--- a/slides/03-development-workflows.pptx
+++ b/slides/03-development-workflows.pptx
@@ -2477,145 +2477,9 @@
           <a:chExt cx="0" cy="0"/>
         </a:xfrm>
       </p:grpSpPr>
-      <p:sp>
-        <p:nvSpPr>
-          <p:cNvPr id="2" name="Text 0"/>
-          <p:cNvSpPr/>
-          <p:nvPr/>
-        </p:nvSpPr>
-        <p:spPr>
-          <a:xfrm>
-            <a:off x="5968901" y="0"/>
-            <a:ext cx="3174950" cy="5143500"/>
-          </a:xfrm>
-          <a:prstGeom prst="rect">
-            <a:avLst/>
-          </a:prstGeom>
-          <a:solidFill>
-            <a:srgbClr val="1A7F37"/>
-          </a:solidFill>
-          <a:ln/>
-        </p:spPr>
-        <p:txBody>
-          <a:bodyPr wrap="square" rtlCol="0" anchor="ctr"/>
-          <a:lstStyle/>
-          <a:p>
-            <a:pPr indent="0" marL="0">
-              <a:buNone/>
-            </a:pPr>
-            <a:endParaRPr lang="en-US" dirty="0"/>
-          </a:p>
-        </p:txBody>
-      </p:sp>
-      <p:sp>
-        <p:nvSpPr>
-          <p:cNvPr id="3" name="Text 1"/>
-          <p:cNvSpPr/>
-          <p:nvPr/>
-        </p:nvSpPr>
-        <p:spPr>
-          <a:xfrm>
-            <a:off x="5939692" y="1269950"/>
-            <a:ext cx="2979319" cy="2159050"/>
-          </a:xfrm>
-          <a:prstGeom prst="rect">
-            <a:avLst/>
-          </a:prstGeom>
-          <a:noFill/>
-          <a:ln/>
-        </p:spPr>
-        <p:txBody>
-          <a:bodyPr wrap="square" lIns="0" tIns="0" rIns="0" bIns="0" rtlCol="0" anchor="t"/>
-          <a:lstStyle/>
-          <a:p>
-            <a:pPr algn="ctr" indent="0" marL="0">
-              <a:lnSpc>
-                <a:spcPts val="17000"/>
-              </a:lnSpc>
-              <a:buNone/>
-            </a:pPr>
-            <a:r>
-              <a:rPr lang="en-US" sz="15000" b="1" dirty="0">
-                <a:solidFill>
-                  <a:srgbClr val="2DA44E"/>
-                </a:solidFill>
-                <a:latin typeface="Arial" pitchFamily="34" charset="0"/>
-                <a:ea typeface="Arial" pitchFamily="34" charset="-122"/>
-                <a:cs typeface="Arial" pitchFamily="34" charset="-120"/>
-              </a:rPr>
-              <a:t>03</a:t>
-            </a:r>
-            <a:endParaRPr lang="en-US" sz="15000" dirty="0"/>
-          </a:p>
-        </p:txBody>
-      </p:sp>
-      <p:sp>
-        <p:nvSpPr>
-          <p:cNvPr id="4" name="Text 2"/>
-          <p:cNvSpPr/>
-          <p:nvPr/>
-        </p:nvSpPr>
-        <p:spPr>
-          <a:xfrm>
-            <a:off x="6069330" y="3682901"/>
-            <a:ext cx="2720340" cy="431899"/>
-          </a:xfrm>
-          <a:prstGeom prst="rect">
-            <a:avLst/>
-          </a:prstGeom>
-          <a:noFill/>
-          <a:ln/>
-        </p:spPr>
-        <p:txBody>
-          <a:bodyPr wrap="square" lIns="0" tIns="0" rIns="0" bIns="0" rtlCol="0" anchor="t"/>
-          <a:lstStyle/>
-          <a:p>
-            <a:pPr algn="ctr" indent="0" marL="0">
-              <a:lnSpc>
-                <a:spcPts val="1700"/>
-              </a:lnSpc>
-              <a:buNone/>
-            </a:pPr>
-            <a:r>
-              <a:rPr lang="en-US" sz="1350" dirty="0">
-                <a:solidFill>
-                  <a:srgbClr val="FFFFFF"/>
-                </a:solidFill>
-                <a:latin typeface="Arial" pitchFamily="34" charset="0"/>
-                <a:ea typeface="Arial" pitchFamily="34" charset="-122"/>
-                <a:cs typeface="Arial" pitchFamily="34" charset="-120"/>
-              </a:rPr>
-              <a:t>GITHUB COPILOT APP</a:t>
-            </a:r>
-            <a:endParaRPr lang="en-US" sz="1350" dirty="0"/>
-          </a:p>
-          <a:p>
-            <a:pPr algn="ctr" indent="0" marL="0">
-              <a:lnSpc>
-                <a:spcPts val="1700"/>
-              </a:lnSpc>
-              <a:buNone/>
-            </a:pPr>
-            <a:r>
-              <a:rPr lang="en-US" sz="1350" dirty="0">
-                <a:solidFill>
-                  <a:srgbClr val="FFFFFF"/>
-                </a:solidFill>
-                <a:latin typeface="Arial" pitchFamily="34" charset="0"/>
-                <a:ea typeface="Arial" pitchFamily="34" charset="-122"/>
-                <a:cs typeface="Arial" pitchFamily="34" charset="-120"/>
-              </a:rPr>
-              <a:t>FOR BEGINNERS</a:t>
-            </a:r>
-            <a:endParaRPr lang="en-US" sz="1350" dirty="0"/>
-          </a:p>
-        </p:txBody>
-      </p:sp>
       <p:pic>
         <p:nvPicPr>
-          <p:cNvPr id="5" name="Image 0" descr="/Users/danwahlin/.copilot/session-state/56a7a0da-def8-48d4-b5e8-0ac3878cb8dd/files/slides-build/icons/FaGithub-FFFFFF.png">
-            <a:hlinkClick r:id="rId2" tooltip="https://github.com/github/copilot-app-for-beginners/tree/main/03-development-workflows"/>
-          </p:cNvPr>
+          <p:cNvPr id="2" name="Image 0" descr="/Users/danwahlin/.copilot/session-state/56a7a0da-def8-48d4-b5e8-0ac3878cb8dd/files/slides-build/img/grad-title.jpg">    </p:cNvPr>
           <p:cNvPicPr>
             <a:picLocks noChangeAspect="1"/>
           </p:cNvPicPr>
@@ -2629,6 +2493,32 @@
         </p:blipFill>
         <p:spPr>
           <a:xfrm>
+            <a:off x="0" y="0"/>
+            <a:ext cx="9144000" cy="5143500"/>
+          </a:xfrm>
+          <a:prstGeom prst="rect">
+            <a:avLst/>
+          </a:prstGeom>
+        </p:spPr>
+      </p:pic>
+      <p:pic>
+        <p:nvPicPr>
+          <p:cNvPr id="3" name="Image 1" descr="/Users/danwahlin/.copilot/session-state/56a7a0da-def8-48d4-b5e8-0ac3878cb8dd/files/slides-build/icons/FaGithub-1F2328.png">
+            <a:hlinkClick r:id="rId3" tooltip="https://github.com/github/copilot-app-for-beginners/tree/main/03-development-workflows"/>
+          </p:cNvPr>
+          <p:cNvPicPr>
+            <a:picLocks noChangeAspect="1"/>
+          </p:cNvPicPr>
+          <p:nvPr/>
+        </p:nvPicPr>
+        <p:blipFill>
+          <a:blip r:embed="rId2"/>
+          <a:stretch>
+            <a:fillRect/>
+          </a:stretch>
+        </p:blipFill>
+        <p:spPr>
+          <a:xfrm>
             <a:off x="8635901" y="203150"/>
             <a:ext cx="304800" cy="304800"/>
           </a:xfrm>
@@ -2639,14 +2529,14 @@
       </p:pic>
       <p:sp>
         <p:nvSpPr>
-          <p:cNvPr id="6" name="Text 3"/>
-          <p:cNvSpPr/>
-          <p:nvPr/>
-        </p:nvSpPr>
-        <p:spPr>
-          <a:xfrm>
-            <a:off x="609600" y="1076325"/>
-            <a:ext cx="5052060" cy="209550"/>
+          <p:cNvPr id="4" name="Text 0"/>
+          <p:cNvSpPr/>
+          <p:nvPr/>
+        </p:nvSpPr>
+        <p:spPr>
+          <a:xfrm>
+            <a:off x="1015901" y="989112"/>
+            <a:ext cx="6088279" cy="209550"/>
           </a:xfrm>
           <a:prstGeom prst="rect">
             <a:avLst/>
@@ -2678,14 +2568,14 @@
       </p:sp>
       <p:sp>
         <p:nvSpPr>
-          <p:cNvPr id="7" name="Text 4"/>
-          <p:cNvSpPr/>
-          <p:nvPr/>
-        </p:nvSpPr>
-        <p:spPr>
-          <a:xfrm>
-            <a:off x="609600" y="1387376"/>
-            <a:ext cx="5052060" cy="1168301"/>
+          <p:cNvPr id="5" name="Text 1"/>
+          <p:cNvSpPr/>
+          <p:nvPr/>
+        </p:nvSpPr>
+        <p:spPr>
+          <a:xfrm>
+            <a:off x="1015901" y="1300163"/>
+            <a:ext cx="6088279" cy="1219200"/>
           </a:xfrm>
           <a:prstGeom prst="rect">
             <a:avLst/>
@@ -2699,7 +2589,7 @@
           <a:p>
             <a:pPr algn="l" indent="0" marL="0">
               <a:lnSpc>
-                <a:spcPts val="4600"/>
+                <a:spcPts val="4800"/>
               </a:lnSpc>
               <a:spcBef>
                 <a:spcPts val="800"/>
@@ -2707,7 +2597,7 @@
               <a:buNone/>
             </a:pPr>
             <a:r>
-              <a:rPr lang="en-US" sz="4000" b="1" dirty="0">
+              <a:rPr lang="en-US" sz="4200" b="1" dirty="0">
                 <a:solidFill>
                   <a:srgbClr val="1F2328"/>
                 </a:solidFill>
@@ -2717,19 +2607,19 @@
               </a:rPr>
               <a:t>Development and GitHub Workflows</a:t>
             </a:r>
-            <a:endParaRPr lang="en-US" sz="4000" dirty="0"/>
-          </a:p>
-        </p:txBody>
-      </p:sp>
-      <p:sp>
-        <p:nvSpPr>
-          <p:cNvPr id="8" name="Text 5"/>
-          <p:cNvSpPr/>
-          <p:nvPr/>
-        </p:nvSpPr>
-        <p:spPr>
-          <a:xfrm>
-            <a:off x="609600" y="2784277"/>
+            <a:endParaRPr lang="en-US" sz="4200" dirty="0"/>
+          </a:p>
+        </p:txBody>
+      </p:sp>
+      <p:sp>
+        <p:nvSpPr>
+          <p:cNvPr id="6" name="Text 2"/>
+          <p:cNvSpPr/>
+          <p:nvPr/>
+        </p:nvSpPr>
+        <p:spPr>
+          <a:xfrm>
+            <a:off x="1015901" y="2747963"/>
             <a:ext cx="609600" cy="63401"/>
           </a:xfrm>
           <a:prstGeom prst="roundRect">
@@ -2755,14 +2645,14 @@
       </p:sp>
       <p:sp>
         <p:nvSpPr>
-          <p:cNvPr id="9" name="Text 6"/>
-          <p:cNvSpPr/>
-          <p:nvPr/>
-        </p:nvSpPr>
-        <p:spPr>
-          <a:xfrm>
-            <a:off x="609600" y="3076277"/>
-            <a:ext cx="5052060" cy="990749"/>
+          <p:cNvPr id="7" name="Text 3"/>
+          <p:cNvSpPr/>
+          <p:nvPr/>
+        </p:nvSpPr>
+        <p:spPr>
+          <a:xfrm>
+            <a:off x="1015901" y="3039963"/>
+            <a:ext cx="6088279" cy="660499"/>
           </a:xfrm>
           <a:prstGeom prst="rect">
             <a:avLst/>
@@ -2797,21 +2687,21 @@
       </p:sp>
       <p:pic>
         <p:nvPicPr>
-          <p:cNvPr id="10" name="Image 1" descr="/Users/danwahlin/.copilot/session-state/56a7a0da-def8-48d4-b5e8-0ac3878cb8dd/files/slides-build/icons/FaGithub-0969DA.png">    </p:cNvPr>
+          <p:cNvPr id="8" name="Image 2" descr="/Users/danwahlin/.copilot/session-state/56a7a0da-def8-48d4-b5e8-0ac3878cb8dd/files/slides-build/icons/FaGithub-0969DA.png">    </p:cNvPr>
           <p:cNvPicPr>
             <a:picLocks noChangeAspect="1"/>
           </p:cNvPicPr>
           <p:nvPr/>
         </p:nvPicPr>
         <p:blipFill>
-          <a:blip r:embed="rId3"/>
+          <a:blip r:embed="rId4"/>
           <a:stretch>
             <a:fillRect/>
           </a:stretch>
         </p:blipFill>
         <p:spPr>
           <a:xfrm>
-            <a:off x="609600" y="4354562"/>
+            <a:off x="1015901" y="3965525"/>
             <a:ext cx="177701" cy="177701"/>
           </a:xfrm>
           <a:prstGeom prst="rect">
@@ -2821,13 +2711,13 @@
       </p:pic>
       <p:sp>
         <p:nvSpPr>
-          <p:cNvPr id="11" name="Text 7"/>
-          <p:cNvSpPr/>
-          <p:nvPr/>
-        </p:nvSpPr>
-        <p:spPr>
-          <a:xfrm>
-            <a:off x="876151" y="4343400"/>
+          <p:cNvPr id="9" name="Text 4"/>
+          <p:cNvSpPr/>
+          <p:nvPr/>
+        </p:nvSpPr>
+        <p:spPr>
+          <a:xfrm>
+            <a:off x="1282452" y="3954363"/>
             <a:ext cx="3373252" cy="200025"/>
           </a:xfrm>
           <a:prstGeom prst="rect">
@@ -2851,7 +2741,7 @@
                 <a:latin typeface="Arial" pitchFamily="34" charset="0"/>
                 <a:ea typeface="Arial" pitchFamily="34" charset="-122"/>
                 <a:cs typeface="Arial" pitchFamily="34" charset="-120"/>
-                <a:hlinkClick r:id="rId4" invalidUrl="" action="" tgtFrame="" tooltip="https://github.com/github/copilot-app-for-beginners/tree/main/03-development-workflows" history="1" highlightClick="0" endSnd="0">
+                <a:hlinkClick r:id="rId5" invalidUrl="" action="" tgtFrame="" tooltip="https://github.com/github/copilot-app-for-beginners/tree/main/03-development-workflows" history="1" highlightClick="0" endSnd="0">
                   <a:extLst>
                     <a:ext uri="{A12FA001-AC4F-418D-AE19-62706E023703}">
                       <ahyp:hlinkClr xmlns:ahyp="http://schemas.microsoft.com/office/drawing/2018/hyperlinkcolor" val="tx"/>
@@ -2897,112 +2787,9 @@
           <a:chExt cx="0" cy="0"/>
         </a:xfrm>
       </p:grpSpPr>
-      <p:sp>
-        <p:nvSpPr>
-          <p:cNvPr id="2" name="Text 0"/>
-          <p:cNvSpPr/>
-          <p:nvPr/>
-        </p:nvSpPr>
-        <p:spPr>
-          <a:xfrm>
-            <a:off x="0" y="0"/>
-            <a:ext cx="9144000" cy="76200"/>
-          </a:xfrm>
-          <a:prstGeom prst="rect">
-            <a:avLst/>
-          </a:prstGeom>
-          <a:solidFill>
-            <a:srgbClr val="0969DA"/>
-          </a:solidFill>
-          <a:ln/>
-        </p:spPr>
-        <p:txBody>
-          <a:bodyPr wrap="square" rtlCol="0" anchor="ctr"/>
-          <a:lstStyle/>
-          <a:p>
-            <a:pPr indent="0" marL="0">
-              <a:buNone/>
-            </a:pPr>
-            <a:endParaRPr lang="en-US" dirty="0"/>
-          </a:p>
-        </p:txBody>
-      </p:sp>
-      <p:sp>
-        <p:nvSpPr>
-          <p:cNvPr id="3" name="Text 1"/>
-          <p:cNvSpPr/>
-          <p:nvPr/>
-        </p:nvSpPr>
-        <p:spPr>
-          <a:xfrm>
-            <a:off x="7340501" y="177701"/>
-            <a:ext cx="1168301" cy="279350"/>
-          </a:xfrm>
-          <a:prstGeom prst="roundRect">
-            <a:avLst>
-              <a:gd name="adj" fmla="val 22731"/>
-            </a:avLst>
-          </a:prstGeom>
-          <a:solidFill>
-            <a:srgbClr val="1A7F37"/>
-          </a:solidFill>
-          <a:ln/>
-        </p:spPr>
-        <p:txBody>
-          <a:bodyPr wrap="square" rtlCol="0" anchor="ctr"/>
-          <a:lstStyle/>
-          <a:p>
-            <a:pPr indent="0" marL="0">
-              <a:buNone/>
-            </a:pPr>
-            <a:endParaRPr lang="en-US" dirty="0"/>
-          </a:p>
-        </p:txBody>
-      </p:sp>
-      <p:sp>
-        <p:nvSpPr>
-          <p:cNvPr id="4" name="Text 2"/>
-          <p:cNvSpPr/>
-          <p:nvPr/>
-        </p:nvSpPr>
-        <p:spPr>
-          <a:xfrm>
-            <a:off x="7461041" y="231577"/>
-            <a:ext cx="927071" cy="171450"/>
-          </a:xfrm>
-          <a:prstGeom prst="rect">
-            <a:avLst/>
-          </a:prstGeom>
-          <a:noFill/>
-          <a:ln/>
-        </p:spPr>
-        <p:txBody>
-          <a:bodyPr wrap="square" lIns="0" tIns="0" rIns="0" bIns="0" rtlCol="0" anchor="t"/>
-          <a:lstStyle/>
-          <a:p>
-            <a:pPr algn="ctr" indent="0" marL="0">
-              <a:buNone/>
-            </a:pPr>
-            <a:r>
-              <a:rPr lang="en-US" sz="1150" b="1" dirty="0">
-                <a:solidFill>
-                  <a:srgbClr val="FFFFFF"/>
-                </a:solidFill>
-                <a:latin typeface="Arial" pitchFamily="34" charset="0"/>
-                <a:ea typeface="Arial" pitchFamily="34" charset="-122"/>
-                <a:cs typeface="Arial" pitchFamily="34" charset="-120"/>
-              </a:rPr>
-              <a:t>CHAPTER 03</a:t>
-            </a:r>
-            <a:endParaRPr lang="en-US" sz="1150" dirty="0"/>
-          </a:p>
-        </p:txBody>
-      </p:sp>
       <p:pic>
         <p:nvPicPr>
-          <p:cNvPr id="5" name="Image 0" descr="/Users/danwahlin/.copilot/session-state/56a7a0da-def8-48d4-b5e8-0ac3878cb8dd/files/slides-build/icons/FaGithub-1F2328.png">
-            <a:hlinkClick r:id="rId2" tooltip="https://github.com/github/copilot-app-for-beginners/tree/main/03-development-workflows"/>
-          </p:cNvPr>
+          <p:cNvPr id="2" name="Image 0" descr="/Users/danwahlin/.copilot/session-state/56a7a0da-def8-48d4-b5e8-0ac3878cb8dd/files/slides-build/img/grad-corner.png">    </p:cNvPr>
           <p:cNvPicPr>
             <a:picLocks noChangeAspect="1"/>
           </p:cNvPicPr>
@@ -3016,6 +2803,103 @@
         </p:blipFill>
         <p:spPr>
           <a:xfrm>
+            <a:off x="6349901" y="0"/>
+            <a:ext cx="2793950" cy="1308050"/>
+          </a:xfrm>
+          <a:prstGeom prst="rect">
+            <a:avLst/>
+          </a:prstGeom>
+        </p:spPr>
+      </p:pic>
+      <p:sp>
+        <p:nvSpPr>
+          <p:cNvPr id="3" name="Text 0"/>
+          <p:cNvSpPr/>
+          <p:nvPr/>
+        </p:nvSpPr>
+        <p:spPr>
+          <a:xfrm>
+            <a:off x="7340501" y="177701"/>
+            <a:ext cx="1168301" cy="279350"/>
+          </a:xfrm>
+          <a:prstGeom prst="roundRect">
+            <a:avLst>
+              <a:gd name="adj" fmla="val 22731"/>
+            </a:avLst>
+          </a:prstGeom>
+          <a:solidFill>
+            <a:srgbClr val="1A7F37"/>
+          </a:solidFill>
+          <a:ln/>
+        </p:spPr>
+        <p:txBody>
+          <a:bodyPr wrap="square" rtlCol="0" anchor="ctr"/>
+          <a:lstStyle/>
+          <a:p>
+            <a:pPr indent="0" marL="0">
+              <a:buNone/>
+            </a:pPr>
+            <a:endParaRPr lang="en-US" dirty="0"/>
+          </a:p>
+        </p:txBody>
+      </p:sp>
+      <p:sp>
+        <p:nvSpPr>
+          <p:cNvPr id="4" name="Text 1"/>
+          <p:cNvSpPr/>
+          <p:nvPr/>
+        </p:nvSpPr>
+        <p:spPr>
+          <a:xfrm>
+            <a:off x="7461041" y="231577"/>
+            <a:ext cx="927071" cy="171450"/>
+          </a:xfrm>
+          <a:prstGeom prst="rect">
+            <a:avLst/>
+          </a:prstGeom>
+          <a:noFill/>
+          <a:ln/>
+        </p:spPr>
+        <p:txBody>
+          <a:bodyPr wrap="square" lIns="0" tIns="0" rIns="0" bIns="0" rtlCol="0" anchor="t"/>
+          <a:lstStyle/>
+          <a:p>
+            <a:pPr algn="ctr" indent="0" marL="0">
+              <a:buNone/>
+            </a:pPr>
+            <a:r>
+              <a:rPr lang="en-US" sz="1150" b="1" dirty="0">
+                <a:solidFill>
+                  <a:srgbClr val="FFFFFF"/>
+                </a:solidFill>
+                <a:latin typeface="Arial" pitchFamily="34" charset="0"/>
+                <a:ea typeface="Arial" pitchFamily="34" charset="-122"/>
+                <a:cs typeface="Arial" pitchFamily="34" charset="-120"/>
+              </a:rPr>
+              <a:t>CHAPTER 03</a:t>
+            </a:r>
+            <a:endParaRPr lang="en-US" sz="1150" dirty="0"/>
+          </a:p>
+        </p:txBody>
+      </p:sp>
+      <p:pic>
+        <p:nvPicPr>
+          <p:cNvPr id="5" name="Image 1" descr="/Users/danwahlin/.copilot/session-state/56a7a0da-def8-48d4-b5e8-0ac3878cb8dd/files/slides-build/icons/FaGithub-1F2328.png">
+            <a:hlinkClick r:id="rId3" tooltip="https://github.com/github/copilot-app-for-beginners/tree/main/03-development-workflows"/>
+          </p:cNvPr>
+          <p:cNvPicPr>
+            <a:picLocks noChangeAspect="1"/>
+          </p:cNvPicPr>
+          <p:nvPr/>
+        </p:nvPicPr>
+        <p:blipFill>
+          <a:blip r:embed="rId2"/>
+          <a:stretch>
+            <a:fillRect/>
+          </a:stretch>
+        </p:blipFill>
+        <p:spPr>
+          <a:xfrm>
             <a:off x="8610600" y="165050"/>
             <a:ext cx="304800" cy="304800"/>
           </a:xfrm>
@@ -3026,7 +2910,7 @@
       </p:pic>
       <p:sp>
         <p:nvSpPr>
-          <p:cNvPr id="6" name="Text 3"/>
+          <p:cNvPr id="6" name="Text 2"/>
           <p:cNvSpPr/>
           <p:nvPr/>
         </p:nvSpPr>
@@ -3065,7 +2949,7 @@
       </p:sp>
       <p:sp>
         <p:nvSpPr>
-          <p:cNvPr id="7" name="Text 4"/>
+          <p:cNvPr id="7" name="Text 3"/>
           <p:cNvSpPr/>
           <p:nvPr/>
         </p:nvSpPr>
@@ -3110,7 +2994,7 @@
       </p:sp>
       <p:sp>
         <p:nvSpPr>
-          <p:cNvPr id="8" name="Text 5"/>
+          <p:cNvPr id="8" name="Text 4"/>
           <p:cNvSpPr/>
           <p:nvPr/>
         </p:nvSpPr>
@@ -3146,7 +3030,7 @@
       </p:sp>
       <p:sp>
         <p:nvSpPr>
-          <p:cNvPr id="9" name="Text 6"/>
+          <p:cNvPr id="9" name="Text 5"/>
           <p:cNvSpPr/>
           <p:nvPr/>
         </p:nvSpPr>
@@ -3178,307 +3062,7 @@
       </p:sp>
       <p:pic>
         <p:nvPicPr>
-          <p:cNvPr id="10" name="Image 1" descr="/Users/danwahlin/.copilot/session-state/56a7a0da-def8-48d4-b5e8-0ac3878cb8dd/files/slides-build/icons/GoBeaker-1A7F37.png">    </p:cNvPr>
-          <p:cNvPicPr>
-            <a:picLocks noChangeAspect="1"/>
-          </p:cNvPicPr>
-          <p:nvPr/>
-        </p:nvPicPr>
-        <p:blipFill>
-          <a:blip r:embed="rId3"/>
-          <a:stretch>
-            <a:fillRect/>
-          </a:stretch>
-        </p:blipFill>
-        <p:spPr>
-          <a:xfrm>
-            <a:off x="777776" y="2077789"/>
-            <a:ext cx="215801" cy="215801"/>
-          </a:xfrm>
-          <a:prstGeom prst="rect">
-            <a:avLst/>
-          </a:prstGeom>
-        </p:spPr>
-      </p:pic>
-      <p:sp>
-        <p:nvSpPr>
-          <p:cNvPr id="11" name="Text 7"/>
-          <p:cNvSpPr/>
-          <p:nvPr/>
-        </p:nvSpPr>
-        <p:spPr>
-          <a:xfrm>
-            <a:off x="1190476" y="2071390"/>
-            <a:ext cx="2185532" cy="228600"/>
-          </a:xfrm>
-          <a:prstGeom prst="rect">
-            <a:avLst/>
-          </a:prstGeom>
-          <a:noFill/>
-          <a:ln/>
-        </p:spPr>
-        <p:txBody>
-          <a:bodyPr wrap="square" lIns="0" tIns="0" rIns="0" bIns="0" rtlCol="0" anchor="t"/>
-          <a:lstStyle/>
-          <a:p>
-            <a:pPr algn="l" indent="0" marL="0">
-              <a:lnSpc>
-                <a:spcPts val="1800"/>
-              </a:lnSpc>
-              <a:buNone/>
-            </a:pPr>
-            <a:r>
-              <a:rPr lang="en-US" sz="1650" b="1" dirty="0">
-                <a:solidFill>
-                  <a:srgbClr val="1F2328"/>
-                </a:solidFill>
-                <a:latin typeface="Arial" pitchFamily="34" charset="0"/>
-                <a:ea typeface="Arial" pitchFamily="34" charset="-122"/>
-                <a:cs typeface="Arial" pitchFamily="34" charset="-120"/>
-              </a:rPr>
-              <a:t>Add a regression test</a:t>
-            </a:r>
-            <a:endParaRPr lang="en-US" sz="1650" dirty="0"/>
-          </a:p>
-        </p:txBody>
-      </p:sp>
-      <p:sp>
-        <p:nvSpPr>
-          <p:cNvPr id="12" name="Text 8"/>
-          <p:cNvSpPr/>
-          <p:nvPr/>
-        </p:nvSpPr>
-        <p:spPr>
-          <a:xfrm>
-            <a:off x="695176" y="2452390"/>
-            <a:ext cx="3659707" cy="429220"/>
-          </a:xfrm>
-          <a:prstGeom prst="rect">
-            <a:avLst/>
-          </a:prstGeom>
-          <a:noFill/>
-          <a:ln/>
-        </p:spPr>
-        <p:txBody>
-          <a:bodyPr wrap="square" lIns="0" tIns="0" rIns="0" bIns="0" rtlCol="0" anchor="t"/>
-          <a:lstStyle/>
-          <a:p>
-            <a:pPr algn="l" indent="0" marL="0">
-              <a:lnSpc>
-                <a:spcPts val="1690"/>
-              </a:lnSpc>
-              <a:buNone/>
-            </a:pPr>
-            <a:r>
-              <a:rPr lang="en-US" sz="1400" dirty="0">
-                <a:solidFill>
-                  <a:srgbClr val="59636E"/>
-                </a:solidFill>
-                <a:latin typeface="Arial" pitchFamily="34" charset="0"/>
-                <a:ea typeface="Arial" pitchFamily="34" charset="-122"/>
-                <a:cs typeface="Arial" pitchFamily="34" charset="-120"/>
-              </a:rPr>
-              <a:t>It must </a:t>
-            </a:r>
-            <a:pPr algn="l" indent="0" marL="0">
-              <a:lnSpc>
-                <a:spcPts val="1690"/>
-              </a:lnSpc>
-              <a:buNone/>
-            </a:pPr>
-            <a:r>
-              <a:rPr lang="en-US" sz="1400" b="1" dirty="0">
-                <a:solidFill>
-                  <a:srgbClr val="59636E"/>
-                </a:solidFill>
-                <a:latin typeface="Arial" pitchFamily="34" charset="0"/>
-                <a:ea typeface="Arial" pitchFamily="34" charset="-122"/>
-                <a:cs typeface="Arial" pitchFamily="34" charset="-120"/>
-              </a:rPr>
-              <a:t>fail with the bug</a:t>
-            </a:r>
-            <a:pPr algn="l" indent="0" marL="0">
-              <a:lnSpc>
-                <a:spcPts val="1690"/>
-              </a:lnSpc>
-              <a:buNone/>
-            </a:pPr>
-            <a:r>
-              <a:rPr lang="en-US" sz="1400" dirty="0">
-                <a:solidFill>
-                  <a:srgbClr val="59636E"/>
-                </a:solidFill>
-                <a:latin typeface="Arial" pitchFamily="34" charset="0"/>
-                <a:ea typeface="Arial" pitchFamily="34" charset="-122"/>
-                <a:cs typeface="Arial" pitchFamily="34" charset="-120"/>
-              </a:rPr>
-              <a:t> and </a:t>
-            </a:r>
-            <a:pPr algn="l" indent="0" marL="0">
-              <a:lnSpc>
-                <a:spcPts val="1690"/>
-              </a:lnSpc>
-              <a:buNone/>
-            </a:pPr>
-            <a:r>
-              <a:rPr lang="en-US" sz="1400" b="1" dirty="0">
-                <a:solidFill>
-                  <a:srgbClr val="59636E"/>
-                </a:solidFill>
-                <a:latin typeface="Arial" pitchFamily="34" charset="0"/>
-                <a:ea typeface="Arial" pitchFamily="34" charset="-122"/>
-                <a:cs typeface="Arial" pitchFamily="34" charset="-120"/>
-              </a:rPr>
-              <a:t>pass with the fix</a:t>
-            </a:r>
-            <a:pPr algn="l" indent="0" marL="0">
-              <a:lnSpc>
-                <a:spcPts val="1690"/>
-              </a:lnSpc>
-              <a:buNone/>
-            </a:pPr>
-            <a:r>
-              <a:rPr lang="en-US" sz="1400" dirty="0">
-                <a:solidFill>
-                  <a:srgbClr val="59636E"/>
-                </a:solidFill>
-                <a:latin typeface="Arial" pitchFamily="34" charset="0"/>
-                <a:ea typeface="Arial" pitchFamily="34" charset="-122"/>
-                <a:cs typeface="Arial" pitchFamily="34" charset="-120"/>
-              </a:rPr>
-              <a:t>. Never weaken an existing test.</a:t>
-            </a:r>
-            <a:endParaRPr lang="en-US" sz="1400" dirty="0"/>
-          </a:p>
-        </p:txBody>
-      </p:sp>
-      <p:sp>
-        <p:nvSpPr>
-          <p:cNvPr id="13" name="Text 9"/>
-          <p:cNvSpPr/>
-          <p:nvPr/>
-        </p:nvSpPr>
-        <p:spPr>
-          <a:xfrm>
-            <a:off x="695176" y="2957810"/>
-            <a:ext cx="3587948" cy="939552"/>
-          </a:xfrm>
-          <a:prstGeom prst="roundRect">
-            <a:avLst>
-              <a:gd name="adj" fmla="val 8110"/>
-            </a:avLst>
-          </a:prstGeom>
-          <a:solidFill>
-            <a:srgbClr val="FFFFFF"/>
-          </a:solidFill>
-          <a:ln/>
-        </p:spPr>
-        <p:txBody>
-          <a:bodyPr wrap="square" rtlCol="0" anchor="ctr"/>
-          <a:lstStyle/>
-          <a:p>
-            <a:pPr indent="0" marL="0">
-              <a:buNone/>
-            </a:pPr>
-            <a:endParaRPr lang="en-US" dirty="0"/>
-          </a:p>
-        </p:txBody>
-      </p:sp>
-      <p:sp>
-        <p:nvSpPr>
-          <p:cNvPr id="14" name="Shape 10"/>
-          <p:cNvSpPr/>
-          <p:nvPr/>
-        </p:nvSpPr>
-        <p:spPr>
-          <a:xfrm>
-            <a:off x="695176" y="2962573"/>
-            <a:ext cx="3587948" cy="0"/>
-          </a:xfrm>
-          <a:prstGeom prst="line">
-            <a:avLst/>
-          </a:prstGeom>
-          <a:noFill/>
-          <a:ln w="9525">
-            <a:solidFill>
-              <a:srgbClr val="8CE7A5"/>
-            </a:solidFill>
-            <a:prstDash val="solid"/>
-          </a:ln>
-        </p:spPr>
-      </p:sp>
-      <p:sp>
-        <p:nvSpPr>
-          <p:cNvPr id="15" name="Shape 11"/>
-          <p:cNvSpPr/>
-          <p:nvPr/>
-        </p:nvSpPr>
-        <p:spPr>
-          <a:xfrm>
-            <a:off x="4278362" y="2957810"/>
-            <a:ext cx="0" cy="939552"/>
-          </a:xfrm>
-          <a:prstGeom prst="line">
-            <a:avLst/>
-          </a:prstGeom>
-          <a:noFill/>
-          <a:ln w="9525">
-            <a:solidFill>
-              <a:srgbClr val="8CE7A5"/>
-            </a:solidFill>
-            <a:prstDash val="solid"/>
-          </a:ln>
-        </p:spPr>
-      </p:sp>
-      <p:sp>
-        <p:nvSpPr>
-          <p:cNvPr id="16" name="Shape 12"/>
-          <p:cNvSpPr/>
-          <p:nvPr/>
-        </p:nvSpPr>
-        <p:spPr>
-          <a:xfrm>
-            <a:off x="695176" y="3892600"/>
-            <a:ext cx="3587948" cy="0"/>
-          </a:xfrm>
-          <a:prstGeom prst="line">
-            <a:avLst/>
-          </a:prstGeom>
-          <a:noFill/>
-          <a:ln w="9525">
-            <a:solidFill>
-              <a:srgbClr val="8CE7A5"/>
-            </a:solidFill>
-            <a:prstDash val="solid"/>
-          </a:ln>
-        </p:spPr>
-      </p:sp>
-      <p:sp>
-        <p:nvSpPr>
-          <p:cNvPr id="17" name="Shape 13"/>
-          <p:cNvSpPr/>
-          <p:nvPr/>
-        </p:nvSpPr>
-        <p:spPr>
-          <a:xfrm>
-            <a:off x="718989" y="2957810"/>
-            <a:ext cx="0" cy="939552"/>
-          </a:xfrm>
-          <a:prstGeom prst="line">
-            <a:avLst/>
-          </a:prstGeom>
-          <a:noFill/>
-          <a:ln w="47625">
-            <a:solidFill>
-              <a:srgbClr val="1A7F37"/>
-            </a:solidFill>
-            <a:prstDash val="solid"/>
-          </a:ln>
-        </p:spPr>
-      </p:sp>
-      <p:pic>
-        <p:nvPicPr>
-          <p:cNvPr id="18" name="Image 2" descr="/Users/danwahlin/.copilot/session-state/56a7a0da-def8-48d4-b5e8-0ac3878cb8dd/files/slides-build/icons/GoCopilot-1A7F37.png">    </p:cNvPr>
+          <p:cNvPr id="10" name="Image 2" descr="/Users/danwahlin/.copilot/session-state/56a7a0da-def8-48d4-b5e8-0ac3878cb8dd/files/slides-build/icons/GoBeaker-1A7F37.png">    </p:cNvPr>
           <p:cNvPicPr>
             <a:picLocks noChangeAspect="1"/>
           </p:cNvPicPr>
@@ -3492,6 +3076,306 @@
         </p:blipFill>
         <p:spPr>
           <a:xfrm>
+            <a:off x="777776" y="2077789"/>
+            <a:ext cx="215801" cy="215801"/>
+          </a:xfrm>
+          <a:prstGeom prst="rect">
+            <a:avLst/>
+          </a:prstGeom>
+        </p:spPr>
+      </p:pic>
+      <p:sp>
+        <p:nvSpPr>
+          <p:cNvPr id="11" name="Text 6"/>
+          <p:cNvSpPr/>
+          <p:nvPr/>
+        </p:nvSpPr>
+        <p:spPr>
+          <a:xfrm>
+            <a:off x="1190476" y="2071390"/>
+            <a:ext cx="2185532" cy="228600"/>
+          </a:xfrm>
+          <a:prstGeom prst="rect">
+            <a:avLst/>
+          </a:prstGeom>
+          <a:noFill/>
+          <a:ln/>
+        </p:spPr>
+        <p:txBody>
+          <a:bodyPr wrap="square" lIns="0" tIns="0" rIns="0" bIns="0" rtlCol="0" anchor="t"/>
+          <a:lstStyle/>
+          <a:p>
+            <a:pPr algn="l" indent="0" marL="0">
+              <a:lnSpc>
+                <a:spcPts val="1800"/>
+              </a:lnSpc>
+              <a:buNone/>
+            </a:pPr>
+            <a:r>
+              <a:rPr lang="en-US" sz="1650" b="1" dirty="0">
+                <a:solidFill>
+                  <a:srgbClr val="1F2328"/>
+                </a:solidFill>
+                <a:latin typeface="Arial" pitchFamily="34" charset="0"/>
+                <a:ea typeface="Arial" pitchFamily="34" charset="-122"/>
+                <a:cs typeface="Arial" pitchFamily="34" charset="-120"/>
+              </a:rPr>
+              <a:t>Add a regression test</a:t>
+            </a:r>
+            <a:endParaRPr lang="en-US" sz="1650" dirty="0"/>
+          </a:p>
+        </p:txBody>
+      </p:sp>
+      <p:sp>
+        <p:nvSpPr>
+          <p:cNvPr id="12" name="Text 7"/>
+          <p:cNvSpPr/>
+          <p:nvPr/>
+        </p:nvSpPr>
+        <p:spPr>
+          <a:xfrm>
+            <a:off x="695176" y="2452390"/>
+            <a:ext cx="3659707" cy="429220"/>
+          </a:xfrm>
+          <a:prstGeom prst="rect">
+            <a:avLst/>
+          </a:prstGeom>
+          <a:noFill/>
+          <a:ln/>
+        </p:spPr>
+        <p:txBody>
+          <a:bodyPr wrap="square" lIns="0" tIns="0" rIns="0" bIns="0" rtlCol="0" anchor="t"/>
+          <a:lstStyle/>
+          <a:p>
+            <a:pPr algn="l" indent="0" marL="0">
+              <a:lnSpc>
+                <a:spcPts val="1690"/>
+              </a:lnSpc>
+              <a:buNone/>
+            </a:pPr>
+            <a:r>
+              <a:rPr lang="en-US" sz="1400" dirty="0">
+                <a:solidFill>
+                  <a:srgbClr val="59636E"/>
+                </a:solidFill>
+                <a:latin typeface="Arial" pitchFamily="34" charset="0"/>
+                <a:ea typeface="Arial" pitchFamily="34" charset="-122"/>
+                <a:cs typeface="Arial" pitchFamily="34" charset="-120"/>
+              </a:rPr>
+              <a:t>It must </a:t>
+            </a:r>
+            <a:pPr algn="l" indent="0" marL="0">
+              <a:lnSpc>
+                <a:spcPts val="1690"/>
+              </a:lnSpc>
+              <a:buNone/>
+            </a:pPr>
+            <a:r>
+              <a:rPr lang="en-US" sz="1400" b="1" dirty="0">
+                <a:solidFill>
+                  <a:srgbClr val="59636E"/>
+                </a:solidFill>
+                <a:latin typeface="Arial" pitchFamily="34" charset="0"/>
+                <a:ea typeface="Arial" pitchFamily="34" charset="-122"/>
+                <a:cs typeface="Arial" pitchFamily="34" charset="-120"/>
+              </a:rPr>
+              <a:t>fail with the bug</a:t>
+            </a:r>
+            <a:pPr algn="l" indent="0" marL="0">
+              <a:lnSpc>
+                <a:spcPts val="1690"/>
+              </a:lnSpc>
+              <a:buNone/>
+            </a:pPr>
+            <a:r>
+              <a:rPr lang="en-US" sz="1400" dirty="0">
+                <a:solidFill>
+                  <a:srgbClr val="59636E"/>
+                </a:solidFill>
+                <a:latin typeface="Arial" pitchFamily="34" charset="0"/>
+                <a:ea typeface="Arial" pitchFamily="34" charset="-122"/>
+                <a:cs typeface="Arial" pitchFamily="34" charset="-120"/>
+              </a:rPr>
+              <a:t> and </a:t>
+            </a:r>
+            <a:pPr algn="l" indent="0" marL="0">
+              <a:lnSpc>
+                <a:spcPts val="1690"/>
+              </a:lnSpc>
+              <a:buNone/>
+            </a:pPr>
+            <a:r>
+              <a:rPr lang="en-US" sz="1400" b="1" dirty="0">
+                <a:solidFill>
+                  <a:srgbClr val="59636E"/>
+                </a:solidFill>
+                <a:latin typeface="Arial" pitchFamily="34" charset="0"/>
+                <a:ea typeface="Arial" pitchFamily="34" charset="-122"/>
+                <a:cs typeface="Arial" pitchFamily="34" charset="-120"/>
+              </a:rPr>
+              <a:t>pass with the fix</a:t>
+            </a:r>
+            <a:pPr algn="l" indent="0" marL="0">
+              <a:lnSpc>
+                <a:spcPts val="1690"/>
+              </a:lnSpc>
+              <a:buNone/>
+            </a:pPr>
+            <a:r>
+              <a:rPr lang="en-US" sz="1400" dirty="0">
+                <a:solidFill>
+                  <a:srgbClr val="59636E"/>
+                </a:solidFill>
+                <a:latin typeface="Arial" pitchFamily="34" charset="0"/>
+                <a:ea typeface="Arial" pitchFamily="34" charset="-122"/>
+                <a:cs typeface="Arial" pitchFamily="34" charset="-120"/>
+              </a:rPr>
+              <a:t>. Never weaken an existing test.</a:t>
+            </a:r>
+            <a:endParaRPr lang="en-US" sz="1400" dirty="0"/>
+          </a:p>
+        </p:txBody>
+      </p:sp>
+      <p:sp>
+        <p:nvSpPr>
+          <p:cNvPr id="13" name="Text 8"/>
+          <p:cNvSpPr/>
+          <p:nvPr/>
+        </p:nvSpPr>
+        <p:spPr>
+          <a:xfrm>
+            <a:off x="695176" y="2957810"/>
+            <a:ext cx="3587948" cy="939552"/>
+          </a:xfrm>
+          <a:prstGeom prst="roundRect">
+            <a:avLst>
+              <a:gd name="adj" fmla="val 8110"/>
+            </a:avLst>
+          </a:prstGeom>
+          <a:solidFill>
+            <a:srgbClr val="FFFFFF"/>
+          </a:solidFill>
+          <a:ln/>
+        </p:spPr>
+        <p:txBody>
+          <a:bodyPr wrap="square" rtlCol="0" anchor="ctr"/>
+          <a:lstStyle/>
+          <a:p>
+            <a:pPr indent="0" marL="0">
+              <a:buNone/>
+            </a:pPr>
+            <a:endParaRPr lang="en-US" dirty="0"/>
+          </a:p>
+        </p:txBody>
+      </p:sp>
+      <p:sp>
+        <p:nvSpPr>
+          <p:cNvPr id="14" name="Shape 9"/>
+          <p:cNvSpPr/>
+          <p:nvPr/>
+        </p:nvSpPr>
+        <p:spPr>
+          <a:xfrm>
+            <a:off x="695176" y="2962573"/>
+            <a:ext cx="3587948" cy="0"/>
+          </a:xfrm>
+          <a:prstGeom prst="line">
+            <a:avLst/>
+          </a:prstGeom>
+          <a:noFill/>
+          <a:ln w="9525">
+            <a:solidFill>
+              <a:srgbClr val="8CE7A5"/>
+            </a:solidFill>
+            <a:prstDash val="solid"/>
+          </a:ln>
+        </p:spPr>
+      </p:sp>
+      <p:sp>
+        <p:nvSpPr>
+          <p:cNvPr id="15" name="Shape 10"/>
+          <p:cNvSpPr/>
+          <p:nvPr/>
+        </p:nvSpPr>
+        <p:spPr>
+          <a:xfrm>
+            <a:off x="4278362" y="2957810"/>
+            <a:ext cx="0" cy="939552"/>
+          </a:xfrm>
+          <a:prstGeom prst="line">
+            <a:avLst/>
+          </a:prstGeom>
+          <a:noFill/>
+          <a:ln w="9525">
+            <a:solidFill>
+              <a:srgbClr val="8CE7A5"/>
+            </a:solidFill>
+            <a:prstDash val="solid"/>
+          </a:ln>
+        </p:spPr>
+      </p:sp>
+      <p:sp>
+        <p:nvSpPr>
+          <p:cNvPr id="16" name="Shape 11"/>
+          <p:cNvSpPr/>
+          <p:nvPr/>
+        </p:nvSpPr>
+        <p:spPr>
+          <a:xfrm>
+            <a:off x="695176" y="3892600"/>
+            <a:ext cx="3587948" cy="0"/>
+          </a:xfrm>
+          <a:prstGeom prst="line">
+            <a:avLst/>
+          </a:prstGeom>
+          <a:noFill/>
+          <a:ln w="9525">
+            <a:solidFill>
+              <a:srgbClr val="8CE7A5"/>
+            </a:solidFill>
+            <a:prstDash val="solid"/>
+          </a:ln>
+        </p:spPr>
+      </p:sp>
+      <p:sp>
+        <p:nvSpPr>
+          <p:cNvPr id="17" name="Shape 12"/>
+          <p:cNvSpPr/>
+          <p:nvPr/>
+        </p:nvSpPr>
+        <p:spPr>
+          <a:xfrm>
+            <a:off x="718989" y="2957810"/>
+            <a:ext cx="0" cy="939552"/>
+          </a:xfrm>
+          <a:prstGeom prst="line">
+            <a:avLst/>
+          </a:prstGeom>
+          <a:noFill/>
+          <a:ln w="47625">
+            <a:solidFill>
+              <a:srgbClr val="1A7F37"/>
+            </a:solidFill>
+            <a:prstDash val="solid"/>
+          </a:ln>
+        </p:spPr>
+      </p:sp>
+      <p:pic>
+        <p:nvPicPr>
+          <p:cNvPr id="18" name="Image 3" descr="/Users/danwahlin/.copilot/session-state/56a7a0da-def8-48d4-b5e8-0ac3878cb8dd/files/slides-build/icons/GoCopilot-1A7F37.png">    </p:cNvPr>
+          <p:cNvPicPr>
+            <a:picLocks noChangeAspect="1"/>
+          </p:cNvPicPr>
+          <p:nvPr/>
+        </p:nvPicPr>
+        <p:blipFill>
+          <a:blip r:embed="rId5"/>
+          <a:stretch>
+            <a:fillRect/>
+          </a:stretch>
+        </p:blipFill>
+        <p:spPr>
+          <a:xfrm>
             <a:off x="920502" y="3097411"/>
             <a:ext cx="165050" cy="165050"/>
           </a:xfrm>
@@ -3502,7 +3386,7 @@
       </p:pic>
       <p:sp>
         <p:nvSpPr>
-          <p:cNvPr id="19" name="Text 14"/>
+          <p:cNvPr id="19" name="Text 13"/>
           <p:cNvSpPr/>
           <p:nvPr/>
         </p:nvSpPr>
@@ -3541,7 +3425,7 @@
       </p:sp>
       <p:sp>
         <p:nvSpPr>
-          <p:cNvPr id="20" name="Text 15"/>
+          <p:cNvPr id="20" name="Text 14"/>
           <p:cNvSpPr/>
           <p:nvPr/>
         </p:nvSpPr>
@@ -3583,7 +3467,7 @@
       </p:sp>
       <p:sp>
         <p:nvSpPr>
-          <p:cNvPr id="21" name="Text 16"/>
+          <p:cNvPr id="21" name="Text 15"/>
           <p:cNvSpPr/>
           <p:nvPr/>
         </p:nvSpPr>
@@ -3619,7 +3503,7 @@
       </p:sp>
       <p:sp>
         <p:nvSpPr>
-          <p:cNvPr id="22" name="Text 17"/>
+          <p:cNvPr id="22" name="Text 16"/>
           <p:cNvSpPr/>
           <p:nvPr/>
         </p:nvSpPr>
@@ -3651,239 +3535,7 @@
       </p:sp>
       <p:pic>
         <p:nvPicPr>
-          <p:cNvPr id="23" name="Image 3" descr="/Users/danwahlin/.copilot/session-state/56a7a0da-def8-48d4-b5e8-0ac3878cb8dd/files/slides-build/icons/GoCodeReview-8250DF.png">    </p:cNvPr>
-          <p:cNvPicPr>
-            <a:picLocks noChangeAspect="1"/>
-          </p:cNvPicPr>
-          <p:nvPr/>
-        </p:nvPicPr>
-        <p:blipFill>
-          <a:blip r:embed="rId5"/>
-          <a:stretch>
-            <a:fillRect/>
-          </a:stretch>
-        </p:blipFill>
-        <p:spPr>
-          <a:xfrm>
-            <a:off x="4943326" y="2077789"/>
-            <a:ext cx="215801" cy="215801"/>
-          </a:xfrm>
-          <a:prstGeom prst="rect">
-            <a:avLst/>
-          </a:prstGeom>
-        </p:spPr>
-      </p:pic>
-      <p:sp>
-        <p:nvSpPr>
-          <p:cNvPr id="24" name="Text 18"/>
-          <p:cNvSpPr/>
-          <p:nvPr/>
-        </p:nvSpPr>
-        <p:spPr>
-          <a:xfrm>
-            <a:off x="5356027" y="2071390"/>
-            <a:ext cx="2066669" cy="228600"/>
-          </a:xfrm>
-          <a:prstGeom prst="rect">
-            <a:avLst/>
-          </a:prstGeom>
-          <a:noFill/>
-          <a:ln/>
-        </p:spPr>
-        <p:txBody>
-          <a:bodyPr wrap="square" lIns="0" tIns="0" rIns="0" bIns="0" rtlCol="0" anchor="t"/>
-          <a:lstStyle/>
-          <a:p>
-            <a:pPr algn="l" indent="0" marL="0">
-              <a:lnSpc>
-                <a:spcPts val="1800"/>
-              </a:lnSpc>
-              <a:buNone/>
-            </a:pPr>
-            <a:r>
-              <a:rPr lang="en-US" sz="1650" b="1" dirty="0">
-                <a:solidFill>
-                  <a:srgbClr val="1F2328"/>
-                </a:solidFill>
-                <a:latin typeface="Arial" pitchFamily="34" charset="0"/>
-                <a:ea typeface="Arial" pitchFamily="34" charset="-122"/>
-                <a:cs typeface="Arial" pitchFamily="34" charset="-120"/>
-              </a:rPr>
-              <a:t>Ask the rubber duck</a:t>
-            </a:r>
-            <a:endParaRPr lang="en-US" sz="1650" dirty="0"/>
-          </a:p>
-        </p:txBody>
-      </p:sp>
-      <p:sp>
-        <p:nvSpPr>
-          <p:cNvPr id="25" name="Text 19"/>
-          <p:cNvSpPr/>
-          <p:nvPr/>
-        </p:nvSpPr>
-        <p:spPr>
-          <a:xfrm>
-            <a:off x="4860727" y="2452390"/>
-            <a:ext cx="3659707" cy="429220"/>
-          </a:xfrm>
-          <a:prstGeom prst="rect">
-            <a:avLst/>
-          </a:prstGeom>
-          <a:noFill/>
-          <a:ln/>
-        </p:spPr>
-        <p:txBody>
-          <a:bodyPr wrap="square" lIns="0" tIns="0" rIns="0" bIns="0" rtlCol="0" anchor="t"/>
-          <a:lstStyle/>
-          <a:p>
-            <a:pPr algn="l" indent="0" marL="0">
-              <a:lnSpc>
-                <a:spcPts val="1690"/>
-              </a:lnSpc>
-              <a:buNone/>
-            </a:pPr>
-            <a:r>
-              <a:rPr lang="en-US" sz="1400" dirty="0">
-                <a:solidFill>
-                  <a:srgbClr val="59636E"/>
-                </a:solidFill>
-                <a:latin typeface="Arial" pitchFamily="34" charset="0"/>
-                <a:ea typeface="Arial" pitchFamily="34" charset="-122"/>
-                <a:cs typeface="Arial" pitchFamily="34" charset="-120"/>
-              </a:rPr>
-              <a:t>A critic that uses a different model to find gaps in your evidence.</a:t>
-            </a:r>
-            <a:endParaRPr lang="en-US" sz="1400" dirty="0"/>
-          </a:p>
-        </p:txBody>
-      </p:sp>
-      <p:sp>
-        <p:nvSpPr>
-          <p:cNvPr id="26" name="Text 20"/>
-          <p:cNvSpPr/>
-          <p:nvPr/>
-        </p:nvSpPr>
-        <p:spPr>
-          <a:xfrm>
-            <a:off x="4860727" y="2957810"/>
-            <a:ext cx="3587948" cy="939552"/>
-          </a:xfrm>
-          <a:prstGeom prst="roundRect">
-            <a:avLst>
-              <a:gd name="adj" fmla="val 8110"/>
-            </a:avLst>
-          </a:prstGeom>
-          <a:solidFill>
-            <a:srgbClr val="FFFFFF"/>
-          </a:solidFill>
-          <a:ln/>
-        </p:spPr>
-        <p:txBody>
-          <a:bodyPr wrap="square" rtlCol="0" anchor="ctr"/>
-          <a:lstStyle/>
-          <a:p>
-            <a:pPr indent="0" marL="0">
-              <a:buNone/>
-            </a:pPr>
-            <a:endParaRPr lang="en-US" dirty="0"/>
-          </a:p>
-        </p:txBody>
-      </p:sp>
-      <p:sp>
-        <p:nvSpPr>
-          <p:cNvPr id="27" name="Shape 21"/>
-          <p:cNvSpPr/>
-          <p:nvPr/>
-        </p:nvSpPr>
-        <p:spPr>
-          <a:xfrm>
-            <a:off x="4860727" y="2962573"/>
-            <a:ext cx="3587948" cy="0"/>
-          </a:xfrm>
-          <a:prstGeom prst="line">
-            <a:avLst/>
-          </a:prstGeom>
-          <a:noFill/>
-          <a:ln w="9525">
-            <a:solidFill>
-              <a:srgbClr val="E0C5FF"/>
-            </a:solidFill>
-            <a:prstDash val="solid"/>
-          </a:ln>
-        </p:spPr>
-      </p:sp>
-      <p:sp>
-        <p:nvSpPr>
-          <p:cNvPr id="28" name="Shape 22"/>
-          <p:cNvSpPr/>
-          <p:nvPr/>
-        </p:nvSpPr>
-        <p:spPr>
-          <a:xfrm>
-            <a:off x="8443912" y="2957810"/>
-            <a:ext cx="0" cy="939552"/>
-          </a:xfrm>
-          <a:prstGeom prst="line">
-            <a:avLst/>
-          </a:prstGeom>
-          <a:noFill/>
-          <a:ln w="9525">
-            <a:solidFill>
-              <a:srgbClr val="E0C5FF"/>
-            </a:solidFill>
-            <a:prstDash val="solid"/>
-          </a:ln>
-        </p:spPr>
-      </p:sp>
-      <p:sp>
-        <p:nvSpPr>
-          <p:cNvPr id="29" name="Shape 23"/>
-          <p:cNvSpPr/>
-          <p:nvPr/>
-        </p:nvSpPr>
-        <p:spPr>
-          <a:xfrm>
-            <a:off x="4860727" y="3892600"/>
-            <a:ext cx="3587948" cy="0"/>
-          </a:xfrm>
-          <a:prstGeom prst="line">
-            <a:avLst/>
-          </a:prstGeom>
-          <a:noFill/>
-          <a:ln w="9525">
-            <a:solidFill>
-              <a:srgbClr val="E0C5FF"/>
-            </a:solidFill>
-            <a:prstDash val="solid"/>
-          </a:ln>
-        </p:spPr>
-      </p:sp>
-      <p:sp>
-        <p:nvSpPr>
-          <p:cNvPr id="30" name="Shape 24"/>
-          <p:cNvSpPr/>
-          <p:nvPr/>
-        </p:nvSpPr>
-        <p:spPr>
-          <a:xfrm>
-            <a:off x="4884539" y="2957810"/>
-            <a:ext cx="0" cy="939552"/>
-          </a:xfrm>
-          <a:prstGeom prst="line">
-            <a:avLst/>
-          </a:prstGeom>
-          <a:noFill/>
-          <a:ln w="47625">
-            <a:solidFill>
-              <a:srgbClr val="8250DF"/>
-            </a:solidFill>
-            <a:prstDash val="solid"/>
-          </a:ln>
-        </p:spPr>
-      </p:sp>
-      <p:pic>
-        <p:nvPicPr>
-          <p:cNvPr id="31" name="Image 4" descr="/Users/danwahlin/.copilot/session-state/56a7a0da-def8-48d4-b5e8-0ac3878cb8dd/files/slides-build/icons/GoCopilot-8250DF.png">    </p:cNvPr>
+          <p:cNvPr id="23" name="Image 4" descr="/Users/danwahlin/.copilot/session-state/56a7a0da-def8-48d4-b5e8-0ac3878cb8dd/files/slides-build/icons/GoCodeReview-8250DF.png">    </p:cNvPr>
           <p:cNvPicPr>
             <a:picLocks noChangeAspect="1"/>
           </p:cNvPicPr>
@@ -3897,6 +3549,238 @@
         </p:blipFill>
         <p:spPr>
           <a:xfrm>
+            <a:off x="4943326" y="2077789"/>
+            <a:ext cx="215801" cy="215801"/>
+          </a:xfrm>
+          <a:prstGeom prst="rect">
+            <a:avLst/>
+          </a:prstGeom>
+        </p:spPr>
+      </p:pic>
+      <p:sp>
+        <p:nvSpPr>
+          <p:cNvPr id="24" name="Text 17"/>
+          <p:cNvSpPr/>
+          <p:nvPr/>
+        </p:nvSpPr>
+        <p:spPr>
+          <a:xfrm>
+            <a:off x="5356027" y="2071390"/>
+            <a:ext cx="2066669" cy="228600"/>
+          </a:xfrm>
+          <a:prstGeom prst="rect">
+            <a:avLst/>
+          </a:prstGeom>
+          <a:noFill/>
+          <a:ln/>
+        </p:spPr>
+        <p:txBody>
+          <a:bodyPr wrap="square" lIns="0" tIns="0" rIns="0" bIns="0" rtlCol="0" anchor="t"/>
+          <a:lstStyle/>
+          <a:p>
+            <a:pPr algn="l" indent="0" marL="0">
+              <a:lnSpc>
+                <a:spcPts val="1800"/>
+              </a:lnSpc>
+              <a:buNone/>
+            </a:pPr>
+            <a:r>
+              <a:rPr lang="en-US" sz="1650" b="1" dirty="0">
+                <a:solidFill>
+                  <a:srgbClr val="1F2328"/>
+                </a:solidFill>
+                <a:latin typeface="Arial" pitchFamily="34" charset="0"/>
+                <a:ea typeface="Arial" pitchFamily="34" charset="-122"/>
+                <a:cs typeface="Arial" pitchFamily="34" charset="-120"/>
+              </a:rPr>
+              <a:t>Ask the rubber duck</a:t>
+            </a:r>
+            <a:endParaRPr lang="en-US" sz="1650" dirty="0"/>
+          </a:p>
+        </p:txBody>
+      </p:sp>
+      <p:sp>
+        <p:nvSpPr>
+          <p:cNvPr id="25" name="Text 18"/>
+          <p:cNvSpPr/>
+          <p:nvPr/>
+        </p:nvSpPr>
+        <p:spPr>
+          <a:xfrm>
+            <a:off x="4860727" y="2452390"/>
+            <a:ext cx="3659707" cy="429220"/>
+          </a:xfrm>
+          <a:prstGeom prst="rect">
+            <a:avLst/>
+          </a:prstGeom>
+          <a:noFill/>
+          <a:ln/>
+        </p:spPr>
+        <p:txBody>
+          <a:bodyPr wrap="square" lIns="0" tIns="0" rIns="0" bIns="0" rtlCol="0" anchor="t"/>
+          <a:lstStyle/>
+          <a:p>
+            <a:pPr algn="l" indent="0" marL="0">
+              <a:lnSpc>
+                <a:spcPts val="1690"/>
+              </a:lnSpc>
+              <a:buNone/>
+            </a:pPr>
+            <a:r>
+              <a:rPr lang="en-US" sz="1400" dirty="0">
+                <a:solidFill>
+                  <a:srgbClr val="59636E"/>
+                </a:solidFill>
+                <a:latin typeface="Arial" pitchFamily="34" charset="0"/>
+                <a:ea typeface="Arial" pitchFamily="34" charset="-122"/>
+                <a:cs typeface="Arial" pitchFamily="34" charset="-120"/>
+              </a:rPr>
+              <a:t>A critic that uses a different model to find gaps in your evidence.</a:t>
+            </a:r>
+            <a:endParaRPr lang="en-US" sz="1400" dirty="0"/>
+          </a:p>
+        </p:txBody>
+      </p:sp>
+      <p:sp>
+        <p:nvSpPr>
+          <p:cNvPr id="26" name="Text 19"/>
+          <p:cNvSpPr/>
+          <p:nvPr/>
+        </p:nvSpPr>
+        <p:spPr>
+          <a:xfrm>
+            <a:off x="4860727" y="2957810"/>
+            <a:ext cx="3587948" cy="939552"/>
+          </a:xfrm>
+          <a:prstGeom prst="roundRect">
+            <a:avLst>
+              <a:gd name="adj" fmla="val 8110"/>
+            </a:avLst>
+          </a:prstGeom>
+          <a:solidFill>
+            <a:srgbClr val="FFFFFF"/>
+          </a:solidFill>
+          <a:ln/>
+        </p:spPr>
+        <p:txBody>
+          <a:bodyPr wrap="square" rtlCol="0" anchor="ctr"/>
+          <a:lstStyle/>
+          <a:p>
+            <a:pPr indent="0" marL="0">
+              <a:buNone/>
+            </a:pPr>
+            <a:endParaRPr lang="en-US" dirty="0"/>
+          </a:p>
+        </p:txBody>
+      </p:sp>
+      <p:sp>
+        <p:nvSpPr>
+          <p:cNvPr id="27" name="Shape 20"/>
+          <p:cNvSpPr/>
+          <p:nvPr/>
+        </p:nvSpPr>
+        <p:spPr>
+          <a:xfrm>
+            <a:off x="4860727" y="2962573"/>
+            <a:ext cx="3587948" cy="0"/>
+          </a:xfrm>
+          <a:prstGeom prst="line">
+            <a:avLst/>
+          </a:prstGeom>
+          <a:noFill/>
+          <a:ln w="9525">
+            <a:solidFill>
+              <a:srgbClr val="E0C5FF"/>
+            </a:solidFill>
+            <a:prstDash val="solid"/>
+          </a:ln>
+        </p:spPr>
+      </p:sp>
+      <p:sp>
+        <p:nvSpPr>
+          <p:cNvPr id="28" name="Shape 21"/>
+          <p:cNvSpPr/>
+          <p:nvPr/>
+        </p:nvSpPr>
+        <p:spPr>
+          <a:xfrm>
+            <a:off x="8443912" y="2957810"/>
+            <a:ext cx="0" cy="939552"/>
+          </a:xfrm>
+          <a:prstGeom prst="line">
+            <a:avLst/>
+          </a:prstGeom>
+          <a:noFill/>
+          <a:ln w="9525">
+            <a:solidFill>
+              <a:srgbClr val="E0C5FF"/>
+            </a:solidFill>
+            <a:prstDash val="solid"/>
+          </a:ln>
+        </p:spPr>
+      </p:sp>
+      <p:sp>
+        <p:nvSpPr>
+          <p:cNvPr id="29" name="Shape 22"/>
+          <p:cNvSpPr/>
+          <p:nvPr/>
+        </p:nvSpPr>
+        <p:spPr>
+          <a:xfrm>
+            <a:off x="4860727" y="3892600"/>
+            <a:ext cx="3587948" cy="0"/>
+          </a:xfrm>
+          <a:prstGeom prst="line">
+            <a:avLst/>
+          </a:prstGeom>
+          <a:noFill/>
+          <a:ln w="9525">
+            <a:solidFill>
+              <a:srgbClr val="E0C5FF"/>
+            </a:solidFill>
+            <a:prstDash val="solid"/>
+          </a:ln>
+        </p:spPr>
+      </p:sp>
+      <p:sp>
+        <p:nvSpPr>
+          <p:cNvPr id="30" name="Shape 23"/>
+          <p:cNvSpPr/>
+          <p:nvPr/>
+        </p:nvSpPr>
+        <p:spPr>
+          <a:xfrm>
+            <a:off x="4884539" y="2957810"/>
+            <a:ext cx="0" cy="939552"/>
+          </a:xfrm>
+          <a:prstGeom prst="line">
+            <a:avLst/>
+          </a:prstGeom>
+          <a:noFill/>
+          <a:ln w="47625">
+            <a:solidFill>
+              <a:srgbClr val="8250DF"/>
+            </a:solidFill>
+            <a:prstDash val="solid"/>
+          </a:ln>
+        </p:spPr>
+      </p:sp>
+      <p:pic>
+        <p:nvPicPr>
+          <p:cNvPr id="31" name="Image 5" descr="/Users/danwahlin/.copilot/session-state/56a7a0da-def8-48d4-b5e8-0ac3878cb8dd/files/slides-build/icons/GoCopilot-8250DF.png">    </p:cNvPr>
+          <p:cNvPicPr>
+            <a:picLocks noChangeAspect="1"/>
+          </p:cNvPicPr>
+          <p:nvPr/>
+        </p:nvPicPr>
+        <p:blipFill>
+          <a:blip r:embed="rId7"/>
+          <a:stretch>
+            <a:fillRect/>
+          </a:stretch>
+        </p:blipFill>
+        <p:spPr>
+          <a:xfrm>
             <a:off x="5086052" y="3097411"/>
             <a:ext cx="165050" cy="165050"/>
           </a:xfrm>
@@ -3907,7 +3791,7 @@
       </p:pic>
       <p:sp>
         <p:nvSpPr>
-          <p:cNvPr id="32" name="Text 25"/>
+          <p:cNvPr id="32" name="Text 24"/>
           <p:cNvSpPr/>
           <p:nvPr/>
         </p:nvSpPr>
@@ -3946,7 +3830,7 @@
       </p:sp>
       <p:sp>
         <p:nvSpPr>
-          <p:cNvPr id="33" name="Text 26"/>
+          <p:cNvPr id="33" name="Text 25"/>
           <p:cNvSpPr/>
           <p:nvPr/>
         </p:nvSpPr>
@@ -4018,112 +3902,9 @@
           <a:chExt cx="0" cy="0"/>
         </a:xfrm>
       </p:grpSpPr>
-      <p:sp>
-        <p:nvSpPr>
-          <p:cNvPr id="2" name="Text 0"/>
-          <p:cNvSpPr/>
-          <p:nvPr/>
-        </p:nvSpPr>
-        <p:spPr>
-          <a:xfrm>
-            <a:off x="0" y="0"/>
-            <a:ext cx="9144000" cy="76200"/>
-          </a:xfrm>
-          <a:prstGeom prst="rect">
-            <a:avLst/>
-          </a:prstGeom>
-          <a:solidFill>
-            <a:srgbClr val="0969DA"/>
-          </a:solidFill>
-          <a:ln/>
-        </p:spPr>
-        <p:txBody>
-          <a:bodyPr wrap="square" rtlCol="0" anchor="ctr"/>
-          <a:lstStyle/>
-          <a:p>
-            <a:pPr indent="0" marL="0">
-              <a:buNone/>
-            </a:pPr>
-            <a:endParaRPr lang="en-US" dirty="0"/>
-          </a:p>
-        </p:txBody>
-      </p:sp>
-      <p:sp>
-        <p:nvSpPr>
-          <p:cNvPr id="3" name="Text 1"/>
-          <p:cNvSpPr/>
-          <p:nvPr/>
-        </p:nvSpPr>
-        <p:spPr>
-          <a:xfrm>
-            <a:off x="7340501" y="177701"/>
-            <a:ext cx="1168301" cy="279350"/>
-          </a:xfrm>
-          <a:prstGeom prst="roundRect">
-            <a:avLst>
-              <a:gd name="adj" fmla="val 22731"/>
-            </a:avLst>
-          </a:prstGeom>
-          <a:solidFill>
-            <a:srgbClr val="1A7F37"/>
-          </a:solidFill>
-          <a:ln/>
-        </p:spPr>
-        <p:txBody>
-          <a:bodyPr wrap="square" rtlCol="0" anchor="ctr"/>
-          <a:lstStyle/>
-          <a:p>
-            <a:pPr indent="0" marL="0">
-              <a:buNone/>
-            </a:pPr>
-            <a:endParaRPr lang="en-US" dirty="0"/>
-          </a:p>
-        </p:txBody>
-      </p:sp>
-      <p:sp>
-        <p:nvSpPr>
-          <p:cNvPr id="4" name="Text 2"/>
-          <p:cNvSpPr/>
-          <p:nvPr/>
-        </p:nvSpPr>
-        <p:spPr>
-          <a:xfrm>
-            <a:off x="7461041" y="231577"/>
-            <a:ext cx="927071" cy="171450"/>
-          </a:xfrm>
-          <a:prstGeom prst="rect">
-            <a:avLst/>
-          </a:prstGeom>
-          <a:noFill/>
-          <a:ln/>
-        </p:spPr>
-        <p:txBody>
-          <a:bodyPr wrap="square" lIns="0" tIns="0" rIns="0" bIns="0" rtlCol="0" anchor="t"/>
-          <a:lstStyle/>
-          <a:p>
-            <a:pPr algn="ctr" indent="0" marL="0">
-              <a:buNone/>
-            </a:pPr>
-            <a:r>
-              <a:rPr lang="en-US" sz="1150" b="1" dirty="0">
-                <a:solidFill>
-                  <a:srgbClr val="FFFFFF"/>
-                </a:solidFill>
-                <a:latin typeface="Arial" pitchFamily="34" charset="0"/>
-                <a:ea typeface="Arial" pitchFamily="34" charset="-122"/>
-                <a:cs typeface="Arial" pitchFamily="34" charset="-120"/>
-              </a:rPr>
-              <a:t>CHAPTER 03</a:t>
-            </a:r>
-            <a:endParaRPr lang="en-US" sz="1150" dirty="0"/>
-          </a:p>
-        </p:txBody>
-      </p:sp>
       <p:pic>
         <p:nvPicPr>
-          <p:cNvPr id="5" name="Image 0" descr="/Users/danwahlin/.copilot/session-state/56a7a0da-def8-48d4-b5e8-0ac3878cb8dd/files/slides-build/icons/FaGithub-1F2328.png">
-            <a:hlinkClick r:id="rId2" tooltip="https://github.com/github/copilot-app-for-beginners/tree/main/03-development-workflows"/>
-          </p:cNvPr>
+          <p:cNvPr id="2" name="Image 0" descr="/Users/danwahlin/.copilot/session-state/56a7a0da-def8-48d4-b5e8-0ac3878cb8dd/files/slides-build/img/grad-corner.png">    </p:cNvPr>
           <p:cNvPicPr>
             <a:picLocks noChangeAspect="1"/>
           </p:cNvPicPr>
@@ -4137,6 +3918,103 @@
         </p:blipFill>
         <p:spPr>
           <a:xfrm>
+            <a:off x="6349901" y="0"/>
+            <a:ext cx="2793950" cy="1308050"/>
+          </a:xfrm>
+          <a:prstGeom prst="rect">
+            <a:avLst/>
+          </a:prstGeom>
+        </p:spPr>
+      </p:pic>
+      <p:sp>
+        <p:nvSpPr>
+          <p:cNvPr id="3" name="Text 0"/>
+          <p:cNvSpPr/>
+          <p:nvPr/>
+        </p:nvSpPr>
+        <p:spPr>
+          <a:xfrm>
+            <a:off x="7340501" y="177701"/>
+            <a:ext cx="1168301" cy="279350"/>
+          </a:xfrm>
+          <a:prstGeom prst="roundRect">
+            <a:avLst>
+              <a:gd name="adj" fmla="val 22731"/>
+            </a:avLst>
+          </a:prstGeom>
+          <a:solidFill>
+            <a:srgbClr val="1A7F37"/>
+          </a:solidFill>
+          <a:ln/>
+        </p:spPr>
+        <p:txBody>
+          <a:bodyPr wrap="square" rtlCol="0" anchor="ctr"/>
+          <a:lstStyle/>
+          <a:p>
+            <a:pPr indent="0" marL="0">
+              <a:buNone/>
+            </a:pPr>
+            <a:endParaRPr lang="en-US" dirty="0"/>
+          </a:p>
+        </p:txBody>
+      </p:sp>
+      <p:sp>
+        <p:nvSpPr>
+          <p:cNvPr id="4" name="Text 1"/>
+          <p:cNvSpPr/>
+          <p:nvPr/>
+        </p:nvSpPr>
+        <p:spPr>
+          <a:xfrm>
+            <a:off x="7461041" y="231577"/>
+            <a:ext cx="927071" cy="171450"/>
+          </a:xfrm>
+          <a:prstGeom prst="rect">
+            <a:avLst/>
+          </a:prstGeom>
+          <a:noFill/>
+          <a:ln/>
+        </p:spPr>
+        <p:txBody>
+          <a:bodyPr wrap="square" lIns="0" tIns="0" rIns="0" bIns="0" rtlCol="0" anchor="t"/>
+          <a:lstStyle/>
+          <a:p>
+            <a:pPr algn="ctr" indent="0" marL="0">
+              <a:buNone/>
+            </a:pPr>
+            <a:r>
+              <a:rPr lang="en-US" sz="1150" b="1" dirty="0">
+                <a:solidFill>
+                  <a:srgbClr val="FFFFFF"/>
+                </a:solidFill>
+                <a:latin typeface="Arial" pitchFamily="34" charset="0"/>
+                <a:ea typeface="Arial" pitchFamily="34" charset="-122"/>
+                <a:cs typeface="Arial" pitchFamily="34" charset="-120"/>
+              </a:rPr>
+              <a:t>CHAPTER 03</a:t>
+            </a:r>
+            <a:endParaRPr lang="en-US" sz="1150" dirty="0"/>
+          </a:p>
+        </p:txBody>
+      </p:sp>
+      <p:pic>
+        <p:nvPicPr>
+          <p:cNvPr id="5" name="Image 1" descr="/Users/danwahlin/.copilot/session-state/56a7a0da-def8-48d4-b5e8-0ac3878cb8dd/files/slides-build/icons/FaGithub-1F2328.png">
+            <a:hlinkClick r:id="rId3" tooltip="https://github.com/github/copilot-app-for-beginners/tree/main/03-development-workflows"/>
+          </p:cNvPr>
+          <p:cNvPicPr>
+            <a:picLocks noChangeAspect="1"/>
+          </p:cNvPicPr>
+          <p:nvPr/>
+        </p:nvPicPr>
+        <p:blipFill>
+          <a:blip r:embed="rId2"/>
+          <a:stretch>
+            <a:fillRect/>
+          </a:stretch>
+        </p:blipFill>
+        <p:spPr>
+          <a:xfrm>
             <a:off x="8610600" y="165050"/>
             <a:ext cx="304800" cy="304800"/>
           </a:xfrm>
@@ -4147,7 +4025,7 @@
       </p:pic>
       <p:sp>
         <p:nvSpPr>
-          <p:cNvPr id="6" name="Text 3"/>
+          <p:cNvPr id="6" name="Text 2"/>
           <p:cNvSpPr/>
           <p:nvPr/>
         </p:nvSpPr>
@@ -4186,7 +4064,7 @@
       </p:sp>
       <p:sp>
         <p:nvSpPr>
-          <p:cNvPr id="7" name="Text 4"/>
+          <p:cNvPr id="7" name="Text 3"/>
           <p:cNvSpPr/>
           <p:nvPr/>
         </p:nvSpPr>
@@ -4231,7 +4109,7 @@
       </p:sp>
       <p:sp>
         <p:nvSpPr>
-          <p:cNvPr id="8" name="Text 5"/>
+          <p:cNvPr id="8" name="Text 4"/>
           <p:cNvSpPr/>
           <p:nvPr/>
         </p:nvSpPr>
@@ -4276,7 +4154,7 @@
       </p:sp>
       <p:sp>
         <p:nvSpPr>
-          <p:cNvPr id="9" name="Text 6"/>
+          <p:cNvPr id="9" name="Text 5"/>
           <p:cNvSpPr/>
           <p:nvPr/>
         </p:nvSpPr>
@@ -4319,14 +4197,14 @@
       </p:sp>
       <p:pic>
         <p:nvPicPr>
-          <p:cNvPr id="10" name="Image 1" descr="/Users/danwahlin/.copilot/session-state/56a7a0da-def8-48d4-b5e8-0ac3878cb8dd/files/slides-build/img/03-pick-crop.png">    </p:cNvPr>
+          <p:cNvPr id="10" name="Image 2" descr="/Users/danwahlin/.copilot/session-state/56a7a0da-def8-48d4-b5e8-0ac3878cb8dd/files/slides-build/img/03-pick-crop.png">    </p:cNvPr>
           <p:cNvPicPr>
             <a:picLocks noChangeAspect="1"/>
           </p:cNvPicPr>
           <p:nvPr/>
         </p:nvPicPr>
         <p:blipFill>
-          <a:blip r:embed="rId3"/>
+          <a:blip r:embed="rId4"/>
           <a:stretch>
             <a:fillRect/>
           </a:stretch>
@@ -4343,7 +4221,7 @@
       </p:pic>
       <p:sp>
         <p:nvSpPr>
-          <p:cNvPr id="11" name="Text 7"/>
+          <p:cNvPr id="11" name="Text 6"/>
           <p:cNvSpPr/>
           <p:nvPr/>
         </p:nvSpPr>
@@ -4375,7 +4253,7 @@
       </p:sp>
       <p:sp>
         <p:nvSpPr>
-          <p:cNvPr id="12" name="Text 8"/>
+          <p:cNvPr id="12" name="Text 7"/>
           <p:cNvSpPr/>
           <p:nvPr/>
         </p:nvSpPr>
@@ -4414,7 +4292,7 @@
       </p:sp>
       <p:sp>
         <p:nvSpPr>
-          <p:cNvPr id="13" name="Text 9"/>
+          <p:cNvPr id="13" name="Text 8"/>
           <p:cNvSpPr/>
           <p:nvPr/>
         </p:nvSpPr>
@@ -4456,7 +4334,7 @@
       </p:sp>
       <p:sp>
         <p:nvSpPr>
-          <p:cNvPr id="14" name="Text 10"/>
+          <p:cNvPr id="14" name="Text 9"/>
           <p:cNvSpPr/>
           <p:nvPr/>
         </p:nvSpPr>
@@ -4498,7 +4376,7 @@
       </p:sp>
       <p:sp>
         <p:nvSpPr>
-          <p:cNvPr id="15" name="Text 11"/>
+          <p:cNvPr id="15" name="Text 10"/>
           <p:cNvSpPr/>
           <p:nvPr/>
         </p:nvSpPr>
@@ -4530,7 +4408,7 @@
       </p:sp>
       <p:sp>
         <p:nvSpPr>
-          <p:cNvPr id="16" name="Text 12"/>
+          <p:cNvPr id="16" name="Text 11"/>
           <p:cNvSpPr/>
           <p:nvPr/>
         </p:nvSpPr>
@@ -4569,7 +4447,7 @@
       </p:sp>
       <p:sp>
         <p:nvSpPr>
-          <p:cNvPr id="17" name="Text 13"/>
+          <p:cNvPr id="17" name="Text 12"/>
           <p:cNvSpPr/>
           <p:nvPr/>
         </p:nvSpPr>
@@ -4611,7 +4489,7 @@
       </p:sp>
       <p:sp>
         <p:nvSpPr>
-          <p:cNvPr id="18" name="Text 14"/>
+          <p:cNvPr id="18" name="Text 13"/>
           <p:cNvSpPr/>
           <p:nvPr/>
         </p:nvSpPr>
@@ -4653,7 +4531,7 @@
       </p:sp>
       <p:sp>
         <p:nvSpPr>
-          <p:cNvPr id="19" name="Text 15"/>
+          <p:cNvPr id="19" name="Text 14"/>
           <p:cNvSpPr/>
           <p:nvPr/>
         </p:nvSpPr>
@@ -4685,7 +4563,7 @@
       </p:sp>
       <p:sp>
         <p:nvSpPr>
-          <p:cNvPr id="20" name="Text 16"/>
+          <p:cNvPr id="20" name="Text 15"/>
           <p:cNvSpPr/>
           <p:nvPr/>
         </p:nvSpPr>
@@ -4724,7 +4602,7 @@
       </p:sp>
       <p:sp>
         <p:nvSpPr>
-          <p:cNvPr id="21" name="Text 17"/>
+          <p:cNvPr id="21" name="Text 16"/>
           <p:cNvSpPr/>
           <p:nvPr/>
         </p:nvSpPr>
@@ -4766,7 +4644,7 @@
       </p:sp>
       <p:sp>
         <p:nvSpPr>
-          <p:cNvPr id="22" name="Text 18"/>
+          <p:cNvPr id="22" name="Text 17"/>
           <p:cNvSpPr/>
           <p:nvPr/>
         </p:nvSpPr>
@@ -4825,7 +4703,7 @@
       </p:sp>
       <p:sp>
         <p:nvSpPr>
-          <p:cNvPr id="23" name="Text 19"/>
+          <p:cNvPr id="23" name="Text 18"/>
           <p:cNvSpPr/>
           <p:nvPr/>
         </p:nvSpPr>
@@ -4868,14 +4746,14 @@
       </p:sp>
       <p:pic>
         <p:nvPicPr>
-          <p:cNvPr id="24" name="Image 2" descr="/Users/danwahlin/.copilot/session-state/56a7a0da-def8-48d4-b5e8-0ac3878cb8dd/files/slides-build/img/03-pick-prompt-crop.png">    </p:cNvPr>
+          <p:cNvPr id="24" name="Image 3" descr="/Users/danwahlin/.copilot/session-state/56a7a0da-def8-48d4-b5e8-0ac3878cb8dd/files/slides-build/img/03-pick-prompt-crop.png">    </p:cNvPr>
           <p:cNvPicPr>
             <a:picLocks noChangeAspect="1"/>
           </p:cNvPicPr>
           <p:nvPr/>
         </p:nvPicPr>
         <p:blipFill>
-          <a:blip r:embed="rId4"/>
+          <a:blip r:embed="rId5"/>
           <a:stretch>
             <a:fillRect/>
           </a:stretch>
@@ -5024,82 +4902,9 @@
           </a:p>
         </p:txBody>
       </p:sp>
-      <p:sp>
-        <p:nvSpPr>
-          <p:cNvPr id="5" name="Text 3"/>
-          <p:cNvSpPr/>
-          <p:nvPr/>
-        </p:nvSpPr>
-        <p:spPr>
-          <a:xfrm>
-            <a:off x="7340501" y="177701"/>
-            <a:ext cx="1168301" cy="279350"/>
-          </a:xfrm>
-          <a:prstGeom prst="roundRect">
-            <a:avLst>
-              <a:gd name="adj" fmla="val 22731"/>
-            </a:avLst>
-          </a:prstGeom>
-          <a:solidFill>
-            <a:srgbClr val="1A7F37"/>
-          </a:solidFill>
-          <a:ln/>
-        </p:spPr>
-        <p:txBody>
-          <a:bodyPr wrap="square" rtlCol="0" anchor="ctr"/>
-          <a:lstStyle/>
-          <a:p>
-            <a:pPr indent="0" marL="0">
-              <a:buNone/>
-            </a:pPr>
-            <a:endParaRPr lang="en-US" dirty="0"/>
-          </a:p>
-        </p:txBody>
-      </p:sp>
-      <p:sp>
-        <p:nvSpPr>
-          <p:cNvPr id="6" name="Text 4"/>
-          <p:cNvSpPr/>
-          <p:nvPr/>
-        </p:nvSpPr>
-        <p:spPr>
-          <a:xfrm>
-            <a:off x="7461041" y="231577"/>
-            <a:ext cx="927071" cy="171450"/>
-          </a:xfrm>
-          <a:prstGeom prst="rect">
-            <a:avLst/>
-          </a:prstGeom>
-          <a:noFill/>
-          <a:ln/>
-        </p:spPr>
-        <p:txBody>
-          <a:bodyPr wrap="square" lIns="0" tIns="0" rIns="0" bIns="0" rtlCol="0" anchor="t"/>
-          <a:lstStyle/>
-          <a:p>
-            <a:pPr algn="ctr" indent="0" marL="0">
-              <a:buNone/>
-            </a:pPr>
-            <a:r>
-              <a:rPr lang="en-US" sz="1150" b="1" dirty="0">
-                <a:solidFill>
-                  <a:srgbClr val="FFFFFF"/>
-                </a:solidFill>
-                <a:latin typeface="Arial" pitchFamily="34" charset="0"/>
-                <a:ea typeface="Arial" pitchFamily="34" charset="-122"/>
-                <a:cs typeface="Arial" pitchFamily="34" charset="-120"/>
-              </a:rPr>
-              <a:t>CHAPTER 03</a:t>
-            </a:r>
-            <a:endParaRPr lang="en-US" sz="1150" dirty="0"/>
-          </a:p>
-        </p:txBody>
-      </p:sp>
       <p:pic>
         <p:nvPicPr>
-          <p:cNvPr id="7" name="Image 0" descr="/Users/danwahlin/.copilot/session-state/56a7a0da-def8-48d4-b5e8-0ac3878cb8dd/files/slides-build/icons/FaGithub-1F2328.png">
-            <a:hlinkClick r:id="rId2" tooltip="https://github.com/github/copilot-app-for-beginners/tree/main/03-development-workflows"/>
-          </p:cNvPr>
+          <p:cNvPr id="5" name="Image 0" descr="/Users/danwahlin/.copilot/session-state/56a7a0da-def8-48d4-b5e8-0ac3878cb8dd/files/slides-build/img/grad-corner.png">    </p:cNvPr>
           <p:cNvPicPr>
             <a:picLocks noChangeAspect="1"/>
           </p:cNvPicPr>
@@ -5113,6 +4918,103 @@
         </p:blipFill>
         <p:spPr>
           <a:xfrm>
+            <a:off x="6349901" y="0"/>
+            <a:ext cx="2793950" cy="1308050"/>
+          </a:xfrm>
+          <a:prstGeom prst="rect">
+            <a:avLst/>
+          </a:prstGeom>
+        </p:spPr>
+      </p:pic>
+      <p:sp>
+        <p:nvSpPr>
+          <p:cNvPr id="6" name="Text 3"/>
+          <p:cNvSpPr/>
+          <p:nvPr/>
+        </p:nvSpPr>
+        <p:spPr>
+          <a:xfrm>
+            <a:off x="7340501" y="177701"/>
+            <a:ext cx="1168301" cy="279350"/>
+          </a:xfrm>
+          <a:prstGeom prst="roundRect">
+            <a:avLst>
+              <a:gd name="adj" fmla="val 22731"/>
+            </a:avLst>
+          </a:prstGeom>
+          <a:solidFill>
+            <a:srgbClr val="1A7F37"/>
+          </a:solidFill>
+          <a:ln/>
+        </p:spPr>
+        <p:txBody>
+          <a:bodyPr wrap="square" rtlCol="0" anchor="ctr"/>
+          <a:lstStyle/>
+          <a:p>
+            <a:pPr indent="0" marL="0">
+              <a:buNone/>
+            </a:pPr>
+            <a:endParaRPr lang="en-US" dirty="0"/>
+          </a:p>
+        </p:txBody>
+      </p:sp>
+      <p:sp>
+        <p:nvSpPr>
+          <p:cNvPr id="7" name="Text 4"/>
+          <p:cNvSpPr/>
+          <p:nvPr/>
+        </p:nvSpPr>
+        <p:spPr>
+          <a:xfrm>
+            <a:off x="7461041" y="231577"/>
+            <a:ext cx="927071" cy="171450"/>
+          </a:xfrm>
+          <a:prstGeom prst="rect">
+            <a:avLst/>
+          </a:prstGeom>
+          <a:noFill/>
+          <a:ln/>
+        </p:spPr>
+        <p:txBody>
+          <a:bodyPr wrap="square" lIns="0" tIns="0" rIns="0" bIns="0" rtlCol="0" anchor="t"/>
+          <a:lstStyle/>
+          <a:p>
+            <a:pPr algn="ctr" indent="0" marL="0">
+              <a:buNone/>
+            </a:pPr>
+            <a:r>
+              <a:rPr lang="en-US" sz="1150" b="1" dirty="0">
+                <a:solidFill>
+                  <a:srgbClr val="FFFFFF"/>
+                </a:solidFill>
+                <a:latin typeface="Arial" pitchFamily="34" charset="0"/>
+                <a:ea typeface="Arial" pitchFamily="34" charset="-122"/>
+                <a:cs typeface="Arial" pitchFamily="34" charset="-120"/>
+              </a:rPr>
+              <a:t>CHAPTER 03</a:t>
+            </a:r>
+            <a:endParaRPr lang="en-US" sz="1150" dirty="0"/>
+          </a:p>
+        </p:txBody>
+      </p:sp>
+      <p:pic>
+        <p:nvPicPr>
+          <p:cNvPr id="8" name="Image 1" descr="/Users/danwahlin/.copilot/session-state/56a7a0da-def8-48d4-b5e8-0ac3878cb8dd/files/slides-build/icons/FaGithub-1F2328.png">
+            <a:hlinkClick r:id="rId3" tooltip="https://github.com/github/copilot-app-for-beginners/tree/main/03-development-workflows"/>
+          </p:cNvPr>
+          <p:cNvPicPr>
+            <a:picLocks noChangeAspect="1"/>
+          </p:cNvPicPr>
+          <p:nvPr/>
+        </p:nvPicPr>
+        <p:blipFill>
+          <a:blip r:embed="rId2"/>
+          <a:stretch>
+            <a:fillRect/>
+          </a:stretch>
+        </p:blipFill>
+        <p:spPr>
+          <a:xfrm>
             <a:off x="8610600" y="165050"/>
             <a:ext cx="304800" cy="304800"/>
           </a:xfrm>
@@ -5123,7 +5025,7 @@
       </p:pic>
       <p:sp>
         <p:nvSpPr>
-          <p:cNvPr id="8" name="Text 5"/>
+          <p:cNvPr id="9" name="Text 5"/>
           <p:cNvSpPr/>
           <p:nvPr/>
         </p:nvSpPr>
@@ -5162,7 +5064,7 @@
       </p:sp>
       <p:sp>
         <p:nvSpPr>
-          <p:cNvPr id="9" name="Text 6"/>
+          <p:cNvPr id="10" name="Text 6"/>
           <p:cNvSpPr/>
           <p:nvPr/>
         </p:nvSpPr>
@@ -5207,7 +5109,7 @@
       </p:sp>
       <p:sp>
         <p:nvSpPr>
-          <p:cNvPr id="10" name="Text 7"/>
+          <p:cNvPr id="11" name="Text 7"/>
           <p:cNvSpPr/>
           <p:nvPr/>
         </p:nvSpPr>
@@ -5239,7 +5141,7 @@
       </p:sp>
       <p:sp>
         <p:nvSpPr>
-          <p:cNvPr id="11" name="Text 8"/>
+          <p:cNvPr id="12" name="Text 8"/>
           <p:cNvSpPr/>
           <p:nvPr/>
         </p:nvSpPr>
@@ -5311,112 +5213,9 @@
           <a:chExt cx="0" cy="0"/>
         </a:xfrm>
       </p:grpSpPr>
-      <p:sp>
-        <p:nvSpPr>
-          <p:cNvPr id="2" name="Text 0"/>
-          <p:cNvSpPr/>
-          <p:nvPr/>
-        </p:nvSpPr>
-        <p:spPr>
-          <a:xfrm>
-            <a:off x="0" y="0"/>
-            <a:ext cx="9144000" cy="76200"/>
-          </a:xfrm>
-          <a:prstGeom prst="rect">
-            <a:avLst/>
-          </a:prstGeom>
-          <a:solidFill>
-            <a:srgbClr val="8250DF"/>
-          </a:solidFill>
-          <a:ln/>
-        </p:spPr>
-        <p:txBody>
-          <a:bodyPr wrap="square" rtlCol="0" anchor="ctr"/>
-          <a:lstStyle/>
-          <a:p>
-            <a:pPr indent="0" marL="0">
-              <a:buNone/>
-            </a:pPr>
-            <a:endParaRPr lang="en-US" dirty="0"/>
-          </a:p>
-        </p:txBody>
-      </p:sp>
-      <p:sp>
-        <p:nvSpPr>
-          <p:cNvPr id="3" name="Text 1"/>
-          <p:cNvSpPr/>
-          <p:nvPr/>
-        </p:nvSpPr>
-        <p:spPr>
-          <a:xfrm>
-            <a:off x="7340501" y="177701"/>
-            <a:ext cx="1168301" cy="279350"/>
-          </a:xfrm>
-          <a:prstGeom prst="roundRect">
-            <a:avLst>
-              <a:gd name="adj" fmla="val 22731"/>
-            </a:avLst>
-          </a:prstGeom>
-          <a:solidFill>
-            <a:srgbClr val="1A7F37"/>
-          </a:solidFill>
-          <a:ln/>
-        </p:spPr>
-        <p:txBody>
-          <a:bodyPr wrap="square" rtlCol="0" anchor="ctr"/>
-          <a:lstStyle/>
-          <a:p>
-            <a:pPr indent="0" marL="0">
-              <a:buNone/>
-            </a:pPr>
-            <a:endParaRPr lang="en-US" dirty="0"/>
-          </a:p>
-        </p:txBody>
-      </p:sp>
-      <p:sp>
-        <p:nvSpPr>
-          <p:cNvPr id="4" name="Text 2"/>
-          <p:cNvSpPr/>
-          <p:nvPr/>
-        </p:nvSpPr>
-        <p:spPr>
-          <a:xfrm>
-            <a:off x="7461041" y="231577"/>
-            <a:ext cx="927071" cy="171450"/>
-          </a:xfrm>
-          <a:prstGeom prst="rect">
-            <a:avLst/>
-          </a:prstGeom>
-          <a:noFill/>
-          <a:ln/>
-        </p:spPr>
-        <p:txBody>
-          <a:bodyPr wrap="square" lIns="0" tIns="0" rIns="0" bIns="0" rtlCol="0" anchor="t"/>
-          <a:lstStyle/>
-          <a:p>
-            <a:pPr algn="ctr" indent="0" marL="0">
-              <a:buNone/>
-            </a:pPr>
-            <a:r>
-              <a:rPr lang="en-US" sz="1150" b="1" dirty="0">
-                <a:solidFill>
-                  <a:srgbClr val="FFFFFF"/>
-                </a:solidFill>
-                <a:latin typeface="Arial" pitchFamily="34" charset="0"/>
-                <a:ea typeface="Arial" pitchFamily="34" charset="-122"/>
-                <a:cs typeface="Arial" pitchFamily="34" charset="-120"/>
-              </a:rPr>
-              <a:t>CHAPTER 03</a:t>
-            </a:r>
-            <a:endParaRPr lang="en-US" sz="1150" dirty="0"/>
-          </a:p>
-        </p:txBody>
-      </p:sp>
       <p:pic>
         <p:nvPicPr>
-          <p:cNvPr id="5" name="Image 0" descr="/Users/danwahlin/.copilot/session-state/56a7a0da-def8-48d4-b5e8-0ac3878cb8dd/files/slides-build/icons/FaGithub-1F2328.png">
-            <a:hlinkClick r:id="rId2" tooltip="https://github.com/github/copilot-app-for-beginners/tree/main/03-development-workflows"/>
-          </p:cNvPr>
+          <p:cNvPr id="2" name="Image 0" descr="/Users/danwahlin/.copilot/session-state/56a7a0da-def8-48d4-b5e8-0ac3878cb8dd/files/slides-build/img/grad-corner.png">    </p:cNvPr>
           <p:cNvPicPr>
             <a:picLocks noChangeAspect="1"/>
           </p:cNvPicPr>
@@ -5430,6 +5229,103 @@
         </p:blipFill>
         <p:spPr>
           <a:xfrm>
+            <a:off x="6349901" y="0"/>
+            <a:ext cx="2793950" cy="1308050"/>
+          </a:xfrm>
+          <a:prstGeom prst="rect">
+            <a:avLst/>
+          </a:prstGeom>
+        </p:spPr>
+      </p:pic>
+      <p:sp>
+        <p:nvSpPr>
+          <p:cNvPr id="3" name="Text 0"/>
+          <p:cNvSpPr/>
+          <p:nvPr/>
+        </p:nvSpPr>
+        <p:spPr>
+          <a:xfrm>
+            <a:off x="7340501" y="177701"/>
+            <a:ext cx="1168301" cy="279350"/>
+          </a:xfrm>
+          <a:prstGeom prst="roundRect">
+            <a:avLst>
+              <a:gd name="adj" fmla="val 22731"/>
+            </a:avLst>
+          </a:prstGeom>
+          <a:solidFill>
+            <a:srgbClr val="1A7F37"/>
+          </a:solidFill>
+          <a:ln/>
+        </p:spPr>
+        <p:txBody>
+          <a:bodyPr wrap="square" rtlCol="0" anchor="ctr"/>
+          <a:lstStyle/>
+          <a:p>
+            <a:pPr indent="0" marL="0">
+              <a:buNone/>
+            </a:pPr>
+            <a:endParaRPr lang="en-US" dirty="0"/>
+          </a:p>
+        </p:txBody>
+      </p:sp>
+      <p:sp>
+        <p:nvSpPr>
+          <p:cNvPr id="4" name="Text 1"/>
+          <p:cNvSpPr/>
+          <p:nvPr/>
+        </p:nvSpPr>
+        <p:spPr>
+          <a:xfrm>
+            <a:off x="7461041" y="231577"/>
+            <a:ext cx="927071" cy="171450"/>
+          </a:xfrm>
+          <a:prstGeom prst="rect">
+            <a:avLst/>
+          </a:prstGeom>
+          <a:noFill/>
+          <a:ln/>
+        </p:spPr>
+        <p:txBody>
+          <a:bodyPr wrap="square" lIns="0" tIns="0" rIns="0" bIns="0" rtlCol="0" anchor="t"/>
+          <a:lstStyle/>
+          <a:p>
+            <a:pPr algn="ctr" indent="0" marL="0">
+              <a:buNone/>
+            </a:pPr>
+            <a:r>
+              <a:rPr lang="en-US" sz="1150" b="1" dirty="0">
+                <a:solidFill>
+                  <a:srgbClr val="FFFFFF"/>
+                </a:solidFill>
+                <a:latin typeface="Arial" pitchFamily="34" charset="0"/>
+                <a:ea typeface="Arial" pitchFamily="34" charset="-122"/>
+                <a:cs typeface="Arial" pitchFamily="34" charset="-120"/>
+              </a:rPr>
+              <a:t>CHAPTER 03</a:t>
+            </a:r>
+            <a:endParaRPr lang="en-US" sz="1150" dirty="0"/>
+          </a:p>
+        </p:txBody>
+      </p:sp>
+      <p:pic>
+        <p:nvPicPr>
+          <p:cNvPr id="5" name="Image 1" descr="/Users/danwahlin/.copilot/session-state/56a7a0da-def8-48d4-b5e8-0ac3878cb8dd/files/slides-build/icons/FaGithub-1F2328.png">
+            <a:hlinkClick r:id="rId3" tooltip="https://github.com/github/copilot-app-for-beginners/tree/main/03-development-workflows"/>
+          </p:cNvPr>
+          <p:cNvPicPr>
+            <a:picLocks noChangeAspect="1"/>
+          </p:cNvPicPr>
+          <p:nvPr/>
+        </p:nvPicPr>
+        <p:blipFill>
+          <a:blip r:embed="rId2"/>
+          <a:stretch>
+            <a:fillRect/>
+          </a:stretch>
+        </p:blipFill>
+        <p:spPr>
+          <a:xfrm>
             <a:off x="8610600" y="165050"/>
             <a:ext cx="304800" cy="304800"/>
           </a:xfrm>
@@ -5440,7 +5336,7 @@
       </p:pic>
       <p:sp>
         <p:nvSpPr>
-          <p:cNvPr id="6" name="Text 3"/>
+          <p:cNvPr id="6" name="Text 2"/>
           <p:cNvSpPr/>
           <p:nvPr/>
         </p:nvSpPr>
@@ -5479,7 +5375,7 @@
       </p:sp>
       <p:sp>
         <p:nvSpPr>
-          <p:cNvPr id="7" name="Text 4"/>
+          <p:cNvPr id="7" name="Text 3"/>
           <p:cNvSpPr/>
           <p:nvPr/>
         </p:nvSpPr>
@@ -5524,7 +5420,7 @@
       </p:sp>
       <p:sp>
         <p:nvSpPr>
-          <p:cNvPr id="8" name="Text 5"/>
+          <p:cNvPr id="8" name="Text 4"/>
           <p:cNvSpPr/>
           <p:nvPr/>
         </p:nvSpPr>
@@ -5569,14 +5465,14 @@
       </p:sp>
       <p:pic>
         <p:nvPicPr>
-          <p:cNvPr id="9" name="Image 1" descr="/Users/danwahlin/.copilot/session-state/56a7a0da-def8-48d4-b5e8-0ac3878cb8dd/files/slides-build/img/03-issue-to-merged-pr.png">    </p:cNvPr>
+          <p:cNvPr id="9" name="Image 2" descr="/Users/danwahlin/.copilot/session-state/56a7a0da-def8-48d4-b5e8-0ac3878cb8dd/files/slides-build/img/03-issue-to-merged-pr.png">    </p:cNvPr>
           <p:cNvPicPr>
             <a:picLocks noChangeAspect="1"/>
           </p:cNvPicPr>
           <p:nvPr/>
         </p:nvPicPr>
         <p:blipFill>
-          <a:blip r:embed="rId3"/>
+          <a:blip r:embed="rId4"/>
           <a:stretch>
             <a:fillRect/>
           </a:stretch>
@@ -5623,112 +5519,9 @@
           <a:chExt cx="0" cy="0"/>
         </a:xfrm>
       </p:grpSpPr>
-      <p:sp>
-        <p:nvSpPr>
-          <p:cNvPr id="2" name="Text 0"/>
-          <p:cNvSpPr/>
-          <p:nvPr/>
-        </p:nvSpPr>
-        <p:spPr>
-          <a:xfrm>
-            <a:off x="0" y="0"/>
-            <a:ext cx="9144000" cy="76200"/>
-          </a:xfrm>
-          <a:prstGeom prst="rect">
-            <a:avLst/>
-          </a:prstGeom>
-          <a:solidFill>
-            <a:srgbClr val="8250DF"/>
-          </a:solidFill>
-          <a:ln/>
-        </p:spPr>
-        <p:txBody>
-          <a:bodyPr wrap="square" rtlCol="0" anchor="ctr"/>
-          <a:lstStyle/>
-          <a:p>
-            <a:pPr indent="0" marL="0">
-              <a:buNone/>
-            </a:pPr>
-            <a:endParaRPr lang="en-US" dirty="0"/>
-          </a:p>
-        </p:txBody>
-      </p:sp>
-      <p:sp>
-        <p:nvSpPr>
-          <p:cNvPr id="3" name="Text 1"/>
-          <p:cNvSpPr/>
-          <p:nvPr/>
-        </p:nvSpPr>
-        <p:spPr>
-          <a:xfrm>
-            <a:off x="7340501" y="177701"/>
-            <a:ext cx="1168301" cy="279350"/>
-          </a:xfrm>
-          <a:prstGeom prst="roundRect">
-            <a:avLst>
-              <a:gd name="adj" fmla="val 22731"/>
-            </a:avLst>
-          </a:prstGeom>
-          <a:solidFill>
-            <a:srgbClr val="1A7F37"/>
-          </a:solidFill>
-          <a:ln/>
-        </p:spPr>
-        <p:txBody>
-          <a:bodyPr wrap="square" rtlCol="0" anchor="ctr"/>
-          <a:lstStyle/>
-          <a:p>
-            <a:pPr indent="0" marL="0">
-              <a:buNone/>
-            </a:pPr>
-            <a:endParaRPr lang="en-US" dirty="0"/>
-          </a:p>
-        </p:txBody>
-      </p:sp>
-      <p:sp>
-        <p:nvSpPr>
-          <p:cNvPr id="4" name="Text 2"/>
-          <p:cNvSpPr/>
-          <p:nvPr/>
-        </p:nvSpPr>
-        <p:spPr>
-          <a:xfrm>
-            <a:off x="7461041" y="231577"/>
-            <a:ext cx="927071" cy="171450"/>
-          </a:xfrm>
-          <a:prstGeom prst="rect">
-            <a:avLst/>
-          </a:prstGeom>
-          <a:noFill/>
-          <a:ln/>
-        </p:spPr>
-        <p:txBody>
-          <a:bodyPr wrap="square" lIns="0" tIns="0" rIns="0" bIns="0" rtlCol="0" anchor="t"/>
-          <a:lstStyle/>
-          <a:p>
-            <a:pPr algn="ctr" indent="0" marL="0">
-              <a:buNone/>
-            </a:pPr>
-            <a:r>
-              <a:rPr lang="en-US" sz="1150" b="1" dirty="0">
-                <a:solidFill>
-                  <a:srgbClr val="FFFFFF"/>
-                </a:solidFill>
-                <a:latin typeface="Arial" pitchFamily="34" charset="0"/>
-                <a:ea typeface="Arial" pitchFamily="34" charset="-122"/>
-                <a:cs typeface="Arial" pitchFamily="34" charset="-120"/>
-              </a:rPr>
-              <a:t>CHAPTER 03</a:t>
-            </a:r>
-            <a:endParaRPr lang="en-US" sz="1150" dirty="0"/>
-          </a:p>
-        </p:txBody>
-      </p:sp>
       <p:pic>
         <p:nvPicPr>
-          <p:cNvPr id="5" name="Image 0" descr="/Users/danwahlin/.copilot/session-state/56a7a0da-def8-48d4-b5e8-0ac3878cb8dd/files/slides-build/icons/FaGithub-1F2328.png">
-            <a:hlinkClick r:id="rId2" tooltip="https://github.com/github/copilot-app-for-beginners/tree/main/03-development-workflows"/>
-          </p:cNvPr>
+          <p:cNvPr id="2" name="Image 0" descr="/Users/danwahlin/.copilot/session-state/56a7a0da-def8-48d4-b5e8-0ac3878cb8dd/files/slides-build/img/grad-corner.png">    </p:cNvPr>
           <p:cNvPicPr>
             <a:picLocks noChangeAspect="1"/>
           </p:cNvPicPr>
@@ -5742,6 +5535,103 @@
         </p:blipFill>
         <p:spPr>
           <a:xfrm>
+            <a:off x="6349901" y="0"/>
+            <a:ext cx="2793950" cy="1308050"/>
+          </a:xfrm>
+          <a:prstGeom prst="rect">
+            <a:avLst/>
+          </a:prstGeom>
+        </p:spPr>
+      </p:pic>
+      <p:sp>
+        <p:nvSpPr>
+          <p:cNvPr id="3" name="Text 0"/>
+          <p:cNvSpPr/>
+          <p:nvPr/>
+        </p:nvSpPr>
+        <p:spPr>
+          <a:xfrm>
+            <a:off x="7340501" y="177701"/>
+            <a:ext cx="1168301" cy="279350"/>
+          </a:xfrm>
+          <a:prstGeom prst="roundRect">
+            <a:avLst>
+              <a:gd name="adj" fmla="val 22731"/>
+            </a:avLst>
+          </a:prstGeom>
+          <a:solidFill>
+            <a:srgbClr val="1A7F37"/>
+          </a:solidFill>
+          <a:ln/>
+        </p:spPr>
+        <p:txBody>
+          <a:bodyPr wrap="square" rtlCol="0" anchor="ctr"/>
+          <a:lstStyle/>
+          <a:p>
+            <a:pPr indent="0" marL="0">
+              <a:buNone/>
+            </a:pPr>
+            <a:endParaRPr lang="en-US" dirty="0"/>
+          </a:p>
+        </p:txBody>
+      </p:sp>
+      <p:sp>
+        <p:nvSpPr>
+          <p:cNvPr id="4" name="Text 1"/>
+          <p:cNvSpPr/>
+          <p:nvPr/>
+        </p:nvSpPr>
+        <p:spPr>
+          <a:xfrm>
+            <a:off x="7461041" y="231577"/>
+            <a:ext cx="927071" cy="171450"/>
+          </a:xfrm>
+          <a:prstGeom prst="rect">
+            <a:avLst/>
+          </a:prstGeom>
+          <a:noFill/>
+          <a:ln/>
+        </p:spPr>
+        <p:txBody>
+          <a:bodyPr wrap="square" lIns="0" tIns="0" rIns="0" bIns="0" rtlCol="0" anchor="t"/>
+          <a:lstStyle/>
+          <a:p>
+            <a:pPr algn="ctr" indent="0" marL="0">
+              <a:buNone/>
+            </a:pPr>
+            <a:r>
+              <a:rPr lang="en-US" sz="1150" b="1" dirty="0">
+                <a:solidFill>
+                  <a:srgbClr val="FFFFFF"/>
+                </a:solidFill>
+                <a:latin typeface="Arial" pitchFamily="34" charset="0"/>
+                <a:ea typeface="Arial" pitchFamily="34" charset="-122"/>
+                <a:cs typeface="Arial" pitchFamily="34" charset="-120"/>
+              </a:rPr>
+              <a:t>CHAPTER 03</a:t>
+            </a:r>
+            <a:endParaRPr lang="en-US" sz="1150" dirty="0"/>
+          </a:p>
+        </p:txBody>
+      </p:sp>
+      <p:pic>
+        <p:nvPicPr>
+          <p:cNvPr id="5" name="Image 1" descr="/Users/danwahlin/.copilot/session-state/56a7a0da-def8-48d4-b5e8-0ac3878cb8dd/files/slides-build/icons/FaGithub-1F2328.png">
+            <a:hlinkClick r:id="rId3" tooltip="https://github.com/github/copilot-app-for-beginners/tree/main/03-development-workflows"/>
+          </p:cNvPr>
+          <p:cNvPicPr>
+            <a:picLocks noChangeAspect="1"/>
+          </p:cNvPicPr>
+          <p:nvPr/>
+        </p:nvPicPr>
+        <p:blipFill>
+          <a:blip r:embed="rId2"/>
+          <a:stretch>
+            <a:fillRect/>
+          </a:stretch>
+        </p:blipFill>
+        <p:spPr>
+          <a:xfrm>
             <a:off x="8610600" y="165050"/>
             <a:ext cx="304800" cy="304800"/>
           </a:xfrm>
@@ -5752,7 +5642,7 @@
       </p:pic>
       <p:sp>
         <p:nvSpPr>
-          <p:cNvPr id="6" name="Text 3"/>
+          <p:cNvPr id="6" name="Text 2"/>
           <p:cNvSpPr/>
           <p:nvPr/>
         </p:nvSpPr>
@@ -5791,7 +5681,7 @@
       </p:sp>
       <p:sp>
         <p:nvSpPr>
-          <p:cNvPr id="7" name="Text 4"/>
+          <p:cNvPr id="7" name="Text 3"/>
           <p:cNvSpPr/>
           <p:nvPr/>
         </p:nvSpPr>
@@ -5836,7 +5726,7 @@
       </p:sp>
       <p:sp>
         <p:nvSpPr>
-          <p:cNvPr id="8" name="Text 5"/>
+          <p:cNvPr id="8" name="Text 4"/>
           <p:cNvSpPr/>
           <p:nvPr/>
         </p:nvSpPr>
@@ -5881,7 +5771,7 @@
       </p:sp>
       <p:sp>
         <p:nvSpPr>
-          <p:cNvPr id="9" name="Text 6"/>
+          <p:cNvPr id="9" name="Text 5"/>
           <p:cNvSpPr/>
           <p:nvPr/>
         </p:nvSpPr>
@@ -5913,7 +5803,7 @@
       </p:sp>
       <p:sp>
         <p:nvSpPr>
-          <p:cNvPr id="10" name="Text 7"/>
+          <p:cNvPr id="10" name="Text 6"/>
           <p:cNvSpPr/>
           <p:nvPr/>
         </p:nvSpPr>
@@ -5952,7 +5842,7 @@
       </p:sp>
       <p:sp>
         <p:nvSpPr>
-          <p:cNvPr id="11" name="Text 8"/>
+          <p:cNvPr id="11" name="Text 7"/>
           <p:cNvSpPr/>
           <p:nvPr/>
         </p:nvSpPr>
@@ -5994,7 +5884,7 @@
       </p:sp>
       <p:sp>
         <p:nvSpPr>
-          <p:cNvPr id="12" name="Text 9"/>
+          <p:cNvPr id="12" name="Text 8"/>
           <p:cNvSpPr/>
           <p:nvPr/>
         </p:nvSpPr>
@@ -6070,7 +5960,7 @@
       </p:sp>
       <p:sp>
         <p:nvSpPr>
-          <p:cNvPr id="13" name="Text 10"/>
+          <p:cNvPr id="13" name="Text 9"/>
           <p:cNvSpPr/>
           <p:nvPr/>
         </p:nvSpPr>
@@ -6102,7 +5992,7 @@
       </p:sp>
       <p:sp>
         <p:nvSpPr>
-          <p:cNvPr id="14" name="Text 11"/>
+          <p:cNvPr id="14" name="Text 10"/>
           <p:cNvSpPr/>
           <p:nvPr/>
         </p:nvSpPr>
@@ -6141,7 +6031,7 @@
       </p:sp>
       <p:sp>
         <p:nvSpPr>
-          <p:cNvPr id="15" name="Text 12"/>
+          <p:cNvPr id="15" name="Text 11"/>
           <p:cNvSpPr/>
           <p:nvPr/>
         </p:nvSpPr>
@@ -6183,7 +6073,7 @@
       </p:sp>
       <p:sp>
         <p:nvSpPr>
-          <p:cNvPr id="16" name="Text 13"/>
+          <p:cNvPr id="16" name="Text 12"/>
           <p:cNvSpPr/>
           <p:nvPr/>
         </p:nvSpPr>
@@ -6225,7 +6115,7 @@
       </p:sp>
       <p:sp>
         <p:nvSpPr>
-          <p:cNvPr id="17" name="Text 14"/>
+          <p:cNvPr id="17" name="Text 13"/>
           <p:cNvSpPr/>
           <p:nvPr/>
         </p:nvSpPr>
@@ -6268,14 +6158,14 @@
       </p:sp>
       <p:pic>
         <p:nvPicPr>
-          <p:cNvPr id="18" name="Image 1" descr="/Users/danwahlin/.copilot/session-state/56a7a0da-def8-48d4-b5e8-0ac3878cb8dd/files/slides-build/img/03-app-filter-repo.png">    </p:cNvPr>
+          <p:cNvPr id="18" name="Image 2" descr="/Users/danwahlin/.copilot/session-state/56a7a0da-def8-48d4-b5e8-0ac3878cb8dd/files/slides-build/img/03-app-filter-repo.png">    </p:cNvPr>
           <p:cNvPicPr>
             <a:picLocks noChangeAspect="1"/>
           </p:cNvPicPr>
           <p:nvPr/>
         </p:nvPicPr>
         <p:blipFill>
-          <a:blip r:embed="rId3"/>
+          <a:blip r:embed="rId4"/>
           <a:stretch>
             <a:fillRect/>
           </a:stretch>
@@ -6292,7 +6182,7 @@
       </p:pic>
       <p:sp>
         <p:nvSpPr>
-          <p:cNvPr id="19" name="Text 15"/>
+          <p:cNvPr id="19" name="Text 14"/>
           <p:cNvSpPr/>
           <p:nvPr/>
         </p:nvSpPr>
@@ -6335,14 +6225,14 @@
       </p:sp>
       <p:pic>
         <p:nvPicPr>
-          <p:cNvPr id="20" name="Image 2" descr="/Users/danwahlin/.copilot/session-state/56a7a0da-def8-48d4-b5e8-0ac3878cb8dd/files/slides-build/img/03-issues-crop.png">    </p:cNvPr>
+          <p:cNvPr id="20" name="Image 3" descr="/Users/danwahlin/.copilot/session-state/56a7a0da-def8-48d4-b5e8-0ac3878cb8dd/files/slides-build/img/03-issues-crop.png">    </p:cNvPr>
           <p:cNvPicPr>
             <a:picLocks noChangeAspect="1"/>
           </p:cNvPicPr>
           <p:nvPr/>
         </p:nvPicPr>
         <p:blipFill>
-          <a:blip r:embed="rId4"/>
+          <a:blip r:embed="rId5"/>
           <a:stretch>
             <a:fillRect/>
           </a:stretch>
@@ -6389,112 +6279,9 @@
           <a:chExt cx="0" cy="0"/>
         </a:xfrm>
       </p:grpSpPr>
-      <p:sp>
-        <p:nvSpPr>
-          <p:cNvPr id="2" name="Text 0"/>
-          <p:cNvSpPr/>
-          <p:nvPr/>
-        </p:nvSpPr>
-        <p:spPr>
-          <a:xfrm>
-            <a:off x="0" y="0"/>
-            <a:ext cx="9144000" cy="76200"/>
-          </a:xfrm>
-          <a:prstGeom prst="rect">
-            <a:avLst/>
-          </a:prstGeom>
-          <a:solidFill>
-            <a:srgbClr val="8250DF"/>
-          </a:solidFill>
-          <a:ln/>
-        </p:spPr>
-        <p:txBody>
-          <a:bodyPr wrap="square" rtlCol="0" anchor="ctr"/>
-          <a:lstStyle/>
-          <a:p>
-            <a:pPr indent="0" marL="0">
-              <a:buNone/>
-            </a:pPr>
-            <a:endParaRPr lang="en-US" dirty="0"/>
-          </a:p>
-        </p:txBody>
-      </p:sp>
-      <p:sp>
-        <p:nvSpPr>
-          <p:cNvPr id="3" name="Text 1"/>
-          <p:cNvSpPr/>
-          <p:nvPr/>
-        </p:nvSpPr>
-        <p:spPr>
-          <a:xfrm>
-            <a:off x="7340501" y="177701"/>
-            <a:ext cx="1168301" cy="279350"/>
-          </a:xfrm>
-          <a:prstGeom prst="roundRect">
-            <a:avLst>
-              <a:gd name="adj" fmla="val 22731"/>
-            </a:avLst>
-          </a:prstGeom>
-          <a:solidFill>
-            <a:srgbClr val="1A7F37"/>
-          </a:solidFill>
-          <a:ln/>
-        </p:spPr>
-        <p:txBody>
-          <a:bodyPr wrap="square" rtlCol="0" anchor="ctr"/>
-          <a:lstStyle/>
-          <a:p>
-            <a:pPr indent="0" marL="0">
-              <a:buNone/>
-            </a:pPr>
-            <a:endParaRPr lang="en-US" dirty="0"/>
-          </a:p>
-        </p:txBody>
-      </p:sp>
-      <p:sp>
-        <p:nvSpPr>
-          <p:cNvPr id="4" name="Text 2"/>
-          <p:cNvSpPr/>
-          <p:nvPr/>
-        </p:nvSpPr>
-        <p:spPr>
-          <a:xfrm>
-            <a:off x="7461041" y="231577"/>
-            <a:ext cx="927071" cy="171450"/>
-          </a:xfrm>
-          <a:prstGeom prst="rect">
-            <a:avLst/>
-          </a:prstGeom>
-          <a:noFill/>
-          <a:ln/>
-        </p:spPr>
-        <p:txBody>
-          <a:bodyPr wrap="square" lIns="0" tIns="0" rIns="0" bIns="0" rtlCol="0" anchor="t"/>
-          <a:lstStyle/>
-          <a:p>
-            <a:pPr algn="ctr" indent="0" marL="0">
-              <a:buNone/>
-            </a:pPr>
-            <a:r>
-              <a:rPr lang="en-US" sz="1150" b="1" dirty="0">
-                <a:solidFill>
-                  <a:srgbClr val="FFFFFF"/>
-                </a:solidFill>
-                <a:latin typeface="Arial" pitchFamily="34" charset="0"/>
-                <a:ea typeface="Arial" pitchFamily="34" charset="-122"/>
-                <a:cs typeface="Arial" pitchFamily="34" charset="-120"/>
-              </a:rPr>
-              <a:t>CHAPTER 03</a:t>
-            </a:r>
-            <a:endParaRPr lang="en-US" sz="1150" dirty="0"/>
-          </a:p>
-        </p:txBody>
-      </p:sp>
       <p:pic>
         <p:nvPicPr>
-          <p:cNvPr id="5" name="Image 0" descr="/Users/danwahlin/.copilot/session-state/56a7a0da-def8-48d4-b5e8-0ac3878cb8dd/files/slides-build/icons/FaGithub-1F2328.png">
-            <a:hlinkClick r:id="rId2" tooltip="https://github.com/github/copilot-app-for-beginners/tree/main/03-development-workflows"/>
-          </p:cNvPr>
+          <p:cNvPr id="2" name="Image 0" descr="/Users/danwahlin/.copilot/session-state/56a7a0da-def8-48d4-b5e8-0ac3878cb8dd/files/slides-build/img/grad-corner.png">    </p:cNvPr>
           <p:cNvPicPr>
             <a:picLocks noChangeAspect="1"/>
           </p:cNvPicPr>
@@ -6508,6 +6295,103 @@
         </p:blipFill>
         <p:spPr>
           <a:xfrm>
+            <a:off x="6349901" y="0"/>
+            <a:ext cx="2793950" cy="1308050"/>
+          </a:xfrm>
+          <a:prstGeom prst="rect">
+            <a:avLst/>
+          </a:prstGeom>
+        </p:spPr>
+      </p:pic>
+      <p:sp>
+        <p:nvSpPr>
+          <p:cNvPr id="3" name="Text 0"/>
+          <p:cNvSpPr/>
+          <p:nvPr/>
+        </p:nvSpPr>
+        <p:spPr>
+          <a:xfrm>
+            <a:off x="7340501" y="177701"/>
+            <a:ext cx="1168301" cy="279350"/>
+          </a:xfrm>
+          <a:prstGeom prst="roundRect">
+            <a:avLst>
+              <a:gd name="adj" fmla="val 22731"/>
+            </a:avLst>
+          </a:prstGeom>
+          <a:solidFill>
+            <a:srgbClr val="1A7F37"/>
+          </a:solidFill>
+          <a:ln/>
+        </p:spPr>
+        <p:txBody>
+          <a:bodyPr wrap="square" rtlCol="0" anchor="ctr"/>
+          <a:lstStyle/>
+          <a:p>
+            <a:pPr indent="0" marL="0">
+              <a:buNone/>
+            </a:pPr>
+            <a:endParaRPr lang="en-US" dirty="0"/>
+          </a:p>
+        </p:txBody>
+      </p:sp>
+      <p:sp>
+        <p:nvSpPr>
+          <p:cNvPr id="4" name="Text 1"/>
+          <p:cNvSpPr/>
+          <p:nvPr/>
+        </p:nvSpPr>
+        <p:spPr>
+          <a:xfrm>
+            <a:off x="7461041" y="231577"/>
+            <a:ext cx="927071" cy="171450"/>
+          </a:xfrm>
+          <a:prstGeom prst="rect">
+            <a:avLst/>
+          </a:prstGeom>
+          <a:noFill/>
+          <a:ln/>
+        </p:spPr>
+        <p:txBody>
+          <a:bodyPr wrap="square" lIns="0" tIns="0" rIns="0" bIns="0" rtlCol="0" anchor="t"/>
+          <a:lstStyle/>
+          <a:p>
+            <a:pPr algn="ctr" indent="0" marL="0">
+              <a:buNone/>
+            </a:pPr>
+            <a:r>
+              <a:rPr lang="en-US" sz="1150" b="1" dirty="0">
+                <a:solidFill>
+                  <a:srgbClr val="FFFFFF"/>
+                </a:solidFill>
+                <a:latin typeface="Arial" pitchFamily="34" charset="0"/>
+                <a:ea typeface="Arial" pitchFamily="34" charset="-122"/>
+                <a:cs typeface="Arial" pitchFamily="34" charset="-120"/>
+              </a:rPr>
+              <a:t>CHAPTER 03</a:t>
+            </a:r>
+            <a:endParaRPr lang="en-US" sz="1150" dirty="0"/>
+          </a:p>
+        </p:txBody>
+      </p:sp>
+      <p:pic>
+        <p:nvPicPr>
+          <p:cNvPr id="5" name="Image 1" descr="/Users/danwahlin/.copilot/session-state/56a7a0da-def8-48d4-b5e8-0ac3878cb8dd/files/slides-build/icons/FaGithub-1F2328.png">
+            <a:hlinkClick r:id="rId3" tooltip="https://github.com/github/copilot-app-for-beginners/tree/main/03-development-workflows"/>
+          </p:cNvPr>
+          <p:cNvPicPr>
+            <a:picLocks noChangeAspect="1"/>
+          </p:cNvPicPr>
+          <p:nvPr/>
+        </p:nvPicPr>
+        <p:blipFill>
+          <a:blip r:embed="rId2"/>
+          <a:stretch>
+            <a:fillRect/>
+          </a:stretch>
+        </p:blipFill>
+        <p:spPr>
+          <a:xfrm>
             <a:off x="8610600" y="165050"/>
             <a:ext cx="304800" cy="304800"/>
           </a:xfrm>
@@ -6518,7 +6402,7 @@
       </p:pic>
       <p:sp>
         <p:nvSpPr>
-          <p:cNvPr id="6" name="Text 3"/>
+          <p:cNvPr id="6" name="Text 2"/>
           <p:cNvSpPr/>
           <p:nvPr/>
         </p:nvSpPr>
@@ -6557,7 +6441,7 @@
       </p:sp>
       <p:sp>
         <p:nvSpPr>
-          <p:cNvPr id="7" name="Text 4"/>
+          <p:cNvPr id="7" name="Text 3"/>
           <p:cNvSpPr/>
           <p:nvPr/>
         </p:nvSpPr>
@@ -6602,7 +6486,7 @@
       </p:sp>
       <p:sp>
         <p:nvSpPr>
-          <p:cNvPr id="8" name="Text 5"/>
+          <p:cNvPr id="8" name="Text 4"/>
           <p:cNvSpPr/>
           <p:nvPr/>
         </p:nvSpPr>
@@ -6687,7 +6571,7 @@
       </p:sp>
       <p:sp>
         <p:nvSpPr>
-          <p:cNvPr id="9" name="Text 6"/>
+          <p:cNvPr id="9" name="Text 5"/>
           <p:cNvSpPr/>
           <p:nvPr/>
         </p:nvSpPr>
@@ -6723,7 +6607,7 @@
       </p:sp>
       <p:sp>
         <p:nvSpPr>
-          <p:cNvPr id="10" name="Shape 7"/>
+          <p:cNvPr id="10" name="Shape 6"/>
           <p:cNvSpPr/>
           <p:nvPr/>
         </p:nvSpPr>
@@ -6746,7 +6630,7 @@
       </p:sp>
       <p:sp>
         <p:nvSpPr>
-          <p:cNvPr id="11" name="Text 8"/>
+          <p:cNvPr id="11" name="Text 7"/>
           <p:cNvSpPr/>
           <p:nvPr/>
         </p:nvSpPr>
@@ -6778,7 +6662,7 @@
       </p:sp>
       <p:sp>
         <p:nvSpPr>
-          <p:cNvPr id="12" name="Text 9"/>
+          <p:cNvPr id="12" name="Text 8"/>
           <p:cNvSpPr/>
           <p:nvPr/>
         </p:nvSpPr>
@@ -6817,7 +6701,7 @@
       </p:sp>
       <p:sp>
         <p:nvSpPr>
-          <p:cNvPr id="13" name="Text 10"/>
+          <p:cNvPr id="13" name="Text 9"/>
           <p:cNvSpPr/>
           <p:nvPr/>
         </p:nvSpPr>
@@ -6859,7 +6743,7 @@
       </p:sp>
       <p:sp>
         <p:nvSpPr>
-          <p:cNvPr id="14" name="Text 11"/>
+          <p:cNvPr id="14" name="Text 10"/>
           <p:cNvSpPr/>
           <p:nvPr/>
         </p:nvSpPr>
@@ -6969,7 +6853,7 @@
       </p:sp>
       <p:sp>
         <p:nvSpPr>
-          <p:cNvPr id="15" name="Shape 12"/>
+          <p:cNvPr id="15" name="Shape 11"/>
           <p:cNvSpPr/>
           <p:nvPr/>
         </p:nvSpPr>
@@ -6992,7 +6876,7 @@
       </p:sp>
       <p:sp>
         <p:nvSpPr>
-          <p:cNvPr id="16" name="Text 13"/>
+          <p:cNvPr id="16" name="Text 12"/>
           <p:cNvSpPr/>
           <p:nvPr/>
         </p:nvSpPr>
@@ -7024,7 +6908,7 @@
       </p:sp>
       <p:sp>
         <p:nvSpPr>
-          <p:cNvPr id="17" name="Text 14"/>
+          <p:cNvPr id="17" name="Text 13"/>
           <p:cNvSpPr/>
           <p:nvPr/>
         </p:nvSpPr>
@@ -7063,7 +6947,7 @@
       </p:sp>
       <p:sp>
         <p:nvSpPr>
-          <p:cNvPr id="18" name="Text 15"/>
+          <p:cNvPr id="18" name="Text 14"/>
           <p:cNvSpPr/>
           <p:nvPr/>
         </p:nvSpPr>
@@ -7105,7 +6989,7 @@
       </p:sp>
       <p:sp>
         <p:nvSpPr>
-          <p:cNvPr id="19" name="Text 16"/>
+          <p:cNvPr id="19" name="Text 15"/>
           <p:cNvSpPr/>
           <p:nvPr/>
         </p:nvSpPr>
@@ -7181,7 +7065,7 @@
       </p:sp>
       <p:sp>
         <p:nvSpPr>
-          <p:cNvPr id="20" name="Shape 17"/>
+          <p:cNvPr id="20" name="Shape 16"/>
           <p:cNvSpPr/>
           <p:nvPr/>
         </p:nvSpPr>
@@ -7204,7 +7088,7 @@
       </p:sp>
       <p:sp>
         <p:nvSpPr>
-          <p:cNvPr id="21" name="Text 18"/>
+          <p:cNvPr id="21" name="Text 17"/>
           <p:cNvSpPr/>
           <p:nvPr/>
         </p:nvSpPr>
@@ -7236,7 +7120,7 @@
       </p:sp>
       <p:sp>
         <p:nvSpPr>
-          <p:cNvPr id="22" name="Text 19"/>
+          <p:cNvPr id="22" name="Text 18"/>
           <p:cNvSpPr/>
           <p:nvPr/>
         </p:nvSpPr>
@@ -7275,7 +7159,7 @@
       </p:sp>
       <p:sp>
         <p:nvSpPr>
-          <p:cNvPr id="23" name="Text 20"/>
+          <p:cNvPr id="23" name="Text 19"/>
           <p:cNvSpPr/>
           <p:nvPr/>
         </p:nvSpPr>
@@ -7317,7 +7201,7 @@
       </p:sp>
       <p:sp>
         <p:nvSpPr>
-          <p:cNvPr id="24" name="Text 21"/>
+          <p:cNvPr id="24" name="Text 20"/>
           <p:cNvSpPr/>
           <p:nvPr/>
         </p:nvSpPr>
@@ -7427,7 +7311,7 @@
       </p:sp>
       <p:sp>
         <p:nvSpPr>
-          <p:cNvPr id="25" name="Text 22"/>
+          <p:cNvPr id="25" name="Text 21"/>
           <p:cNvSpPr/>
           <p:nvPr/>
         </p:nvSpPr>
@@ -7459,7 +7343,7 @@
       </p:sp>
       <p:sp>
         <p:nvSpPr>
-          <p:cNvPr id="26" name="Text 23"/>
+          <p:cNvPr id="26" name="Text 22"/>
           <p:cNvSpPr/>
           <p:nvPr/>
         </p:nvSpPr>
@@ -7498,7 +7382,7 @@
       </p:sp>
       <p:sp>
         <p:nvSpPr>
-          <p:cNvPr id="27" name="Text 24"/>
+          <p:cNvPr id="27" name="Text 23"/>
           <p:cNvSpPr/>
           <p:nvPr/>
         </p:nvSpPr>
@@ -7540,7 +7424,7 @@
       </p:sp>
       <p:sp>
         <p:nvSpPr>
-          <p:cNvPr id="28" name="Text 25"/>
+          <p:cNvPr id="28" name="Text 24"/>
           <p:cNvSpPr/>
           <p:nvPr/>
         </p:nvSpPr>
@@ -7616,7 +7500,7 @@
       </p:sp>
       <p:sp>
         <p:nvSpPr>
-          <p:cNvPr id="29" name="Text 26"/>
+          <p:cNvPr id="29" name="Text 25"/>
           <p:cNvSpPr/>
           <p:nvPr/>
         </p:nvSpPr>
@@ -7652,14 +7536,14 @@
       </p:sp>
       <p:pic>
         <p:nvPicPr>
-          <p:cNvPr id="30" name="Image 1" descr="/Users/danwahlin/.copilot/session-state/56a7a0da-def8-48d4-b5e8-0ac3878cb8dd/files/slides-build/icons/GoAlert-9A6700.png">    </p:cNvPr>
+          <p:cNvPr id="30" name="Image 2" descr="/Users/danwahlin/.copilot/session-state/56a7a0da-def8-48d4-b5e8-0ac3878cb8dd/files/slides-build/icons/GoAlert-9A6700.png">    </p:cNvPr>
           <p:cNvPicPr>
             <a:picLocks noChangeAspect="1"/>
           </p:cNvPicPr>
           <p:nvPr/>
         </p:nvPicPr>
         <p:blipFill>
-          <a:blip r:embed="rId3"/>
+          <a:blip r:embed="rId4"/>
           <a:stretch>
             <a:fillRect/>
           </a:stretch>
@@ -7676,7 +7560,7 @@
       </p:pic>
       <p:sp>
         <p:nvSpPr>
-          <p:cNvPr id="31" name="Text 27"/>
+          <p:cNvPr id="31" name="Text 26"/>
           <p:cNvSpPr/>
           <p:nvPr/>
         </p:nvSpPr>
@@ -7748,112 +7632,9 @@
           <a:chExt cx="0" cy="0"/>
         </a:xfrm>
       </p:grpSpPr>
-      <p:sp>
-        <p:nvSpPr>
-          <p:cNvPr id="2" name="Text 0"/>
-          <p:cNvSpPr/>
-          <p:nvPr/>
-        </p:nvSpPr>
-        <p:spPr>
-          <a:xfrm>
-            <a:off x="0" y="0"/>
-            <a:ext cx="9144000" cy="76200"/>
-          </a:xfrm>
-          <a:prstGeom prst="rect">
-            <a:avLst/>
-          </a:prstGeom>
-          <a:solidFill>
-            <a:srgbClr val="8250DF"/>
-          </a:solidFill>
-          <a:ln/>
-        </p:spPr>
-        <p:txBody>
-          <a:bodyPr wrap="square" rtlCol="0" anchor="ctr"/>
-          <a:lstStyle/>
-          <a:p>
-            <a:pPr indent="0" marL="0">
-              <a:buNone/>
-            </a:pPr>
-            <a:endParaRPr lang="en-US" dirty="0"/>
-          </a:p>
-        </p:txBody>
-      </p:sp>
-      <p:sp>
-        <p:nvSpPr>
-          <p:cNvPr id="3" name="Text 1"/>
-          <p:cNvSpPr/>
-          <p:nvPr/>
-        </p:nvSpPr>
-        <p:spPr>
-          <a:xfrm>
-            <a:off x="7340501" y="177701"/>
-            <a:ext cx="1168301" cy="279350"/>
-          </a:xfrm>
-          <a:prstGeom prst="roundRect">
-            <a:avLst>
-              <a:gd name="adj" fmla="val 22731"/>
-            </a:avLst>
-          </a:prstGeom>
-          <a:solidFill>
-            <a:srgbClr val="1A7F37"/>
-          </a:solidFill>
-          <a:ln/>
-        </p:spPr>
-        <p:txBody>
-          <a:bodyPr wrap="square" rtlCol="0" anchor="ctr"/>
-          <a:lstStyle/>
-          <a:p>
-            <a:pPr indent="0" marL="0">
-              <a:buNone/>
-            </a:pPr>
-            <a:endParaRPr lang="en-US" dirty="0"/>
-          </a:p>
-        </p:txBody>
-      </p:sp>
-      <p:sp>
-        <p:nvSpPr>
-          <p:cNvPr id="4" name="Text 2"/>
-          <p:cNvSpPr/>
-          <p:nvPr/>
-        </p:nvSpPr>
-        <p:spPr>
-          <a:xfrm>
-            <a:off x="7461041" y="231577"/>
-            <a:ext cx="927071" cy="171450"/>
-          </a:xfrm>
-          <a:prstGeom prst="rect">
-            <a:avLst/>
-          </a:prstGeom>
-          <a:noFill/>
-          <a:ln/>
-        </p:spPr>
-        <p:txBody>
-          <a:bodyPr wrap="square" lIns="0" tIns="0" rIns="0" bIns="0" rtlCol="0" anchor="t"/>
-          <a:lstStyle/>
-          <a:p>
-            <a:pPr algn="ctr" indent="0" marL="0">
-              <a:buNone/>
-            </a:pPr>
-            <a:r>
-              <a:rPr lang="en-US" sz="1150" b="1" dirty="0">
-                <a:solidFill>
-                  <a:srgbClr val="FFFFFF"/>
-                </a:solidFill>
-                <a:latin typeface="Arial" pitchFamily="34" charset="0"/>
-                <a:ea typeface="Arial" pitchFamily="34" charset="-122"/>
-                <a:cs typeface="Arial" pitchFamily="34" charset="-120"/>
-              </a:rPr>
-              <a:t>CHAPTER 03</a:t>
-            </a:r>
-            <a:endParaRPr lang="en-US" sz="1150" dirty="0"/>
-          </a:p>
-        </p:txBody>
-      </p:sp>
       <p:pic>
         <p:nvPicPr>
-          <p:cNvPr id="5" name="Image 0" descr="/Users/danwahlin/.copilot/session-state/56a7a0da-def8-48d4-b5e8-0ac3878cb8dd/files/slides-build/icons/FaGithub-1F2328.png">
-            <a:hlinkClick r:id="rId2" tooltip="https://github.com/github/copilot-app-for-beginners/tree/main/03-development-workflows"/>
-          </p:cNvPr>
+          <p:cNvPr id="2" name="Image 0" descr="/Users/danwahlin/.copilot/session-state/56a7a0da-def8-48d4-b5e8-0ac3878cb8dd/files/slides-build/img/grad-corner.png">    </p:cNvPr>
           <p:cNvPicPr>
             <a:picLocks noChangeAspect="1"/>
           </p:cNvPicPr>
@@ -7867,6 +7648,103 @@
         </p:blipFill>
         <p:spPr>
           <a:xfrm>
+            <a:off x="6349901" y="0"/>
+            <a:ext cx="2793950" cy="1308050"/>
+          </a:xfrm>
+          <a:prstGeom prst="rect">
+            <a:avLst/>
+          </a:prstGeom>
+        </p:spPr>
+      </p:pic>
+      <p:sp>
+        <p:nvSpPr>
+          <p:cNvPr id="3" name="Text 0"/>
+          <p:cNvSpPr/>
+          <p:nvPr/>
+        </p:nvSpPr>
+        <p:spPr>
+          <a:xfrm>
+            <a:off x="7340501" y="177701"/>
+            <a:ext cx="1168301" cy="279350"/>
+          </a:xfrm>
+          <a:prstGeom prst="roundRect">
+            <a:avLst>
+              <a:gd name="adj" fmla="val 22731"/>
+            </a:avLst>
+          </a:prstGeom>
+          <a:solidFill>
+            <a:srgbClr val="1A7F37"/>
+          </a:solidFill>
+          <a:ln/>
+        </p:spPr>
+        <p:txBody>
+          <a:bodyPr wrap="square" rtlCol="0" anchor="ctr"/>
+          <a:lstStyle/>
+          <a:p>
+            <a:pPr indent="0" marL="0">
+              <a:buNone/>
+            </a:pPr>
+            <a:endParaRPr lang="en-US" dirty="0"/>
+          </a:p>
+        </p:txBody>
+      </p:sp>
+      <p:sp>
+        <p:nvSpPr>
+          <p:cNvPr id="4" name="Text 1"/>
+          <p:cNvSpPr/>
+          <p:nvPr/>
+        </p:nvSpPr>
+        <p:spPr>
+          <a:xfrm>
+            <a:off x="7461041" y="231577"/>
+            <a:ext cx="927071" cy="171450"/>
+          </a:xfrm>
+          <a:prstGeom prst="rect">
+            <a:avLst/>
+          </a:prstGeom>
+          <a:noFill/>
+          <a:ln/>
+        </p:spPr>
+        <p:txBody>
+          <a:bodyPr wrap="square" lIns="0" tIns="0" rIns="0" bIns="0" rtlCol="0" anchor="t"/>
+          <a:lstStyle/>
+          <a:p>
+            <a:pPr algn="ctr" indent="0" marL="0">
+              <a:buNone/>
+            </a:pPr>
+            <a:r>
+              <a:rPr lang="en-US" sz="1150" b="1" dirty="0">
+                <a:solidFill>
+                  <a:srgbClr val="FFFFFF"/>
+                </a:solidFill>
+                <a:latin typeface="Arial" pitchFamily="34" charset="0"/>
+                <a:ea typeface="Arial" pitchFamily="34" charset="-122"/>
+                <a:cs typeface="Arial" pitchFamily="34" charset="-120"/>
+              </a:rPr>
+              <a:t>CHAPTER 03</a:t>
+            </a:r>
+            <a:endParaRPr lang="en-US" sz="1150" dirty="0"/>
+          </a:p>
+        </p:txBody>
+      </p:sp>
+      <p:pic>
+        <p:nvPicPr>
+          <p:cNvPr id="5" name="Image 1" descr="/Users/danwahlin/.copilot/session-state/56a7a0da-def8-48d4-b5e8-0ac3878cb8dd/files/slides-build/icons/FaGithub-1F2328.png">
+            <a:hlinkClick r:id="rId3" tooltip="https://github.com/github/copilot-app-for-beginners/tree/main/03-development-workflows"/>
+          </p:cNvPr>
+          <p:cNvPicPr>
+            <a:picLocks noChangeAspect="1"/>
+          </p:cNvPicPr>
+          <p:nvPr/>
+        </p:nvPicPr>
+        <p:blipFill>
+          <a:blip r:embed="rId2"/>
+          <a:stretch>
+            <a:fillRect/>
+          </a:stretch>
+        </p:blipFill>
+        <p:spPr>
+          <a:xfrm>
             <a:off x="8610600" y="165050"/>
             <a:ext cx="304800" cy="304800"/>
           </a:xfrm>
@@ -7877,7 +7755,7 @@
       </p:pic>
       <p:sp>
         <p:nvSpPr>
-          <p:cNvPr id="6" name="Text 3"/>
+          <p:cNvPr id="6" name="Text 2"/>
           <p:cNvSpPr/>
           <p:nvPr/>
         </p:nvSpPr>
@@ -7916,7 +7794,7 @@
       </p:sp>
       <p:sp>
         <p:nvSpPr>
-          <p:cNvPr id="7" name="Text 4"/>
+          <p:cNvPr id="7" name="Text 3"/>
           <p:cNvSpPr/>
           <p:nvPr/>
         </p:nvSpPr>
@@ -7961,7 +7839,7 @@
       </p:sp>
       <p:sp>
         <p:nvSpPr>
-          <p:cNvPr id="8" name="Text 5"/>
+          <p:cNvPr id="8" name="Text 4"/>
           <p:cNvSpPr/>
           <p:nvPr/>
         </p:nvSpPr>
@@ -8000,7 +7878,7 @@
       </p:sp>
       <p:sp>
         <p:nvSpPr>
-          <p:cNvPr id="9" name="Text 6"/>
+          <p:cNvPr id="9" name="Text 5"/>
           <p:cNvSpPr/>
           <p:nvPr/>
         </p:nvSpPr>
@@ -8043,155 +7921,7 @@
       </p:sp>
       <p:pic>
         <p:nvPicPr>
-          <p:cNvPr id="10" name="Image 1" descr="/Users/danwahlin/.copilot/session-state/56a7a0da-def8-48d4-b5e8-0ac3878cb8dd/files/slides-build/img/03-review-comment-crop.png">    </p:cNvPr>
-          <p:cNvPicPr>
-            <a:picLocks noChangeAspect="1"/>
-          </p:cNvPicPr>
-          <p:nvPr/>
-        </p:nvPicPr>
-        <p:blipFill>
-          <a:blip r:embed="rId3"/>
-          <a:stretch>
-            <a:fillRect/>
-          </a:stretch>
-        </p:blipFill>
-        <p:spPr>
-          <a:xfrm>
-            <a:off x="558701" y="2231380"/>
-            <a:ext cx="3759101" cy="661541"/>
-          </a:xfrm>
-          <a:prstGeom prst="rect">
-            <a:avLst/>
-          </a:prstGeom>
-        </p:spPr>
-      </p:pic>
-      <p:sp>
-        <p:nvSpPr>
-          <p:cNvPr id="11" name="Text 7"/>
-          <p:cNvSpPr/>
-          <p:nvPr/>
-        </p:nvSpPr>
-        <p:spPr>
-          <a:xfrm>
-            <a:off x="507950" y="3387626"/>
-            <a:ext cx="3860750" cy="939552"/>
-          </a:xfrm>
-          <a:prstGeom prst="roundRect">
-            <a:avLst>
-              <a:gd name="adj" fmla="val 8110"/>
-            </a:avLst>
-          </a:prstGeom>
-          <a:solidFill>
-            <a:srgbClr val="FFFFFF"/>
-          </a:solidFill>
-          <a:ln/>
-        </p:spPr>
-        <p:txBody>
-          <a:bodyPr wrap="square" rtlCol="0" anchor="ctr"/>
-          <a:lstStyle/>
-          <a:p>
-            <a:pPr indent="0" marL="0">
-              <a:buNone/>
-            </a:pPr>
-            <a:endParaRPr lang="en-US" dirty="0"/>
-          </a:p>
-        </p:txBody>
-      </p:sp>
-      <p:sp>
-        <p:nvSpPr>
-          <p:cNvPr id="12" name="Shape 8"/>
-          <p:cNvSpPr/>
-          <p:nvPr/>
-        </p:nvSpPr>
-        <p:spPr>
-          <a:xfrm>
-            <a:off x="507950" y="3392388"/>
-            <a:ext cx="3860750" cy="0"/>
-          </a:xfrm>
-          <a:prstGeom prst="line">
-            <a:avLst/>
-          </a:prstGeom>
-          <a:noFill/>
-          <a:ln w="9525">
-            <a:solidFill>
-              <a:srgbClr val="9CD7FF"/>
-            </a:solidFill>
-            <a:prstDash val="solid"/>
-          </a:ln>
-        </p:spPr>
-      </p:sp>
-      <p:sp>
-        <p:nvSpPr>
-          <p:cNvPr id="13" name="Shape 9"/>
-          <p:cNvSpPr/>
-          <p:nvPr/>
-        </p:nvSpPr>
-        <p:spPr>
-          <a:xfrm>
-            <a:off x="4363938" y="3387626"/>
-            <a:ext cx="0" cy="939552"/>
-          </a:xfrm>
-          <a:prstGeom prst="line">
-            <a:avLst/>
-          </a:prstGeom>
-          <a:noFill/>
-          <a:ln w="9525">
-            <a:solidFill>
-              <a:srgbClr val="9CD7FF"/>
-            </a:solidFill>
-            <a:prstDash val="solid"/>
-          </a:ln>
-        </p:spPr>
-      </p:sp>
-      <p:sp>
-        <p:nvSpPr>
-          <p:cNvPr id="14" name="Shape 10"/>
-          <p:cNvSpPr/>
-          <p:nvPr/>
-        </p:nvSpPr>
-        <p:spPr>
-          <a:xfrm>
-            <a:off x="507950" y="4322415"/>
-            <a:ext cx="3860750" cy="0"/>
-          </a:xfrm>
-          <a:prstGeom prst="line">
-            <a:avLst/>
-          </a:prstGeom>
-          <a:noFill/>
-          <a:ln w="9525">
-            <a:solidFill>
-              <a:srgbClr val="9CD7FF"/>
-            </a:solidFill>
-            <a:prstDash val="solid"/>
-          </a:ln>
-        </p:spPr>
-      </p:sp>
-      <p:sp>
-        <p:nvSpPr>
-          <p:cNvPr id="15" name="Shape 11"/>
-          <p:cNvSpPr/>
-          <p:nvPr/>
-        </p:nvSpPr>
-        <p:spPr>
-          <a:xfrm>
-            <a:off x="531763" y="3387626"/>
-            <a:ext cx="0" cy="939552"/>
-          </a:xfrm>
-          <a:prstGeom prst="line">
-            <a:avLst/>
-          </a:prstGeom>
-          <a:noFill/>
-          <a:ln w="47625">
-            <a:solidFill>
-              <a:srgbClr val="0969DA"/>
-            </a:solidFill>
-            <a:prstDash val="solid"/>
-          </a:ln>
-        </p:spPr>
-      </p:sp>
-      <p:pic>
-        <p:nvPicPr>
-          <p:cNvPr id="16" name="Image 2" descr="/Users/danwahlin/.copilot/session-state/56a7a0da-def8-48d4-b5e8-0ac3878cb8dd/files/slides-build/icons/GoCopilot-0969DA.png">    </p:cNvPr>
+          <p:cNvPr id="10" name="Image 2" descr="/Users/danwahlin/.copilot/session-state/56a7a0da-def8-48d4-b5e8-0ac3878cb8dd/files/slides-build/img/03-review-comment-crop.png">    </p:cNvPr>
           <p:cNvPicPr>
             <a:picLocks noChangeAspect="1"/>
           </p:cNvPicPr>
@@ -8205,6 +7935,154 @@
         </p:blipFill>
         <p:spPr>
           <a:xfrm>
+            <a:off x="558701" y="2231380"/>
+            <a:ext cx="3759101" cy="661541"/>
+          </a:xfrm>
+          <a:prstGeom prst="rect">
+            <a:avLst/>
+          </a:prstGeom>
+        </p:spPr>
+      </p:pic>
+      <p:sp>
+        <p:nvSpPr>
+          <p:cNvPr id="11" name="Text 6"/>
+          <p:cNvSpPr/>
+          <p:nvPr/>
+        </p:nvSpPr>
+        <p:spPr>
+          <a:xfrm>
+            <a:off x="507950" y="3387626"/>
+            <a:ext cx="3860750" cy="939552"/>
+          </a:xfrm>
+          <a:prstGeom prst="roundRect">
+            <a:avLst>
+              <a:gd name="adj" fmla="val 8110"/>
+            </a:avLst>
+          </a:prstGeom>
+          <a:solidFill>
+            <a:srgbClr val="FFFFFF"/>
+          </a:solidFill>
+          <a:ln/>
+        </p:spPr>
+        <p:txBody>
+          <a:bodyPr wrap="square" rtlCol="0" anchor="ctr"/>
+          <a:lstStyle/>
+          <a:p>
+            <a:pPr indent="0" marL="0">
+              <a:buNone/>
+            </a:pPr>
+            <a:endParaRPr lang="en-US" dirty="0"/>
+          </a:p>
+        </p:txBody>
+      </p:sp>
+      <p:sp>
+        <p:nvSpPr>
+          <p:cNvPr id="12" name="Shape 7"/>
+          <p:cNvSpPr/>
+          <p:nvPr/>
+        </p:nvSpPr>
+        <p:spPr>
+          <a:xfrm>
+            <a:off x="507950" y="3392388"/>
+            <a:ext cx="3860750" cy="0"/>
+          </a:xfrm>
+          <a:prstGeom prst="line">
+            <a:avLst/>
+          </a:prstGeom>
+          <a:noFill/>
+          <a:ln w="9525">
+            <a:solidFill>
+              <a:srgbClr val="9CD7FF"/>
+            </a:solidFill>
+            <a:prstDash val="solid"/>
+          </a:ln>
+        </p:spPr>
+      </p:sp>
+      <p:sp>
+        <p:nvSpPr>
+          <p:cNvPr id="13" name="Shape 8"/>
+          <p:cNvSpPr/>
+          <p:nvPr/>
+        </p:nvSpPr>
+        <p:spPr>
+          <a:xfrm>
+            <a:off x="4363938" y="3387626"/>
+            <a:ext cx="0" cy="939552"/>
+          </a:xfrm>
+          <a:prstGeom prst="line">
+            <a:avLst/>
+          </a:prstGeom>
+          <a:noFill/>
+          <a:ln w="9525">
+            <a:solidFill>
+              <a:srgbClr val="9CD7FF"/>
+            </a:solidFill>
+            <a:prstDash val="solid"/>
+          </a:ln>
+        </p:spPr>
+      </p:sp>
+      <p:sp>
+        <p:nvSpPr>
+          <p:cNvPr id="14" name="Shape 9"/>
+          <p:cNvSpPr/>
+          <p:nvPr/>
+        </p:nvSpPr>
+        <p:spPr>
+          <a:xfrm>
+            <a:off x="507950" y="4322415"/>
+            <a:ext cx="3860750" cy="0"/>
+          </a:xfrm>
+          <a:prstGeom prst="line">
+            <a:avLst/>
+          </a:prstGeom>
+          <a:noFill/>
+          <a:ln w="9525">
+            <a:solidFill>
+              <a:srgbClr val="9CD7FF"/>
+            </a:solidFill>
+            <a:prstDash val="solid"/>
+          </a:ln>
+        </p:spPr>
+      </p:sp>
+      <p:sp>
+        <p:nvSpPr>
+          <p:cNvPr id="15" name="Shape 10"/>
+          <p:cNvSpPr/>
+          <p:nvPr/>
+        </p:nvSpPr>
+        <p:spPr>
+          <a:xfrm>
+            <a:off x="531763" y="3387626"/>
+            <a:ext cx="0" cy="939552"/>
+          </a:xfrm>
+          <a:prstGeom prst="line">
+            <a:avLst/>
+          </a:prstGeom>
+          <a:noFill/>
+          <a:ln w="47625">
+            <a:solidFill>
+              <a:srgbClr val="0969DA"/>
+            </a:solidFill>
+            <a:prstDash val="solid"/>
+          </a:ln>
+        </p:spPr>
+      </p:sp>
+      <p:pic>
+        <p:nvPicPr>
+          <p:cNvPr id="16" name="Image 3" descr="/Users/danwahlin/.copilot/session-state/56a7a0da-def8-48d4-b5e8-0ac3878cb8dd/files/slides-build/icons/GoCopilot-0969DA.png">    </p:cNvPr>
+          <p:cNvPicPr>
+            <a:picLocks noChangeAspect="1"/>
+          </p:cNvPicPr>
+          <p:nvPr/>
+        </p:nvPicPr>
+        <p:blipFill>
+          <a:blip r:embed="rId5"/>
+          <a:stretch>
+            <a:fillRect/>
+          </a:stretch>
+        </p:blipFill>
+        <p:spPr>
+          <a:xfrm>
             <a:off x="733276" y="3527227"/>
             <a:ext cx="165050" cy="165050"/>
           </a:xfrm>
@@ -8215,7 +8093,7 @@
       </p:pic>
       <p:sp>
         <p:nvSpPr>
-          <p:cNvPr id="17" name="Text 12"/>
+          <p:cNvPr id="17" name="Text 11"/>
           <p:cNvSpPr/>
           <p:nvPr/>
         </p:nvSpPr>
@@ -8254,7 +8132,7 @@
       </p:sp>
       <p:sp>
         <p:nvSpPr>
-          <p:cNvPr id="18" name="Text 13"/>
+          <p:cNvPr id="18" name="Text 12"/>
           <p:cNvSpPr/>
           <p:nvPr/>
         </p:nvSpPr>
@@ -8296,7 +8174,7 @@
       </p:sp>
       <p:sp>
         <p:nvSpPr>
-          <p:cNvPr id="19" name="Text 14"/>
+          <p:cNvPr id="19" name="Text 13"/>
           <p:cNvSpPr/>
           <p:nvPr/>
         </p:nvSpPr>
@@ -8335,7 +8213,7 @@
       </p:sp>
       <p:sp>
         <p:nvSpPr>
-          <p:cNvPr id="20" name="Text 15"/>
+          <p:cNvPr id="20" name="Text 14"/>
           <p:cNvSpPr/>
           <p:nvPr/>
         </p:nvSpPr>
@@ -8378,155 +8256,7 @@
       </p:sp>
       <p:pic>
         <p:nvPicPr>
-          <p:cNvPr id="21" name="Image 3" descr="/Users/danwahlin/.copilot/session-state/56a7a0da-def8-48d4-b5e8-0ac3878cb8dd/files/slides-build/img/03-failing-check-crop.png">    </p:cNvPr>
-          <p:cNvPicPr>
-            <a:picLocks noChangeAspect="1"/>
-          </p:cNvPicPr>
-          <p:nvPr/>
-        </p:nvPicPr>
-        <p:blipFill>
-          <a:blip r:embed="rId5"/>
-          <a:stretch>
-            <a:fillRect/>
-          </a:stretch>
-        </p:blipFill>
-        <p:spPr>
-          <a:xfrm>
-            <a:off x="4825752" y="2121545"/>
-            <a:ext cx="3759101" cy="881360"/>
-          </a:xfrm>
-          <a:prstGeom prst="rect">
-            <a:avLst/>
-          </a:prstGeom>
-        </p:spPr>
-      </p:pic>
-      <p:sp>
-        <p:nvSpPr>
-          <p:cNvPr id="22" name="Text 16"/>
-          <p:cNvSpPr/>
-          <p:nvPr/>
-        </p:nvSpPr>
-        <p:spPr>
-          <a:xfrm>
-            <a:off x="4775002" y="3387626"/>
-            <a:ext cx="3860750" cy="939552"/>
-          </a:xfrm>
-          <a:prstGeom prst="roundRect">
-            <a:avLst>
-              <a:gd name="adj" fmla="val 8110"/>
-            </a:avLst>
-          </a:prstGeom>
-          <a:solidFill>
-            <a:srgbClr val="FFFFFF"/>
-          </a:solidFill>
-          <a:ln/>
-        </p:spPr>
-        <p:txBody>
-          <a:bodyPr wrap="square" rtlCol="0" anchor="ctr"/>
-          <a:lstStyle/>
-          <a:p>
-            <a:pPr indent="0" marL="0">
-              <a:buNone/>
-            </a:pPr>
-            <a:endParaRPr lang="en-US" dirty="0"/>
-          </a:p>
-        </p:txBody>
-      </p:sp>
-      <p:sp>
-        <p:nvSpPr>
-          <p:cNvPr id="23" name="Shape 17"/>
-          <p:cNvSpPr/>
-          <p:nvPr/>
-        </p:nvSpPr>
-        <p:spPr>
-          <a:xfrm>
-            <a:off x="4775002" y="3392388"/>
-            <a:ext cx="3860750" cy="0"/>
-          </a:xfrm>
-          <a:prstGeom prst="line">
-            <a:avLst/>
-          </a:prstGeom>
-          <a:noFill/>
-          <a:ln w="9525">
-            <a:solidFill>
-              <a:srgbClr val="FFCECB"/>
-            </a:solidFill>
-            <a:prstDash val="solid"/>
-          </a:ln>
-        </p:spPr>
-      </p:sp>
-      <p:sp>
-        <p:nvSpPr>
-          <p:cNvPr id="24" name="Shape 18"/>
-          <p:cNvSpPr/>
-          <p:nvPr/>
-        </p:nvSpPr>
-        <p:spPr>
-          <a:xfrm>
-            <a:off x="8630989" y="3387626"/>
-            <a:ext cx="0" cy="939552"/>
-          </a:xfrm>
-          <a:prstGeom prst="line">
-            <a:avLst/>
-          </a:prstGeom>
-          <a:noFill/>
-          <a:ln w="9525">
-            <a:solidFill>
-              <a:srgbClr val="FFCECB"/>
-            </a:solidFill>
-            <a:prstDash val="solid"/>
-          </a:ln>
-        </p:spPr>
-      </p:sp>
-      <p:sp>
-        <p:nvSpPr>
-          <p:cNvPr id="25" name="Shape 19"/>
-          <p:cNvSpPr/>
-          <p:nvPr/>
-        </p:nvSpPr>
-        <p:spPr>
-          <a:xfrm>
-            <a:off x="4775002" y="4322415"/>
-            <a:ext cx="3860750" cy="0"/>
-          </a:xfrm>
-          <a:prstGeom prst="line">
-            <a:avLst/>
-          </a:prstGeom>
-          <a:noFill/>
-          <a:ln w="9525">
-            <a:solidFill>
-              <a:srgbClr val="FFCECB"/>
-            </a:solidFill>
-            <a:prstDash val="solid"/>
-          </a:ln>
-        </p:spPr>
-      </p:sp>
-      <p:sp>
-        <p:nvSpPr>
-          <p:cNvPr id="26" name="Shape 20"/>
-          <p:cNvSpPr/>
-          <p:nvPr/>
-        </p:nvSpPr>
-        <p:spPr>
-          <a:xfrm>
-            <a:off x="4798814" y="3387626"/>
-            <a:ext cx="0" cy="939552"/>
-          </a:xfrm>
-          <a:prstGeom prst="line">
-            <a:avLst/>
-          </a:prstGeom>
-          <a:noFill/>
-          <a:ln w="47625">
-            <a:solidFill>
-              <a:srgbClr val="CF222E"/>
-            </a:solidFill>
-            <a:prstDash val="solid"/>
-          </a:ln>
-        </p:spPr>
-      </p:sp>
-      <p:pic>
-        <p:nvPicPr>
-          <p:cNvPr id="27" name="Image 4" descr="/Users/danwahlin/.copilot/session-state/56a7a0da-def8-48d4-b5e8-0ac3878cb8dd/files/slides-build/icons/GoCopilot-CF222E.png">    </p:cNvPr>
+          <p:cNvPr id="21" name="Image 4" descr="/Users/danwahlin/.copilot/session-state/56a7a0da-def8-48d4-b5e8-0ac3878cb8dd/files/slides-build/img/03-failing-check-crop.png">    </p:cNvPr>
           <p:cNvPicPr>
             <a:picLocks noChangeAspect="1"/>
           </p:cNvPicPr>
@@ -8540,6 +8270,154 @@
         </p:blipFill>
         <p:spPr>
           <a:xfrm>
+            <a:off x="4825752" y="2121545"/>
+            <a:ext cx="3759101" cy="881360"/>
+          </a:xfrm>
+          <a:prstGeom prst="rect">
+            <a:avLst/>
+          </a:prstGeom>
+        </p:spPr>
+      </p:pic>
+      <p:sp>
+        <p:nvSpPr>
+          <p:cNvPr id="22" name="Text 15"/>
+          <p:cNvSpPr/>
+          <p:nvPr/>
+        </p:nvSpPr>
+        <p:spPr>
+          <a:xfrm>
+            <a:off x="4775002" y="3387626"/>
+            <a:ext cx="3860750" cy="939552"/>
+          </a:xfrm>
+          <a:prstGeom prst="roundRect">
+            <a:avLst>
+              <a:gd name="adj" fmla="val 8110"/>
+            </a:avLst>
+          </a:prstGeom>
+          <a:solidFill>
+            <a:srgbClr val="FFFFFF"/>
+          </a:solidFill>
+          <a:ln/>
+        </p:spPr>
+        <p:txBody>
+          <a:bodyPr wrap="square" rtlCol="0" anchor="ctr"/>
+          <a:lstStyle/>
+          <a:p>
+            <a:pPr indent="0" marL="0">
+              <a:buNone/>
+            </a:pPr>
+            <a:endParaRPr lang="en-US" dirty="0"/>
+          </a:p>
+        </p:txBody>
+      </p:sp>
+      <p:sp>
+        <p:nvSpPr>
+          <p:cNvPr id="23" name="Shape 16"/>
+          <p:cNvSpPr/>
+          <p:nvPr/>
+        </p:nvSpPr>
+        <p:spPr>
+          <a:xfrm>
+            <a:off x="4775002" y="3392388"/>
+            <a:ext cx="3860750" cy="0"/>
+          </a:xfrm>
+          <a:prstGeom prst="line">
+            <a:avLst/>
+          </a:prstGeom>
+          <a:noFill/>
+          <a:ln w="9525">
+            <a:solidFill>
+              <a:srgbClr val="FFCECB"/>
+            </a:solidFill>
+            <a:prstDash val="solid"/>
+          </a:ln>
+        </p:spPr>
+      </p:sp>
+      <p:sp>
+        <p:nvSpPr>
+          <p:cNvPr id="24" name="Shape 17"/>
+          <p:cNvSpPr/>
+          <p:nvPr/>
+        </p:nvSpPr>
+        <p:spPr>
+          <a:xfrm>
+            <a:off x="8630989" y="3387626"/>
+            <a:ext cx="0" cy="939552"/>
+          </a:xfrm>
+          <a:prstGeom prst="line">
+            <a:avLst/>
+          </a:prstGeom>
+          <a:noFill/>
+          <a:ln w="9525">
+            <a:solidFill>
+              <a:srgbClr val="FFCECB"/>
+            </a:solidFill>
+            <a:prstDash val="solid"/>
+          </a:ln>
+        </p:spPr>
+      </p:sp>
+      <p:sp>
+        <p:nvSpPr>
+          <p:cNvPr id="25" name="Shape 18"/>
+          <p:cNvSpPr/>
+          <p:nvPr/>
+        </p:nvSpPr>
+        <p:spPr>
+          <a:xfrm>
+            <a:off x="4775002" y="4322415"/>
+            <a:ext cx="3860750" cy="0"/>
+          </a:xfrm>
+          <a:prstGeom prst="line">
+            <a:avLst/>
+          </a:prstGeom>
+          <a:noFill/>
+          <a:ln w="9525">
+            <a:solidFill>
+              <a:srgbClr val="FFCECB"/>
+            </a:solidFill>
+            <a:prstDash val="solid"/>
+          </a:ln>
+        </p:spPr>
+      </p:sp>
+      <p:sp>
+        <p:nvSpPr>
+          <p:cNvPr id="26" name="Shape 19"/>
+          <p:cNvSpPr/>
+          <p:nvPr/>
+        </p:nvSpPr>
+        <p:spPr>
+          <a:xfrm>
+            <a:off x="4798814" y="3387626"/>
+            <a:ext cx="0" cy="939552"/>
+          </a:xfrm>
+          <a:prstGeom prst="line">
+            <a:avLst/>
+          </a:prstGeom>
+          <a:noFill/>
+          <a:ln w="47625">
+            <a:solidFill>
+              <a:srgbClr val="CF222E"/>
+            </a:solidFill>
+            <a:prstDash val="solid"/>
+          </a:ln>
+        </p:spPr>
+      </p:sp>
+      <p:pic>
+        <p:nvPicPr>
+          <p:cNvPr id="27" name="Image 5" descr="/Users/danwahlin/.copilot/session-state/56a7a0da-def8-48d4-b5e8-0ac3878cb8dd/files/slides-build/icons/GoCopilot-CF222E.png">    </p:cNvPr>
+          <p:cNvPicPr>
+            <a:picLocks noChangeAspect="1"/>
+          </p:cNvPicPr>
+          <p:nvPr/>
+        </p:nvPicPr>
+        <p:blipFill>
+          <a:blip r:embed="rId7"/>
+          <a:stretch>
+            <a:fillRect/>
+          </a:stretch>
+        </p:blipFill>
+        <p:spPr>
+          <a:xfrm>
             <a:off x="5000327" y="3527227"/>
             <a:ext cx="165050" cy="165050"/>
           </a:xfrm>
@@ -8550,7 +8428,7 @@
       </p:pic>
       <p:sp>
         <p:nvSpPr>
-          <p:cNvPr id="28" name="Text 21"/>
+          <p:cNvPr id="28" name="Text 20"/>
           <p:cNvSpPr/>
           <p:nvPr/>
         </p:nvSpPr>
@@ -8589,7 +8467,7 @@
       </p:sp>
       <p:sp>
         <p:nvSpPr>
-          <p:cNvPr id="29" name="Text 22"/>
+          <p:cNvPr id="29" name="Text 21"/>
           <p:cNvSpPr/>
           <p:nvPr/>
         </p:nvSpPr>
@@ -8661,112 +8539,9 @@
           <a:chExt cx="0" cy="0"/>
         </a:xfrm>
       </p:grpSpPr>
-      <p:sp>
-        <p:nvSpPr>
-          <p:cNvPr id="2" name="Text 0"/>
-          <p:cNvSpPr/>
-          <p:nvPr/>
-        </p:nvSpPr>
-        <p:spPr>
-          <a:xfrm>
-            <a:off x="0" y="0"/>
-            <a:ext cx="9144000" cy="76200"/>
-          </a:xfrm>
-          <a:prstGeom prst="rect">
-            <a:avLst/>
-          </a:prstGeom>
-          <a:solidFill>
-            <a:srgbClr val="8250DF"/>
-          </a:solidFill>
-          <a:ln/>
-        </p:spPr>
-        <p:txBody>
-          <a:bodyPr wrap="square" rtlCol="0" anchor="ctr"/>
-          <a:lstStyle/>
-          <a:p>
-            <a:pPr indent="0" marL="0">
-              <a:buNone/>
-            </a:pPr>
-            <a:endParaRPr lang="en-US" dirty="0"/>
-          </a:p>
-        </p:txBody>
-      </p:sp>
-      <p:sp>
-        <p:nvSpPr>
-          <p:cNvPr id="3" name="Text 1"/>
-          <p:cNvSpPr/>
-          <p:nvPr/>
-        </p:nvSpPr>
-        <p:spPr>
-          <a:xfrm>
-            <a:off x="7340501" y="177701"/>
-            <a:ext cx="1168301" cy="279350"/>
-          </a:xfrm>
-          <a:prstGeom prst="roundRect">
-            <a:avLst>
-              <a:gd name="adj" fmla="val 22731"/>
-            </a:avLst>
-          </a:prstGeom>
-          <a:solidFill>
-            <a:srgbClr val="1A7F37"/>
-          </a:solidFill>
-          <a:ln/>
-        </p:spPr>
-        <p:txBody>
-          <a:bodyPr wrap="square" rtlCol="0" anchor="ctr"/>
-          <a:lstStyle/>
-          <a:p>
-            <a:pPr indent="0" marL="0">
-              <a:buNone/>
-            </a:pPr>
-            <a:endParaRPr lang="en-US" dirty="0"/>
-          </a:p>
-        </p:txBody>
-      </p:sp>
-      <p:sp>
-        <p:nvSpPr>
-          <p:cNvPr id="4" name="Text 2"/>
-          <p:cNvSpPr/>
-          <p:nvPr/>
-        </p:nvSpPr>
-        <p:spPr>
-          <a:xfrm>
-            <a:off x="7461041" y="231577"/>
-            <a:ext cx="927071" cy="171450"/>
-          </a:xfrm>
-          <a:prstGeom prst="rect">
-            <a:avLst/>
-          </a:prstGeom>
-          <a:noFill/>
-          <a:ln/>
-        </p:spPr>
-        <p:txBody>
-          <a:bodyPr wrap="square" lIns="0" tIns="0" rIns="0" bIns="0" rtlCol="0" anchor="t"/>
-          <a:lstStyle/>
-          <a:p>
-            <a:pPr algn="ctr" indent="0" marL="0">
-              <a:buNone/>
-            </a:pPr>
-            <a:r>
-              <a:rPr lang="en-US" sz="1150" b="1" dirty="0">
-                <a:solidFill>
-                  <a:srgbClr val="FFFFFF"/>
-                </a:solidFill>
-                <a:latin typeface="Arial" pitchFamily="34" charset="0"/>
-                <a:ea typeface="Arial" pitchFamily="34" charset="-122"/>
-                <a:cs typeface="Arial" pitchFamily="34" charset="-120"/>
-              </a:rPr>
-              <a:t>CHAPTER 03</a:t>
-            </a:r>
-            <a:endParaRPr lang="en-US" sz="1150" dirty="0"/>
-          </a:p>
-        </p:txBody>
-      </p:sp>
       <p:pic>
         <p:nvPicPr>
-          <p:cNvPr id="5" name="Image 0" descr="/Users/danwahlin/.copilot/session-state/56a7a0da-def8-48d4-b5e8-0ac3878cb8dd/files/slides-build/icons/FaGithub-1F2328.png">
-            <a:hlinkClick r:id="rId2" tooltip="https://github.com/github/copilot-app-for-beginners/tree/main/03-development-workflows"/>
-          </p:cNvPr>
+          <p:cNvPr id="2" name="Image 0" descr="/Users/danwahlin/.copilot/session-state/56a7a0da-def8-48d4-b5e8-0ac3878cb8dd/files/slides-build/img/grad-corner.png">    </p:cNvPr>
           <p:cNvPicPr>
             <a:picLocks noChangeAspect="1"/>
           </p:cNvPicPr>
@@ -8780,6 +8555,103 @@
         </p:blipFill>
         <p:spPr>
           <a:xfrm>
+            <a:off x="6349901" y="0"/>
+            <a:ext cx="2793950" cy="1308050"/>
+          </a:xfrm>
+          <a:prstGeom prst="rect">
+            <a:avLst/>
+          </a:prstGeom>
+        </p:spPr>
+      </p:pic>
+      <p:sp>
+        <p:nvSpPr>
+          <p:cNvPr id="3" name="Text 0"/>
+          <p:cNvSpPr/>
+          <p:nvPr/>
+        </p:nvSpPr>
+        <p:spPr>
+          <a:xfrm>
+            <a:off x="7340501" y="177701"/>
+            <a:ext cx="1168301" cy="279350"/>
+          </a:xfrm>
+          <a:prstGeom prst="roundRect">
+            <a:avLst>
+              <a:gd name="adj" fmla="val 22731"/>
+            </a:avLst>
+          </a:prstGeom>
+          <a:solidFill>
+            <a:srgbClr val="1A7F37"/>
+          </a:solidFill>
+          <a:ln/>
+        </p:spPr>
+        <p:txBody>
+          <a:bodyPr wrap="square" rtlCol="0" anchor="ctr"/>
+          <a:lstStyle/>
+          <a:p>
+            <a:pPr indent="0" marL="0">
+              <a:buNone/>
+            </a:pPr>
+            <a:endParaRPr lang="en-US" dirty="0"/>
+          </a:p>
+        </p:txBody>
+      </p:sp>
+      <p:sp>
+        <p:nvSpPr>
+          <p:cNvPr id="4" name="Text 1"/>
+          <p:cNvSpPr/>
+          <p:nvPr/>
+        </p:nvSpPr>
+        <p:spPr>
+          <a:xfrm>
+            <a:off x="7461041" y="231577"/>
+            <a:ext cx="927071" cy="171450"/>
+          </a:xfrm>
+          <a:prstGeom prst="rect">
+            <a:avLst/>
+          </a:prstGeom>
+          <a:noFill/>
+          <a:ln/>
+        </p:spPr>
+        <p:txBody>
+          <a:bodyPr wrap="square" lIns="0" tIns="0" rIns="0" bIns="0" rtlCol="0" anchor="t"/>
+          <a:lstStyle/>
+          <a:p>
+            <a:pPr algn="ctr" indent="0" marL="0">
+              <a:buNone/>
+            </a:pPr>
+            <a:r>
+              <a:rPr lang="en-US" sz="1150" b="1" dirty="0">
+                <a:solidFill>
+                  <a:srgbClr val="FFFFFF"/>
+                </a:solidFill>
+                <a:latin typeface="Arial" pitchFamily="34" charset="0"/>
+                <a:ea typeface="Arial" pitchFamily="34" charset="-122"/>
+                <a:cs typeface="Arial" pitchFamily="34" charset="-120"/>
+              </a:rPr>
+              <a:t>CHAPTER 03</a:t>
+            </a:r>
+            <a:endParaRPr lang="en-US" sz="1150" dirty="0"/>
+          </a:p>
+        </p:txBody>
+      </p:sp>
+      <p:pic>
+        <p:nvPicPr>
+          <p:cNvPr id="5" name="Image 1" descr="/Users/danwahlin/.copilot/session-state/56a7a0da-def8-48d4-b5e8-0ac3878cb8dd/files/slides-build/icons/FaGithub-1F2328.png">
+            <a:hlinkClick r:id="rId3" tooltip="https://github.com/github/copilot-app-for-beginners/tree/main/03-development-workflows"/>
+          </p:cNvPr>
+          <p:cNvPicPr>
+            <a:picLocks noChangeAspect="1"/>
+          </p:cNvPicPr>
+          <p:nvPr/>
+        </p:nvPicPr>
+        <p:blipFill>
+          <a:blip r:embed="rId2"/>
+          <a:stretch>
+            <a:fillRect/>
+          </a:stretch>
+        </p:blipFill>
+        <p:spPr>
+          <a:xfrm>
             <a:off x="8610600" y="165050"/>
             <a:ext cx="304800" cy="304800"/>
           </a:xfrm>
@@ -8790,7 +8662,7 @@
       </p:pic>
       <p:sp>
         <p:nvSpPr>
-          <p:cNvPr id="6" name="Text 3"/>
+          <p:cNvPr id="6" name="Text 2"/>
           <p:cNvSpPr/>
           <p:nvPr/>
         </p:nvSpPr>
@@ -8829,7 +8701,7 @@
       </p:sp>
       <p:sp>
         <p:nvSpPr>
-          <p:cNvPr id="7" name="Text 4"/>
+          <p:cNvPr id="7" name="Text 3"/>
           <p:cNvSpPr/>
           <p:nvPr/>
         </p:nvSpPr>
@@ -8874,7 +8746,7 @@
       </p:sp>
       <p:sp>
         <p:nvSpPr>
-          <p:cNvPr id="8" name="Text 5"/>
+          <p:cNvPr id="8" name="Text 4"/>
           <p:cNvSpPr/>
           <p:nvPr/>
         </p:nvSpPr>
@@ -8919,7 +8791,7 @@
       </p:sp>
       <p:sp>
         <p:nvSpPr>
-          <p:cNvPr id="9" name="Text 6"/>
+          <p:cNvPr id="9" name="Text 5"/>
           <p:cNvSpPr/>
           <p:nvPr/>
         </p:nvSpPr>
@@ -8962,14 +8834,14 @@
       </p:sp>
       <p:pic>
         <p:nvPicPr>
-          <p:cNvPr id="10" name="Image 1" descr="/Users/danwahlin/.copilot/session-state/56a7a0da-def8-48d4-b5e8-0ac3878cb8dd/files/slides-build/img/03-human-judgment-loop.jpg">    </p:cNvPr>
+          <p:cNvPr id="10" name="Image 2" descr="/Users/danwahlin/.copilot/session-state/56a7a0da-def8-48d4-b5e8-0ac3878cb8dd/files/slides-build/img/03-human-judgment-loop.jpg">    </p:cNvPr>
           <p:cNvPicPr>
             <a:picLocks noChangeAspect="1"/>
           </p:cNvPicPr>
           <p:nvPr/>
         </p:nvPicPr>
         <p:blipFill>
-          <a:blip r:embed="rId3"/>
+          <a:blip r:embed="rId4"/>
           <a:stretch>
             <a:fillRect/>
           </a:stretch>
@@ -8986,7 +8858,7 @@
       </p:pic>
       <p:sp>
         <p:nvSpPr>
-          <p:cNvPr id="11" name="Text 7"/>
+          <p:cNvPr id="11" name="Text 6"/>
           <p:cNvSpPr/>
           <p:nvPr/>
         </p:nvSpPr>
@@ -9022,7 +8894,7 @@
       </p:sp>
       <p:sp>
         <p:nvSpPr>
-          <p:cNvPr id="12" name="Text 8"/>
+          <p:cNvPr id="12" name="Text 7"/>
           <p:cNvSpPr/>
           <p:nvPr/>
         </p:nvSpPr>
@@ -9054,14 +8926,14 @@
       </p:sp>
       <p:pic>
         <p:nvPicPr>
-          <p:cNvPr id="13" name="Image 2" descr="/Users/danwahlin/.copilot/session-state/56a7a0da-def8-48d4-b5e8-0ac3878cb8dd/files/slides-build/icons/GoCheckCircle-1A7F37.png">    </p:cNvPr>
+          <p:cNvPr id="13" name="Image 3" descr="/Users/danwahlin/.copilot/session-state/56a7a0da-def8-48d4-b5e8-0ac3878cb8dd/files/slides-build/icons/GoCheckCircle-1A7F37.png">    </p:cNvPr>
           <p:cNvPicPr>
             <a:picLocks noChangeAspect="1"/>
           </p:cNvPicPr>
           <p:nvPr/>
         </p:nvPicPr>
         <p:blipFill>
-          <a:blip r:embed="rId4"/>
+          <a:blip r:embed="rId5"/>
           <a:stretch>
             <a:fillRect/>
           </a:stretch>
@@ -9078,7 +8950,7 @@
       </p:pic>
       <p:sp>
         <p:nvSpPr>
-          <p:cNvPr id="14" name="Text 9"/>
+          <p:cNvPr id="14" name="Text 8"/>
           <p:cNvSpPr/>
           <p:nvPr/>
         </p:nvSpPr>
@@ -9120,7 +8992,7 @@
       </p:sp>
       <p:sp>
         <p:nvSpPr>
-          <p:cNvPr id="15" name="Text 10"/>
+          <p:cNvPr id="15" name="Text 9"/>
           <p:cNvSpPr/>
           <p:nvPr/>
         </p:nvSpPr>
@@ -9152,7 +9024,7 @@
       </p:sp>
       <p:sp>
         <p:nvSpPr>
-          <p:cNvPr id="16" name="Text 11"/>
+          <p:cNvPr id="16" name="Text 10"/>
           <p:cNvSpPr/>
           <p:nvPr/>
         </p:nvSpPr>
@@ -9194,7 +9066,7 @@
       </p:sp>
       <p:sp>
         <p:nvSpPr>
-          <p:cNvPr id="17" name="Text 12"/>
+          <p:cNvPr id="17" name="Text 11"/>
           <p:cNvSpPr/>
           <p:nvPr/>
         </p:nvSpPr>
@@ -9226,7 +9098,7 @@
       </p:sp>
       <p:sp>
         <p:nvSpPr>
-          <p:cNvPr id="18" name="Text 13"/>
+          <p:cNvPr id="18" name="Text 12"/>
           <p:cNvSpPr/>
           <p:nvPr/>
         </p:nvSpPr>
@@ -9268,7 +9140,7 @@
       </p:sp>
       <p:sp>
         <p:nvSpPr>
-          <p:cNvPr id="19" name="Text 14"/>
+          <p:cNvPr id="19" name="Text 13"/>
           <p:cNvSpPr/>
           <p:nvPr/>
         </p:nvSpPr>
@@ -9304,7 +9176,7 @@
       </p:sp>
       <p:sp>
         <p:nvSpPr>
-          <p:cNvPr id="20" name="Text 15"/>
+          <p:cNvPr id="20" name="Text 14"/>
           <p:cNvSpPr/>
           <p:nvPr/>
         </p:nvSpPr>
@@ -9336,14 +9208,14 @@
       </p:sp>
       <p:pic>
         <p:nvPicPr>
-          <p:cNvPr id="21" name="Image 3" descr="/Users/danwahlin/.copilot/session-state/56a7a0da-def8-48d4-b5e8-0ac3878cb8dd/files/slides-build/icons/GoAlert-CF222E.png">    </p:cNvPr>
+          <p:cNvPr id="21" name="Image 4" descr="/Users/danwahlin/.copilot/session-state/56a7a0da-def8-48d4-b5e8-0ac3878cb8dd/files/slides-build/icons/GoAlert-CF222E.png">    </p:cNvPr>
           <p:cNvPicPr>
             <a:picLocks noChangeAspect="1"/>
           </p:cNvPicPr>
           <p:nvPr/>
         </p:nvPicPr>
         <p:blipFill>
-          <a:blip r:embed="rId5"/>
+          <a:blip r:embed="rId6"/>
           <a:stretch>
             <a:fillRect/>
           </a:stretch>
@@ -9360,7 +9232,7 @@
       </p:pic>
       <p:sp>
         <p:nvSpPr>
-          <p:cNvPr id="22" name="Text 16"/>
+          <p:cNvPr id="22" name="Text 15"/>
           <p:cNvSpPr/>
           <p:nvPr/>
         </p:nvSpPr>
@@ -9402,7 +9274,7 @@
       </p:sp>
       <p:sp>
         <p:nvSpPr>
-          <p:cNvPr id="23" name="Text 17"/>
+          <p:cNvPr id="23" name="Text 16"/>
           <p:cNvSpPr/>
           <p:nvPr/>
         </p:nvSpPr>
@@ -9474,112 +9346,9 @@
           <a:chExt cx="0" cy="0"/>
         </a:xfrm>
       </p:grpSpPr>
-      <p:sp>
-        <p:nvSpPr>
-          <p:cNvPr id="2" name="Text 0"/>
-          <p:cNvSpPr/>
-          <p:nvPr/>
-        </p:nvSpPr>
-        <p:spPr>
-          <a:xfrm>
-            <a:off x="0" y="0"/>
-            <a:ext cx="9144000" cy="76200"/>
-          </a:xfrm>
-          <a:prstGeom prst="rect">
-            <a:avLst/>
-          </a:prstGeom>
-          <a:solidFill>
-            <a:srgbClr val="BC4C00"/>
-          </a:solidFill>
-          <a:ln/>
-        </p:spPr>
-        <p:txBody>
-          <a:bodyPr wrap="square" rtlCol="0" anchor="ctr"/>
-          <a:lstStyle/>
-          <a:p>
-            <a:pPr indent="0" marL="0">
-              <a:buNone/>
-            </a:pPr>
-            <a:endParaRPr lang="en-US" dirty="0"/>
-          </a:p>
-        </p:txBody>
-      </p:sp>
-      <p:sp>
-        <p:nvSpPr>
-          <p:cNvPr id="3" name="Text 1"/>
-          <p:cNvSpPr/>
-          <p:nvPr/>
-        </p:nvSpPr>
-        <p:spPr>
-          <a:xfrm>
-            <a:off x="7340501" y="177701"/>
-            <a:ext cx="1168301" cy="279350"/>
-          </a:xfrm>
-          <a:prstGeom prst="roundRect">
-            <a:avLst>
-              <a:gd name="adj" fmla="val 22731"/>
-            </a:avLst>
-          </a:prstGeom>
-          <a:solidFill>
-            <a:srgbClr val="1A7F37"/>
-          </a:solidFill>
-          <a:ln/>
-        </p:spPr>
-        <p:txBody>
-          <a:bodyPr wrap="square" rtlCol="0" anchor="ctr"/>
-          <a:lstStyle/>
-          <a:p>
-            <a:pPr indent="0" marL="0">
-              <a:buNone/>
-            </a:pPr>
-            <a:endParaRPr lang="en-US" dirty="0"/>
-          </a:p>
-        </p:txBody>
-      </p:sp>
-      <p:sp>
-        <p:nvSpPr>
-          <p:cNvPr id="4" name="Text 2"/>
-          <p:cNvSpPr/>
-          <p:nvPr/>
-        </p:nvSpPr>
-        <p:spPr>
-          <a:xfrm>
-            <a:off x="7461041" y="231577"/>
-            <a:ext cx="927071" cy="171450"/>
-          </a:xfrm>
-          <a:prstGeom prst="rect">
-            <a:avLst/>
-          </a:prstGeom>
-          <a:noFill/>
-          <a:ln/>
-        </p:spPr>
-        <p:txBody>
-          <a:bodyPr wrap="square" lIns="0" tIns="0" rIns="0" bIns="0" rtlCol="0" anchor="t"/>
-          <a:lstStyle/>
-          <a:p>
-            <a:pPr algn="ctr" indent="0" marL="0">
-              <a:buNone/>
-            </a:pPr>
-            <a:r>
-              <a:rPr lang="en-US" sz="1150" b="1" dirty="0">
-                <a:solidFill>
-                  <a:srgbClr val="FFFFFF"/>
-                </a:solidFill>
-                <a:latin typeface="Arial" pitchFamily="34" charset="0"/>
-                <a:ea typeface="Arial" pitchFamily="34" charset="-122"/>
-                <a:cs typeface="Arial" pitchFamily="34" charset="-120"/>
-              </a:rPr>
-              <a:t>CHAPTER 03</a:t>
-            </a:r>
-            <a:endParaRPr lang="en-US" sz="1150" dirty="0"/>
-          </a:p>
-        </p:txBody>
-      </p:sp>
       <p:pic>
         <p:nvPicPr>
-          <p:cNvPr id="5" name="Image 0" descr="/Users/danwahlin/.copilot/session-state/56a7a0da-def8-48d4-b5e8-0ac3878cb8dd/files/slides-build/icons/FaGithub-1F2328.png">
-            <a:hlinkClick r:id="rId2" tooltip="https://github.com/github/copilot-app-for-beginners/tree/main/03-development-workflows"/>
-          </p:cNvPr>
+          <p:cNvPr id="2" name="Image 0" descr="/Users/danwahlin/.copilot/session-state/56a7a0da-def8-48d4-b5e8-0ac3878cb8dd/files/slides-build/img/grad-corner.png">    </p:cNvPr>
           <p:cNvPicPr>
             <a:picLocks noChangeAspect="1"/>
           </p:cNvPicPr>
@@ -9593,6 +9362,103 @@
         </p:blipFill>
         <p:spPr>
           <a:xfrm>
+            <a:off x="6349901" y="0"/>
+            <a:ext cx="2793950" cy="1308050"/>
+          </a:xfrm>
+          <a:prstGeom prst="rect">
+            <a:avLst/>
+          </a:prstGeom>
+        </p:spPr>
+      </p:pic>
+      <p:sp>
+        <p:nvSpPr>
+          <p:cNvPr id="3" name="Text 0"/>
+          <p:cNvSpPr/>
+          <p:nvPr/>
+        </p:nvSpPr>
+        <p:spPr>
+          <a:xfrm>
+            <a:off x="7340501" y="177701"/>
+            <a:ext cx="1168301" cy="279350"/>
+          </a:xfrm>
+          <a:prstGeom prst="roundRect">
+            <a:avLst>
+              <a:gd name="adj" fmla="val 22731"/>
+            </a:avLst>
+          </a:prstGeom>
+          <a:solidFill>
+            <a:srgbClr val="1A7F37"/>
+          </a:solidFill>
+          <a:ln/>
+        </p:spPr>
+        <p:txBody>
+          <a:bodyPr wrap="square" rtlCol="0" anchor="ctr"/>
+          <a:lstStyle/>
+          <a:p>
+            <a:pPr indent="0" marL="0">
+              <a:buNone/>
+            </a:pPr>
+            <a:endParaRPr lang="en-US" dirty="0"/>
+          </a:p>
+        </p:txBody>
+      </p:sp>
+      <p:sp>
+        <p:nvSpPr>
+          <p:cNvPr id="4" name="Text 1"/>
+          <p:cNvSpPr/>
+          <p:nvPr/>
+        </p:nvSpPr>
+        <p:spPr>
+          <a:xfrm>
+            <a:off x="7461041" y="231577"/>
+            <a:ext cx="927071" cy="171450"/>
+          </a:xfrm>
+          <a:prstGeom prst="rect">
+            <a:avLst/>
+          </a:prstGeom>
+          <a:noFill/>
+          <a:ln/>
+        </p:spPr>
+        <p:txBody>
+          <a:bodyPr wrap="square" lIns="0" tIns="0" rIns="0" bIns="0" rtlCol="0" anchor="t"/>
+          <a:lstStyle/>
+          <a:p>
+            <a:pPr algn="ctr" indent="0" marL="0">
+              <a:buNone/>
+            </a:pPr>
+            <a:r>
+              <a:rPr lang="en-US" sz="1150" b="1" dirty="0">
+                <a:solidFill>
+                  <a:srgbClr val="FFFFFF"/>
+                </a:solidFill>
+                <a:latin typeface="Arial" pitchFamily="34" charset="0"/>
+                <a:ea typeface="Arial" pitchFamily="34" charset="-122"/>
+                <a:cs typeface="Arial" pitchFamily="34" charset="-120"/>
+              </a:rPr>
+              <a:t>CHAPTER 03</a:t>
+            </a:r>
+            <a:endParaRPr lang="en-US" sz="1150" dirty="0"/>
+          </a:p>
+        </p:txBody>
+      </p:sp>
+      <p:pic>
+        <p:nvPicPr>
+          <p:cNvPr id="5" name="Image 1" descr="/Users/danwahlin/.copilot/session-state/56a7a0da-def8-48d4-b5e8-0ac3878cb8dd/files/slides-build/icons/FaGithub-1F2328.png">
+            <a:hlinkClick r:id="rId3" tooltip="https://github.com/github/copilot-app-for-beginners/tree/main/03-development-workflows"/>
+          </p:cNvPr>
+          <p:cNvPicPr>
+            <a:picLocks noChangeAspect="1"/>
+          </p:cNvPicPr>
+          <p:nvPr/>
+        </p:nvPicPr>
+        <p:blipFill>
+          <a:blip r:embed="rId2"/>
+          <a:stretch>
+            <a:fillRect/>
+          </a:stretch>
+        </p:blipFill>
+        <p:spPr>
+          <a:xfrm>
             <a:off x="8610600" y="165050"/>
             <a:ext cx="304800" cy="304800"/>
           </a:xfrm>
@@ -9603,7 +9469,7 @@
       </p:pic>
       <p:sp>
         <p:nvSpPr>
-          <p:cNvPr id="6" name="Text 3"/>
+          <p:cNvPr id="6" name="Text 2"/>
           <p:cNvSpPr/>
           <p:nvPr/>
         </p:nvSpPr>
@@ -9642,7 +9508,7 @@
       </p:sp>
       <p:sp>
         <p:nvSpPr>
-          <p:cNvPr id="7" name="Text 4"/>
+          <p:cNvPr id="7" name="Text 3"/>
           <p:cNvSpPr/>
           <p:nvPr/>
         </p:nvSpPr>
@@ -9687,7 +9553,7 @@
       </p:sp>
       <p:sp>
         <p:nvSpPr>
-          <p:cNvPr id="8" name="Text 5"/>
+          <p:cNvPr id="8" name="Text 4"/>
           <p:cNvSpPr/>
           <p:nvPr/>
         </p:nvSpPr>
@@ -9732,7 +9598,7 @@
       </p:sp>
       <p:sp>
         <p:nvSpPr>
-          <p:cNvPr id="9" name="Text 6"/>
+          <p:cNvPr id="9" name="Text 5"/>
           <p:cNvSpPr/>
           <p:nvPr/>
         </p:nvSpPr>
@@ -9768,7 +9634,7 @@
       </p:sp>
       <p:sp>
         <p:nvSpPr>
-          <p:cNvPr id="10" name="Shape 7"/>
+          <p:cNvPr id="10" name="Shape 6"/>
           <p:cNvSpPr/>
           <p:nvPr/>
         </p:nvSpPr>
@@ -9791,7 +9657,7 @@
       </p:sp>
       <p:sp>
         <p:nvSpPr>
-          <p:cNvPr id="11" name="Text 8"/>
+          <p:cNvPr id="11" name="Text 7"/>
           <p:cNvSpPr/>
           <p:nvPr/>
         </p:nvSpPr>
@@ -9823,7 +9689,7 @@
       </p:sp>
       <p:sp>
         <p:nvSpPr>
-          <p:cNvPr id="12" name="Text 9"/>
+          <p:cNvPr id="12" name="Text 8"/>
           <p:cNvSpPr/>
           <p:nvPr/>
         </p:nvSpPr>
@@ -9862,7 +9728,7 @@
       </p:sp>
       <p:sp>
         <p:nvSpPr>
-          <p:cNvPr id="13" name="Text 10"/>
+          <p:cNvPr id="13" name="Text 9"/>
           <p:cNvSpPr/>
           <p:nvPr/>
         </p:nvSpPr>
@@ -9904,7 +9770,7 @@
       </p:sp>
       <p:sp>
         <p:nvSpPr>
-          <p:cNvPr id="14" name="Text 11"/>
+          <p:cNvPr id="14" name="Text 10"/>
           <p:cNvSpPr/>
           <p:nvPr/>
         </p:nvSpPr>
@@ -9946,7 +9812,7 @@
       </p:sp>
       <p:sp>
         <p:nvSpPr>
-          <p:cNvPr id="15" name="Shape 12"/>
+          <p:cNvPr id="15" name="Shape 11"/>
           <p:cNvSpPr/>
           <p:nvPr/>
         </p:nvSpPr>
@@ -9969,7 +9835,7 @@
       </p:sp>
       <p:sp>
         <p:nvSpPr>
-          <p:cNvPr id="16" name="Text 13"/>
+          <p:cNvPr id="16" name="Text 12"/>
           <p:cNvSpPr/>
           <p:nvPr/>
         </p:nvSpPr>
@@ -10001,7 +9867,7 @@
       </p:sp>
       <p:sp>
         <p:nvSpPr>
-          <p:cNvPr id="17" name="Text 14"/>
+          <p:cNvPr id="17" name="Text 13"/>
           <p:cNvSpPr/>
           <p:nvPr/>
         </p:nvSpPr>
@@ -10040,7 +9906,7 @@
       </p:sp>
       <p:sp>
         <p:nvSpPr>
-          <p:cNvPr id="18" name="Text 15"/>
+          <p:cNvPr id="18" name="Text 14"/>
           <p:cNvSpPr/>
           <p:nvPr/>
         </p:nvSpPr>
@@ -10082,7 +9948,7 @@
       </p:sp>
       <p:sp>
         <p:nvSpPr>
-          <p:cNvPr id="19" name="Text 16"/>
+          <p:cNvPr id="19" name="Text 15"/>
           <p:cNvSpPr/>
           <p:nvPr/>
         </p:nvSpPr>
@@ -10158,7 +10024,7 @@
       </p:sp>
       <p:sp>
         <p:nvSpPr>
-          <p:cNvPr id="20" name="Shape 17"/>
+          <p:cNvPr id="20" name="Shape 16"/>
           <p:cNvSpPr/>
           <p:nvPr/>
         </p:nvSpPr>
@@ -10181,7 +10047,7 @@
       </p:sp>
       <p:sp>
         <p:nvSpPr>
-          <p:cNvPr id="21" name="Text 18"/>
+          <p:cNvPr id="21" name="Text 17"/>
           <p:cNvSpPr/>
           <p:nvPr/>
         </p:nvSpPr>
@@ -10213,7 +10079,7 @@
       </p:sp>
       <p:sp>
         <p:nvSpPr>
-          <p:cNvPr id="22" name="Text 19"/>
+          <p:cNvPr id="22" name="Text 18"/>
           <p:cNvSpPr/>
           <p:nvPr/>
         </p:nvSpPr>
@@ -10252,7 +10118,7 @@
       </p:sp>
       <p:sp>
         <p:nvSpPr>
-          <p:cNvPr id="23" name="Text 20"/>
+          <p:cNvPr id="23" name="Text 19"/>
           <p:cNvSpPr/>
           <p:nvPr/>
         </p:nvSpPr>
@@ -10294,7 +10160,7 @@
       </p:sp>
       <p:sp>
         <p:nvSpPr>
-          <p:cNvPr id="24" name="Text 21"/>
+          <p:cNvPr id="24" name="Text 20"/>
           <p:cNvSpPr/>
           <p:nvPr/>
         </p:nvSpPr>
@@ -10336,7 +10202,7 @@
       </p:sp>
       <p:sp>
         <p:nvSpPr>
-          <p:cNvPr id="25" name="Text 22"/>
+          <p:cNvPr id="25" name="Text 21"/>
           <p:cNvSpPr/>
           <p:nvPr/>
         </p:nvSpPr>
@@ -10368,7 +10234,7 @@
       </p:sp>
       <p:sp>
         <p:nvSpPr>
-          <p:cNvPr id="26" name="Text 23"/>
+          <p:cNvPr id="26" name="Text 22"/>
           <p:cNvSpPr/>
           <p:nvPr/>
         </p:nvSpPr>
@@ -10407,7 +10273,7 @@
       </p:sp>
       <p:sp>
         <p:nvSpPr>
-          <p:cNvPr id="27" name="Text 24"/>
+          <p:cNvPr id="27" name="Text 23"/>
           <p:cNvSpPr/>
           <p:nvPr/>
         </p:nvSpPr>
@@ -10449,7 +10315,7 @@
       </p:sp>
       <p:sp>
         <p:nvSpPr>
-          <p:cNvPr id="28" name="Text 25"/>
+          <p:cNvPr id="28" name="Text 24"/>
           <p:cNvSpPr/>
           <p:nvPr/>
         </p:nvSpPr>
@@ -10491,7 +10357,7 @@
       </p:sp>
       <p:sp>
         <p:nvSpPr>
-          <p:cNvPr id="29" name="Text 26"/>
+          <p:cNvPr id="29" name="Text 25"/>
           <p:cNvSpPr/>
           <p:nvPr/>
         </p:nvSpPr>
@@ -10527,7 +10393,7 @@
       </p:sp>
       <p:sp>
         <p:nvSpPr>
-          <p:cNvPr id="30" name="Text 27"/>
+          <p:cNvPr id="30" name="Text 26"/>
           <p:cNvSpPr/>
           <p:nvPr/>
         </p:nvSpPr>
@@ -10559,14 +10425,14 @@
       </p:sp>
       <p:pic>
         <p:nvPicPr>
-          <p:cNvPr id="31" name="Image 1" descr="/Users/danwahlin/.copilot/session-state/56a7a0da-def8-48d4-b5e8-0ac3878cb8dd/files/slides-build/icons/GoGoal-BC4C00.png">    </p:cNvPr>
+          <p:cNvPr id="31" name="Image 2" descr="/Users/danwahlin/.copilot/session-state/56a7a0da-def8-48d4-b5e8-0ac3878cb8dd/files/slides-build/icons/GoGoal-BC4C00.png">    </p:cNvPr>
           <p:cNvPicPr>
             <a:picLocks noChangeAspect="1"/>
           </p:cNvPicPr>
           <p:nvPr/>
         </p:nvPicPr>
         <p:blipFill>
-          <a:blip r:embed="rId3"/>
+          <a:blip r:embed="rId4"/>
           <a:stretch>
             <a:fillRect/>
           </a:stretch>
@@ -10583,7 +10449,7 @@
       </p:pic>
       <p:sp>
         <p:nvSpPr>
-          <p:cNvPr id="32" name="Text 28"/>
+          <p:cNvPr id="32" name="Text 27"/>
           <p:cNvSpPr/>
           <p:nvPr/>
         </p:nvSpPr>
@@ -10625,7 +10491,7 @@
       </p:sp>
       <p:sp>
         <p:nvSpPr>
-          <p:cNvPr id="33" name="Text 29"/>
+          <p:cNvPr id="33" name="Text 28"/>
           <p:cNvSpPr/>
           <p:nvPr/>
         </p:nvSpPr>
@@ -10697,112 +10563,9 @@
           <a:chExt cx="0" cy="0"/>
         </a:xfrm>
       </p:grpSpPr>
-      <p:sp>
-        <p:nvSpPr>
-          <p:cNvPr id="2" name="Text 0"/>
-          <p:cNvSpPr/>
-          <p:nvPr/>
-        </p:nvSpPr>
-        <p:spPr>
-          <a:xfrm>
-            <a:off x="0" y="0"/>
-            <a:ext cx="9144000" cy="76200"/>
-          </a:xfrm>
-          <a:prstGeom prst="rect">
-            <a:avLst/>
-          </a:prstGeom>
-          <a:solidFill>
-            <a:srgbClr val="1A7F37"/>
-          </a:solidFill>
-          <a:ln/>
-        </p:spPr>
-        <p:txBody>
-          <a:bodyPr wrap="square" rtlCol="0" anchor="ctr"/>
-          <a:lstStyle/>
-          <a:p>
-            <a:pPr indent="0" marL="0">
-              <a:buNone/>
-            </a:pPr>
-            <a:endParaRPr lang="en-US" dirty="0"/>
-          </a:p>
-        </p:txBody>
-      </p:sp>
-      <p:sp>
-        <p:nvSpPr>
-          <p:cNvPr id="3" name="Text 1"/>
-          <p:cNvSpPr/>
-          <p:nvPr/>
-        </p:nvSpPr>
-        <p:spPr>
-          <a:xfrm>
-            <a:off x="7340501" y="177701"/>
-            <a:ext cx="1168301" cy="279350"/>
-          </a:xfrm>
-          <a:prstGeom prst="roundRect">
-            <a:avLst>
-              <a:gd name="adj" fmla="val 22731"/>
-            </a:avLst>
-          </a:prstGeom>
-          <a:solidFill>
-            <a:srgbClr val="1A7F37"/>
-          </a:solidFill>
-          <a:ln/>
-        </p:spPr>
-        <p:txBody>
-          <a:bodyPr wrap="square" rtlCol="0" anchor="ctr"/>
-          <a:lstStyle/>
-          <a:p>
-            <a:pPr indent="0" marL="0">
-              <a:buNone/>
-            </a:pPr>
-            <a:endParaRPr lang="en-US" dirty="0"/>
-          </a:p>
-        </p:txBody>
-      </p:sp>
-      <p:sp>
-        <p:nvSpPr>
-          <p:cNvPr id="4" name="Text 2"/>
-          <p:cNvSpPr/>
-          <p:nvPr/>
-        </p:nvSpPr>
-        <p:spPr>
-          <a:xfrm>
-            <a:off x="7461041" y="231577"/>
-            <a:ext cx="927071" cy="171450"/>
-          </a:xfrm>
-          <a:prstGeom prst="rect">
-            <a:avLst/>
-          </a:prstGeom>
-          <a:noFill/>
-          <a:ln/>
-        </p:spPr>
-        <p:txBody>
-          <a:bodyPr wrap="square" lIns="0" tIns="0" rIns="0" bIns="0" rtlCol="0" anchor="t"/>
-          <a:lstStyle/>
-          <a:p>
-            <a:pPr algn="ctr" indent="0" marL="0">
-              <a:buNone/>
-            </a:pPr>
-            <a:r>
-              <a:rPr lang="en-US" sz="1150" b="1" dirty="0">
-                <a:solidFill>
-                  <a:srgbClr val="FFFFFF"/>
-                </a:solidFill>
-                <a:latin typeface="Arial" pitchFamily="34" charset="0"/>
-                <a:ea typeface="Arial" pitchFamily="34" charset="-122"/>
-                <a:cs typeface="Arial" pitchFamily="34" charset="-120"/>
-              </a:rPr>
-              <a:t>CHAPTER 03</a:t>
-            </a:r>
-            <a:endParaRPr lang="en-US" sz="1150" dirty="0"/>
-          </a:p>
-        </p:txBody>
-      </p:sp>
       <p:pic>
         <p:nvPicPr>
-          <p:cNvPr id="5" name="Image 0" descr="/Users/danwahlin/.copilot/session-state/56a7a0da-def8-48d4-b5e8-0ac3878cb8dd/files/slides-build/icons/FaGithub-1F2328.png">
-            <a:hlinkClick r:id="rId2" tooltip="https://github.com/github/copilot-app-for-beginners/tree/main/03-development-workflows"/>
-          </p:cNvPr>
+          <p:cNvPr id="2" name="Image 0" descr="/Users/danwahlin/.copilot/session-state/56a7a0da-def8-48d4-b5e8-0ac3878cb8dd/files/slides-build/img/grad-corner.png">    </p:cNvPr>
           <p:cNvPicPr>
             <a:picLocks noChangeAspect="1"/>
           </p:cNvPicPr>
@@ -10816,6 +10579,103 @@
         </p:blipFill>
         <p:spPr>
           <a:xfrm>
+            <a:off x="6349901" y="0"/>
+            <a:ext cx="2793950" cy="1308050"/>
+          </a:xfrm>
+          <a:prstGeom prst="rect">
+            <a:avLst/>
+          </a:prstGeom>
+        </p:spPr>
+      </p:pic>
+      <p:sp>
+        <p:nvSpPr>
+          <p:cNvPr id="3" name="Text 0"/>
+          <p:cNvSpPr/>
+          <p:nvPr/>
+        </p:nvSpPr>
+        <p:spPr>
+          <a:xfrm>
+            <a:off x="7340501" y="177701"/>
+            <a:ext cx="1168301" cy="279350"/>
+          </a:xfrm>
+          <a:prstGeom prst="roundRect">
+            <a:avLst>
+              <a:gd name="adj" fmla="val 22731"/>
+            </a:avLst>
+          </a:prstGeom>
+          <a:solidFill>
+            <a:srgbClr val="1A7F37"/>
+          </a:solidFill>
+          <a:ln/>
+        </p:spPr>
+        <p:txBody>
+          <a:bodyPr wrap="square" rtlCol="0" anchor="ctr"/>
+          <a:lstStyle/>
+          <a:p>
+            <a:pPr indent="0" marL="0">
+              <a:buNone/>
+            </a:pPr>
+            <a:endParaRPr lang="en-US" dirty="0"/>
+          </a:p>
+        </p:txBody>
+      </p:sp>
+      <p:sp>
+        <p:nvSpPr>
+          <p:cNvPr id="4" name="Text 1"/>
+          <p:cNvSpPr/>
+          <p:nvPr/>
+        </p:nvSpPr>
+        <p:spPr>
+          <a:xfrm>
+            <a:off x="7461041" y="231577"/>
+            <a:ext cx="927071" cy="171450"/>
+          </a:xfrm>
+          <a:prstGeom prst="rect">
+            <a:avLst/>
+          </a:prstGeom>
+          <a:noFill/>
+          <a:ln/>
+        </p:spPr>
+        <p:txBody>
+          <a:bodyPr wrap="square" lIns="0" tIns="0" rIns="0" bIns="0" rtlCol="0" anchor="t"/>
+          <a:lstStyle/>
+          <a:p>
+            <a:pPr algn="ctr" indent="0" marL="0">
+              <a:buNone/>
+            </a:pPr>
+            <a:r>
+              <a:rPr lang="en-US" sz="1150" b="1" dirty="0">
+                <a:solidFill>
+                  <a:srgbClr val="FFFFFF"/>
+                </a:solidFill>
+                <a:latin typeface="Arial" pitchFamily="34" charset="0"/>
+                <a:ea typeface="Arial" pitchFamily="34" charset="-122"/>
+                <a:cs typeface="Arial" pitchFamily="34" charset="-120"/>
+              </a:rPr>
+              <a:t>CHAPTER 03</a:t>
+            </a:r>
+            <a:endParaRPr lang="en-US" sz="1150" dirty="0"/>
+          </a:p>
+        </p:txBody>
+      </p:sp>
+      <p:pic>
+        <p:nvPicPr>
+          <p:cNvPr id="5" name="Image 1" descr="/Users/danwahlin/.copilot/session-state/56a7a0da-def8-48d4-b5e8-0ac3878cb8dd/files/slides-build/icons/FaGithub-1F2328.png">
+            <a:hlinkClick r:id="rId3" tooltip="https://github.com/github/copilot-app-for-beginners/tree/main/03-development-workflows"/>
+          </p:cNvPr>
+          <p:cNvPicPr>
+            <a:picLocks noChangeAspect="1"/>
+          </p:cNvPicPr>
+          <p:nvPr/>
+        </p:nvPicPr>
+        <p:blipFill>
+          <a:blip r:embed="rId2"/>
+          <a:stretch>
+            <a:fillRect/>
+          </a:stretch>
+        </p:blipFill>
+        <p:spPr>
+          <a:xfrm>
             <a:off x="8610600" y="165050"/>
             <a:ext cx="304800" cy="304800"/>
           </a:xfrm>
@@ -10826,7 +10686,7 @@
       </p:pic>
       <p:sp>
         <p:nvSpPr>
-          <p:cNvPr id="6" name="Text 3"/>
+          <p:cNvPr id="6" name="Text 2"/>
           <p:cNvSpPr/>
           <p:nvPr/>
         </p:nvSpPr>
@@ -10865,7 +10725,7 @@
       </p:sp>
       <p:sp>
         <p:nvSpPr>
-          <p:cNvPr id="7" name="Text 4"/>
+          <p:cNvPr id="7" name="Text 3"/>
           <p:cNvSpPr/>
           <p:nvPr/>
         </p:nvSpPr>
@@ -10910,7 +10770,7 @@
       </p:sp>
       <p:sp>
         <p:nvSpPr>
-          <p:cNvPr id="8" name="Text 5"/>
+          <p:cNvPr id="8" name="Text 4"/>
           <p:cNvSpPr/>
           <p:nvPr/>
         </p:nvSpPr>
@@ -10946,7 +10806,7 @@
       </p:sp>
       <p:sp>
         <p:nvSpPr>
-          <p:cNvPr id="9" name="Text 6"/>
+          <p:cNvPr id="9" name="Text 5"/>
           <p:cNvSpPr/>
           <p:nvPr/>
         </p:nvSpPr>
@@ -10978,7 +10838,7 @@
       </p:sp>
       <p:sp>
         <p:nvSpPr>
-          <p:cNvPr id="10" name="Text 7"/>
+          <p:cNvPr id="10" name="Text 6"/>
           <p:cNvSpPr/>
           <p:nvPr/>
         </p:nvSpPr>
@@ -11017,7 +10877,7 @@
       </p:sp>
       <p:sp>
         <p:nvSpPr>
-          <p:cNvPr id="11" name="Text 8"/>
+          <p:cNvPr id="11" name="Text 7"/>
           <p:cNvSpPr/>
           <p:nvPr/>
         </p:nvSpPr>
@@ -11059,7 +10919,7 @@
       </p:sp>
       <p:sp>
         <p:nvSpPr>
-          <p:cNvPr id="12" name="Text 9"/>
+          <p:cNvPr id="12" name="Text 8"/>
           <p:cNvSpPr/>
           <p:nvPr/>
         </p:nvSpPr>
@@ -11095,7 +10955,7 @@
       </p:sp>
       <p:sp>
         <p:nvSpPr>
-          <p:cNvPr id="13" name="Text 10"/>
+          <p:cNvPr id="13" name="Text 9"/>
           <p:cNvSpPr/>
           <p:nvPr/>
         </p:nvSpPr>
@@ -11127,7 +10987,7 @@
       </p:sp>
       <p:sp>
         <p:nvSpPr>
-          <p:cNvPr id="14" name="Text 11"/>
+          <p:cNvPr id="14" name="Text 10"/>
           <p:cNvSpPr/>
           <p:nvPr/>
         </p:nvSpPr>
@@ -11166,7 +11026,7 @@
       </p:sp>
       <p:sp>
         <p:nvSpPr>
-          <p:cNvPr id="15" name="Text 12"/>
+          <p:cNvPr id="15" name="Text 11"/>
           <p:cNvSpPr/>
           <p:nvPr/>
         </p:nvSpPr>
@@ -11208,7 +11068,7 @@
       </p:sp>
       <p:sp>
         <p:nvSpPr>
-          <p:cNvPr id="16" name="Text 13"/>
+          <p:cNvPr id="16" name="Text 12"/>
           <p:cNvSpPr/>
           <p:nvPr/>
         </p:nvSpPr>
@@ -11244,7 +11104,7 @@
       </p:sp>
       <p:sp>
         <p:nvSpPr>
-          <p:cNvPr id="17" name="Text 14"/>
+          <p:cNvPr id="17" name="Text 13"/>
           <p:cNvSpPr/>
           <p:nvPr/>
         </p:nvSpPr>
@@ -11276,7 +11136,7 @@
       </p:sp>
       <p:sp>
         <p:nvSpPr>
-          <p:cNvPr id="18" name="Text 15"/>
+          <p:cNvPr id="18" name="Text 14"/>
           <p:cNvSpPr/>
           <p:nvPr/>
         </p:nvSpPr>
@@ -11315,7 +11175,7 @@
       </p:sp>
       <p:sp>
         <p:nvSpPr>
-          <p:cNvPr id="19" name="Text 16"/>
+          <p:cNvPr id="19" name="Text 15"/>
           <p:cNvSpPr/>
           <p:nvPr/>
         </p:nvSpPr>
@@ -11357,7 +11217,7 @@
       </p:sp>
       <p:sp>
         <p:nvSpPr>
-          <p:cNvPr id="20" name="Text 17"/>
+          <p:cNvPr id="20" name="Text 16"/>
           <p:cNvSpPr/>
           <p:nvPr/>
         </p:nvSpPr>
@@ -11393,7 +11253,7 @@
       </p:sp>
       <p:sp>
         <p:nvSpPr>
-          <p:cNvPr id="21" name="Text 18"/>
+          <p:cNvPr id="21" name="Text 17"/>
           <p:cNvSpPr/>
           <p:nvPr/>
         </p:nvSpPr>
@@ -11425,7 +11285,7 @@
       </p:sp>
       <p:sp>
         <p:nvSpPr>
-          <p:cNvPr id="22" name="Text 19"/>
+          <p:cNvPr id="22" name="Text 18"/>
           <p:cNvSpPr/>
           <p:nvPr/>
         </p:nvSpPr>
@@ -11464,7 +11324,7 @@
       </p:sp>
       <p:sp>
         <p:nvSpPr>
-          <p:cNvPr id="23" name="Text 20"/>
+          <p:cNvPr id="23" name="Text 19"/>
           <p:cNvSpPr/>
           <p:nvPr/>
         </p:nvSpPr>
@@ -11506,7 +11366,7 @@
       </p:sp>
       <p:sp>
         <p:nvSpPr>
-          <p:cNvPr id="24" name="Text 21"/>
+          <p:cNvPr id="24" name="Text 20"/>
           <p:cNvSpPr/>
           <p:nvPr/>
         </p:nvSpPr>
@@ -11542,7 +11402,7 @@
       </p:sp>
       <p:sp>
         <p:nvSpPr>
-          <p:cNvPr id="25" name="Text 22"/>
+          <p:cNvPr id="25" name="Text 21"/>
           <p:cNvSpPr/>
           <p:nvPr/>
         </p:nvSpPr>
@@ -11574,14 +11434,14 @@
       </p:sp>
       <p:pic>
         <p:nvPicPr>
-          <p:cNvPr id="26" name="Image 1" descr="/Users/danwahlin/.copilot/session-state/56a7a0da-def8-48d4-b5e8-0ac3878cb8dd/files/slides-build/icons/FaGithub-0969DA.png">    </p:cNvPr>
+          <p:cNvPr id="26" name="Image 2" descr="/Users/danwahlin/.copilot/session-state/56a7a0da-def8-48d4-b5e8-0ac3878cb8dd/files/slides-build/icons/FaGithub-0969DA.png">    </p:cNvPr>
           <p:cNvPicPr>
             <a:picLocks noChangeAspect="1"/>
           </p:cNvPicPr>
           <p:nvPr/>
         </p:nvPicPr>
         <p:blipFill>
-          <a:blip r:embed="rId3"/>
+          <a:blip r:embed="rId4"/>
           <a:stretch>
             <a:fillRect/>
           </a:stretch>
@@ -11598,7 +11458,7 @@
       </p:pic>
       <p:sp>
         <p:nvSpPr>
-          <p:cNvPr id="27" name="Text 23"/>
+          <p:cNvPr id="27" name="Text 22"/>
           <p:cNvSpPr/>
           <p:nvPr/>
         </p:nvSpPr>
@@ -11637,7 +11497,7 @@
       </p:sp>
       <p:sp>
         <p:nvSpPr>
-          <p:cNvPr id="28" name="Text 24"/>
+          <p:cNvPr id="28" name="Text 23"/>
           <p:cNvSpPr/>
           <p:nvPr/>
         </p:nvSpPr>
@@ -11667,7 +11527,7 @@
                 <a:latin typeface="Arial" pitchFamily="34" charset="0"/>
                 <a:ea typeface="Arial" pitchFamily="34" charset="-122"/>
                 <a:cs typeface="Arial" pitchFamily="34" charset="-120"/>
-                <a:hlinkClick r:id="rId4" invalidUrl="" action="" tgtFrame="" tooltip="https://github.com/github/copilot-app-for-beginners/tree/main/03-development-workflows" history="1" highlightClick="0" endSnd="0">
+                <a:hlinkClick r:id="rId5" invalidUrl="" action="" tgtFrame="" tooltip="https://github.com/github/copilot-app-for-beginners/tree/main/03-development-workflows" history="1" highlightClick="0" endSnd="0">
                   <a:extLst>
                     <a:ext uri="{A12FA001-AC4F-418D-AE19-62706E023703}">
                       <ahyp:hlinkClr xmlns:ahyp="http://schemas.microsoft.com/office/drawing/2018/hyperlinkcolor" val="tx"/>
@@ -11683,7 +11543,7 @@
       </p:sp>
       <p:sp>
         <p:nvSpPr>
-          <p:cNvPr id="29" name="Text 25"/>
+          <p:cNvPr id="29" name="Text 24"/>
           <p:cNvSpPr/>
           <p:nvPr/>
         </p:nvSpPr>
@@ -11722,7 +11582,7 @@
       </p:sp>
       <p:sp>
         <p:nvSpPr>
-          <p:cNvPr id="30" name="Text 26"/>
+          <p:cNvPr id="30" name="Text 25"/>
           <p:cNvSpPr/>
           <p:nvPr/>
         </p:nvSpPr>
@@ -11752,7 +11612,7 @@
                 <a:latin typeface="Arial" pitchFamily="34" charset="0"/>
                 <a:ea typeface="Arial" pitchFamily="34" charset="-122"/>
                 <a:cs typeface="Arial" pitchFamily="34" charset="-120"/>
-                <a:hlinkClick r:id="rId5" invalidUrl="" action="" tgtFrame="" tooltip="https://github.com/github/copilot-app-for-beginners/tree/main/04-skills-custom-agents" history="1" highlightClick="0" endSnd="0">
+                <a:hlinkClick r:id="rId6" invalidUrl="" action="" tgtFrame="" tooltip="https://github.com/github/copilot-app-for-beginners/tree/main/04-skills-custom-agents" history="1" highlightClick="0" endSnd="0">
                   <a:extLst>
                     <a:ext uri="{A12FA001-AC4F-418D-AE19-62706E023703}">
                       <ahyp:hlinkClr xmlns:ahyp="http://schemas.microsoft.com/office/drawing/2018/hyperlinkcolor" val="tx"/>
@@ -11798,112 +11658,9 @@
           <a:chExt cx="0" cy="0"/>
         </a:xfrm>
       </p:grpSpPr>
-      <p:sp>
-        <p:nvSpPr>
-          <p:cNvPr id="2" name="Text 0"/>
-          <p:cNvSpPr/>
-          <p:nvPr/>
-        </p:nvSpPr>
-        <p:spPr>
-          <a:xfrm>
-            <a:off x="0" y="0"/>
-            <a:ext cx="9144000" cy="76200"/>
-          </a:xfrm>
-          <a:prstGeom prst="rect">
-            <a:avLst/>
-          </a:prstGeom>
-          <a:solidFill>
-            <a:srgbClr val="1A7F37"/>
-          </a:solidFill>
-          <a:ln/>
-        </p:spPr>
-        <p:txBody>
-          <a:bodyPr wrap="square" rtlCol="0" anchor="ctr"/>
-          <a:lstStyle/>
-          <a:p>
-            <a:pPr indent="0" marL="0">
-              <a:buNone/>
-            </a:pPr>
-            <a:endParaRPr lang="en-US" dirty="0"/>
-          </a:p>
-        </p:txBody>
-      </p:sp>
-      <p:sp>
-        <p:nvSpPr>
-          <p:cNvPr id="3" name="Text 1"/>
-          <p:cNvSpPr/>
-          <p:nvPr/>
-        </p:nvSpPr>
-        <p:spPr>
-          <a:xfrm>
-            <a:off x="7340501" y="177701"/>
-            <a:ext cx="1168301" cy="279350"/>
-          </a:xfrm>
-          <a:prstGeom prst="roundRect">
-            <a:avLst>
-              <a:gd name="adj" fmla="val 22731"/>
-            </a:avLst>
-          </a:prstGeom>
-          <a:solidFill>
-            <a:srgbClr val="1A7F37"/>
-          </a:solidFill>
-          <a:ln/>
-        </p:spPr>
-        <p:txBody>
-          <a:bodyPr wrap="square" rtlCol="0" anchor="ctr"/>
-          <a:lstStyle/>
-          <a:p>
-            <a:pPr indent="0" marL="0">
-              <a:buNone/>
-            </a:pPr>
-            <a:endParaRPr lang="en-US" dirty="0"/>
-          </a:p>
-        </p:txBody>
-      </p:sp>
-      <p:sp>
-        <p:nvSpPr>
-          <p:cNvPr id="4" name="Text 2"/>
-          <p:cNvSpPr/>
-          <p:nvPr/>
-        </p:nvSpPr>
-        <p:spPr>
-          <a:xfrm>
-            <a:off x="7461041" y="231577"/>
-            <a:ext cx="927071" cy="171450"/>
-          </a:xfrm>
-          <a:prstGeom prst="rect">
-            <a:avLst/>
-          </a:prstGeom>
-          <a:noFill/>
-          <a:ln/>
-        </p:spPr>
-        <p:txBody>
-          <a:bodyPr wrap="square" lIns="0" tIns="0" rIns="0" bIns="0" rtlCol="0" anchor="t"/>
-          <a:lstStyle/>
-          <a:p>
-            <a:pPr algn="ctr" indent="0" marL="0">
-              <a:buNone/>
-            </a:pPr>
-            <a:r>
-              <a:rPr lang="en-US" sz="1150" b="1" dirty="0">
-                <a:solidFill>
-                  <a:srgbClr val="FFFFFF"/>
-                </a:solidFill>
-                <a:latin typeface="Arial" pitchFamily="34" charset="0"/>
-                <a:ea typeface="Arial" pitchFamily="34" charset="-122"/>
-                <a:cs typeface="Arial" pitchFamily="34" charset="-120"/>
-              </a:rPr>
-              <a:t>CHAPTER 03</a:t>
-            </a:r>
-            <a:endParaRPr lang="en-US" sz="1150" dirty="0"/>
-          </a:p>
-        </p:txBody>
-      </p:sp>
       <p:pic>
         <p:nvPicPr>
-          <p:cNvPr id="5" name="Image 0" descr="/Users/danwahlin/.copilot/session-state/56a7a0da-def8-48d4-b5e8-0ac3878cb8dd/files/slides-build/icons/FaGithub-1F2328.png">
-            <a:hlinkClick r:id="rId2" tooltip="https://github.com/github/copilot-app-for-beginners/tree/main/03-development-workflows"/>
-          </p:cNvPr>
+          <p:cNvPr id="2" name="Image 0" descr="/Users/danwahlin/.copilot/session-state/56a7a0da-def8-48d4-b5e8-0ac3878cb8dd/files/slides-build/img/grad-corner.png">    </p:cNvPr>
           <p:cNvPicPr>
             <a:picLocks noChangeAspect="1"/>
           </p:cNvPicPr>
@@ -11917,6 +11674,103 @@
         </p:blipFill>
         <p:spPr>
           <a:xfrm>
+            <a:off x="6349901" y="0"/>
+            <a:ext cx="2793950" cy="1308050"/>
+          </a:xfrm>
+          <a:prstGeom prst="rect">
+            <a:avLst/>
+          </a:prstGeom>
+        </p:spPr>
+      </p:pic>
+      <p:sp>
+        <p:nvSpPr>
+          <p:cNvPr id="3" name="Text 0"/>
+          <p:cNvSpPr/>
+          <p:nvPr/>
+        </p:nvSpPr>
+        <p:spPr>
+          <a:xfrm>
+            <a:off x="7340501" y="177701"/>
+            <a:ext cx="1168301" cy="279350"/>
+          </a:xfrm>
+          <a:prstGeom prst="roundRect">
+            <a:avLst>
+              <a:gd name="adj" fmla="val 22731"/>
+            </a:avLst>
+          </a:prstGeom>
+          <a:solidFill>
+            <a:srgbClr val="1A7F37"/>
+          </a:solidFill>
+          <a:ln/>
+        </p:spPr>
+        <p:txBody>
+          <a:bodyPr wrap="square" rtlCol="0" anchor="ctr"/>
+          <a:lstStyle/>
+          <a:p>
+            <a:pPr indent="0" marL="0">
+              <a:buNone/>
+            </a:pPr>
+            <a:endParaRPr lang="en-US" dirty="0"/>
+          </a:p>
+        </p:txBody>
+      </p:sp>
+      <p:sp>
+        <p:nvSpPr>
+          <p:cNvPr id="4" name="Text 1"/>
+          <p:cNvSpPr/>
+          <p:nvPr/>
+        </p:nvSpPr>
+        <p:spPr>
+          <a:xfrm>
+            <a:off x="7461041" y="231577"/>
+            <a:ext cx="927071" cy="171450"/>
+          </a:xfrm>
+          <a:prstGeom prst="rect">
+            <a:avLst/>
+          </a:prstGeom>
+          <a:noFill/>
+          <a:ln/>
+        </p:spPr>
+        <p:txBody>
+          <a:bodyPr wrap="square" lIns="0" tIns="0" rIns="0" bIns="0" rtlCol="0" anchor="t"/>
+          <a:lstStyle/>
+          <a:p>
+            <a:pPr algn="ctr" indent="0" marL="0">
+              <a:buNone/>
+            </a:pPr>
+            <a:r>
+              <a:rPr lang="en-US" sz="1150" b="1" dirty="0">
+                <a:solidFill>
+                  <a:srgbClr val="FFFFFF"/>
+                </a:solidFill>
+                <a:latin typeface="Arial" pitchFamily="34" charset="0"/>
+                <a:ea typeface="Arial" pitchFamily="34" charset="-122"/>
+                <a:cs typeface="Arial" pitchFamily="34" charset="-120"/>
+              </a:rPr>
+              <a:t>CHAPTER 03</a:t>
+            </a:r>
+            <a:endParaRPr lang="en-US" sz="1150" dirty="0"/>
+          </a:p>
+        </p:txBody>
+      </p:sp>
+      <p:pic>
+        <p:nvPicPr>
+          <p:cNvPr id="5" name="Image 1" descr="/Users/danwahlin/.copilot/session-state/56a7a0da-def8-48d4-b5e8-0ac3878cb8dd/files/slides-build/icons/FaGithub-1F2328.png">
+            <a:hlinkClick r:id="rId3" tooltip="https://github.com/github/copilot-app-for-beginners/tree/main/03-development-workflows"/>
+          </p:cNvPr>
+          <p:cNvPicPr>
+            <a:picLocks noChangeAspect="1"/>
+          </p:cNvPicPr>
+          <p:nvPr/>
+        </p:nvPicPr>
+        <p:blipFill>
+          <a:blip r:embed="rId2"/>
+          <a:stretch>
+            <a:fillRect/>
+          </a:stretch>
+        </p:blipFill>
+        <p:spPr>
+          <a:xfrm>
             <a:off x="8610600" y="165050"/>
             <a:ext cx="304800" cy="304800"/>
           </a:xfrm>
@@ -11927,7 +11781,7 @@
       </p:pic>
       <p:sp>
         <p:nvSpPr>
-          <p:cNvPr id="6" name="Text 3"/>
+          <p:cNvPr id="6" name="Text 2"/>
           <p:cNvSpPr/>
           <p:nvPr/>
         </p:nvSpPr>
@@ -11966,7 +11820,7 @@
       </p:sp>
       <p:sp>
         <p:nvSpPr>
-          <p:cNvPr id="7" name="Text 4"/>
+          <p:cNvPr id="7" name="Text 3"/>
           <p:cNvSpPr/>
           <p:nvPr/>
         </p:nvSpPr>
@@ -12011,7 +11865,7 @@
       </p:sp>
       <p:sp>
         <p:nvSpPr>
-          <p:cNvPr id="8" name="Text 5"/>
+          <p:cNvPr id="8" name="Text 4"/>
           <p:cNvSpPr/>
           <p:nvPr/>
         </p:nvSpPr>
@@ -12043,7 +11897,7 @@
       </p:sp>
       <p:sp>
         <p:nvSpPr>
-          <p:cNvPr id="9" name="Shape 6"/>
+          <p:cNvPr id="9" name="Shape 5"/>
           <p:cNvSpPr/>
           <p:nvPr/>
         </p:nvSpPr>
@@ -12066,7 +11920,7 @@
       </p:sp>
       <p:sp>
         <p:nvSpPr>
-          <p:cNvPr id="10" name="Shape 7"/>
+          <p:cNvPr id="10" name="Shape 6"/>
           <p:cNvSpPr/>
           <p:nvPr/>
         </p:nvSpPr>
@@ -12089,7 +11943,7 @@
       </p:sp>
       <p:sp>
         <p:nvSpPr>
-          <p:cNvPr id="11" name="Shape 8"/>
+          <p:cNvPr id="11" name="Shape 7"/>
           <p:cNvSpPr/>
           <p:nvPr/>
         </p:nvSpPr>
@@ -12112,7 +11966,7 @@
       </p:sp>
       <p:sp>
         <p:nvSpPr>
-          <p:cNvPr id="12" name="Shape 9"/>
+          <p:cNvPr id="12" name="Shape 8"/>
           <p:cNvSpPr/>
           <p:nvPr/>
         </p:nvSpPr>
@@ -12135,7 +11989,7 @@
       </p:sp>
       <p:sp>
         <p:nvSpPr>
-          <p:cNvPr id="13" name="Text 10"/>
+          <p:cNvPr id="13" name="Text 9"/>
           <p:cNvSpPr/>
           <p:nvPr/>
         </p:nvSpPr>
@@ -12174,7 +12028,7 @@
       </p:sp>
       <p:sp>
         <p:nvSpPr>
-          <p:cNvPr id="14" name="Text 11"/>
+          <p:cNvPr id="14" name="Text 10"/>
           <p:cNvSpPr/>
           <p:nvPr/>
         </p:nvSpPr>
@@ -12213,7 +12067,7 @@
       </p:sp>
       <p:sp>
         <p:nvSpPr>
-          <p:cNvPr id="15" name="Text 12"/>
+          <p:cNvPr id="15" name="Text 11"/>
           <p:cNvSpPr/>
           <p:nvPr/>
         </p:nvSpPr>
@@ -12255,7 +12109,7 @@
       </p:sp>
       <p:sp>
         <p:nvSpPr>
-          <p:cNvPr id="16" name="Text 13"/>
+          <p:cNvPr id="16" name="Text 12"/>
           <p:cNvSpPr/>
           <p:nvPr/>
         </p:nvSpPr>
@@ -12287,7 +12141,7 @@
       </p:sp>
       <p:sp>
         <p:nvSpPr>
-          <p:cNvPr id="17" name="Shape 14"/>
+          <p:cNvPr id="17" name="Shape 13"/>
           <p:cNvSpPr/>
           <p:nvPr/>
         </p:nvSpPr>
@@ -12310,7 +12164,7 @@
       </p:sp>
       <p:sp>
         <p:nvSpPr>
-          <p:cNvPr id="18" name="Shape 15"/>
+          <p:cNvPr id="18" name="Shape 14"/>
           <p:cNvSpPr/>
           <p:nvPr/>
         </p:nvSpPr>
@@ -12333,7 +12187,7 @@
       </p:sp>
       <p:sp>
         <p:nvSpPr>
-          <p:cNvPr id="19" name="Shape 16"/>
+          <p:cNvPr id="19" name="Shape 15"/>
           <p:cNvSpPr/>
           <p:nvPr/>
         </p:nvSpPr>
@@ -12356,7 +12210,7 @@
       </p:sp>
       <p:sp>
         <p:nvSpPr>
-          <p:cNvPr id="20" name="Shape 17"/>
+          <p:cNvPr id="20" name="Shape 16"/>
           <p:cNvSpPr/>
           <p:nvPr/>
         </p:nvSpPr>
@@ -12379,7 +12233,7 @@
       </p:sp>
       <p:sp>
         <p:nvSpPr>
-          <p:cNvPr id="21" name="Text 18"/>
+          <p:cNvPr id="21" name="Text 17"/>
           <p:cNvSpPr/>
           <p:nvPr/>
         </p:nvSpPr>
@@ -12418,7 +12272,7 @@
       </p:sp>
       <p:sp>
         <p:nvSpPr>
-          <p:cNvPr id="22" name="Text 19"/>
+          <p:cNvPr id="22" name="Text 18"/>
           <p:cNvSpPr/>
           <p:nvPr/>
         </p:nvSpPr>
@@ -12457,7 +12311,7 @@
       </p:sp>
       <p:sp>
         <p:nvSpPr>
-          <p:cNvPr id="23" name="Text 20"/>
+          <p:cNvPr id="23" name="Text 19"/>
           <p:cNvSpPr/>
           <p:nvPr/>
         </p:nvSpPr>
@@ -12529,112 +12383,9 @@
           <a:chExt cx="0" cy="0"/>
         </a:xfrm>
       </p:grpSpPr>
-      <p:sp>
-        <p:nvSpPr>
-          <p:cNvPr id="2" name="Text 0"/>
-          <p:cNvSpPr/>
-          <p:nvPr/>
-        </p:nvSpPr>
-        <p:spPr>
-          <a:xfrm>
-            <a:off x="0" y="0"/>
-            <a:ext cx="9144000" cy="76200"/>
-          </a:xfrm>
-          <a:prstGeom prst="rect">
-            <a:avLst/>
-          </a:prstGeom>
-          <a:solidFill>
-            <a:srgbClr val="9A6700"/>
-          </a:solidFill>
-          <a:ln/>
-        </p:spPr>
-        <p:txBody>
-          <a:bodyPr wrap="square" rtlCol="0" anchor="ctr"/>
-          <a:lstStyle/>
-          <a:p>
-            <a:pPr indent="0" marL="0">
-              <a:buNone/>
-            </a:pPr>
-            <a:endParaRPr lang="en-US" dirty="0"/>
-          </a:p>
-        </p:txBody>
-      </p:sp>
-      <p:sp>
-        <p:nvSpPr>
-          <p:cNvPr id="3" name="Text 1"/>
-          <p:cNvSpPr/>
-          <p:nvPr/>
-        </p:nvSpPr>
-        <p:spPr>
-          <a:xfrm>
-            <a:off x="7340501" y="177701"/>
-            <a:ext cx="1168301" cy="279350"/>
-          </a:xfrm>
-          <a:prstGeom prst="roundRect">
-            <a:avLst>
-              <a:gd name="adj" fmla="val 22731"/>
-            </a:avLst>
-          </a:prstGeom>
-          <a:solidFill>
-            <a:srgbClr val="1A7F37"/>
-          </a:solidFill>
-          <a:ln/>
-        </p:spPr>
-        <p:txBody>
-          <a:bodyPr wrap="square" rtlCol="0" anchor="ctr"/>
-          <a:lstStyle/>
-          <a:p>
-            <a:pPr indent="0" marL="0">
-              <a:buNone/>
-            </a:pPr>
-            <a:endParaRPr lang="en-US" dirty="0"/>
-          </a:p>
-        </p:txBody>
-      </p:sp>
-      <p:sp>
-        <p:nvSpPr>
-          <p:cNvPr id="4" name="Text 2"/>
-          <p:cNvSpPr/>
-          <p:nvPr/>
-        </p:nvSpPr>
-        <p:spPr>
-          <a:xfrm>
-            <a:off x="7461041" y="231577"/>
-            <a:ext cx="927071" cy="171450"/>
-          </a:xfrm>
-          <a:prstGeom prst="rect">
-            <a:avLst/>
-          </a:prstGeom>
-          <a:noFill/>
-          <a:ln/>
-        </p:spPr>
-        <p:txBody>
-          <a:bodyPr wrap="square" lIns="0" tIns="0" rIns="0" bIns="0" rtlCol="0" anchor="t"/>
-          <a:lstStyle/>
-          <a:p>
-            <a:pPr algn="ctr" indent="0" marL="0">
-              <a:buNone/>
-            </a:pPr>
-            <a:r>
-              <a:rPr lang="en-US" sz="1150" b="1" dirty="0">
-                <a:solidFill>
-                  <a:srgbClr val="FFFFFF"/>
-                </a:solidFill>
-                <a:latin typeface="Arial" pitchFamily="34" charset="0"/>
-                <a:ea typeface="Arial" pitchFamily="34" charset="-122"/>
-                <a:cs typeface="Arial" pitchFamily="34" charset="-120"/>
-              </a:rPr>
-              <a:t>CHAPTER 03</a:t>
-            </a:r>
-            <a:endParaRPr lang="en-US" sz="1150" dirty="0"/>
-          </a:p>
-        </p:txBody>
-      </p:sp>
       <p:pic>
         <p:nvPicPr>
-          <p:cNvPr id="5" name="Image 0" descr="/Users/danwahlin/.copilot/session-state/56a7a0da-def8-48d4-b5e8-0ac3878cb8dd/files/slides-build/icons/FaGithub-1F2328.png">
-            <a:hlinkClick r:id="rId2" tooltip="https://github.com/github/copilot-app-for-beginners/tree/main/03-development-workflows"/>
-          </p:cNvPr>
+          <p:cNvPr id="2" name="Image 0" descr="/Users/danwahlin/.copilot/session-state/56a7a0da-def8-48d4-b5e8-0ac3878cb8dd/files/slides-build/img/grad-corner.png">    </p:cNvPr>
           <p:cNvPicPr>
             <a:picLocks noChangeAspect="1"/>
           </p:cNvPicPr>
@@ -12648,6 +12399,103 @@
         </p:blipFill>
         <p:spPr>
           <a:xfrm>
+            <a:off x="6349901" y="0"/>
+            <a:ext cx="2793950" cy="1308050"/>
+          </a:xfrm>
+          <a:prstGeom prst="rect">
+            <a:avLst/>
+          </a:prstGeom>
+        </p:spPr>
+      </p:pic>
+      <p:sp>
+        <p:nvSpPr>
+          <p:cNvPr id="3" name="Text 0"/>
+          <p:cNvSpPr/>
+          <p:nvPr/>
+        </p:nvSpPr>
+        <p:spPr>
+          <a:xfrm>
+            <a:off x="7340501" y="177701"/>
+            <a:ext cx="1168301" cy="279350"/>
+          </a:xfrm>
+          <a:prstGeom prst="roundRect">
+            <a:avLst>
+              <a:gd name="adj" fmla="val 22731"/>
+            </a:avLst>
+          </a:prstGeom>
+          <a:solidFill>
+            <a:srgbClr val="1A7F37"/>
+          </a:solidFill>
+          <a:ln/>
+        </p:spPr>
+        <p:txBody>
+          <a:bodyPr wrap="square" rtlCol="0" anchor="ctr"/>
+          <a:lstStyle/>
+          <a:p>
+            <a:pPr indent="0" marL="0">
+              <a:buNone/>
+            </a:pPr>
+            <a:endParaRPr lang="en-US" dirty="0"/>
+          </a:p>
+        </p:txBody>
+      </p:sp>
+      <p:sp>
+        <p:nvSpPr>
+          <p:cNvPr id="4" name="Text 1"/>
+          <p:cNvSpPr/>
+          <p:nvPr/>
+        </p:nvSpPr>
+        <p:spPr>
+          <a:xfrm>
+            <a:off x="7461041" y="231577"/>
+            <a:ext cx="927071" cy="171450"/>
+          </a:xfrm>
+          <a:prstGeom prst="rect">
+            <a:avLst/>
+          </a:prstGeom>
+          <a:noFill/>
+          <a:ln/>
+        </p:spPr>
+        <p:txBody>
+          <a:bodyPr wrap="square" lIns="0" tIns="0" rIns="0" bIns="0" rtlCol="0" anchor="t"/>
+          <a:lstStyle/>
+          <a:p>
+            <a:pPr algn="ctr" indent="0" marL="0">
+              <a:buNone/>
+            </a:pPr>
+            <a:r>
+              <a:rPr lang="en-US" sz="1150" b="1" dirty="0">
+                <a:solidFill>
+                  <a:srgbClr val="FFFFFF"/>
+                </a:solidFill>
+                <a:latin typeface="Arial" pitchFamily="34" charset="0"/>
+                <a:ea typeface="Arial" pitchFamily="34" charset="-122"/>
+                <a:cs typeface="Arial" pitchFamily="34" charset="-120"/>
+              </a:rPr>
+              <a:t>CHAPTER 03</a:t>
+            </a:r>
+            <a:endParaRPr lang="en-US" sz="1150" dirty="0"/>
+          </a:p>
+        </p:txBody>
+      </p:sp>
+      <p:pic>
+        <p:nvPicPr>
+          <p:cNvPr id="5" name="Image 1" descr="/Users/danwahlin/.copilot/session-state/56a7a0da-def8-48d4-b5e8-0ac3878cb8dd/files/slides-build/icons/FaGithub-1F2328.png">
+            <a:hlinkClick r:id="rId3" tooltip="https://github.com/github/copilot-app-for-beginners/tree/main/03-development-workflows"/>
+          </p:cNvPr>
+          <p:cNvPicPr>
+            <a:picLocks noChangeAspect="1"/>
+          </p:cNvPicPr>
+          <p:nvPr/>
+        </p:nvPicPr>
+        <p:blipFill>
+          <a:blip r:embed="rId2"/>
+          <a:stretch>
+            <a:fillRect/>
+          </a:stretch>
+        </p:blipFill>
+        <p:spPr>
+          <a:xfrm>
             <a:off x="8610600" y="165050"/>
             <a:ext cx="304800" cy="304800"/>
           </a:xfrm>
@@ -12658,7 +12506,7 @@
       </p:pic>
       <p:sp>
         <p:nvSpPr>
-          <p:cNvPr id="6" name="Text 3"/>
+          <p:cNvPr id="6" name="Text 2"/>
           <p:cNvSpPr/>
           <p:nvPr/>
         </p:nvSpPr>
@@ -12697,7 +12545,7 @@
       </p:sp>
       <p:sp>
         <p:nvSpPr>
-          <p:cNvPr id="7" name="Text 4"/>
+          <p:cNvPr id="7" name="Text 3"/>
           <p:cNvSpPr/>
           <p:nvPr/>
         </p:nvSpPr>
@@ -12742,7 +12590,7 @@
       </p:sp>
       <p:sp>
         <p:nvSpPr>
-          <p:cNvPr id="8" name="Text 5"/>
+          <p:cNvPr id="8" name="Text 4"/>
           <p:cNvSpPr/>
           <p:nvPr/>
         </p:nvSpPr>
@@ -12785,63 +12633,7 @@
       </p:sp>
       <p:pic>
         <p:nvPicPr>
-          <p:cNvPr id="9" name="Image 1" descr="/Users/danwahlin/.copilot/session-state/56a7a0da-def8-48d4-b5e8-0ac3878cb8dd/files/slides-build/img/03-record-playback-retake-loop.jpg">    </p:cNvPr>
-          <p:cNvPicPr>
-            <a:picLocks noChangeAspect="1"/>
-          </p:cNvPicPr>
-          <p:nvPr/>
-        </p:nvPicPr>
-        <p:blipFill>
-          <a:blip r:embed="rId3"/>
-          <a:stretch>
-            <a:fillRect/>
-          </a:stretch>
-        </p:blipFill>
-        <p:spPr>
-          <a:xfrm>
-            <a:off x="584150" y="1424880"/>
-            <a:ext cx="3657600" cy="2438400"/>
-          </a:xfrm>
-          <a:prstGeom prst="rect">
-            <a:avLst/>
-          </a:prstGeom>
-        </p:spPr>
-      </p:pic>
-      <p:sp>
-        <p:nvSpPr>
-          <p:cNvPr id="10" name="Text 6"/>
-          <p:cNvSpPr/>
-          <p:nvPr/>
-        </p:nvSpPr>
-        <p:spPr>
-          <a:xfrm>
-            <a:off x="507950" y="4101852"/>
-            <a:ext cx="381000" cy="381000"/>
-          </a:xfrm>
-          <a:prstGeom prst="roundRect">
-            <a:avLst>
-              <a:gd name="adj" fmla="val 23333"/>
-            </a:avLst>
-          </a:prstGeom>
-          <a:solidFill>
-            <a:srgbClr val="DDF4FF"/>
-          </a:solidFill>
-          <a:ln/>
-        </p:spPr>
-        <p:txBody>
-          <a:bodyPr wrap="square" rtlCol="0" anchor="ctr"/>
-          <a:lstStyle/>
-          <a:p>
-            <a:pPr indent="0" marL="0">
-              <a:buNone/>
-            </a:pPr>
-            <a:endParaRPr lang="en-US" dirty="0"/>
-          </a:p>
-        </p:txBody>
-      </p:sp>
-      <p:pic>
-        <p:nvPicPr>
-          <p:cNvPr id="11" name="Image 2" descr="/Users/danwahlin/.copilot/session-state/56a7a0da-def8-48d4-b5e8-0ac3878cb8dd/files/slides-build/icons/GoSync-0969DA.png">    </p:cNvPr>
+          <p:cNvPr id="9" name="Image 2" descr="/Users/danwahlin/.copilot/session-state/56a7a0da-def8-48d4-b5e8-0ac3878cb8dd/files/slides-build/img/03-record-playback-retake-loop.jpg">    </p:cNvPr>
           <p:cNvPicPr>
             <a:picLocks noChangeAspect="1"/>
           </p:cNvPicPr>
@@ -12855,6 +12647,62 @@
         </p:blipFill>
         <p:spPr>
           <a:xfrm>
+            <a:off x="584150" y="1424880"/>
+            <a:ext cx="3657600" cy="2438400"/>
+          </a:xfrm>
+          <a:prstGeom prst="rect">
+            <a:avLst/>
+          </a:prstGeom>
+        </p:spPr>
+      </p:pic>
+      <p:sp>
+        <p:nvSpPr>
+          <p:cNvPr id="10" name="Text 5"/>
+          <p:cNvSpPr/>
+          <p:nvPr/>
+        </p:nvSpPr>
+        <p:spPr>
+          <a:xfrm>
+            <a:off x="507950" y="4101852"/>
+            <a:ext cx="381000" cy="381000"/>
+          </a:xfrm>
+          <a:prstGeom prst="roundRect">
+            <a:avLst>
+              <a:gd name="adj" fmla="val 23333"/>
+            </a:avLst>
+          </a:prstGeom>
+          <a:solidFill>
+            <a:srgbClr val="DDF4FF"/>
+          </a:solidFill>
+          <a:ln/>
+        </p:spPr>
+        <p:txBody>
+          <a:bodyPr wrap="square" rtlCol="0" anchor="ctr"/>
+          <a:lstStyle/>
+          <a:p>
+            <a:pPr indent="0" marL="0">
+              <a:buNone/>
+            </a:pPr>
+            <a:endParaRPr lang="en-US" dirty="0"/>
+          </a:p>
+        </p:txBody>
+      </p:sp>
+      <p:pic>
+        <p:nvPicPr>
+          <p:cNvPr id="11" name="Image 3" descr="/Users/danwahlin/.copilot/session-state/56a7a0da-def8-48d4-b5e8-0ac3878cb8dd/files/slides-build/icons/GoSync-0969DA.png">    </p:cNvPr>
+          <p:cNvPicPr>
+            <a:picLocks noChangeAspect="1"/>
+          </p:cNvPicPr>
+          <p:nvPr/>
+        </p:nvPicPr>
+        <p:blipFill>
+          <a:blip r:embed="rId5"/>
+          <a:stretch>
+            <a:fillRect/>
+          </a:stretch>
+        </p:blipFill>
+        <p:spPr>
+          <a:xfrm>
             <a:off x="590550" y="4184452"/>
             <a:ext cx="215801" cy="215801"/>
           </a:xfrm>
@@ -12865,7 +12713,7 @@
       </p:pic>
       <p:sp>
         <p:nvSpPr>
-          <p:cNvPr id="12" name="Text 7"/>
+          <p:cNvPr id="12" name="Text 6"/>
           <p:cNvSpPr/>
           <p:nvPr/>
         </p:nvSpPr>
@@ -12904,7 +12752,7 @@
       </p:sp>
       <p:sp>
         <p:nvSpPr>
-          <p:cNvPr id="13" name="Text 8"/>
+          <p:cNvPr id="13" name="Text 7"/>
           <p:cNvSpPr/>
           <p:nvPr/>
         </p:nvSpPr>
@@ -12946,7 +12794,7 @@
       </p:sp>
       <p:sp>
         <p:nvSpPr>
-          <p:cNvPr id="14" name="Text 9"/>
+          <p:cNvPr id="14" name="Text 8"/>
           <p:cNvSpPr/>
           <p:nvPr/>
         </p:nvSpPr>
@@ -12989,63 +12837,7 @@
       </p:sp>
       <p:pic>
         <p:nvPicPr>
-          <p:cNvPr id="15" name="Image 3" descr="/Users/danwahlin/.copilot/session-state/56a7a0da-def8-48d4-b5e8-0ac3878cb8dd/files/slides-build/img/03-producer-review-desk-github.jpg">    </p:cNvPr>
-          <p:cNvPicPr>
-            <a:picLocks noChangeAspect="1"/>
-          </p:cNvPicPr>
-          <p:nvPr/>
-        </p:nvPicPr>
-        <p:blipFill>
-          <a:blip r:embed="rId5"/>
-          <a:stretch>
-            <a:fillRect/>
-          </a:stretch>
-        </p:blipFill>
-        <p:spPr>
-          <a:xfrm>
-            <a:off x="4902101" y="1424880"/>
-            <a:ext cx="3657600" cy="2438400"/>
-          </a:xfrm>
-          <a:prstGeom prst="rect">
-            <a:avLst/>
-          </a:prstGeom>
-        </p:spPr>
-      </p:pic>
-      <p:sp>
-        <p:nvSpPr>
-          <p:cNvPr id="16" name="Text 10"/>
-          <p:cNvSpPr/>
-          <p:nvPr/>
-        </p:nvSpPr>
-        <p:spPr>
-          <a:xfrm>
-            <a:off x="4825901" y="4101852"/>
-            <a:ext cx="381000" cy="381000"/>
-          </a:xfrm>
-          <a:prstGeom prst="roundRect">
-            <a:avLst>
-              <a:gd name="adj" fmla="val 23333"/>
-            </a:avLst>
-          </a:prstGeom>
-          <a:solidFill>
-            <a:srgbClr val="FBEFFF"/>
-          </a:solidFill>
-          <a:ln/>
-        </p:spPr>
-        <p:txBody>
-          <a:bodyPr wrap="square" rtlCol="0" anchor="ctr"/>
-          <a:lstStyle/>
-          <a:p>
-            <a:pPr indent="0" marL="0">
-              <a:buNone/>
-            </a:pPr>
-            <a:endParaRPr lang="en-US" dirty="0"/>
-          </a:p>
-        </p:txBody>
-      </p:sp>
-      <p:pic>
-        <p:nvPicPr>
-          <p:cNvPr id="17" name="Image 4" descr="/Users/danwahlin/.copilot/session-state/56a7a0da-def8-48d4-b5e8-0ac3878cb8dd/files/slides-build/icons/FaGithub-8250DF.png">    </p:cNvPr>
+          <p:cNvPr id="15" name="Image 4" descr="/Users/danwahlin/.copilot/session-state/56a7a0da-def8-48d4-b5e8-0ac3878cb8dd/files/slides-build/img/03-producer-review-desk-github.jpg">    </p:cNvPr>
           <p:cNvPicPr>
             <a:picLocks noChangeAspect="1"/>
           </p:cNvPicPr>
@@ -13059,6 +12851,62 @@
         </p:blipFill>
         <p:spPr>
           <a:xfrm>
+            <a:off x="4902101" y="1424880"/>
+            <a:ext cx="3657600" cy="2438400"/>
+          </a:xfrm>
+          <a:prstGeom prst="rect">
+            <a:avLst/>
+          </a:prstGeom>
+        </p:spPr>
+      </p:pic>
+      <p:sp>
+        <p:nvSpPr>
+          <p:cNvPr id="16" name="Text 9"/>
+          <p:cNvSpPr/>
+          <p:nvPr/>
+        </p:nvSpPr>
+        <p:spPr>
+          <a:xfrm>
+            <a:off x="4825901" y="4101852"/>
+            <a:ext cx="381000" cy="381000"/>
+          </a:xfrm>
+          <a:prstGeom prst="roundRect">
+            <a:avLst>
+              <a:gd name="adj" fmla="val 23333"/>
+            </a:avLst>
+          </a:prstGeom>
+          <a:solidFill>
+            <a:srgbClr val="FBEFFF"/>
+          </a:solidFill>
+          <a:ln/>
+        </p:spPr>
+        <p:txBody>
+          <a:bodyPr wrap="square" rtlCol="0" anchor="ctr"/>
+          <a:lstStyle/>
+          <a:p>
+            <a:pPr indent="0" marL="0">
+              <a:buNone/>
+            </a:pPr>
+            <a:endParaRPr lang="en-US" dirty="0"/>
+          </a:p>
+        </p:txBody>
+      </p:sp>
+      <p:pic>
+        <p:nvPicPr>
+          <p:cNvPr id="17" name="Image 5" descr="/Users/danwahlin/.copilot/session-state/56a7a0da-def8-48d4-b5e8-0ac3878cb8dd/files/slides-build/icons/FaGithub-8250DF.png">    </p:cNvPr>
+          <p:cNvPicPr>
+            <a:picLocks noChangeAspect="1"/>
+          </p:cNvPicPr>
+          <p:nvPr/>
+        </p:nvPicPr>
+        <p:blipFill>
+          <a:blip r:embed="rId7"/>
+          <a:stretch>
+            <a:fillRect/>
+          </a:stretch>
+        </p:blipFill>
+        <p:spPr>
+          <a:xfrm>
             <a:off x="4908500" y="4184452"/>
             <a:ext cx="215801" cy="215801"/>
           </a:xfrm>
@@ -13069,7 +12917,7 @@
       </p:pic>
       <p:sp>
         <p:nvSpPr>
-          <p:cNvPr id="18" name="Text 11"/>
+          <p:cNvPr id="18" name="Text 10"/>
           <p:cNvSpPr/>
           <p:nvPr/>
         </p:nvSpPr>
@@ -13108,7 +12956,7 @@
       </p:sp>
       <p:sp>
         <p:nvSpPr>
-          <p:cNvPr id="19" name="Text 12"/>
+          <p:cNvPr id="19" name="Text 11"/>
           <p:cNvSpPr/>
           <p:nvPr/>
         </p:nvSpPr>
@@ -13180,112 +13028,9 @@
           <a:chExt cx="0" cy="0"/>
         </a:xfrm>
       </p:grpSpPr>
-      <p:sp>
-        <p:nvSpPr>
-          <p:cNvPr id="2" name="Text 0"/>
-          <p:cNvSpPr/>
-          <p:nvPr/>
-        </p:nvSpPr>
-        <p:spPr>
-          <a:xfrm>
-            <a:off x="0" y="0"/>
-            <a:ext cx="9144000" cy="76200"/>
-          </a:xfrm>
-          <a:prstGeom prst="rect">
-            <a:avLst/>
-          </a:prstGeom>
-          <a:solidFill>
-            <a:srgbClr val="1A7F37"/>
-          </a:solidFill>
-          <a:ln/>
-        </p:spPr>
-        <p:txBody>
-          <a:bodyPr wrap="square" rtlCol="0" anchor="ctr"/>
-          <a:lstStyle/>
-          <a:p>
-            <a:pPr indent="0" marL="0">
-              <a:buNone/>
-            </a:pPr>
-            <a:endParaRPr lang="en-US" dirty="0"/>
-          </a:p>
-        </p:txBody>
-      </p:sp>
-      <p:sp>
-        <p:nvSpPr>
-          <p:cNvPr id="3" name="Text 1"/>
-          <p:cNvSpPr/>
-          <p:nvPr/>
-        </p:nvSpPr>
-        <p:spPr>
-          <a:xfrm>
-            <a:off x="7340501" y="177701"/>
-            <a:ext cx="1168301" cy="279350"/>
-          </a:xfrm>
-          <a:prstGeom prst="roundRect">
-            <a:avLst>
-              <a:gd name="adj" fmla="val 22731"/>
-            </a:avLst>
-          </a:prstGeom>
-          <a:solidFill>
-            <a:srgbClr val="1A7F37"/>
-          </a:solidFill>
-          <a:ln/>
-        </p:spPr>
-        <p:txBody>
-          <a:bodyPr wrap="square" rtlCol="0" anchor="ctr"/>
-          <a:lstStyle/>
-          <a:p>
-            <a:pPr indent="0" marL="0">
-              <a:buNone/>
-            </a:pPr>
-            <a:endParaRPr lang="en-US" dirty="0"/>
-          </a:p>
-        </p:txBody>
-      </p:sp>
-      <p:sp>
-        <p:nvSpPr>
-          <p:cNvPr id="4" name="Text 2"/>
-          <p:cNvSpPr/>
-          <p:nvPr/>
-        </p:nvSpPr>
-        <p:spPr>
-          <a:xfrm>
-            <a:off x="7461041" y="231577"/>
-            <a:ext cx="927071" cy="171450"/>
-          </a:xfrm>
-          <a:prstGeom prst="rect">
-            <a:avLst/>
-          </a:prstGeom>
-          <a:noFill/>
-          <a:ln/>
-        </p:spPr>
-        <p:txBody>
-          <a:bodyPr wrap="square" lIns="0" tIns="0" rIns="0" bIns="0" rtlCol="0" anchor="t"/>
-          <a:lstStyle/>
-          <a:p>
-            <a:pPr algn="ctr" indent="0" marL="0">
-              <a:buNone/>
-            </a:pPr>
-            <a:r>
-              <a:rPr lang="en-US" sz="1150" b="1" dirty="0">
-                <a:solidFill>
-                  <a:srgbClr val="FFFFFF"/>
-                </a:solidFill>
-                <a:latin typeface="Arial" pitchFamily="34" charset="0"/>
-                <a:ea typeface="Arial" pitchFamily="34" charset="-122"/>
-                <a:cs typeface="Arial" pitchFamily="34" charset="-120"/>
-              </a:rPr>
-              <a:t>CHAPTER 03</a:t>
-            </a:r>
-            <a:endParaRPr lang="en-US" sz="1150" dirty="0"/>
-          </a:p>
-        </p:txBody>
-      </p:sp>
       <p:pic>
         <p:nvPicPr>
-          <p:cNvPr id="5" name="Image 0" descr="/Users/danwahlin/.copilot/session-state/56a7a0da-def8-48d4-b5e8-0ac3878cb8dd/files/slides-build/icons/FaGithub-1F2328.png">
-            <a:hlinkClick r:id="rId2" tooltip="https://github.com/github/copilot-app-for-beginners/tree/main/03-development-workflows"/>
-          </p:cNvPr>
+          <p:cNvPr id="2" name="Image 0" descr="/Users/danwahlin/.copilot/session-state/56a7a0da-def8-48d4-b5e8-0ac3878cb8dd/files/slides-build/img/grad-corner.png">    </p:cNvPr>
           <p:cNvPicPr>
             <a:picLocks noChangeAspect="1"/>
           </p:cNvPicPr>
@@ -13299,6 +13044,103 @@
         </p:blipFill>
         <p:spPr>
           <a:xfrm>
+            <a:off x="6349901" y="0"/>
+            <a:ext cx="2793950" cy="1308050"/>
+          </a:xfrm>
+          <a:prstGeom prst="rect">
+            <a:avLst/>
+          </a:prstGeom>
+        </p:spPr>
+      </p:pic>
+      <p:sp>
+        <p:nvSpPr>
+          <p:cNvPr id="3" name="Text 0"/>
+          <p:cNvSpPr/>
+          <p:nvPr/>
+        </p:nvSpPr>
+        <p:spPr>
+          <a:xfrm>
+            <a:off x="7340501" y="177701"/>
+            <a:ext cx="1168301" cy="279350"/>
+          </a:xfrm>
+          <a:prstGeom prst="roundRect">
+            <a:avLst>
+              <a:gd name="adj" fmla="val 22731"/>
+            </a:avLst>
+          </a:prstGeom>
+          <a:solidFill>
+            <a:srgbClr val="1A7F37"/>
+          </a:solidFill>
+          <a:ln/>
+        </p:spPr>
+        <p:txBody>
+          <a:bodyPr wrap="square" rtlCol="0" anchor="ctr"/>
+          <a:lstStyle/>
+          <a:p>
+            <a:pPr indent="0" marL="0">
+              <a:buNone/>
+            </a:pPr>
+            <a:endParaRPr lang="en-US" dirty="0"/>
+          </a:p>
+        </p:txBody>
+      </p:sp>
+      <p:sp>
+        <p:nvSpPr>
+          <p:cNvPr id="4" name="Text 1"/>
+          <p:cNvSpPr/>
+          <p:nvPr/>
+        </p:nvSpPr>
+        <p:spPr>
+          <a:xfrm>
+            <a:off x="7461041" y="231577"/>
+            <a:ext cx="927071" cy="171450"/>
+          </a:xfrm>
+          <a:prstGeom prst="rect">
+            <a:avLst/>
+          </a:prstGeom>
+          <a:noFill/>
+          <a:ln/>
+        </p:spPr>
+        <p:txBody>
+          <a:bodyPr wrap="square" lIns="0" tIns="0" rIns="0" bIns="0" rtlCol="0" anchor="t"/>
+          <a:lstStyle/>
+          <a:p>
+            <a:pPr algn="ctr" indent="0" marL="0">
+              <a:buNone/>
+            </a:pPr>
+            <a:r>
+              <a:rPr lang="en-US" sz="1150" b="1" dirty="0">
+                <a:solidFill>
+                  <a:srgbClr val="FFFFFF"/>
+                </a:solidFill>
+                <a:latin typeface="Arial" pitchFamily="34" charset="0"/>
+                <a:ea typeface="Arial" pitchFamily="34" charset="-122"/>
+                <a:cs typeface="Arial" pitchFamily="34" charset="-120"/>
+              </a:rPr>
+              <a:t>CHAPTER 03</a:t>
+            </a:r>
+            <a:endParaRPr lang="en-US" sz="1150" dirty="0"/>
+          </a:p>
+        </p:txBody>
+      </p:sp>
+      <p:pic>
+        <p:nvPicPr>
+          <p:cNvPr id="5" name="Image 1" descr="/Users/danwahlin/.copilot/session-state/56a7a0da-def8-48d4-b5e8-0ac3878cb8dd/files/slides-build/icons/FaGithub-1F2328.png">
+            <a:hlinkClick r:id="rId3" tooltip="https://github.com/github/copilot-app-for-beginners/tree/main/03-development-workflows"/>
+          </p:cNvPr>
+          <p:cNvPicPr>
+            <a:picLocks noChangeAspect="1"/>
+          </p:cNvPicPr>
+          <p:nvPr/>
+        </p:nvPicPr>
+        <p:blipFill>
+          <a:blip r:embed="rId2"/>
+          <a:stretch>
+            <a:fillRect/>
+          </a:stretch>
+        </p:blipFill>
+        <p:spPr>
+          <a:xfrm>
             <a:off x="8610600" y="165050"/>
             <a:ext cx="304800" cy="304800"/>
           </a:xfrm>
@@ -13309,7 +13151,7 @@
       </p:pic>
       <p:sp>
         <p:nvSpPr>
-          <p:cNvPr id="6" name="Text 3"/>
+          <p:cNvPr id="6" name="Text 2"/>
           <p:cNvSpPr/>
           <p:nvPr/>
         </p:nvSpPr>
@@ -13348,7 +13190,7 @@
       </p:sp>
       <p:sp>
         <p:nvSpPr>
-          <p:cNvPr id="7" name="Text 4"/>
+          <p:cNvPr id="7" name="Text 3"/>
           <p:cNvSpPr/>
           <p:nvPr/>
         </p:nvSpPr>
@@ -13393,7 +13235,7 @@
       </p:sp>
       <p:sp>
         <p:nvSpPr>
-          <p:cNvPr id="8" name="Text 5"/>
+          <p:cNvPr id="8" name="Text 4"/>
           <p:cNvSpPr/>
           <p:nvPr/>
         </p:nvSpPr>
@@ -13438,7 +13280,7 @@
       </p:sp>
       <p:sp>
         <p:nvSpPr>
-          <p:cNvPr id="9" name="Text 6"/>
+          <p:cNvPr id="9" name="Text 5"/>
           <p:cNvSpPr/>
           <p:nvPr/>
         </p:nvSpPr>
@@ -13481,14 +13323,14 @@
       </p:sp>
       <p:pic>
         <p:nvPicPr>
-          <p:cNvPr id="10" name="Image 1" descr="/Users/danwahlin/.copilot/session-state/56a7a0da-def8-48d4-b5e8-0ac3878cb8dd/files/slides-build/img/03-development-loop.jpg">    </p:cNvPr>
+          <p:cNvPr id="10" name="Image 2" descr="/Users/danwahlin/.copilot/session-state/56a7a0da-def8-48d4-b5e8-0ac3878cb8dd/files/slides-build/img/03-development-loop.jpg">    </p:cNvPr>
           <p:cNvPicPr>
             <a:picLocks noChangeAspect="1"/>
           </p:cNvPicPr>
           <p:nvPr/>
         </p:nvPicPr>
         <p:blipFill>
-          <a:blip r:embed="rId3"/>
+          <a:blip r:embed="rId4"/>
           <a:stretch>
             <a:fillRect/>
           </a:stretch>
@@ -13505,7 +13347,7 @@
       </p:pic>
       <p:sp>
         <p:nvSpPr>
-          <p:cNvPr id="11" name="Text 7"/>
+          <p:cNvPr id="11" name="Text 6"/>
           <p:cNvSpPr/>
           <p:nvPr/>
         </p:nvSpPr>
@@ -13541,7 +13383,7 @@
       </p:sp>
       <p:sp>
         <p:nvSpPr>
-          <p:cNvPr id="12" name="Text 8"/>
+          <p:cNvPr id="12" name="Text 7"/>
           <p:cNvSpPr/>
           <p:nvPr/>
         </p:nvSpPr>
@@ -13573,14 +13415,14 @@
       </p:sp>
       <p:pic>
         <p:nvPicPr>
-          <p:cNvPr id="13" name="Image 2" descr="/Users/danwahlin/.copilot/session-state/56a7a0da-def8-48d4-b5e8-0ac3878cb8dd/files/slides-build/icons/GoDeviceDesktop-0969DA.png">    </p:cNvPr>
+          <p:cNvPr id="13" name="Image 3" descr="/Users/danwahlin/.copilot/session-state/56a7a0da-def8-48d4-b5e8-0ac3878cb8dd/files/slides-build/icons/GoDeviceDesktop-0969DA.png">    </p:cNvPr>
           <p:cNvPicPr>
             <a:picLocks noChangeAspect="1"/>
           </p:cNvPicPr>
           <p:nvPr/>
         </p:nvPicPr>
         <p:blipFill>
-          <a:blip r:embed="rId4"/>
+          <a:blip r:embed="rId5"/>
           <a:stretch>
             <a:fillRect/>
           </a:stretch>
@@ -13597,7 +13439,7 @@
       </p:pic>
       <p:sp>
         <p:nvSpPr>
-          <p:cNvPr id="14" name="Text 9"/>
+          <p:cNvPr id="14" name="Text 8"/>
           <p:cNvSpPr/>
           <p:nvPr/>
         </p:nvSpPr>
@@ -13639,7 +13481,7 @@
       </p:sp>
       <p:sp>
         <p:nvSpPr>
-          <p:cNvPr id="15" name="Text 10"/>
+          <p:cNvPr id="15" name="Text 9"/>
           <p:cNvSpPr/>
           <p:nvPr/>
         </p:nvSpPr>
@@ -13681,7 +13523,7 @@
       </p:sp>
       <p:sp>
         <p:nvSpPr>
-          <p:cNvPr id="16" name="Text 11"/>
+          <p:cNvPr id="16" name="Text 10"/>
           <p:cNvSpPr/>
           <p:nvPr/>
         </p:nvSpPr>
@@ -13717,7 +13559,7 @@
       </p:sp>
       <p:sp>
         <p:nvSpPr>
-          <p:cNvPr id="17" name="Text 12"/>
+          <p:cNvPr id="17" name="Text 11"/>
           <p:cNvSpPr/>
           <p:nvPr/>
         </p:nvSpPr>
@@ -13749,14 +13591,14 @@
       </p:sp>
       <p:pic>
         <p:nvPicPr>
-          <p:cNvPr id="18" name="Image 3" descr="/Users/danwahlin/.copilot/session-state/56a7a0da-def8-48d4-b5e8-0ac3878cb8dd/files/slides-build/icons/FaGithub-8250DF.png">    </p:cNvPr>
+          <p:cNvPr id="18" name="Image 4" descr="/Users/danwahlin/.copilot/session-state/56a7a0da-def8-48d4-b5e8-0ac3878cb8dd/files/slides-build/icons/FaGithub-8250DF.png">    </p:cNvPr>
           <p:cNvPicPr>
             <a:picLocks noChangeAspect="1"/>
           </p:cNvPicPr>
           <p:nvPr/>
         </p:nvPicPr>
         <p:blipFill>
-          <a:blip r:embed="rId5"/>
+          <a:blip r:embed="rId6"/>
           <a:stretch>
             <a:fillRect/>
           </a:stretch>
@@ -13773,7 +13615,7 @@
       </p:pic>
       <p:sp>
         <p:nvSpPr>
-          <p:cNvPr id="19" name="Text 13"/>
+          <p:cNvPr id="19" name="Text 12"/>
           <p:cNvSpPr/>
           <p:nvPr/>
         </p:nvSpPr>
@@ -13815,7 +13657,7 @@
       </p:sp>
       <p:sp>
         <p:nvSpPr>
-          <p:cNvPr id="20" name="Text 14"/>
+          <p:cNvPr id="20" name="Text 13"/>
           <p:cNvSpPr/>
           <p:nvPr/>
         </p:nvSpPr>
@@ -13887,112 +13729,9 @@
           <a:chExt cx="0" cy="0"/>
         </a:xfrm>
       </p:grpSpPr>
-      <p:sp>
-        <p:nvSpPr>
-          <p:cNvPr id="2" name="Text 0"/>
-          <p:cNvSpPr/>
-          <p:nvPr/>
-        </p:nvSpPr>
-        <p:spPr>
-          <a:xfrm>
-            <a:off x="0" y="0"/>
-            <a:ext cx="9144000" cy="76200"/>
-          </a:xfrm>
-          <a:prstGeom prst="rect">
-            <a:avLst/>
-          </a:prstGeom>
-          <a:solidFill>
-            <a:srgbClr val="1A7F37"/>
-          </a:solidFill>
-          <a:ln/>
-        </p:spPr>
-        <p:txBody>
-          <a:bodyPr wrap="square" rtlCol="0" anchor="ctr"/>
-          <a:lstStyle/>
-          <a:p>
-            <a:pPr indent="0" marL="0">
-              <a:buNone/>
-            </a:pPr>
-            <a:endParaRPr lang="en-US" dirty="0"/>
-          </a:p>
-        </p:txBody>
-      </p:sp>
-      <p:sp>
-        <p:nvSpPr>
-          <p:cNvPr id="3" name="Text 1"/>
-          <p:cNvSpPr/>
-          <p:nvPr/>
-        </p:nvSpPr>
-        <p:spPr>
-          <a:xfrm>
-            <a:off x="7340501" y="177701"/>
-            <a:ext cx="1168301" cy="279350"/>
-          </a:xfrm>
-          <a:prstGeom prst="roundRect">
-            <a:avLst>
-              <a:gd name="adj" fmla="val 22731"/>
-            </a:avLst>
-          </a:prstGeom>
-          <a:solidFill>
-            <a:srgbClr val="1A7F37"/>
-          </a:solidFill>
-          <a:ln/>
-        </p:spPr>
-        <p:txBody>
-          <a:bodyPr wrap="square" rtlCol="0" anchor="ctr"/>
-          <a:lstStyle/>
-          <a:p>
-            <a:pPr indent="0" marL="0">
-              <a:buNone/>
-            </a:pPr>
-            <a:endParaRPr lang="en-US" dirty="0"/>
-          </a:p>
-        </p:txBody>
-      </p:sp>
-      <p:sp>
-        <p:nvSpPr>
-          <p:cNvPr id="4" name="Text 2"/>
-          <p:cNvSpPr/>
-          <p:nvPr/>
-        </p:nvSpPr>
-        <p:spPr>
-          <a:xfrm>
-            <a:off x="7461041" y="231577"/>
-            <a:ext cx="927071" cy="171450"/>
-          </a:xfrm>
-          <a:prstGeom prst="rect">
-            <a:avLst/>
-          </a:prstGeom>
-          <a:noFill/>
-          <a:ln/>
-        </p:spPr>
-        <p:txBody>
-          <a:bodyPr wrap="square" lIns="0" tIns="0" rIns="0" bIns="0" rtlCol="0" anchor="t"/>
-          <a:lstStyle/>
-          <a:p>
-            <a:pPr algn="ctr" indent="0" marL="0">
-              <a:buNone/>
-            </a:pPr>
-            <a:r>
-              <a:rPr lang="en-US" sz="1150" b="1" dirty="0">
-                <a:solidFill>
-                  <a:srgbClr val="FFFFFF"/>
-                </a:solidFill>
-                <a:latin typeface="Arial" pitchFamily="34" charset="0"/>
-                <a:ea typeface="Arial" pitchFamily="34" charset="-122"/>
-                <a:cs typeface="Arial" pitchFamily="34" charset="-120"/>
-              </a:rPr>
-              <a:t>CHAPTER 03</a:t>
-            </a:r>
-            <a:endParaRPr lang="en-US" sz="1150" dirty="0"/>
-          </a:p>
-        </p:txBody>
-      </p:sp>
       <p:pic>
         <p:nvPicPr>
-          <p:cNvPr id="5" name="Image 0" descr="/Users/danwahlin/.copilot/session-state/56a7a0da-def8-48d4-b5e8-0ac3878cb8dd/files/slides-build/icons/FaGithub-1F2328.png">
-            <a:hlinkClick r:id="rId2" tooltip="https://github.com/github/copilot-app-for-beginners/tree/main/03-development-workflows"/>
-          </p:cNvPr>
+          <p:cNvPr id="2" name="Image 0" descr="/Users/danwahlin/.copilot/session-state/56a7a0da-def8-48d4-b5e8-0ac3878cb8dd/files/slides-build/img/grad-corner.png">    </p:cNvPr>
           <p:cNvPicPr>
             <a:picLocks noChangeAspect="1"/>
           </p:cNvPicPr>
@@ -14006,6 +13745,103 @@
         </p:blipFill>
         <p:spPr>
           <a:xfrm>
+            <a:off x="6349901" y="0"/>
+            <a:ext cx="2793950" cy="1308050"/>
+          </a:xfrm>
+          <a:prstGeom prst="rect">
+            <a:avLst/>
+          </a:prstGeom>
+        </p:spPr>
+      </p:pic>
+      <p:sp>
+        <p:nvSpPr>
+          <p:cNvPr id="3" name="Text 0"/>
+          <p:cNvSpPr/>
+          <p:nvPr/>
+        </p:nvSpPr>
+        <p:spPr>
+          <a:xfrm>
+            <a:off x="7340501" y="177701"/>
+            <a:ext cx="1168301" cy="279350"/>
+          </a:xfrm>
+          <a:prstGeom prst="roundRect">
+            <a:avLst>
+              <a:gd name="adj" fmla="val 22731"/>
+            </a:avLst>
+          </a:prstGeom>
+          <a:solidFill>
+            <a:srgbClr val="1A7F37"/>
+          </a:solidFill>
+          <a:ln/>
+        </p:spPr>
+        <p:txBody>
+          <a:bodyPr wrap="square" rtlCol="0" anchor="ctr"/>
+          <a:lstStyle/>
+          <a:p>
+            <a:pPr indent="0" marL="0">
+              <a:buNone/>
+            </a:pPr>
+            <a:endParaRPr lang="en-US" dirty="0"/>
+          </a:p>
+        </p:txBody>
+      </p:sp>
+      <p:sp>
+        <p:nvSpPr>
+          <p:cNvPr id="4" name="Text 1"/>
+          <p:cNvSpPr/>
+          <p:nvPr/>
+        </p:nvSpPr>
+        <p:spPr>
+          <a:xfrm>
+            <a:off x="7461041" y="231577"/>
+            <a:ext cx="927071" cy="171450"/>
+          </a:xfrm>
+          <a:prstGeom prst="rect">
+            <a:avLst/>
+          </a:prstGeom>
+          <a:noFill/>
+          <a:ln/>
+        </p:spPr>
+        <p:txBody>
+          <a:bodyPr wrap="square" lIns="0" tIns="0" rIns="0" bIns="0" rtlCol="0" anchor="t"/>
+          <a:lstStyle/>
+          <a:p>
+            <a:pPr algn="ctr" indent="0" marL="0">
+              <a:buNone/>
+            </a:pPr>
+            <a:r>
+              <a:rPr lang="en-US" sz="1150" b="1" dirty="0">
+                <a:solidFill>
+                  <a:srgbClr val="FFFFFF"/>
+                </a:solidFill>
+                <a:latin typeface="Arial" pitchFamily="34" charset="0"/>
+                <a:ea typeface="Arial" pitchFamily="34" charset="-122"/>
+                <a:cs typeface="Arial" pitchFamily="34" charset="-120"/>
+              </a:rPr>
+              <a:t>CHAPTER 03</a:t>
+            </a:r>
+            <a:endParaRPr lang="en-US" sz="1150" dirty="0"/>
+          </a:p>
+        </p:txBody>
+      </p:sp>
+      <p:pic>
+        <p:nvPicPr>
+          <p:cNvPr id="5" name="Image 1" descr="/Users/danwahlin/.copilot/session-state/56a7a0da-def8-48d4-b5e8-0ac3878cb8dd/files/slides-build/icons/FaGithub-1F2328.png">
+            <a:hlinkClick r:id="rId3" tooltip="https://github.com/github/copilot-app-for-beginners/tree/main/03-development-workflows"/>
+          </p:cNvPr>
+          <p:cNvPicPr>
+            <a:picLocks noChangeAspect="1"/>
+          </p:cNvPicPr>
+          <p:nvPr/>
+        </p:nvPicPr>
+        <p:blipFill>
+          <a:blip r:embed="rId2"/>
+          <a:stretch>
+            <a:fillRect/>
+          </a:stretch>
+        </p:blipFill>
+        <p:spPr>
+          <a:xfrm>
             <a:off x="8610600" y="165050"/>
             <a:ext cx="304800" cy="304800"/>
           </a:xfrm>
@@ -14016,7 +13852,7 @@
       </p:pic>
       <p:sp>
         <p:nvSpPr>
-          <p:cNvPr id="6" name="Text 3"/>
+          <p:cNvPr id="6" name="Text 2"/>
           <p:cNvSpPr/>
           <p:nvPr/>
         </p:nvSpPr>
@@ -14055,7 +13891,7 @@
       </p:sp>
       <p:sp>
         <p:nvSpPr>
-          <p:cNvPr id="7" name="Text 4"/>
+          <p:cNvPr id="7" name="Text 3"/>
           <p:cNvSpPr/>
           <p:nvPr/>
         </p:nvSpPr>
@@ -14100,7 +13936,7 @@
       </p:sp>
       <p:sp>
         <p:nvSpPr>
-          <p:cNvPr id="8" name="Text 5"/>
+          <p:cNvPr id="8" name="Text 4"/>
           <p:cNvSpPr/>
           <p:nvPr/>
         </p:nvSpPr>
@@ -14145,7 +13981,7 @@
       </p:sp>
       <p:sp>
         <p:nvSpPr>
-          <p:cNvPr id="9" name="Text 6"/>
+          <p:cNvPr id="9" name="Text 5"/>
           <p:cNvSpPr/>
           <p:nvPr/>
         </p:nvSpPr>
@@ -14181,7 +14017,7 @@
       </p:sp>
       <p:sp>
         <p:nvSpPr>
-          <p:cNvPr id="10" name="Text 7"/>
+          <p:cNvPr id="10" name="Text 6"/>
           <p:cNvSpPr/>
           <p:nvPr/>
         </p:nvSpPr>
@@ -14213,14 +14049,14 @@
       </p:sp>
       <p:pic>
         <p:nvPicPr>
-          <p:cNvPr id="11" name="Image 1" descr="/Users/danwahlin/.copilot/session-state/56a7a0da-def8-48d4-b5e8-0ac3878cb8dd/files/slides-build/icons/GoFileDiff-0969DA.png">    </p:cNvPr>
+          <p:cNvPr id="11" name="Image 2" descr="/Users/danwahlin/.copilot/session-state/56a7a0da-def8-48d4-b5e8-0ac3878cb8dd/files/slides-build/icons/GoFileDiff-0969DA.png">    </p:cNvPr>
           <p:cNvPicPr>
             <a:picLocks noChangeAspect="1"/>
           </p:cNvPicPr>
           <p:nvPr/>
         </p:nvPicPr>
         <p:blipFill>
-          <a:blip r:embed="rId3"/>
+          <a:blip r:embed="rId4"/>
           <a:stretch>
             <a:fillRect/>
           </a:stretch>
@@ -14237,7 +14073,7 @@
       </p:pic>
       <p:sp>
         <p:nvSpPr>
-          <p:cNvPr id="12" name="Text 8"/>
+          <p:cNvPr id="12" name="Text 7"/>
           <p:cNvSpPr/>
           <p:nvPr/>
         </p:nvSpPr>
@@ -14279,7 +14115,7 @@
       </p:sp>
       <p:sp>
         <p:nvSpPr>
-          <p:cNvPr id="13" name="Text 9"/>
+          <p:cNvPr id="13" name="Text 8"/>
           <p:cNvSpPr/>
           <p:nvPr/>
         </p:nvSpPr>
@@ -14318,7 +14154,7 @@
       </p:sp>
       <p:sp>
         <p:nvSpPr>
-          <p:cNvPr id="14" name="Text 10"/>
+          <p:cNvPr id="14" name="Text 9"/>
           <p:cNvSpPr/>
           <p:nvPr/>
         </p:nvSpPr>
@@ -14360,7 +14196,7 @@
       </p:sp>
       <p:sp>
         <p:nvSpPr>
-          <p:cNvPr id="15" name="Text 11"/>
+          <p:cNvPr id="15" name="Text 10"/>
           <p:cNvSpPr/>
           <p:nvPr/>
         </p:nvSpPr>
@@ -14396,7 +14232,7 @@
       </p:sp>
       <p:sp>
         <p:nvSpPr>
-          <p:cNvPr id="16" name="Text 12"/>
+          <p:cNvPr id="16" name="Text 11"/>
           <p:cNvSpPr/>
           <p:nvPr/>
         </p:nvSpPr>
@@ -14428,14 +14264,14 @@
       </p:sp>
       <p:pic>
         <p:nvPicPr>
-          <p:cNvPr id="17" name="Image 2" descr="/Users/danwahlin/.copilot/session-state/56a7a0da-def8-48d4-b5e8-0ac3878cb8dd/files/slides-build/icons/GoTerminal-8250DF.png">    </p:cNvPr>
+          <p:cNvPr id="17" name="Image 3" descr="/Users/danwahlin/.copilot/session-state/56a7a0da-def8-48d4-b5e8-0ac3878cb8dd/files/slides-build/icons/GoTerminal-8250DF.png">    </p:cNvPr>
           <p:cNvPicPr>
             <a:picLocks noChangeAspect="1"/>
           </p:cNvPicPr>
           <p:nvPr/>
         </p:nvPicPr>
         <p:blipFill>
-          <a:blip r:embed="rId4"/>
+          <a:blip r:embed="rId5"/>
           <a:stretch>
             <a:fillRect/>
           </a:stretch>
@@ -14452,7 +14288,7 @@
       </p:pic>
       <p:sp>
         <p:nvSpPr>
-          <p:cNvPr id="18" name="Text 13"/>
+          <p:cNvPr id="18" name="Text 12"/>
           <p:cNvSpPr/>
           <p:nvPr/>
         </p:nvSpPr>
@@ -14494,7 +14330,7 @@
       </p:sp>
       <p:sp>
         <p:nvSpPr>
-          <p:cNvPr id="19" name="Text 14"/>
+          <p:cNvPr id="19" name="Text 13"/>
           <p:cNvSpPr/>
           <p:nvPr/>
         </p:nvSpPr>
@@ -14533,7 +14369,7 @@
       </p:sp>
       <p:sp>
         <p:nvSpPr>
-          <p:cNvPr id="20" name="Text 15"/>
+          <p:cNvPr id="20" name="Text 14"/>
           <p:cNvSpPr/>
           <p:nvPr/>
         </p:nvSpPr>
@@ -14575,7 +14411,7 @@
       </p:sp>
       <p:sp>
         <p:nvSpPr>
-          <p:cNvPr id="21" name="Text 16"/>
+          <p:cNvPr id="21" name="Text 15"/>
           <p:cNvSpPr/>
           <p:nvPr/>
         </p:nvSpPr>
@@ -14611,7 +14447,7 @@
       </p:sp>
       <p:sp>
         <p:nvSpPr>
-          <p:cNvPr id="22" name="Text 17"/>
+          <p:cNvPr id="22" name="Text 16"/>
           <p:cNvSpPr/>
           <p:nvPr/>
         </p:nvSpPr>
@@ -14643,14 +14479,14 @@
       </p:sp>
       <p:pic>
         <p:nvPicPr>
-          <p:cNvPr id="23" name="Image 3" descr="/Users/danwahlin/.copilot/session-state/56a7a0da-def8-48d4-b5e8-0ac3878cb8dd/files/slides-build/icons/GoBrowser-BC4C00.png">    </p:cNvPr>
+          <p:cNvPr id="23" name="Image 4" descr="/Users/danwahlin/.copilot/session-state/56a7a0da-def8-48d4-b5e8-0ac3878cb8dd/files/slides-build/icons/GoBrowser-BC4C00.png">    </p:cNvPr>
           <p:cNvPicPr>
             <a:picLocks noChangeAspect="1"/>
           </p:cNvPicPr>
           <p:nvPr/>
         </p:nvPicPr>
         <p:blipFill>
-          <a:blip r:embed="rId5"/>
+          <a:blip r:embed="rId6"/>
           <a:stretch>
             <a:fillRect/>
           </a:stretch>
@@ -14667,7 +14503,7 @@
       </p:pic>
       <p:sp>
         <p:nvSpPr>
-          <p:cNvPr id="24" name="Text 18"/>
+          <p:cNvPr id="24" name="Text 17"/>
           <p:cNvSpPr/>
           <p:nvPr/>
         </p:nvSpPr>
@@ -14709,7 +14545,7 @@
       </p:sp>
       <p:sp>
         <p:nvSpPr>
-          <p:cNvPr id="25" name="Text 19"/>
+          <p:cNvPr id="25" name="Text 18"/>
           <p:cNvSpPr/>
           <p:nvPr/>
         </p:nvSpPr>
@@ -14748,7 +14584,7 @@
       </p:sp>
       <p:sp>
         <p:nvSpPr>
-          <p:cNvPr id="26" name="Text 20"/>
+          <p:cNvPr id="26" name="Text 19"/>
           <p:cNvSpPr/>
           <p:nvPr/>
         </p:nvSpPr>
@@ -14790,7 +14626,7 @@
       </p:sp>
       <p:sp>
         <p:nvSpPr>
-          <p:cNvPr id="27" name="Text 21"/>
+          <p:cNvPr id="27" name="Text 20"/>
           <p:cNvSpPr/>
           <p:nvPr/>
         </p:nvSpPr>
@@ -14826,7 +14662,7 @@
       </p:sp>
       <p:sp>
         <p:nvSpPr>
-          <p:cNvPr id="28" name="Text 22"/>
+          <p:cNvPr id="28" name="Text 21"/>
           <p:cNvSpPr/>
           <p:nvPr/>
         </p:nvSpPr>
@@ -14858,14 +14694,14 @@
       </p:sp>
       <p:pic>
         <p:nvPicPr>
-          <p:cNvPr id="29" name="Image 4" descr="/Users/danwahlin/.copilot/session-state/56a7a0da-def8-48d4-b5e8-0ac3878cb8dd/files/slides-build/icons/GoCheckCircle-1A7F37.png">    </p:cNvPr>
+          <p:cNvPr id="29" name="Image 5" descr="/Users/danwahlin/.copilot/session-state/56a7a0da-def8-48d4-b5e8-0ac3878cb8dd/files/slides-build/icons/GoCheckCircle-1A7F37.png">    </p:cNvPr>
           <p:cNvPicPr>
             <a:picLocks noChangeAspect="1"/>
           </p:cNvPicPr>
           <p:nvPr/>
         </p:nvPicPr>
         <p:blipFill>
-          <a:blip r:embed="rId6"/>
+          <a:blip r:embed="rId7"/>
           <a:stretch>
             <a:fillRect/>
           </a:stretch>
@@ -14882,7 +14718,7 @@
       </p:pic>
       <p:sp>
         <p:nvSpPr>
-          <p:cNvPr id="30" name="Text 23"/>
+          <p:cNvPr id="30" name="Text 22"/>
           <p:cNvSpPr/>
           <p:nvPr/>
         </p:nvSpPr>
@@ -14924,7 +14760,7 @@
       </p:sp>
       <p:sp>
         <p:nvSpPr>
-          <p:cNvPr id="31" name="Text 24"/>
+          <p:cNvPr id="31" name="Text 23"/>
           <p:cNvSpPr/>
           <p:nvPr/>
         </p:nvSpPr>
@@ -14963,7 +14799,7 @@
       </p:sp>
       <p:sp>
         <p:nvSpPr>
-          <p:cNvPr id="32" name="Text 25"/>
+          <p:cNvPr id="32" name="Text 24"/>
           <p:cNvSpPr/>
           <p:nvPr/>
         </p:nvSpPr>
@@ -15137,82 +14973,9 @@
           </a:p>
         </p:txBody>
       </p:sp>
-      <p:sp>
-        <p:nvSpPr>
-          <p:cNvPr id="5" name="Text 3"/>
-          <p:cNvSpPr/>
-          <p:nvPr/>
-        </p:nvSpPr>
-        <p:spPr>
-          <a:xfrm>
-            <a:off x="7340501" y="177701"/>
-            <a:ext cx="1168301" cy="279350"/>
-          </a:xfrm>
-          <a:prstGeom prst="roundRect">
-            <a:avLst>
-              <a:gd name="adj" fmla="val 22731"/>
-            </a:avLst>
-          </a:prstGeom>
-          <a:solidFill>
-            <a:srgbClr val="1A7F37"/>
-          </a:solidFill>
-          <a:ln/>
-        </p:spPr>
-        <p:txBody>
-          <a:bodyPr wrap="square" rtlCol="0" anchor="ctr"/>
-          <a:lstStyle/>
-          <a:p>
-            <a:pPr indent="0" marL="0">
-              <a:buNone/>
-            </a:pPr>
-            <a:endParaRPr lang="en-US" dirty="0"/>
-          </a:p>
-        </p:txBody>
-      </p:sp>
-      <p:sp>
-        <p:nvSpPr>
-          <p:cNvPr id="6" name="Text 4"/>
-          <p:cNvSpPr/>
-          <p:nvPr/>
-        </p:nvSpPr>
-        <p:spPr>
-          <a:xfrm>
-            <a:off x="7461041" y="231577"/>
-            <a:ext cx="927071" cy="171450"/>
-          </a:xfrm>
-          <a:prstGeom prst="rect">
-            <a:avLst/>
-          </a:prstGeom>
-          <a:noFill/>
-          <a:ln/>
-        </p:spPr>
-        <p:txBody>
-          <a:bodyPr wrap="square" lIns="0" tIns="0" rIns="0" bIns="0" rtlCol="0" anchor="t"/>
-          <a:lstStyle/>
-          <a:p>
-            <a:pPr algn="ctr" indent="0" marL="0">
-              <a:buNone/>
-            </a:pPr>
-            <a:r>
-              <a:rPr lang="en-US" sz="1150" b="1" dirty="0">
-                <a:solidFill>
-                  <a:srgbClr val="FFFFFF"/>
-                </a:solidFill>
-                <a:latin typeface="Arial" pitchFamily="34" charset="0"/>
-                <a:ea typeface="Arial" pitchFamily="34" charset="-122"/>
-                <a:cs typeface="Arial" pitchFamily="34" charset="-120"/>
-              </a:rPr>
-              <a:t>CHAPTER 03</a:t>
-            </a:r>
-            <a:endParaRPr lang="en-US" sz="1150" dirty="0"/>
-          </a:p>
-        </p:txBody>
-      </p:sp>
       <p:pic>
         <p:nvPicPr>
-          <p:cNvPr id="7" name="Image 0" descr="/Users/danwahlin/.copilot/session-state/56a7a0da-def8-48d4-b5e8-0ac3878cb8dd/files/slides-build/icons/FaGithub-1F2328.png">
-            <a:hlinkClick r:id="rId2" tooltip="https://github.com/github/copilot-app-for-beginners/tree/main/03-development-workflows"/>
-          </p:cNvPr>
+          <p:cNvPr id="5" name="Image 0" descr="/Users/danwahlin/.copilot/session-state/56a7a0da-def8-48d4-b5e8-0ac3878cb8dd/files/slides-build/img/grad-corner.png">    </p:cNvPr>
           <p:cNvPicPr>
             <a:picLocks noChangeAspect="1"/>
           </p:cNvPicPr>
@@ -15226,6 +14989,103 @@
         </p:blipFill>
         <p:spPr>
           <a:xfrm>
+            <a:off x="6349901" y="0"/>
+            <a:ext cx="2793950" cy="1308050"/>
+          </a:xfrm>
+          <a:prstGeom prst="rect">
+            <a:avLst/>
+          </a:prstGeom>
+        </p:spPr>
+      </p:pic>
+      <p:sp>
+        <p:nvSpPr>
+          <p:cNvPr id="6" name="Text 3"/>
+          <p:cNvSpPr/>
+          <p:nvPr/>
+        </p:nvSpPr>
+        <p:spPr>
+          <a:xfrm>
+            <a:off x="7340501" y="177701"/>
+            <a:ext cx="1168301" cy="279350"/>
+          </a:xfrm>
+          <a:prstGeom prst="roundRect">
+            <a:avLst>
+              <a:gd name="adj" fmla="val 22731"/>
+            </a:avLst>
+          </a:prstGeom>
+          <a:solidFill>
+            <a:srgbClr val="1A7F37"/>
+          </a:solidFill>
+          <a:ln/>
+        </p:spPr>
+        <p:txBody>
+          <a:bodyPr wrap="square" rtlCol="0" anchor="ctr"/>
+          <a:lstStyle/>
+          <a:p>
+            <a:pPr indent="0" marL="0">
+              <a:buNone/>
+            </a:pPr>
+            <a:endParaRPr lang="en-US" dirty="0"/>
+          </a:p>
+        </p:txBody>
+      </p:sp>
+      <p:sp>
+        <p:nvSpPr>
+          <p:cNvPr id="7" name="Text 4"/>
+          <p:cNvSpPr/>
+          <p:nvPr/>
+        </p:nvSpPr>
+        <p:spPr>
+          <a:xfrm>
+            <a:off x="7461041" y="231577"/>
+            <a:ext cx="927071" cy="171450"/>
+          </a:xfrm>
+          <a:prstGeom prst="rect">
+            <a:avLst/>
+          </a:prstGeom>
+          <a:noFill/>
+          <a:ln/>
+        </p:spPr>
+        <p:txBody>
+          <a:bodyPr wrap="square" lIns="0" tIns="0" rIns="0" bIns="0" rtlCol="0" anchor="t"/>
+          <a:lstStyle/>
+          <a:p>
+            <a:pPr algn="ctr" indent="0" marL="0">
+              <a:buNone/>
+            </a:pPr>
+            <a:r>
+              <a:rPr lang="en-US" sz="1150" b="1" dirty="0">
+                <a:solidFill>
+                  <a:srgbClr val="FFFFFF"/>
+                </a:solidFill>
+                <a:latin typeface="Arial" pitchFamily="34" charset="0"/>
+                <a:ea typeface="Arial" pitchFamily="34" charset="-122"/>
+                <a:cs typeface="Arial" pitchFamily="34" charset="-120"/>
+              </a:rPr>
+              <a:t>CHAPTER 03</a:t>
+            </a:r>
+            <a:endParaRPr lang="en-US" sz="1150" dirty="0"/>
+          </a:p>
+        </p:txBody>
+      </p:sp>
+      <p:pic>
+        <p:nvPicPr>
+          <p:cNvPr id="8" name="Image 1" descr="/Users/danwahlin/.copilot/session-state/56a7a0da-def8-48d4-b5e8-0ac3878cb8dd/files/slides-build/icons/FaGithub-1F2328.png">
+            <a:hlinkClick r:id="rId3" tooltip="https://github.com/github/copilot-app-for-beginners/tree/main/03-development-workflows"/>
+          </p:cNvPr>
+          <p:cNvPicPr>
+            <a:picLocks noChangeAspect="1"/>
+          </p:cNvPicPr>
+          <p:nvPr/>
+        </p:nvPicPr>
+        <p:blipFill>
+          <a:blip r:embed="rId2"/>
+          <a:stretch>
+            <a:fillRect/>
+          </a:stretch>
+        </p:blipFill>
+        <p:spPr>
+          <a:xfrm>
             <a:off x="8610600" y="165050"/>
             <a:ext cx="304800" cy="304800"/>
           </a:xfrm>
@@ -15236,7 +15096,7 @@
       </p:pic>
       <p:sp>
         <p:nvSpPr>
-          <p:cNvPr id="8" name="Text 5"/>
+          <p:cNvPr id="9" name="Text 5"/>
           <p:cNvSpPr/>
           <p:nvPr/>
         </p:nvSpPr>
@@ -15275,7 +15135,7 @@
       </p:sp>
       <p:sp>
         <p:nvSpPr>
-          <p:cNvPr id="9" name="Text 6"/>
+          <p:cNvPr id="10" name="Text 6"/>
           <p:cNvSpPr/>
           <p:nvPr/>
         </p:nvSpPr>
@@ -15320,7 +15180,7 @@
       </p:sp>
       <p:sp>
         <p:nvSpPr>
-          <p:cNvPr id="10" name="Text 7"/>
+          <p:cNvPr id="11" name="Text 7"/>
           <p:cNvSpPr/>
           <p:nvPr/>
         </p:nvSpPr>
@@ -15352,7 +15212,7 @@
       </p:sp>
       <p:sp>
         <p:nvSpPr>
-          <p:cNvPr id="11" name="Text 8"/>
+          <p:cNvPr id="12" name="Text 8"/>
           <p:cNvSpPr/>
           <p:nvPr/>
         </p:nvSpPr>
@@ -15424,112 +15284,9 @@
           <a:chExt cx="0" cy="0"/>
         </a:xfrm>
       </p:grpSpPr>
-      <p:sp>
-        <p:nvSpPr>
-          <p:cNvPr id="2" name="Text 0"/>
-          <p:cNvSpPr/>
-          <p:nvPr/>
-        </p:nvSpPr>
-        <p:spPr>
-          <a:xfrm>
-            <a:off x="0" y="0"/>
-            <a:ext cx="9144000" cy="76200"/>
-          </a:xfrm>
-          <a:prstGeom prst="rect">
-            <a:avLst/>
-          </a:prstGeom>
-          <a:solidFill>
-            <a:srgbClr val="0969DA"/>
-          </a:solidFill>
-          <a:ln/>
-        </p:spPr>
-        <p:txBody>
-          <a:bodyPr wrap="square" rtlCol="0" anchor="ctr"/>
-          <a:lstStyle/>
-          <a:p>
-            <a:pPr indent="0" marL="0">
-              <a:buNone/>
-            </a:pPr>
-            <a:endParaRPr lang="en-US" dirty="0"/>
-          </a:p>
-        </p:txBody>
-      </p:sp>
-      <p:sp>
-        <p:nvSpPr>
-          <p:cNvPr id="3" name="Text 1"/>
-          <p:cNvSpPr/>
-          <p:nvPr/>
-        </p:nvSpPr>
-        <p:spPr>
-          <a:xfrm>
-            <a:off x="7340501" y="177701"/>
-            <a:ext cx="1168301" cy="279350"/>
-          </a:xfrm>
-          <a:prstGeom prst="roundRect">
-            <a:avLst>
-              <a:gd name="adj" fmla="val 22731"/>
-            </a:avLst>
-          </a:prstGeom>
-          <a:solidFill>
-            <a:srgbClr val="1A7F37"/>
-          </a:solidFill>
-          <a:ln/>
-        </p:spPr>
-        <p:txBody>
-          <a:bodyPr wrap="square" rtlCol="0" anchor="ctr"/>
-          <a:lstStyle/>
-          <a:p>
-            <a:pPr indent="0" marL="0">
-              <a:buNone/>
-            </a:pPr>
-            <a:endParaRPr lang="en-US" dirty="0"/>
-          </a:p>
-        </p:txBody>
-      </p:sp>
-      <p:sp>
-        <p:nvSpPr>
-          <p:cNvPr id="4" name="Text 2"/>
-          <p:cNvSpPr/>
-          <p:nvPr/>
-        </p:nvSpPr>
-        <p:spPr>
-          <a:xfrm>
-            <a:off x="7461041" y="231577"/>
-            <a:ext cx="927071" cy="171450"/>
-          </a:xfrm>
-          <a:prstGeom prst="rect">
-            <a:avLst/>
-          </a:prstGeom>
-          <a:noFill/>
-          <a:ln/>
-        </p:spPr>
-        <p:txBody>
-          <a:bodyPr wrap="square" lIns="0" tIns="0" rIns="0" bIns="0" rtlCol="0" anchor="t"/>
-          <a:lstStyle/>
-          <a:p>
-            <a:pPr algn="ctr" indent="0" marL="0">
-              <a:buNone/>
-            </a:pPr>
-            <a:r>
-              <a:rPr lang="en-US" sz="1150" b="1" dirty="0">
-                <a:solidFill>
-                  <a:srgbClr val="FFFFFF"/>
-                </a:solidFill>
-                <a:latin typeface="Arial" pitchFamily="34" charset="0"/>
-                <a:ea typeface="Arial" pitchFamily="34" charset="-122"/>
-                <a:cs typeface="Arial" pitchFamily="34" charset="-120"/>
-              </a:rPr>
-              <a:t>CHAPTER 03</a:t>
-            </a:r>
-            <a:endParaRPr lang="en-US" sz="1150" dirty="0"/>
-          </a:p>
-        </p:txBody>
-      </p:sp>
       <p:pic>
         <p:nvPicPr>
-          <p:cNvPr id="5" name="Image 0" descr="/Users/danwahlin/.copilot/session-state/56a7a0da-def8-48d4-b5e8-0ac3878cb8dd/files/slides-build/icons/FaGithub-1F2328.png">
-            <a:hlinkClick r:id="rId2" tooltip="https://github.com/github/copilot-app-for-beginners/tree/main/03-development-workflows"/>
-          </p:cNvPr>
+          <p:cNvPr id="2" name="Image 0" descr="/Users/danwahlin/.copilot/session-state/56a7a0da-def8-48d4-b5e8-0ac3878cb8dd/files/slides-build/img/grad-corner.png">    </p:cNvPr>
           <p:cNvPicPr>
             <a:picLocks noChangeAspect="1"/>
           </p:cNvPicPr>
@@ -15543,6 +15300,103 @@
         </p:blipFill>
         <p:spPr>
           <a:xfrm>
+            <a:off x="6349901" y="0"/>
+            <a:ext cx="2793950" cy="1308050"/>
+          </a:xfrm>
+          <a:prstGeom prst="rect">
+            <a:avLst/>
+          </a:prstGeom>
+        </p:spPr>
+      </p:pic>
+      <p:sp>
+        <p:nvSpPr>
+          <p:cNvPr id="3" name="Text 0"/>
+          <p:cNvSpPr/>
+          <p:nvPr/>
+        </p:nvSpPr>
+        <p:spPr>
+          <a:xfrm>
+            <a:off x="7340501" y="177701"/>
+            <a:ext cx="1168301" cy="279350"/>
+          </a:xfrm>
+          <a:prstGeom prst="roundRect">
+            <a:avLst>
+              <a:gd name="adj" fmla="val 22731"/>
+            </a:avLst>
+          </a:prstGeom>
+          <a:solidFill>
+            <a:srgbClr val="1A7F37"/>
+          </a:solidFill>
+          <a:ln/>
+        </p:spPr>
+        <p:txBody>
+          <a:bodyPr wrap="square" rtlCol="0" anchor="ctr"/>
+          <a:lstStyle/>
+          <a:p>
+            <a:pPr indent="0" marL="0">
+              <a:buNone/>
+            </a:pPr>
+            <a:endParaRPr lang="en-US" dirty="0"/>
+          </a:p>
+        </p:txBody>
+      </p:sp>
+      <p:sp>
+        <p:nvSpPr>
+          <p:cNvPr id="4" name="Text 1"/>
+          <p:cNvSpPr/>
+          <p:nvPr/>
+        </p:nvSpPr>
+        <p:spPr>
+          <a:xfrm>
+            <a:off x="7461041" y="231577"/>
+            <a:ext cx="927071" cy="171450"/>
+          </a:xfrm>
+          <a:prstGeom prst="rect">
+            <a:avLst/>
+          </a:prstGeom>
+          <a:noFill/>
+          <a:ln/>
+        </p:spPr>
+        <p:txBody>
+          <a:bodyPr wrap="square" lIns="0" tIns="0" rIns="0" bIns="0" rtlCol="0" anchor="t"/>
+          <a:lstStyle/>
+          <a:p>
+            <a:pPr algn="ctr" indent="0" marL="0">
+              <a:buNone/>
+            </a:pPr>
+            <a:r>
+              <a:rPr lang="en-US" sz="1150" b="1" dirty="0">
+                <a:solidFill>
+                  <a:srgbClr val="FFFFFF"/>
+                </a:solidFill>
+                <a:latin typeface="Arial" pitchFamily="34" charset="0"/>
+                <a:ea typeface="Arial" pitchFamily="34" charset="-122"/>
+                <a:cs typeface="Arial" pitchFamily="34" charset="-120"/>
+              </a:rPr>
+              <a:t>CHAPTER 03</a:t>
+            </a:r>
+            <a:endParaRPr lang="en-US" sz="1150" dirty="0"/>
+          </a:p>
+        </p:txBody>
+      </p:sp>
+      <p:pic>
+        <p:nvPicPr>
+          <p:cNvPr id="5" name="Image 1" descr="/Users/danwahlin/.copilot/session-state/56a7a0da-def8-48d4-b5e8-0ac3878cb8dd/files/slides-build/icons/FaGithub-1F2328.png">
+            <a:hlinkClick r:id="rId3" tooltip="https://github.com/github/copilot-app-for-beginners/tree/main/03-development-workflows"/>
+          </p:cNvPr>
+          <p:cNvPicPr>
+            <a:picLocks noChangeAspect="1"/>
+          </p:cNvPicPr>
+          <p:nvPr/>
+        </p:nvPicPr>
+        <p:blipFill>
+          <a:blip r:embed="rId2"/>
+          <a:stretch>
+            <a:fillRect/>
+          </a:stretch>
+        </p:blipFill>
+        <p:spPr>
+          <a:xfrm>
             <a:off x="8610600" y="165050"/>
             <a:ext cx="304800" cy="304800"/>
           </a:xfrm>
@@ -15553,7 +15407,7 @@
       </p:pic>
       <p:sp>
         <p:nvSpPr>
-          <p:cNvPr id="6" name="Text 3"/>
+          <p:cNvPr id="6" name="Text 2"/>
           <p:cNvSpPr/>
           <p:nvPr/>
         </p:nvSpPr>
@@ -15592,7 +15446,7 @@
       </p:sp>
       <p:sp>
         <p:nvSpPr>
-          <p:cNvPr id="7" name="Text 4"/>
+          <p:cNvPr id="7" name="Text 3"/>
           <p:cNvSpPr/>
           <p:nvPr/>
         </p:nvSpPr>
@@ -15637,7 +15491,7 @@
       </p:sp>
       <p:sp>
         <p:nvSpPr>
-          <p:cNvPr id="8" name="Text 5"/>
+          <p:cNvPr id="8" name="Text 4"/>
           <p:cNvSpPr/>
           <p:nvPr/>
         </p:nvSpPr>
@@ -15682,7 +15536,7 @@
       </p:sp>
       <p:sp>
         <p:nvSpPr>
-          <p:cNvPr id="9" name="Text 6"/>
+          <p:cNvPr id="9" name="Text 5"/>
           <p:cNvSpPr/>
           <p:nvPr/>
         </p:nvSpPr>
@@ -15718,7 +15572,7 @@
       </p:sp>
       <p:sp>
         <p:nvSpPr>
-          <p:cNvPr id="10" name="Text 7"/>
+          <p:cNvPr id="10" name="Text 6"/>
           <p:cNvSpPr/>
           <p:nvPr/>
         </p:nvSpPr>
@@ -15748,7 +15602,7 @@
       </p:sp>
       <p:sp>
         <p:nvSpPr>
-          <p:cNvPr id="11" name="Shape 8"/>
+          <p:cNvPr id="11" name="Shape 7"/>
           <p:cNvSpPr/>
           <p:nvPr/>
         </p:nvSpPr>
@@ -15771,7 +15625,7 @@
       </p:sp>
       <p:sp>
         <p:nvSpPr>
-          <p:cNvPr id="12" name="Text 9"/>
+          <p:cNvPr id="12" name="Text 8"/>
           <p:cNvSpPr/>
           <p:nvPr/>
         </p:nvSpPr>
@@ -15803,7 +15657,7 @@
       </p:sp>
       <p:sp>
         <p:nvSpPr>
-          <p:cNvPr id="13" name="Text 10"/>
+          <p:cNvPr id="13" name="Text 9"/>
           <p:cNvSpPr/>
           <p:nvPr/>
         </p:nvSpPr>
@@ -15835,7 +15689,7 @@
       </p:sp>
       <p:sp>
         <p:nvSpPr>
-          <p:cNvPr id="14" name="Text 11"/>
+          <p:cNvPr id="14" name="Text 10"/>
           <p:cNvSpPr/>
           <p:nvPr/>
         </p:nvSpPr>
@@ -15867,7 +15721,7 @@
       </p:sp>
       <p:sp>
         <p:nvSpPr>
-          <p:cNvPr id="15" name="Text 12"/>
+          <p:cNvPr id="15" name="Text 11"/>
           <p:cNvSpPr/>
           <p:nvPr/>
         </p:nvSpPr>
@@ -15906,7 +15760,7 @@
       </p:sp>
       <p:sp>
         <p:nvSpPr>
-          <p:cNvPr id="16" name="Text 13"/>
+          <p:cNvPr id="16" name="Text 12"/>
           <p:cNvSpPr/>
           <p:nvPr/>
         </p:nvSpPr>
@@ -15965,7 +15819,7 @@
       </p:sp>
       <p:sp>
         <p:nvSpPr>
-          <p:cNvPr id="17" name="Text 14"/>
+          <p:cNvPr id="17" name="Text 13"/>
           <p:cNvSpPr/>
           <p:nvPr/>
         </p:nvSpPr>
@@ -16024,7 +15878,7 @@
       </p:sp>
       <p:sp>
         <p:nvSpPr>
-          <p:cNvPr id="18" name="Text 15"/>
+          <p:cNvPr id="18" name="Text 14"/>
           <p:cNvSpPr/>
           <p:nvPr/>
         </p:nvSpPr>
@@ -16083,7 +15937,7 @@
       </p:sp>
       <p:sp>
         <p:nvSpPr>
-          <p:cNvPr id="19" name="Text 16"/>
+          <p:cNvPr id="19" name="Text 15"/>
           <p:cNvSpPr/>
           <p:nvPr/>
         </p:nvSpPr>
@@ -16142,7 +15996,7 @@
       </p:sp>
       <p:sp>
         <p:nvSpPr>
-          <p:cNvPr id="20" name="Text 17"/>
+          <p:cNvPr id="20" name="Text 16"/>
           <p:cNvSpPr/>
           <p:nvPr/>
         </p:nvSpPr>
@@ -16178,7 +16032,7 @@
       </p:sp>
       <p:sp>
         <p:nvSpPr>
-          <p:cNvPr id="21" name="Text 18"/>
+          <p:cNvPr id="21" name="Text 17"/>
           <p:cNvSpPr/>
           <p:nvPr/>
         </p:nvSpPr>
@@ -16220,7 +16074,7 @@
       </p:sp>
       <p:sp>
         <p:nvSpPr>
-          <p:cNvPr id="22" name="Text 19"/>
+          <p:cNvPr id="22" name="Text 18"/>
           <p:cNvSpPr/>
           <p:nvPr/>
         </p:nvSpPr>
@@ -16259,7 +16113,7 @@
       </p:sp>
       <p:sp>
         <p:nvSpPr>
-          <p:cNvPr id="23" name="Text 20"/>
+          <p:cNvPr id="23" name="Text 19"/>
           <p:cNvSpPr/>
           <p:nvPr/>
         </p:nvSpPr>
@@ -16298,7 +16152,7 @@
       </p:sp>
       <p:sp>
         <p:nvSpPr>
-          <p:cNvPr id="24" name="Text 21"/>
+          <p:cNvPr id="24" name="Text 20"/>
           <p:cNvSpPr/>
           <p:nvPr/>
         </p:nvSpPr>
@@ -16334,14 +16188,14 @@
       </p:sp>
       <p:pic>
         <p:nvPicPr>
-          <p:cNvPr id="25" name="Image 1" descr="/Users/danwahlin/.copilot/session-state/56a7a0da-def8-48d4-b5e8-0ac3878cb8dd/files/slides-build/icons/GoAlert-9A6700.png">    </p:cNvPr>
+          <p:cNvPr id="25" name="Image 2" descr="/Users/danwahlin/.copilot/session-state/56a7a0da-def8-48d4-b5e8-0ac3878cb8dd/files/slides-build/icons/GoAlert-9A6700.png">    </p:cNvPr>
           <p:cNvPicPr>
             <a:picLocks noChangeAspect="1"/>
           </p:cNvPicPr>
           <p:nvPr/>
         </p:nvPicPr>
         <p:blipFill>
-          <a:blip r:embed="rId3"/>
+          <a:blip r:embed="rId4"/>
           <a:stretch>
             <a:fillRect/>
           </a:stretch>
@@ -16358,7 +16212,7 @@
       </p:pic>
       <p:sp>
         <p:nvSpPr>
-          <p:cNvPr id="26" name="Text 22"/>
+          <p:cNvPr id="26" name="Text 21"/>
           <p:cNvSpPr/>
           <p:nvPr/>
         </p:nvSpPr>
@@ -16464,112 +16318,9 @@
           <a:chExt cx="0" cy="0"/>
         </a:xfrm>
       </p:grpSpPr>
-      <p:sp>
-        <p:nvSpPr>
-          <p:cNvPr id="2" name="Text 0"/>
-          <p:cNvSpPr/>
-          <p:nvPr/>
-        </p:nvSpPr>
-        <p:spPr>
-          <a:xfrm>
-            <a:off x="0" y="0"/>
-            <a:ext cx="9144000" cy="76200"/>
-          </a:xfrm>
-          <a:prstGeom prst="rect">
-            <a:avLst/>
-          </a:prstGeom>
-          <a:solidFill>
-            <a:srgbClr val="0969DA"/>
-          </a:solidFill>
-          <a:ln/>
-        </p:spPr>
-        <p:txBody>
-          <a:bodyPr wrap="square" rtlCol="0" anchor="ctr"/>
-          <a:lstStyle/>
-          <a:p>
-            <a:pPr indent="0" marL="0">
-              <a:buNone/>
-            </a:pPr>
-            <a:endParaRPr lang="en-US" dirty="0"/>
-          </a:p>
-        </p:txBody>
-      </p:sp>
-      <p:sp>
-        <p:nvSpPr>
-          <p:cNvPr id="3" name="Text 1"/>
-          <p:cNvSpPr/>
-          <p:nvPr/>
-        </p:nvSpPr>
-        <p:spPr>
-          <a:xfrm>
-            <a:off x="7340501" y="177701"/>
-            <a:ext cx="1168301" cy="279350"/>
-          </a:xfrm>
-          <a:prstGeom prst="roundRect">
-            <a:avLst>
-              <a:gd name="adj" fmla="val 22731"/>
-            </a:avLst>
-          </a:prstGeom>
-          <a:solidFill>
-            <a:srgbClr val="1A7F37"/>
-          </a:solidFill>
-          <a:ln/>
-        </p:spPr>
-        <p:txBody>
-          <a:bodyPr wrap="square" rtlCol="0" anchor="ctr"/>
-          <a:lstStyle/>
-          <a:p>
-            <a:pPr indent="0" marL="0">
-              <a:buNone/>
-            </a:pPr>
-            <a:endParaRPr lang="en-US" dirty="0"/>
-          </a:p>
-        </p:txBody>
-      </p:sp>
-      <p:sp>
-        <p:nvSpPr>
-          <p:cNvPr id="4" name="Text 2"/>
-          <p:cNvSpPr/>
-          <p:nvPr/>
-        </p:nvSpPr>
-        <p:spPr>
-          <a:xfrm>
-            <a:off x="7461041" y="231577"/>
-            <a:ext cx="927071" cy="171450"/>
-          </a:xfrm>
-          <a:prstGeom prst="rect">
-            <a:avLst/>
-          </a:prstGeom>
-          <a:noFill/>
-          <a:ln/>
-        </p:spPr>
-        <p:txBody>
-          <a:bodyPr wrap="square" lIns="0" tIns="0" rIns="0" bIns="0" rtlCol="0" anchor="t"/>
-          <a:lstStyle/>
-          <a:p>
-            <a:pPr algn="ctr" indent="0" marL="0">
-              <a:buNone/>
-            </a:pPr>
-            <a:r>
-              <a:rPr lang="en-US" sz="1150" b="1" dirty="0">
-                <a:solidFill>
-                  <a:srgbClr val="FFFFFF"/>
-                </a:solidFill>
-                <a:latin typeface="Arial" pitchFamily="34" charset="0"/>
-                <a:ea typeface="Arial" pitchFamily="34" charset="-122"/>
-                <a:cs typeface="Arial" pitchFamily="34" charset="-120"/>
-              </a:rPr>
-              <a:t>CHAPTER 03</a:t>
-            </a:r>
-            <a:endParaRPr lang="en-US" sz="1150" dirty="0"/>
-          </a:p>
-        </p:txBody>
-      </p:sp>
       <p:pic>
         <p:nvPicPr>
-          <p:cNvPr id="5" name="Image 0" descr="/Users/danwahlin/.copilot/session-state/56a7a0da-def8-48d4-b5e8-0ac3878cb8dd/files/slides-build/icons/FaGithub-1F2328.png">
-            <a:hlinkClick r:id="rId2" tooltip="https://github.com/github/copilot-app-for-beginners/tree/main/03-development-workflows"/>
-          </p:cNvPr>
+          <p:cNvPr id="2" name="Image 0" descr="/Users/danwahlin/.copilot/session-state/56a7a0da-def8-48d4-b5e8-0ac3878cb8dd/files/slides-build/img/grad-corner.png">    </p:cNvPr>
           <p:cNvPicPr>
             <a:picLocks noChangeAspect="1"/>
           </p:cNvPicPr>
@@ -16583,6 +16334,103 @@
         </p:blipFill>
         <p:spPr>
           <a:xfrm>
+            <a:off x="6349901" y="0"/>
+            <a:ext cx="2793950" cy="1308050"/>
+          </a:xfrm>
+          <a:prstGeom prst="rect">
+            <a:avLst/>
+          </a:prstGeom>
+        </p:spPr>
+      </p:pic>
+      <p:sp>
+        <p:nvSpPr>
+          <p:cNvPr id="3" name="Text 0"/>
+          <p:cNvSpPr/>
+          <p:nvPr/>
+        </p:nvSpPr>
+        <p:spPr>
+          <a:xfrm>
+            <a:off x="7340501" y="177701"/>
+            <a:ext cx="1168301" cy="279350"/>
+          </a:xfrm>
+          <a:prstGeom prst="roundRect">
+            <a:avLst>
+              <a:gd name="adj" fmla="val 22731"/>
+            </a:avLst>
+          </a:prstGeom>
+          <a:solidFill>
+            <a:srgbClr val="1A7F37"/>
+          </a:solidFill>
+          <a:ln/>
+        </p:spPr>
+        <p:txBody>
+          <a:bodyPr wrap="square" rtlCol="0" anchor="ctr"/>
+          <a:lstStyle/>
+          <a:p>
+            <a:pPr indent="0" marL="0">
+              <a:buNone/>
+            </a:pPr>
+            <a:endParaRPr lang="en-US" dirty="0"/>
+          </a:p>
+        </p:txBody>
+      </p:sp>
+      <p:sp>
+        <p:nvSpPr>
+          <p:cNvPr id="4" name="Text 1"/>
+          <p:cNvSpPr/>
+          <p:nvPr/>
+        </p:nvSpPr>
+        <p:spPr>
+          <a:xfrm>
+            <a:off x="7461041" y="231577"/>
+            <a:ext cx="927071" cy="171450"/>
+          </a:xfrm>
+          <a:prstGeom prst="rect">
+            <a:avLst/>
+          </a:prstGeom>
+          <a:noFill/>
+          <a:ln/>
+        </p:spPr>
+        <p:txBody>
+          <a:bodyPr wrap="square" lIns="0" tIns="0" rIns="0" bIns="0" rtlCol="0" anchor="t"/>
+          <a:lstStyle/>
+          <a:p>
+            <a:pPr algn="ctr" indent="0" marL="0">
+              <a:buNone/>
+            </a:pPr>
+            <a:r>
+              <a:rPr lang="en-US" sz="1150" b="1" dirty="0">
+                <a:solidFill>
+                  <a:srgbClr val="FFFFFF"/>
+                </a:solidFill>
+                <a:latin typeface="Arial" pitchFamily="34" charset="0"/>
+                <a:ea typeface="Arial" pitchFamily="34" charset="-122"/>
+                <a:cs typeface="Arial" pitchFamily="34" charset="-120"/>
+              </a:rPr>
+              <a:t>CHAPTER 03</a:t>
+            </a:r>
+            <a:endParaRPr lang="en-US" sz="1150" dirty="0"/>
+          </a:p>
+        </p:txBody>
+      </p:sp>
+      <p:pic>
+        <p:nvPicPr>
+          <p:cNvPr id="5" name="Image 1" descr="/Users/danwahlin/.copilot/session-state/56a7a0da-def8-48d4-b5e8-0ac3878cb8dd/files/slides-build/icons/FaGithub-1F2328.png">
+            <a:hlinkClick r:id="rId3" tooltip="https://github.com/github/copilot-app-for-beginners/tree/main/03-development-workflows"/>
+          </p:cNvPr>
+          <p:cNvPicPr>
+            <a:picLocks noChangeAspect="1"/>
+          </p:cNvPicPr>
+          <p:nvPr/>
+        </p:nvPicPr>
+        <p:blipFill>
+          <a:blip r:embed="rId2"/>
+          <a:stretch>
+            <a:fillRect/>
+          </a:stretch>
+        </p:blipFill>
+        <p:spPr>
+          <a:xfrm>
             <a:off x="8610600" y="165050"/>
             <a:ext cx="304800" cy="304800"/>
           </a:xfrm>
@@ -16593,7 +16441,7 @@
       </p:pic>
       <p:sp>
         <p:nvSpPr>
-          <p:cNvPr id="6" name="Text 3"/>
+          <p:cNvPr id="6" name="Text 2"/>
           <p:cNvSpPr/>
           <p:nvPr/>
         </p:nvSpPr>
@@ -16632,7 +16480,7 @@
       </p:sp>
       <p:sp>
         <p:nvSpPr>
-          <p:cNvPr id="7" name="Text 4"/>
+          <p:cNvPr id="7" name="Text 3"/>
           <p:cNvSpPr/>
           <p:nvPr/>
         </p:nvSpPr>
@@ -16677,7 +16525,7 @@
       </p:sp>
       <p:sp>
         <p:nvSpPr>
-          <p:cNvPr id="8" name="Text 5"/>
+          <p:cNvPr id="8" name="Text 4"/>
           <p:cNvSpPr/>
           <p:nvPr/>
         </p:nvSpPr>
@@ -16762,7 +16610,7 @@
       </p:sp>
       <p:sp>
         <p:nvSpPr>
-          <p:cNvPr id="9" name="Text 6"/>
+          <p:cNvPr id="9" name="Text 5"/>
           <p:cNvSpPr/>
           <p:nvPr/>
         </p:nvSpPr>
@@ -16798,7 +16646,7 @@
       </p:sp>
       <p:sp>
         <p:nvSpPr>
-          <p:cNvPr id="10" name="Shape 7"/>
+          <p:cNvPr id="10" name="Shape 6"/>
           <p:cNvSpPr/>
           <p:nvPr/>
         </p:nvSpPr>
@@ -16821,7 +16669,7 @@
       </p:sp>
       <p:sp>
         <p:nvSpPr>
-          <p:cNvPr id="11" name="Text 8"/>
+          <p:cNvPr id="11" name="Text 7"/>
           <p:cNvSpPr/>
           <p:nvPr/>
         </p:nvSpPr>
@@ -16853,7 +16701,7 @@
       </p:sp>
       <p:sp>
         <p:nvSpPr>
-          <p:cNvPr id="12" name="Text 9"/>
+          <p:cNvPr id="12" name="Text 8"/>
           <p:cNvSpPr/>
           <p:nvPr/>
         </p:nvSpPr>
@@ -16892,7 +16740,7 @@
       </p:sp>
       <p:sp>
         <p:nvSpPr>
-          <p:cNvPr id="13" name="Text 10"/>
+          <p:cNvPr id="13" name="Text 9"/>
           <p:cNvSpPr/>
           <p:nvPr/>
         </p:nvSpPr>
@@ -16934,7 +16782,7 @@
       </p:sp>
       <p:sp>
         <p:nvSpPr>
-          <p:cNvPr id="14" name="Text 11"/>
+          <p:cNvPr id="14" name="Text 10"/>
           <p:cNvSpPr/>
           <p:nvPr/>
         </p:nvSpPr>
@@ -17027,7 +16875,7 @@
       </p:sp>
       <p:sp>
         <p:nvSpPr>
-          <p:cNvPr id="15" name="Shape 12"/>
+          <p:cNvPr id="15" name="Shape 11"/>
           <p:cNvSpPr/>
           <p:nvPr/>
         </p:nvSpPr>
@@ -17050,7 +16898,7 @@
       </p:sp>
       <p:sp>
         <p:nvSpPr>
-          <p:cNvPr id="16" name="Text 13"/>
+          <p:cNvPr id="16" name="Text 12"/>
           <p:cNvSpPr/>
           <p:nvPr/>
         </p:nvSpPr>
@@ -17082,7 +16930,7 @@
       </p:sp>
       <p:sp>
         <p:nvSpPr>
-          <p:cNvPr id="17" name="Text 14"/>
+          <p:cNvPr id="17" name="Text 13"/>
           <p:cNvSpPr/>
           <p:nvPr/>
         </p:nvSpPr>
@@ -17121,7 +16969,7 @@
       </p:sp>
       <p:sp>
         <p:nvSpPr>
-          <p:cNvPr id="18" name="Text 15"/>
+          <p:cNvPr id="18" name="Text 14"/>
           <p:cNvSpPr/>
           <p:nvPr/>
         </p:nvSpPr>
@@ -17163,7 +17011,7 @@
       </p:sp>
       <p:sp>
         <p:nvSpPr>
-          <p:cNvPr id="19" name="Text 16"/>
+          <p:cNvPr id="19" name="Text 15"/>
           <p:cNvSpPr/>
           <p:nvPr/>
         </p:nvSpPr>
@@ -17273,7 +17121,7 @@
       </p:sp>
       <p:sp>
         <p:nvSpPr>
-          <p:cNvPr id="20" name="Shape 17"/>
+          <p:cNvPr id="20" name="Shape 16"/>
           <p:cNvSpPr/>
           <p:nvPr/>
         </p:nvSpPr>
@@ -17296,7 +17144,7 @@
       </p:sp>
       <p:sp>
         <p:nvSpPr>
-          <p:cNvPr id="21" name="Text 18"/>
+          <p:cNvPr id="21" name="Text 17"/>
           <p:cNvSpPr/>
           <p:nvPr/>
         </p:nvSpPr>
@@ -17328,7 +17176,7 @@
       </p:sp>
       <p:sp>
         <p:nvSpPr>
-          <p:cNvPr id="22" name="Text 19"/>
+          <p:cNvPr id="22" name="Text 18"/>
           <p:cNvSpPr/>
           <p:nvPr/>
         </p:nvSpPr>
@@ -17367,7 +17215,7 @@
       </p:sp>
       <p:sp>
         <p:nvSpPr>
-          <p:cNvPr id="23" name="Text 20"/>
+          <p:cNvPr id="23" name="Text 19"/>
           <p:cNvSpPr/>
           <p:nvPr/>
         </p:nvSpPr>
@@ -17409,7 +17257,7 @@
       </p:sp>
       <p:sp>
         <p:nvSpPr>
-          <p:cNvPr id="24" name="Text 21"/>
+          <p:cNvPr id="24" name="Text 20"/>
           <p:cNvSpPr/>
           <p:nvPr/>
         </p:nvSpPr>
@@ -17485,7 +17333,7 @@
       </p:sp>
       <p:sp>
         <p:nvSpPr>
-          <p:cNvPr id="25" name="Text 22"/>
+          <p:cNvPr id="25" name="Text 21"/>
           <p:cNvSpPr/>
           <p:nvPr/>
         </p:nvSpPr>
@@ -17517,7 +17365,7 @@
       </p:sp>
       <p:sp>
         <p:nvSpPr>
-          <p:cNvPr id="26" name="Text 23"/>
+          <p:cNvPr id="26" name="Text 22"/>
           <p:cNvSpPr/>
           <p:nvPr/>
         </p:nvSpPr>
@@ -17556,7 +17404,7 @@
       </p:sp>
       <p:sp>
         <p:nvSpPr>
-          <p:cNvPr id="27" name="Text 24"/>
+          <p:cNvPr id="27" name="Text 23"/>
           <p:cNvSpPr/>
           <p:nvPr/>
         </p:nvSpPr>
@@ -17598,7 +17446,7 @@
       </p:sp>
       <p:sp>
         <p:nvSpPr>
-          <p:cNvPr id="28" name="Text 25"/>
+          <p:cNvPr id="28" name="Text 24"/>
           <p:cNvSpPr/>
           <p:nvPr/>
         </p:nvSpPr>
@@ -17670,112 +17518,9 @@
           <a:chExt cx="0" cy="0"/>
         </a:xfrm>
       </p:grpSpPr>
-      <p:sp>
-        <p:nvSpPr>
-          <p:cNvPr id="2" name="Text 0"/>
-          <p:cNvSpPr/>
-          <p:nvPr/>
-        </p:nvSpPr>
-        <p:spPr>
-          <a:xfrm>
-            <a:off x="0" y="0"/>
-            <a:ext cx="9144000" cy="76200"/>
-          </a:xfrm>
-          <a:prstGeom prst="rect">
-            <a:avLst/>
-          </a:prstGeom>
-          <a:solidFill>
-            <a:srgbClr val="0969DA"/>
-          </a:solidFill>
-          <a:ln/>
-        </p:spPr>
-        <p:txBody>
-          <a:bodyPr wrap="square" rtlCol="0" anchor="ctr"/>
-          <a:lstStyle/>
-          <a:p>
-            <a:pPr indent="0" marL="0">
-              <a:buNone/>
-            </a:pPr>
-            <a:endParaRPr lang="en-US" dirty="0"/>
-          </a:p>
-        </p:txBody>
-      </p:sp>
-      <p:sp>
-        <p:nvSpPr>
-          <p:cNvPr id="3" name="Text 1"/>
-          <p:cNvSpPr/>
-          <p:nvPr/>
-        </p:nvSpPr>
-        <p:spPr>
-          <a:xfrm>
-            <a:off x="7340501" y="177701"/>
-            <a:ext cx="1168301" cy="279350"/>
-          </a:xfrm>
-          <a:prstGeom prst="roundRect">
-            <a:avLst>
-              <a:gd name="adj" fmla="val 22731"/>
-            </a:avLst>
-          </a:prstGeom>
-          <a:solidFill>
-            <a:srgbClr val="1A7F37"/>
-          </a:solidFill>
-          <a:ln/>
-        </p:spPr>
-        <p:txBody>
-          <a:bodyPr wrap="square" rtlCol="0" anchor="ctr"/>
-          <a:lstStyle/>
-          <a:p>
-            <a:pPr indent="0" marL="0">
-              <a:buNone/>
-            </a:pPr>
-            <a:endParaRPr lang="en-US" dirty="0"/>
-          </a:p>
-        </p:txBody>
-      </p:sp>
-      <p:sp>
-        <p:nvSpPr>
-          <p:cNvPr id="4" name="Text 2"/>
-          <p:cNvSpPr/>
-          <p:nvPr/>
-        </p:nvSpPr>
-        <p:spPr>
-          <a:xfrm>
-            <a:off x="7461041" y="231577"/>
-            <a:ext cx="927071" cy="171450"/>
-          </a:xfrm>
-          <a:prstGeom prst="rect">
-            <a:avLst/>
-          </a:prstGeom>
-          <a:noFill/>
-          <a:ln/>
-        </p:spPr>
-        <p:txBody>
-          <a:bodyPr wrap="square" lIns="0" tIns="0" rIns="0" bIns="0" rtlCol="0" anchor="t"/>
-          <a:lstStyle/>
-          <a:p>
-            <a:pPr algn="ctr" indent="0" marL="0">
-              <a:buNone/>
-            </a:pPr>
-            <a:r>
-              <a:rPr lang="en-US" sz="1150" b="1" dirty="0">
-                <a:solidFill>
-                  <a:srgbClr val="FFFFFF"/>
-                </a:solidFill>
-                <a:latin typeface="Arial" pitchFamily="34" charset="0"/>
-                <a:ea typeface="Arial" pitchFamily="34" charset="-122"/>
-                <a:cs typeface="Arial" pitchFamily="34" charset="-120"/>
-              </a:rPr>
-              <a:t>CHAPTER 03</a:t>
-            </a:r>
-            <a:endParaRPr lang="en-US" sz="1150" dirty="0"/>
-          </a:p>
-        </p:txBody>
-      </p:sp>
       <p:pic>
         <p:nvPicPr>
-          <p:cNvPr id="5" name="Image 0" descr="/Users/danwahlin/.copilot/session-state/56a7a0da-def8-48d4-b5e8-0ac3878cb8dd/files/slides-build/icons/FaGithub-1F2328.png">
-            <a:hlinkClick r:id="rId2" tooltip="https://github.com/github/copilot-app-for-beginners/tree/main/03-development-workflows"/>
-          </p:cNvPr>
+          <p:cNvPr id="2" name="Image 0" descr="/Users/danwahlin/.copilot/session-state/56a7a0da-def8-48d4-b5e8-0ac3878cb8dd/files/slides-build/img/grad-corner.png">    </p:cNvPr>
           <p:cNvPicPr>
             <a:picLocks noChangeAspect="1"/>
           </p:cNvPicPr>
@@ -17789,6 +17534,103 @@
         </p:blipFill>
         <p:spPr>
           <a:xfrm>
+            <a:off x="6349901" y="0"/>
+            <a:ext cx="2793950" cy="1308050"/>
+          </a:xfrm>
+          <a:prstGeom prst="rect">
+            <a:avLst/>
+          </a:prstGeom>
+        </p:spPr>
+      </p:pic>
+      <p:sp>
+        <p:nvSpPr>
+          <p:cNvPr id="3" name="Text 0"/>
+          <p:cNvSpPr/>
+          <p:nvPr/>
+        </p:nvSpPr>
+        <p:spPr>
+          <a:xfrm>
+            <a:off x="7340501" y="177701"/>
+            <a:ext cx="1168301" cy="279350"/>
+          </a:xfrm>
+          <a:prstGeom prst="roundRect">
+            <a:avLst>
+              <a:gd name="adj" fmla="val 22731"/>
+            </a:avLst>
+          </a:prstGeom>
+          <a:solidFill>
+            <a:srgbClr val="1A7F37"/>
+          </a:solidFill>
+          <a:ln/>
+        </p:spPr>
+        <p:txBody>
+          <a:bodyPr wrap="square" rtlCol="0" anchor="ctr"/>
+          <a:lstStyle/>
+          <a:p>
+            <a:pPr indent="0" marL="0">
+              <a:buNone/>
+            </a:pPr>
+            <a:endParaRPr lang="en-US" dirty="0"/>
+          </a:p>
+        </p:txBody>
+      </p:sp>
+      <p:sp>
+        <p:nvSpPr>
+          <p:cNvPr id="4" name="Text 1"/>
+          <p:cNvSpPr/>
+          <p:nvPr/>
+        </p:nvSpPr>
+        <p:spPr>
+          <a:xfrm>
+            <a:off x="7461041" y="231577"/>
+            <a:ext cx="927071" cy="171450"/>
+          </a:xfrm>
+          <a:prstGeom prst="rect">
+            <a:avLst/>
+          </a:prstGeom>
+          <a:noFill/>
+          <a:ln/>
+        </p:spPr>
+        <p:txBody>
+          <a:bodyPr wrap="square" lIns="0" tIns="0" rIns="0" bIns="0" rtlCol="0" anchor="t"/>
+          <a:lstStyle/>
+          <a:p>
+            <a:pPr algn="ctr" indent="0" marL="0">
+              <a:buNone/>
+            </a:pPr>
+            <a:r>
+              <a:rPr lang="en-US" sz="1150" b="1" dirty="0">
+                <a:solidFill>
+                  <a:srgbClr val="FFFFFF"/>
+                </a:solidFill>
+                <a:latin typeface="Arial" pitchFamily="34" charset="0"/>
+                <a:ea typeface="Arial" pitchFamily="34" charset="-122"/>
+                <a:cs typeface="Arial" pitchFamily="34" charset="-120"/>
+              </a:rPr>
+              <a:t>CHAPTER 03</a:t>
+            </a:r>
+            <a:endParaRPr lang="en-US" sz="1150" dirty="0"/>
+          </a:p>
+        </p:txBody>
+      </p:sp>
+      <p:pic>
+        <p:nvPicPr>
+          <p:cNvPr id="5" name="Image 1" descr="/Users/danwahlin/.copilot/session-state/56a7a0da-def8-48d4-b5e8-0ac3878cb8dd/files/slides-build/icons/FaGithub-1F2328.png">
+            <a:hlinkClick r:id="rId3" tooltip="https://github.com/github/copilot-app-for-beginners/tree/main/03-development-workflows"/>
+          </p:cNvPr>
+          <p:cNvPicPr>
+            <a:picLocks noChangeAspect="1"/>
+          </p:cNvPicPr>
+          <p:nvPr/>
+        </p:nvPicPr>
+        <p:blipFill>
+          <a:blip r:embed="rId2"/>
+          <a:stretch>
+            <a:fillRect/>
+          </a:stretch>
+        </p:blipFill>
+        <p:spPr>
+          <a:xfrm>
             <a:off x="8610600" y="165050"/>
             <a:ext cx="304800" cy="304800"/>
           </a:xfrm>
@@ -17799,7 +17641,7 @@
       </p:pic>
       <p:sp>
         <p:nvSpPr>
-          <p:cNvPr id="6" name="Text 3"/>
+          <p:cNvPr id="6" name="Text 2"/>
           <p:cNvSpPr/>
           <p:nvPr/>
         </p:nvSpPr>
@@ -17838,7 +17680,7 @@
       </p:sp>
       <p:sp>
         <p:nvSpPr>
-          <p:cNvPr id="7" name="Text 4"/>
+          <p:cNvPr id="7" name="Text 3"/>
           <p:cNvSpPr/>
           <p:nvPr/>
         </p:nvSpPr>
@@ -17883,7 +17725,7 @@
       </p:sp>
       <p:sp>
         <p:nvSpPr>
-          <p:cNvPr id="8" name="Text 5"/>
+          <p:cNvPr id="8" name="Text 4"/>
           <p:cNvSpPr/>
           <p:nvPr/>
         </p:nvSpPr>
@@ -18008,7 +17850,7 @@
       </p:sp>
       <p:sp>
         <p:nvSpPr>
-          <p:cNvPr id="9" name="Text 6"/>
+          <p:cNvPr id="9" name="Text 5"/>
           <p:cNvSpPr/>
           <p:nvPr/>
         </p:nvSpPr>
@@ -18044,7 +17886,7 @@
       </p:sp>
       <p:sp>
         <p:nvSpPr>
-          <p:cNvPr id="10" name="Text 7"/>
+          <p:cNvPr id="10" name="Text 6"/>
           <p:cNvSpPr/>
           <p:nvPr/>
         </p:nvSpPr>
@@ -18074,7 +17916,7 @@
       </p:sp>
       <p:sp>
         <p:nvSpPr>
-          <p:cNvPr id="11" name="Shape 8"/>
+          <p:cNvPr id="11" name="Shape 7"/>
           <p:cNvSpPr/>
           <p:nvPr/>
         </p:nvSpPr>
@@ -18097,7 +17939,7 @@
       </p:sp>
       <p:sp>
         <p:nvSpPr>
-          <p:cNvPr id="12" name="Text 9"/>
+          <p:cNvPr id="12" name="Text 8"/>
           <p:cNvSpPr/>
           <p:nvPr/>
         </p:nvSpPr>
@@ -18129,7 +17971,7 @@
       </p:sp>
       <p:sp>
         <p:nvSpPr>
-          <p:cNvPr id="13" name="Text 10"/>
+          <p:cNvPr id="13" name="Text 9"/>
           <p:cNvSpPr/>
           <p:nvPr/>
         </p:nvSpPr>
@@ -18161,7 +18003,7 @@
       </p:sp>
       <p:sp>
         <p:nvSpPr>
-          <p:cNvPr id="14" name="Text 11"/>
+          <p:cNvPr id="14" name="Text 10"/>
           <p:cNvSpPr/>
           <p:nvPr/>
         </p:nvSpPr>
@@ -18193,7 +18035,7 @@
       </p:sp>
       <p:sp>
         <p:nvSpPr>
-          <p:cNvPr id="15" name="Text 12"/>
+          <p:cNvPr id="15" name="Text 11"/>
           <p:cNvSpPr/>
           <p:nvPr/>
         </p:nvSpPr>
@@ -18232,7 +18074,7 @@
       </p:sp>
       <p:sp>
         <p:nvSpPr>
-          <p:cNvPr id="16" name="Text 13"/>
+          <p:cNvPr id="16" name="Text 12"/>
           <p:cNvSpPr/>
           <p:nvPr/>
         </p:nvSpPr>
@@ -18291,7 +18133,7 @@
       </p:sp>
       <p:sp>
         <p:nvSpPr>
-          <p:cNvPr id="17" name="Text 14"/>
+          <p:cNvPr id="17" name="Text 13"/>
           <p:cNvSpPr/>
           <p:nvPr/>
         </p:nvSpPr>
@@ -18350,7 +18192,7 @@
       </p:sp>
       <p:sp>
         <p:nvSpPr>
-          <p:cNvPr id="18" name="Text 15"/>
+          <p:cNvPr id="18" name="Text 14"/>
           <p:cNvSpPr/>
           <p:nvPr/>
         </p:nvSpPr>
@@ -18409,7 +18251,7 @@
       </p:sp>
       <p:sp>
         <p:nvSpPr>
-          <p:cNvPr id="19" name="Text 16"/>
+          <p:cNvPr id="19" name="Text 15"/>
           <p:cNvSpPr/>
           <p:nvPr/>
         </p:nvSpPr>
@@ -18553,7 +18395,7 @@
       </p:sp>
       <p:sp>
         <p:nvSpPr>
-          <p:cNvPr id="20" name="Text 17"/>
+          <p:cNvPr id="20" name="Text 16"/>
           <p:cNvSpPr/>
           <p:nvPr/>
         </p:nvSpPr>
@@ -18592,7 +18434,7 @@
       </p:sp>
       <p:sp>
         <p:nvSpPr>
-          <p:cNvPr id="21" name="Text 18"/>
+          <p:cNvPr id="21" name="Text 17"/>
           <p:cNvSpPr/>
           <p:nvPr/>
         </p:nvSpPr>
@@ -18628,7 +18470,7 @@
       </p:sp>
       <p:sp>
         <p:nvSpPr>
-          <p:cNvPr id="22" name="Text 19"/>
+          <p:cNvPr id="22" name="Text 18"/>
           <p:cNvSpPr/>
           <p:nvPr/>
         </p:nvSpPr>
@@ -18667,7 +18509,7 @@
       </p:sp>
       <p:sp>
         <p:nvSpPr>
-          <p:cNvPr id="23" name="Text 20"/>
+          <p:cNvPr id="23" name="Text 19"/>
           <p:cNvSpPr/>
           <p:nvPr/>
         </p:nvSpPr>
@@ -18709,7 +18551,7 @@
       </p:sp>
       <p:sp>
         <p:nvSpPr>
-          <p:cNvPr id="24" name="Text 21"/>
+          <p:cNvPr id="24" name="Text 20"/>
           <p:cNvSpPr/>
           <p:nvPr/>
         </p:nvSpPr>
@@ -18748,7 +18590,7 @@
       </p:sp>
       <p:sp>
         <p:nvSpPr>
-          <p:cNvPr id="25" name="Text 22"/>
+          <p:cNvPr id="25" name="Text 21"/>
           <p:cNvSpPr/>
           <p:nvPr/>
         </p:nvSpPr>
@@ -18784,7 +18626,7 @@
       </p:sp>
       <p:sp>
         <p:nvSpPr>
-          <p:cNvPr id="26" name="Text 23"/>
+          <p:cNvPr id="26" name="Text 22"/>
           <p:cNvSpPr/>
           <p:nvPr/>
         </p:nvSpPr>
@@ -18823,7 +18665,7 @@
       </p:sp>
       <p:sp>
         <p:nvSpPr>
-          <p:cNvPr id="27" name="Text 24"/>
+          <p:cNvPr id="27" name="Text 23"/>
           <p:cNvSpPr/>
           <p:nvPr/>
         </p:nvSpPr>
@@ -18865,7 +18707,7 @@
       </p:sp>
       <p:sp>
         <p:nvSpPr>
-          <p:cNvPr id="28" name="Text 25"/>
+          <p:cNvPr id="28" name="Text 24"/>
           <p:cNvSpPr/>
           <p:nvPr/>
         </p:nvSpPr>

--- a/slides/03-development-workflows.pptx
+++ b/slides/03-development-workflows.pptx
@@ -4160,8 +4160,8 @@
         </p:nvSpPr>
         <p:spPr>
           <a:xfrm>
-            <a:off x="735211" y="1577876"/>
-            <a:ext cx="3736330" cy="3041600"/>
+            <a:off x="867370" y="1577876"/>
+            <a:ext cx="3472160" cy="3041600"/>
           </a:xfrm>
           <a:prstGeom prst="roundRect">
             <a:avLst>
@@ -4211,8 +4211,8 @@
         </p:blipFill>
         <p:spPr>
           <a:xfrm>
-            <a:off x="782836" y="1625501"/>
-            <a:ext cx="3641080" cy="2946350"/>
+            <a:off x="914995" y="1625501"/>
+            <a:ext cx="3376910" cy="2946350"/>
           </a:xfrm>
           <a:prstGeom prst="rect">
             <a:avLst/>
@@ -4710,7 +4710,7 @@
         <p:spPr>
           <a:xfrm>
             <a:off x="5003750" y="3698677"/>
-            <a:ext cx="2992041" cy="755600"/>
+            <a:ext cx="2834580" cy="755600"/>
           </a:xfrm>
           <a:prstGeom prst="roundRect">
             <a:avLst>
@@ -4761,7 +4761,7 @@
         <p:spPr>
           <a:xfrm>
             <a:off x="5051375" y="3746302"/>
-            <a:ext cx="2896791" cy="660350"/>
+            <a:ext cx="2739330" cy="660350"/>
           </a:xfrm>
           <a:prstGeom prst="rect">
             <a:avLst/>

--- a/slides/03-development-workflows.pptx
+++ b/slides/03-development-workflows.pptx
@@ -6188,12 +6188,12 @@
         </p:nvSpPr>
         <p:spPr>
           <a:xfrm>
-            <a:off x="3939927" y="1885206"/>
-            <a:ext cx="4692551" cy="2376041"/>
+            <a:off x="3939927" y="2078236"/>
+            <a:ext cx="4692551" cy="1989981"/>
           </a:xfrm>
           <a:prstGeom prst="roundRect">
             <a:avLst>
-              <a:gd name="adj" fmla="val 3207"/>
+              <a:gd name="adj" fmla="val 3829"/>
             </a:avLst>
           </a:prstGeom>
           <a:solidFill>
@@ -6239,8 +6239,8 @@
         </p:blipFill>
         <p:spPr>
           <a:xfrm>
-            <a:off x="3987552" y="1932831"/>
-            <a:ext cx="4597301" cy="2280791"/>
+            <a:off x="3987552" y="2125861"/>
+            <a:ext cx="4597301" cy="1894731"/>
           </a:xfrm>
           <a:prstGeom prst="rect">
             <a:avLst/>
@@ -7884,12 +7884,12 @@
         </p:nvSpPr>
         <p:spPr>
           <a:xfrm>
-            <a:off x="511076" y="2183755"/>
-            <a:ext cx="3854351" cy="756791"/>
+            <a:off x="511076" y="2163514"/>
+            <a:ext cx="3854351" cy="797421"/>
           </a:xfrm>
           <a:prstGeom prst="roundRect">
             <a:avLst>
-              <a:gd name="adj" fmla="val 10069"/>
+              <a:gd name="adj" fmla="val 9556"/>
             </a:avLst>
           </a:prstGeom>
           <a:solidFill>
@@ -7935,8 +7935,8 @@
         </p:blipFill>
         <p:spPr>
           <a:xfrm>
-            <a:off x="558701" y="2231380"/>
-            <a:ext cx="3759101" cy="661541"/>
+            <a:off x="558701" y="2211139"/>
+            <a:ext cx="3759101" cy="702171"/>
           </a:xfrm>
           <a:prstGeom prst="rect">
             <a:avLst/>

--- a/slides/03-development-workflows.pptx
+++ b/slides/03-development-workflows.pptx
@@ -2479,7 +2479,7 @@
       </p:grpSpPr>
       <p:pic>
         <p:nvPicPr>
-          <p:cNvPr id="2" name="Image 0" descr="/Users/danwahlin/.copilot/session-state/56a7a0da-def8-48d4-b5e8-0ac3878cb8dd/files/slides-build/img/grad-title.jpg">    </p:cNvPr>
+          <p:cNvPr id="2" name="Image 0" descr="/Users/danwahlin/.copilot/session-state/56a7a0da-def8-48d4-b5e8-0ac3878cb8dd/files/slides-build/img/grad-title-pattern.jpg">    </p:cNvPr>
           <p:cNvPicPr>
             <a:picLocks noChangeAspect="1"/>
           </p:cNvPicPr>
@@ -2789,7 +2789,7 @@
       </p:grpSpPr>
       <p:pic>
         <p:nvPicPr>
-          <p:cNvPr id="2" name="Image 0" descr="/Users/danwahlin/.copilot/session-state/56a7a0da-def8-48d4-b5e8-0ac3878cb8dd/files/slides-build/img/grad-corner.png">    </p:cNvPr>
+          <p:cNvPr id="2" name="Image 0" descr="/Users/danwahlin/.copilot/session-state/56a7a0da-def8-48d4-b5e8-0ac3878cb8dd/files/slides-build/img/grad-corner-pattern.png">    </p:cNvPr>
           <p:cNvPicPr>
             <a:picLocks noChangeAspect="1"/>
           </p:cNvPicPr>
@@ -3904,7 +3904,7 @@
       </p:grpSpPr>
       <p:pic>
         <p:nvPicPr>
-          <p:cNvPr id="2" name="Image 0" descr="/Users/danwahlin/.copilot/session-state/56a7a0da-def8-48d4-b5e8-0ac3878cb8dd/files/slides-build/img/grad-corner.png">    </p:cNvPr>
+          <p:cNvPr id="2" name="Image 0" descr="/Users/danwahlin/.copilot/session-state/56a7a0da-def8-48d4-b5e8-0ac3878cb8dd/files/slides-build/img/grad-corner-pattern.png">    </p:cNvPr>
           <p:cNvPicPr>
             <a:picLocks noChangeAspect="1"/>
           </p:cNvPicPr>
@@ -4904,7 +4904,7 @@
       </p:sp>
       <p:pic>
         <p:nvPicPr>
-          <p:cNvPr id="5" name="Image 0" descr="/Users/danwahlin/.copilot/session-state/56a7a0da-def8-48d4-b5e8-0ac3878cb8dd/files/slides-build/img/grad-corner.png">    </p:cNvPr>
+          <p:cNvPr id="5" name="Image 0" descr="/Users/danwahlin/.copilot/session-state/56a7a0da-def8-48d4-b5e8-0ac3878cb8dd/files/slides-build/img/grad-corner-pattern.png">    </p:cNvPr>
           <p:cNvPicPr>
             <a:picLocks noChangeAspect="1"/>
           </p:cNvPicPr>
@@ -5215,7 +5215,7 @@
       </p:grpSpPr>
       <p:pic>
         <p:nvPicPr>
-          <p:cNvPr id="2" name="Image 0" descr="/Users/danwahlin/.copilot/session-state/56a7a0da-def8-48d4-b5e8-0ac3878cb8dd/files/slides-build/img/grad-corner.png">    </p:cNvPr>
+          <p:cNvPr id="2" name="Image 0" descr="/Users/danwahlin/.copilot/session-state/56a7a0da-def8-48d4-b5e8-0ac3878cb8dd/files/slides-build/img/grad-corner-pattern.png">    </p:cNvPr>
           <p:cNvPicPr>
             <a:picLocks noChangeAspect="1"/>
           </p:cNvPicPr>
@@ -5521,7 +5521,7 @@
       </p:grpSpPr>
       <p:pic>
         <p:nvPicPr>
-          <p:cNvPr id="2" name="Image 0" descr="/Users/danwahlin/.copilot/session-state/56a7a0da-def8-48d4-b5e8-0ac3878cb8dd/files/slides-build/img/grad-corner.png">    </p:cNvPr>
+          <p:cNvPr id="2" name="Image 0" descr="/Users/danwahlin/.copilot/session-state/56a7a0da-def8-48d4-b5e8-0ac3878cb8dd/files/slides-build/img/grad-corner-pattern.png">    </p:cNvPr>
           <p:cNvPicPr>
             <a:picLocks noChangeAspect="1"/>
           </p:cNvPicPr>
@@ -6281,7 +6281,7 @@
       </p:grpSpPr>
       <p:pic>
         <p:nvPicPr>
-          <p:cNvPr id="2" name="Image 0" descr="/Users/danwahlin/.copilot/session-state/56a7a0da-def8-48d4-b5e8-0ac3878cb8dd/files/slides-build/img/grad-corner.png">    </p:cNvPr>
+          <p:cNvPr id="2" name="Image 0" descr="/Users/danwahlin/.copilot/session-state/56a7a0da-def8-48d4-b5e8-0ac3878cb8dd/files/slides-build/img/grad-corner-pattern.png">    </p:cNvPr>
           <p:cNvPicPr>
             <a:picLocks noChangeAspect="1"/>
           </p:cNvPicPr>
@@ -7634,7 +7634,7 @@
       </p:grpSpPr>
       <p:pic>
         <p:nvPicPr>
-          <p:cNvPr id="2" name="Image 0" descr="/Users/danwahlin/.copilot/session-state/56a7a0da-def8-48d4-b5e8-0ac3878cb8dd/files/slides-build/img/grad-corner.png">    </p:cNvPr>
+          <p:cNvPr id="2" name="Image 0" descr="/Users/danwahlin/.copilot/session-state/56a7a0da-def8-48d4-b5e8-0ac3878cb8dd/files/slides-build/img/grad-corner-pattern.png">    </p:cNvPr>
           <p:cNvPicPr>
             <a:picLocks noChangeAspect="1"/>
           </p:cNvPicPr>
@@ -8541,7 +8541,7 @@
       </p:grpSpPr>
       <p:pic>
         <p:nvPicPr>
-          <p:cNvPr id="2" name="Image 0" descr="/Users/danwahlin/.copilot/session-state/56a7a0da-def8-48d4-b5e8-0ac3878cb8dd/files/slides-build/img/grad-corner.png">    </p:cNvPr>
+          <p:cNvPr id="2" name="Image 0" descr="/Users/danwahlin/.copilot/session-state/56a7a0da-def8-48d4-b5e8-0ac3878cb8dd/files/slides-build/img/grad-corner-pattern.png">    </p:cNvPr>
           <p:cNvPicPr>
             <a:picLocks noChangeAspect="1"/>
           </p:cNvPicPr>
@@ -9348,7 +9348,7 @@
       </p:grpSpPr>
       <p:pic>
         <p:nvPicPr>
-          <p:cNvPr id="2" name="Image 0" descr="/Users/danwahlin/.copilot/session-state/56a7a0da-def8-48d4-b5e8-0ac3878cb8dd/files/slides-build/img/grad-corner.png">    </p:cNvPr>
+          <p:cNvPr id="2" name="Image 0" descr="/Users/danwahlin/.copilot/session-state/56a7a0da-def8-48d4-b5e8-0ac3878cb8dd/files/slides-build/img/grad-corner-pattern.png">    </p:cNvPr>
           <p:cNvPicPr>
             <a:picLocks noChangeAspect="1"/>
           </p:cNvPicPr>
@@ -10565,7 +10565,7 @@
       </p:grpSpPr>
       <p:pic>
         <p:nvPicPr>
-          <p:cNvPr id="2" name="Image 0" descr="/Users/danwahlin/.copilot/session-state/56a7a0da-def8-48d4-b5e8-0ac3878cb8dd/files/slides-build/img/grad-corner.png">    </p:cNvPr>
+          <p:cNvPr id="2" name="Image 0" descr="/Users/danwahlin/.copilot/session-state/56a7a0da-def8-48d4-b5e8-0ac3878cb8dd/files/slides-build/img/grad-corner-pattern.png">    </p:cNvPr>
           <p:cNvPicPr>
             <a:picLocks noChangeAspect="1"/>
           </p:cNvPicPr>
@@ -11660,7 +11660,7 @@
       </p:grpSpPr>
       <p:pic>
         <p:nvPicPr>
-          <p:cNvPr id="2" name="Image 0" descr="/Users/danwahlin/.copilot/session-state/56a7a0da-def8-48d4-b5e8-0ac3878cb8dd/files/slides-build/img/grad-corner.png">    </p:cNvPr>
+          <p:cNvPr id="2" name="Image 0" descr="/Users/danwahlin/.copilot/session-state/56a7a0da-def8-48d4-b5e8-0ac3878cb8dd/files/slides-build/img/grad-corner-pattern.png">    </p:cNvPr>
           <p:cNvPicPr>
             <a:picLocks noChangeAspect="1"/>
           </p:cNvPicPr>
@@ -12385,7 +12385,7 @@
       </p:grpSpPr>
       <p:pic>
         <p:nvPicPr>
-          <p:cNvPr id="2" name="Image 0" descr="/Users/danwahlin/.copilot/session-state/56a7a0da-def8-48d4-b5e8-0ac3878cb8dd/files/slides-build/img/grad-corner.png">    </p:cNvPr>
+          <p:cNvPr id="2" name="Image 0" descr="/Users/danwahlin/.copilot/session-state/56a7a0da-def8-48d4-b5e8-0ac3878cb8dd/files/slides-build/img/grad-corner-pattern.png">    </p:cNvPr>
           <p:cNvPicPr>
             <a:picLocks noChangeAspect="1"/>
           </p:cNvPicPr>
@@ -13030,7 +13030,7 @@
       </p:grpSpPr>
       <p:pic>
         <p:nvPicPr>
-          <p:cNvPr id="2" name="Image 0" descr="/Users/danwahlin/.copilot/session-state/56a7a0da-def8-48d4-b5e8-0ac3878cb8dd/files/slides-build/img/grad-corner.png">    </p:cNvPr>
+          <p:cNvPr id="2" name="Image 0" descr="/Users/danwahlin/.copilot/session-state/56a7a0da-def8-48d4-b5e8-0ac3878cb8dd/files/slides-build/img/grad-corner-pattern.png">    </p:cNvPr>
           <p:cNvPicPr>
             <a:picLocks noChangeAspect="1"/>
           </p:cNvPicPr>
@@ -13731,7 +13731,7 @@
       </p:grpSpPr>
       <p:pic>
         <p:nvPicPr>
-          <p:cNvPr id="2" name="Image 0" descr="/Users/danwahlin/.copilot/session-state/56a7a0da-def8-48d4-b5e8-0ac3878cb8dd/files/slides-build/img/grad-corner.png">    </p:cNvPr>
+          <p:cNvPr id="2" name="Image 0" descr="/Users/danwahlin/.copilot/session-state/56a7a0da-def8-48d4-b5e8-0ac3878cb8dd/files/slides-build/img/grad-corner-pattern.png">    </p:cNvPr>
           <p:cNvPicPr>
             <a:picLocks noChangeAspect="1"/>
           </p:cNvPicPr>
@@ -14975,7 +14975,7 @@
       </p:sp>
       <p:pic>
         <p:nvPicPr>
-          <p:cNvPr id="5" name="Image 0" descr="/Users/danwahlin/.copilot/session-state/56a7a0da-def8-48d4-b5e8-0ac3878cb8dd/files/slides-build/img/grad-corner.png">    </p:cNvPr>
+          <p:cNvPr id="5" name="Image 0" descr="/Users/danwahlin/.copilot/session-state/56a7a0da-def8-48d4-b5e8-0ac3878cb8dd/files/slides-build/img/grad-corner-pattern.png">    </p:cNvPr>
           <p:cNvPicPr>
             <a:picLocks noChangeAspect="1"/>
           </p:cNvPicPr>
@@ -15286,7 +15286,7 @@
       </p:grpSpPr>
       <p:pic>
         <p:nvPicPr>
-          <p:cNvPr id="2" name="Image 0" descr="/Users/danwahlin/.copilot/session-state/56a7a0da-def8-48d4-b5e8-0ac3878cb8dd/files/slides-build/img/grad-corner.png">    </p:cNvPr>
+          <p:cNvPr id="2" name="Image 0" descr="/Users/danwahlin/.copilot/session-state/56a7a0da-def8-48d4-b5e8-0ac3878cb8dd/files/slides-build/img/grad-corner-pattern.png">    </p:cNvPr>
           <p:cNvPicPr>
             <a:picLocks noChangeAspect="1"/>
           </p:cNvPicPr>
@@ -16320,7 +16320,7 @@
       </p:grpSpPr>
       <p:pic>
         <p:nvPicPr>
-          <p:cNvPr id="2" name="Image 0" descr="/Users/danwahlin/.copilot/session-state/56a7a0da-def8-48d4-b5e8-0ac3878cb8dd/files/slides-build/img/grad-corner.png">    </p:cNvPr>
+          <p:cNvPr id="2" name="Image 0" descr="/Users/danwahlin/.copilot/session-state/56a7a0da-def8-48d4-b5e8-0ac3878cb8dd/files/slides-build/img/grad-corner-pattern.png">    </p:cNvPr>
           <p:cNvPicPr>
             <a:picLocks noChangeAspect="1"/>
           </p:cNvPicPr>
@@ -17520,7 +17520,7 @@
       </p:grpSpPr>
       <p:pic>
         <p:nvPicPr>
-          <p:cNvPr id="2" name="Image 0" descr="/Users/danwahlin/.copilot/session-state/56a7a0da-def8-48d4-b5e8-0ac3878cb8dd/files/slides-build/img/grad-corner.png">    </p:cNvPr>
+          <p:cNvPr id="2" name="Image 0" descr="/Users/danwahlin/.copilot/session-state/56a7a0da-def8-48d4-b5e8-0ac3878cb8dd/files/slides-build/img/grad-corner-pattern.png">    </p:cNvPr>
           <p:cNvPicPr>
             <a:picLocks noChangeAspect="1"/>
           </p:cNvPicPr>

--- a/slides/03-development-workflows.pptx
+++ b/slides/03-development-workflows.pptx
@@ -1928,7 +1928,7 @@
           <a:p>
             <a:r>
               <a:rPr lang="en-US" dirty="0"/>
-              <a:t>Open the review panel and its Terminal tab. Install dependencies, run the tests once with the run flag so Vitest exits, and run the build. You should see four passing tests. The repository file .github/copilot-instructions.md tells Copilot about the sample app and its validation commands, so you can also ask Copilot to summarize the test framework and build tool. Dependencies are not shared between worktrees.</a:t>
+              <a:t>Open the review panel and its Terminal tab. Install dependencies, run the tests once with the run flag so Vitest exits, and run the build. You should see four passing tests. The repository file .github/copilot-instructions.md tells Copilot about the sample app and its validation commands, so you can also ask Copilot to summarize the test framework and build tool. Dependencies are not shared between worktrees. When Copilot gives you a Bash or PowerShell snippet, you can copy it into the Terminal tab, or select the Run button next to the snippet to run it in the session terminal. The terminal reuses the existing shell, so the working folder and environment carry over.</a:t>
             </a:r>
             <a:endParaRPr lang="en-US" dirty="0"/>
           </a:p>
@@ -16002,7 +16002,7 @@
         </p:nvSpPr>
         <p:spPr>
           <a:xfrm>
-            <a:off x="4622750" y="2272754"/>
+            <a:off x="4622750" y="1764209"/>
             <a:ext cx="4013150" cy="984052"/>
           </a:xfrm>
           <a:prstGeom prst="roundRect">
@@ -16038,7 +16038,7 @@
         </p:nvSpPr>
         <p:spPr>
           <a:xfrm>
-            <a:off x="4860875" y="2459980"/>
+            <a:off x="4860875" y="1951434"/>
             <a:ext cx="316968" cy="609600"/>
           </a:xfrm>
           <a:prstGeom prst="rect">
@@ -16080,7 +16080,7 @@
         </p:nvSpPr>
         <p:spPr>
           <a:xfrm>
-            <a:off x="5374779" y="2528292"/>
+            <a:off x="5374779" y="2019746"/>
             <a:ext cx="2436769" cy="247650"/>
           </a:xfrm>
           <a:prstGeom prst="rect">
@@ -16119,7 +16119,7 @@
         </p:nvSpPr>
         <p:spPr>
           <a:xfrm>
-            <a:off x="5374779" y="2801243"/>
+            <a:off x="5374779" y="2292697"/>
             <a:ext cx="2436769" cy="200025"/>
           </a:xfrm>
           <a:prstGeom prst="rect">
@@ -16158,7 +16158,7 @@
         </p:nvSpPr>
         <p:spPr>
           <a:xfrm>
-            <a:off x="4622750" y="3434507"/>
+            <a:off x="4622750" y="2900660"/>
             <a:ext cx="4013150" cy="515541"/>
           </a:xfrm>
           <a:prstGeom prst="roundRect">
@@ -16202,7 +16202,7 @@
         </p:blipFill>
         <p:spPr>
           <a:xfrm>
-            <a:off x="4809976" y="3590627"/>
+            <a:off x="4809976" y="3056781"/>
             <a:ext cx="203150" cy="203150"/>
           </a:xfrm>
           <a:prstGeom prst="rect">
@@ -16218,7 +16218,7 @@
         </p:nvSpPr>
         <p:spPr>
           <a:xfrm>
-            <a:off x="5140077" y="3570982"/>
+            <a:off x="5140077" y="3037136"/>
             <a:ext cx="3348204" cy="242590"/>
           </a:xfrm>
           <a:prstGeom prst="rect">
@@ -16283,6 +16283,142 @@
               <a:t> first.</a:t>
             </a:r>
             <a:endParaRPr lang="en-US" sz="1450" dirty="0"/>
+          </a:p>
+        </p:txBody>
+      </p:sp>
+      <p:sp>
+        <p:nvSpPr>
+          <p:cNvPr id="27" name="Text 22"/>
+          <p:cNvSpPr/>
+          <p:nvPr/>
+        </p:nvSpPr>
+        <p:spPr>
+          <a:xfrm>
+            <a:off x="4622750" y="3568601"/>
+            <a:ext cx="4013150" cy="889992"/>
+          </a:xfrm>
+          <a:prstGeom prst="roundRect">
+            <a:avLst>
+              <a:gd name="adj" fmla="val 11416"/>
+            </a:avLst>
+          </a:prstGeom>
+          <a:solidFill>
+            <a:srgbClr val="DDF4FF"/>
+          </a:solidFill>
+          <a:ln w="9525">
+            <a:solidFill>
+              <a:srgbClr val="9CD7FF"/>
+            </a:solidFill>
+          </a:ln>
+        </p:spPr>
+        <p:txBody>
+          <a:bodyPr wrap="square" rtlCol="0" anchor="ctr"/>
+          <a:lstStyle/>
+          <a:p>
+            <a:pPr indent="0" marL="0">
+              <a:buNone/>
+            </a:pPr>
+            <a:endParaRPr lang="en-US" dirty="0"/>
+          </a:p>
+        </p:txBody>
+      </p:sp>
+      <p:pic>
+        <p:nvPicPr>
+          <p:cNvPr id="28" name="Image 3" descr="/Users/danwahlin/.copilot/session-state/56a7a0da-def8-48d4-b5e8-0ac3878cb8dd/files/slides-build/icons/GoPlay-0969DA.png">    </p:cNvPr>
+          <p:cNvPicPr>
+            <a:picLocks noChangeAspect="1"/>
+          </p:cNvPicPr>
+          <p:nvPr/>
+        </p:nvPicPr>
+        <p:blipFill>
+          <a:blip r:embed="rId5"/>
+          <a:stretch>
+            <a:fillRect/>
+          </a:stretch>
+        </p:blipFill>
+        <p:spPr>
+          <a:xfrm>
+            <a:off x="4809976" y="3911947"/>
+            <a:ext cx="203150" cy="203150"/>
+          </a:xfrm>
+          <a:prstGeom prst="rect">
+            <a:avLst/>
+          </a:prstGeom>
+        </p:spPr>
+      </p:pic>
+      <p:sp>
+        <p:nvSpPr>
+          <p:cNvPr id="29" name="Text 23"/>
+          <p:cNvSpPr/>
+          <p:nvPr/>
+        </p:nvSpPr>
+        <p:spPr>
+          <a:xfrm>
+            <a:off x="5140077" y="3705076"/>
+            <a:ext cx="3374770" cy="617041"/>
+          </a:xfrm>
+          <a:prstGeom prst="rect">
+            <a:avLst/>
+          </a:prstGeom>
+          <a:noFill/>
+          <a:ln/>
+        </p:spPr>
+        <p:txBody>
+          <a:bodyPr wrap="square" lIns="0" tIns="0" rIns="0" bIns="0" rtlCol="0" anchor="t"/>
+          <a:lstStyle/>
+          <a:p>
+            <a:pPr algn="l" indent="0" marL="0">
+              <a:lnSpc>
+                <a:spcPts val="1620"/>
+              </a:lnSpc>
+              <a:buNone/>
+            </a:pPr>
+            <a:r>
+              <a:rPr lang="en-US" sz="1350" dirty="0">
+                <a:solidFill>
+                  <a:srgbClr val="1F2328"/>
+                </a:solidFill>
+                <a:latin typeface="Arial" pitchFamily="34" charset="0"/>
+                <a:ea typeface="Arial" pitchFamily="34" charset="-122"/>
+                <a:cs typeface="Arial" pitchFamily="34" charset="-120"/>
+              </a:rPr>
+              <a:t>Bash and PowerShell snippets in a response have a </a:t>
+            </a:r>
+            <a:pPr algn="l" indent="0" marL="0">
+              <a:lnSpc>
+                <a:spcPts val="1620"/>
+              </a:lnSpc>
+              <a:buNone/>
+            </a:pPr>
+            <a:r>
+              <a:rPr lang="en-US" sz="1350" b="1" dirty="0">
+                <a:solidFill>
+                  <a:srgbClr val="1F2328"/>
+                </a:solidFill>
+                <a:latin typeface="Arial" pitchFamily="34" charset="0"/>
+                <a:ea typeface="Arial" pitchFamily="34" charset="-122"/>
+                <a:cs typeface="Arial" pitchFamily="34" charset="-120"/>
+              </a:rPr>
+              <a:t>Run</a:t>
+            </a:r>
+            <a:pPr algn="l" indent="0" marL="0">
+              <a:lnSpc>
+                <a:spcPts val="1620"/>
+              </a:lnSpc>
+              <a:buNone/>
+            </a:pPr>
+            <a:r>
+              <a:rPr lang="en-US" sz="1350" dirty="0">
+                <a:solidFill>
+                  <a:srgbClr val="1F2328"/>
+                </a:solidFill>
+                <a:latin typeface="Arial" pitchFamily="34" charset="0"/>
+                <a:ea typeface="Arial" pitchFamily="34" charset="-122"/>
+                <a:cs typeface="Arial" pitchFamily="34" charset="-120"/>
+              </a:rPr>
+              <a:t> button that runs them in this terminal.</a:t>
+            </a:r>
+            <a:endParaRPr lang="en-US" sz="1350" dirty="0"/>
           </a:p>
         </p:txBody>
       </p:sp>

--- a/slides/03-development-workflows.pptx
+++ b/slides/03-development-workflows.pptx
@@ -2479,7 +2479,13 @@
       </p:grpSpPr>
       <p:pic>
         <p:nvPicPr>
-          <p:cNvPr id="2" name="Image 0" descr="/Users/danwahlin/.copilot/session-state/56a7a0da-def8-48d4-b5e8-0ac3878cb8dd/files/slides-build/img/grad-title-pattern.jpg">    </p:cNvPr>
+          <p:cNvPr id="2" name="Image 0" descr="">
+            <a:extLst>
+              <a:ext uri="{C183D7F6-B498-43B3-948B-1728B52AA6E4}">
+                <adec:decorative xmlns:adec="http://schemas.microsoft.com/office/drawing/2017/decorative" val="1"/>
+              </a:ext>
+            </a:extLst>
+          </p:cNvPr>
           <p:cNvPicPr>
             <a:picLocks noChangeAspect="1"/>
           </p:cNvPicPr>
@@ -2503,7 +2509,7 @@
       </p:pic>
       <p:pic>
         <p:nvPicPr>
-          <p:cNvPr id="3" name="Image 1" descr="/Users/danwahlin/.copilot/session-state/56a7a0da-def8-48d4-b5e8-0ac3878cb8dd/files/slides-build/icons/FaGithub-1F2328.png">
+          <p:cNvPr id="3" name="Image 1" descr="Open this chapter on GitHub">
             <a:hlinkClick r:id="rId3" tooltip="https://github.com/github/copilot-app-for-beginners/tree/main/03-development-workflows"/>
           </p:cNvPr>
           <p:cNvPicPr>
@@ -2687,7 +2693,13 @@
       </p:sp>
       <p:pic>
         <p:nvPicPr>
-          <p:cNvPr id="8" name="Image 2" descr="/Users/danwahlin/.copilot/session-state/56a7a0da-def8-48d4-b5e8-0ac3878cb8dd/files/slides-build/icons/FaGithub-0969DA.png">    </p:cNvPr>
+          <p:cNvPr id="8" name="Image 2" descr="">
+            <a:extLst>
+              <a:ext uri="{C183D7F6-B498-43B3-948B-1728B52AA6E4}">
+                <adec:decorative xmlns:adec="http://schemas.microsoft.com/office/drawing/2017/decorative" val="1"/>
+              </a:ext>
+            </a:extLst>
+          </p:cNvPr>
           <p:cNvPicPr>
             <a:picLocks noChangeAspect="1"/>
           </p:cNvPicPr>
@@ -2789,7 +2801,13 @@
       </p:grpSpPr>
       <p:pic>
         <p:nvPicPr>
-          <p:cNvPr id="2" name="Image 0" descr="/Users/danwahlin/.copilot/session-state/56a7a0da-def8-48d4-b5e8-0ac3878cb8dd/files/slides-build/img/grad-corner-pattern.png">    </p:cNvPr>
+          <p:cNvPr id="2" name="Image 0" descr="">
+            <a:extLst>
+              <a:ext uri="{C183D7F6-B498-43B3-948B-1728B52AA6E4}">
+                <adec:decorative xmlns:adec="http://schemas.microsoft.com/office/drawing/2017/decorative" val="1"/>
+              </a:ext>
+            </a:extLst>
+          </p:cNvPr>
           <p:cNvPicPr>
             <a:picLocks noChangeAspect="1"/>
           </p:cNvPicPr>
@@ -2884,7 +2902,7 @@
       </p:sp>
       <p:pic>
         <p:nvPicPr>
-          <p:cNvPr id="5" name="Image 1" descr="/Users/danwahlin/.copilot/session-state/56a7a0da-def8-48d4-b5e8-0ac3878cb8dd/files/slides-build/icons/FaGithub-1F2328.png">
+          <p:cNvPr id="5" name="Image 1" descr="Open this chapter on GitHub">
             <a:hlinkClick r:id="rId3" tooltip="https://github.com/github/copilot-app-for-beginners/tree/main/03-development-workflows"/>
           </p:cNvPr>
           <p:cNvPicPr>
@@ -3062,7 +3080,13 @@
       </p:sp>
       <p:pic>
         <p:nvPicPr>
-          <p:cNvPr id="10" name="Image 2" descr="/Users/danwahlin/.copilot/session-state/56a7a0da-def8-48d4-b5e8-0ac3878cb8dd/files/slides-build/icons/GoBeaker-1A7F37.png">    </p:cNvPr>
+          <p:cNvPr id="10" name="Image 2" descr="">
+            <a:extLst>
+              <a:ext uri="{C183D7F6-B498-43B3-948B-1728B52AA6E4}">
+                <adec:decorative xmlns:adec="http://schemas.microsoft.com/office/drawing/2017/decorative" val="1"/>
+              </a:ext>
+            </a:extLst>
+          </p:cNvPr>
           <p:cNvPicPr>
             <a:picLocks noChangeAspect="1"/>
           </p:cNvPicPr>
@@ -3362,7 +3386,13 @@
       </p:sp>
       <p:pic>
         <p:nvPicPr>
-          <p:cNvPr id="18" name="Image 3" descr="/Users/danwahlin/.copilot/session-state/56a7a0da-def8-48d4-b5e8-0ac3878cb8dd/files/slides-build/icons/GoCopilot-1A7F37.png">    </p:cNvPr>
+          <p:cNvPr id="18" name="Image 3" descr="">
+            <a:extLst>
+              <a:ext uri="{C183D7F6-B498-43B3-948B-1728B52AA6E4}">
+                <adec:decorative xmlns:adec="http://schemas.microsoft.com/office/drawing/2017/decorative" val="1"/>
+              </a:ext>
+            </a:extLst>
+          </p:cNvPr>
           <p:cNvPicPr>
             <a:picLocks noChangeAspect="1"/>
           </p:cNvPicPr>
@@ -3535,7 +3565,13 @@
       </p:sp>
       <p:pic>
         <p:nvPicPr>
-          <p:cNvPr id="23" name="Image 4" descr="/Users/danwahlin/.copilot/session-state/56a7a0da-def8-48d4-b5e8-0ac3878cb8dd/files/slides-build/icons/GoCodeReview-8250DF.png">    </p:cNvPr>
+          <p:cNvPr id="23" name="Image 4" descr="">
+            <a:extLst>
+              <a:ext uri="{C183D7F6-B498-43B3-948B-1728B52AA6E4}">
+                <adec:decorative xmlns:adec="http://schemas.microsoft.com/office/drawing/2017/decorative" val="1"/>
+              </a:ext>
+            </a:extLst>
+          </p:cNvPr>
           <p:cNvPicPr>
             <a:picLocks noChangeAspect="1"/>
           </p:cNvPicPr>
@@ -3767,7 +3803,13 @@
       </p:sp>
       <p:pic>
         <p:nvPicPr>
-          <p:cNvPr id="31" name="Image 5" descr="/Users/danwahlin/.copilot/session-state/56a7a0da-def8-48d4-b5e8-0ac3878cb8dd/files/slides-build/icons/GoCopilot-8250DF.png">    </p:cNvPr>
+          <p:cNvPr id="31" name="Image 5" descr="">
+            <a:extLst>
+              <a:ext uri="{C183D7F6-B498-43B3-948B-1728B52AA6E4}">
+                <adec:decorative xmlns:adec="http://schemas.microsoft.com/office/drawing/2017/decorative" val="1"/>
+              </a:ext>
+            </a:extLst>
+          </p:cNvPr>
           <p:cNvPicPr>
             <a:picLocks noChangeAspect="1"/>
           </p:cNvPicPr>
@@ -3904,7 +3946,13 @@
       </p:grpSpPr>
       <p:pic>
         <p:nvPicPr>
-          <p:cNvPr id="2" name="Image 0" descr="/Users/danwahlin/.copilot/session-state/56a7a0da-def8-48d4-b5e8-0ac3878cb8dd/files/slides-build/img/grad-corner-pattern.png">    </p:cNvPr>
+          <p:cNvPr id="2" name="Image 0" descr="">
+            <a:extLst>
+              <a:ext uri="{C183D7F6-B498-43B3-948B-1728B52AA6E4}">
+                <adec:decorative xmlns:adec="http://schemas.microsoft.com/office/drawing/2017/decorative" val="1"/>
+              </a:ext>
+            </a:extLst>
+          </p:cNvPr>
           <p:cNvPicPr>
             <a:picLocks noChangeAspect="1"/>
           </p:cNvPicPr>
@@ -3999,7 +4047,7 @@
       </p:sp>
       <p:pic>
         <p:nvPicPr>
-          <p:cNvPr id="5" name="Image 1" descr="/Users/danwahlin/.copilot/session-state/56a7a0da-def8-48d4-b5e8-0ac3878cb8dd/files/slides-build/icons/FaGithub-1F2328.png">
+          <p:cNvPr id="5" name="Image 1" descr="Open this chapter on GitHub">
             <a:hlinkClick r:id="rId3" tooltip="https://github.com/github/copilot-app-for-beginners/tree/main/03-development-workflows"/>
           </p:cNvPr>
           <p:cNvPicPr>
@@ -4197,7 +4245,7 @@
       </p:sp>
       <p:pic>
         <p:nvPicPr>
-          <p:cNvPr id="10" name="Image 2" descr="/Users/danwahlin/.copilot/session-state/56a7a0da-def8-48d4-b5e8-0ac3878cb8dd/files/slides-build/img/03-pick-crop.png">    </p:cNvPr>
+          <p:cNvPr id="10" name="Image 2" descr="Pick &amp; Polish with an article.book-card attachment in the prompt box">    </p:cNvPr>
           <p:cNvPicPr>
             <a:picLocks noChangeAspect="1"/>
           </p:cNvPicPr>
@@ -4746,7 +4794,7 @@
       </p:sp>
       <p:pic>
         <p:nvPicPr>
-          <p:cNvPr id="24" name="Image 3" descr="/Users/danwahlin/.copilot/session-state/56a7a0da-def8-48d4-b5e8-0ac3878cb8dd/files/slides-build/img/03-pick-prompt-crop.png">    </p:cNvPr>
+          <p:cNvPr id="24" name="Image 3" descr="Pick &amp; Polish with an article.book-card attachment in the prompt box">    </p:cNvPr>
           <p:cNvPicPr>
             <a:picLocks noChangeAspect="1"/>
           </p:cNvPicPr>
@@ -4904,7 +4952,13 @@
       </p:sp>
       <p:pic>
         <p:nvPicPr>
-          <p:cNvPr id="5" name="Image 0" descr="/Users/danwahlin/.copilot/session-state/56a7a0da-def8-48d4-b5e8-0ac3878cb8dd/files/slides-build/img/grad-corner-pattern.png">    </p:cNvPr>
+          <p:cNvPr id="5" name="Image 0" descr="">
+            <a:extLst>
+              <a:ext uri="{C183D7F6-B498-43B3-948B-1728B52AA6E4}">
+                <adec:decorative xmlns:adec="http://schemas.microsoft.com/office/drawing/2017/decorative" val="1"/>
+              </a:ext>
+            </a:extLst>
+          </p:cNvPr>
           <p:cNvPicPr>
             <a:picLocks noChangeAspect="1"/>
           </p:cNvPicPr>
@@ -4999,7 +5053,7 @@
       </p:sp>
       <p:pic>
         <p:nvPicPr>
-          <p:cNvPr id="8" name="Image 1" descr="/Users/danwahlin/.copilot/session-state/56a7a0da-def8-48d4-b5e8-0ac3878cb8dd/files/slides-build/icons/FaGithub-1F2328.png">
+          <p:cNvPr id="8" name="Image 1" descr="Open this chapter on GitHub">
             <a:hlinkClick r:id="rId3" tooltip="https://github.com/github/copilot-app-for-beginners/tree/main/03-development-workflows"/>
           </p:cNvPr>
           <p:cNvPicPr>
@@ -5215,7 +5269,13 @@
       </p:grpSpPr>
       <p:pic>
         <p:nvPicPr>
-          <p:cNvPr id="2" name="Image 0" descr="/Users/danwahlin/.copilot/session-state/56a7a0da-def8-48d4-b5e8-0ac3878cb8dd/files/slides-build/img/grad-corner-pattern.png">    </p:cNvPr>
+          <p:cNvPr id="2" name="Image 0" descr="">
+            <a:extLst>
+              <a:ext uri="{C183D7F6-B498-43B3-948B-1728B52AA6E4}">
+                <adec:decorative xmlns:adec="http://schemas.microsoft.com/office/drawing/2017/decorative" val="1"/>
+              </a:ext>
+            </a:extLst>
+          </p:cNvPr>
           <p:cNvPicPr>
             <a:picLocks noChangeAspect="1"/>
           </p:cNvPicPr>
@@ -5310,7 +5370,7 @@
       </p:sp>
       <p:pic>
         <p:nvPicPr>
-          <p:cNvPr id="5" name="Image 1" descr="/Users/danwahlin/.copilot/session-state/56a7a0da-def8-48d4-b5e8-0ac3878cb8dd/files/slides-build/icons/FaGithub-1F2328.png">
+          <p:cNvPr id="5" name="Image 1" descr="Open this chapter on GitHub">
             <a:hlinkClick r:id="rId3" tooltip="https://github.com/github/copilot-app-for-beginners/tree/main/03-development-workflows"/>
           </p:cNvPr>
           <p:cNvPicPr>
@@ -5465,7 +5525,7 @@
       </p:sp>
       <p:pic>
         <p:nvPicPr>
-          <p:cNvPr id="9" name="Image 2" descr="/Users/danwahlin/.copilot/session-state/56a7a0da-def8-48d4-b5e8-0ac3878cb8dd/files/slides-build/img/03-issue-to-merged-pr.png">    </p:cNvPr>
+          <p:cNvPr id="9" name="Image 2" descr="Issue-to-merge workflow: issue, session, diff, approval gate, pull request, checks, approval gate, and merge. Feedback or a failed check goes back to the session.">    </p:cNvPr>
           <p:cNvPicPr>
             <a:picLocks noChangeAspect="1"/>
           </p:cNvPicPr>
@@ -5521,7 +5581,13 @@
       </p:grpSpPr>
       <p:pic>
         <p:nvPicPr>
-          <p:cNvPr id="2" name="Image 0" descr="/Users/danwahlin/.copilot/session-state/56a7a0da-def8-48d4-b5e8-0ac3878cb8dd/files/slides-build/img/grad-corner-pattern.png">    </p:cNvPr>
+          <p:cNvPr id="2" name="Image 0" descr="">
+            <a:extLst>
+              <a:ext uri="{C183D7F6-B498-43B3-948B-1728B52AA6E4}">
+                <adec:decorative xmlns:adec="http://schemas.microsoft.com/office/drawing/2017/decorative" val="1"/>
+              </a:ext>
+            </a:extLst>
+          </p:cNvPr>
           <p:cNvPicPr>
             <a:picLocks noChangeAspect="1"/>
           </p:cNvPicPr>
@@ -5616,7 +5682,7 @@
       </p:sp>
       <p:pic>
         <p:nvPicPr>
-          <p:cNvPr id="5" name="Image 1" descr="/Users/danwahlin/.copilot/session-state/56a7a0da-def8-48d4-b5e8-0ac3878cb8dd/files/slides-build/icons/FaGithub-1F2328.png">
+          <p:cNvPr id="5" name="Image 1" descr="Open this chapter on GitHub">
             <a:hlinkClick r:id="rId3" tooltip="https://github.com/github/copilot-app-for-beginners/tree/main/03-development-workflows"/>
           </p:cNvPr>
           <p:cNvPicPr>
@@ -6158,7 +6224,7 @@
       </p:sp>
       <p:pic>
         <p:nvPicPr>
-          <p:cNvPr id="18" name="Image 2" descr="/Users/danwahlin/.copilot/session-state/56a7a0da-def8-48d4-b5e8-0ac3878cb8dd/files/slides-build/img/03-app-filter-repo.png">    </p:cNvPr>
+          <p:cNvPr id="18" name="Image 2" descr="Issues repository picker with callouts for All repositories and the course repository">    </p:cNvPr>
           <p:cNvPicPr>
             <a:picLocks noChangeAspect="1"/>
           </p:cNvPicPr>
@@ -6225,7 +6291,7 @@
       </p:sp>
       <p:pic>
         <p:nvPicPr>
-          <p:cNvPr id="20" name="Image 3" descr="/Users/danwahlin/.copilot/session-state/56a7a0da-def8-48d4-b5e8-0ac3878cb8dd/files/slides-build/img/03-issues-crop.png">    </p:cNvPr>
+          <p:cNvPr id="20" name="Image 3" descr="Issues view filtered to the course repository">    </p:cNvPr>
           <p:cNvPicPr>
             <a:picLocks noChangeAspect="1"/>
           </p:cNvPicPr>
@@ -6281,7 +6347,13 @@
       </p:grpSpPr>
       <p:pic>
         <p:nvPicPr>
-          <p:cNvPr id="2" name="Image 0" descr="/Users/danwahlin/.copilot/session-state/56a7a0da-def8-48d4-b5e8-0ac3878cb8dd/files/slides-build/img/grad-corner-pattern.png">    </p:cNvPr>
+          <p:cNvPr id="2" name="Image 0" descr="">
+            <a:extLst>
+              <a:ext uri="{C183D7F6-B498-43B3-948B-1728B52AA6E4}">
+                <adec:decorative xmlns:adec="http://schemas.microsoft.com/office/drawing/2017/decorative" val="1"/>
+              </a:ext>
+            </a:extLst>
+          </p:cNvPr>
           <p:cNvPicPr>
             <a:picLocks noChangeAspect="1"/>
           </p:cNvPicPr>
@@ -6376,7 +6448,7 @@
       </p:sp>
       <p:pic>
         <p:nvPicPr>
-          <p:cNvPr id="5" name="Image 1" descr="/Users/danwahlin/.copilot/session-state/56a7a0da-def8-48d4-b5e8-0ac3878cb8dd/files/slides-build/icons/FaGithub-1F2328.png">
+          <p:cNvPr id="5" name="Image 1" descr="Open this chapter on GitHub">
             <a:hlinkClick r:id="rId3" tooltip="https://github.com/github/copilot-app-for-beginners/tree/main/03-development-workflows"/>
           </p:cNvPr>
           <p:cNvPicPr>
@@ -7536,7 +7608,13 @@
       </p:sp>
       <p:pic>
         <p:nvPicPr>
-          <p:cNvPr id="30" name="Image 2" descr="/Users/danwahlin/.copilot/session-state/56a7a0da-def8-48d4-b5e8-0ac3878cb8dd/files/slides-build/icons/GoAlert-9A6700.png">    </p:cNvPr>
+          <p:cNvPr id="30" name="Image 2" descr="">
+            <a:extLst>
+              <a:ext uri="{C183D7F6-B498-43B3-948B-1728B52AA6E4}">
+                <adec:decorative xmlns:adec="http://schemas.microsoft.com/office/drawing/2017/decorative" val="1"/>
+              </a:ext>
+            </a:extLst>
+          </p:cNvPr>
           <p:cNvPicPr>
             <a:picLocks noChangeAspect="1"/>
           </p:cNvPicPr>
@@ -7634,7 +7712,13 @@
       </p:grpSpPr>
       <p:pic>
         <p:nvPicPr>
-          <p:cNvPr id="2" name="Image 0" descr="/Users/danwahlin/.copilot/session-state/56a7a0da-def8-48d4-b5e8-0ac3878cb8dd/files/slides-build/img/grad-corner-pattern.png">    </p:cNvPr>
+          <p:cNvPr id="2" name="Image 0" descr="">
+            <a:extLst>
+              <a:ext uri="{C183D7F6-B498-43B3-948B-1728B52AA6E4}">
+                <adec:decorative xmlns:adec="http://schemas.microsoft.com/office/drawing/2017/decorative" val="1"/>
+              </a:ext>
+            </a:extLst>
+          </p:cNvPr>
           <p:cNvPicPr>
             <a:picLocks noChangeAspect="1"/>
           </p:cNvPicPr>
@@ -7729,7 +7813,7 @@
       </p:sp>
       <p:pic>
         <p:nvPicPr>
-          <p:cNvPr id="5" name="Image 1" descr="/Users/danwahlin/.copilot/session-state/56a7a0da-def8-48d4-b5e8-0ac3878cb8dd/files/slides-build/icons/FaGithub-1F2328.png">
+          <p:cNvPr id="5" name="Image 1" descr="Open this chapter on GitHub">
             <a:hlinkClick r:id="rId3" tooltip="https://github.com/github/copilot-app-for-beginners/tree/main/03-development-workflows"/>
           </p:cNvPr>
           <p:cNvPicPr>
@@ -7921,7 +8005,7 @@
       </p:sp>
       <p:pic>
         <p:nvPicPr>
-          <p:cNvPr id="10" name="Image 2" descr="/Users/danwahlin/.copilot/session-state/56a7a0da-def8-48d4-b5e8-0ac3878cb8dd/files/slides-build/img/03-review-comment-crop.png">    </p:cNvPr>
+          <p:cNvPr id="10" name="Image 2" descr="Pull request conversation with the empty-state copy comment">    </p:cNvPr>
           <p:cNvPicPr>
             <a:picLocks noChangeAspect="1"/>
           </p:cNvPicPr>
@@ -8069,7 +8153,13 @@
       </p:sp>
       <p:pic>
         <p:nvPicPr>
-          <p:cNvPr id="16" name="Image 3" descr="/Users/danwahlin/.copilot/session-state/56a7a0da-def8-48d4-b5e8-0ac3878cb8dd/files/slides-build/icons/GoCopilot-0969DA.png">    </p:cNvPr>
+          <p:cNvPr id="16" name="Image 3" descr="">
+            <a:extLst>
+              <a:ext uri="{C183D7F6-B498-43B3-948B-1728B52AA6E4}">
+                <adec:decorative xmlns:adec="http://schemas.microsoft.com/office/drawing/2017/decorative" val="1"/>
+              </a:ext>
+            </a:extLst>
+          </p:cNvPr>
           <p:cNvPicPr>
             <a:picLocks noChangeAspect="1"/>
           </p:cNvPicPr>
@@ -8256,7 +8346,7 @@
       </p:sp>
       <p:pic>
         <p:nvPicPr>
-          <p:cNvPr id="21" name="Image 4" descr="/Users/danwahlin/.copilot/session-state/56a7a0da-def8-48d4-b5e8-0ac3878cb8dd/files/slides-build/img/03-failing-check-crop.png">    </p:cNvPr>
+          <p:cNvPr id="21" name="Image 4" descr="Failing stats check practice pull request showing the failed Book app web validation check">    </p:cNvPr>
           <p:cNvPicPr>
             <a:picLocks noChangeAspect="1"/>
           </p:cNvPicPr>
@@ -8404,7 +8494,13 @@
       </p:sp>
       <p:pic>
         <p:nvPicPr>
-          <p:cNvPr id="27" name="Image 5" descr="/Users/danwahlin/.copilot/session-state/56a7a0da-def8-48d4-b5e8-0ac3878cb8dd/files/slides-build/icons/GoCopilot-CF222E.png">    </p:cNvPr>
+          <p:cNvPr id="27" name="Image 5" descr="">
+            <a:extLst>
+              <a:ext uri="{C183D7F6-B498-43B3-948B-1728B52AA6E4}">
+                <adec:decorative xmlns:adec="http://schemas.microsoft.com/office/drawing/2017/decorative" val="1"/>
+              </a:ext>
+            </a:extLst>
+          </p:cNvPr>
           <p:cNvPicPr>
             <a:picLocks noChangeAspect="1"/>
           </p:cNvPicPr>
@@ -8541,7 +8637,13 @@
       </p:grpSpPr>
       <p:pic>
         <p:nvPicPr>
-          <p:cNvPr id="2" name="Image 0" descr="/Users/danwahlin/.copilot/session-state/56a7a0da-def8-48d4-b5e8-0ac3878cb8dd/files/slides-build/img/grad-corner-pattern.png">    </p:cNvPr>
+          <p:cNvPr id="2" name="Image 0" descr="">
+            <a:extLst>
+              <a:ext uri="{C183D7F6-B498-43B3-948B-1728B52AA6E4}">
+                <adec:decorative xmlns:adec="http://schemas.microsoft.com/office/drawing/2017/decorative" val="1"/>
+              </a:ext>
+            </a:extLst>
+          </p:cNvPr>
           <p:cNvPicPr>
             <a:picLocks noChangeAspect="1"/>
           </p:cNvPicPr>
@@ -8636,7 +8738,7 @@
       </p:sp>
       <p:pic>
         <p:nvPicPr>
-          <p:cNvPr id="5" name="Image 1" descr="/Users/danwahlin/.copilot/session-state/56a7a0da-def8-48d4-b5e8-0ac3878cb8dd/files/slides-build/icons/FaGithub-1F2328.png">
+          <p:cNvPr id="5" name="Image 1" descr="Open this chapter on GitHub">
             <a:hlinkClick r:id="rId3" tooltip="https://github.com/github/copilot-app-for-beginners/tree/main/03-development-workflows"/>
           </p:cNvPr>
           <p:cNvPicPr>
@@ -8834,7 +8936,7 @@
       </p:sp>
       <p:pic>
         <p:nvPicPr>
-          <p:cNvPr id="10" name="Image 2" descr="/Users/danwahlin/.copilot/session-state/56a7a0da-def8-48d4-b5e8-0ac3878cb8dd/files/slides-build/img/03-human-judgment-loop.jpg">    </p:cNvPr>
+          <p:cNvPr id="10" name="Image 2" descr="Human judgment stays in the loop">    </p:cNvPr>
           <p:cNvPicPr>
             <a:picLocks noChangeAspect="1"/>
           </p:cNvPicPr>
@@ -8926,7 +9028,13 @@
       </p:sp>
       <p:pic>
         <p:nvPicPr>
-          <p:cNvPr id="13" name="Image 3" descr="/Users/danwahlin/.copilot/session-state/56a7a0da-def8-48d4-b5e8-0ac3878cb8dd/files/slides-build/icons/GoCheckCircle-1A7F37.png">    </p:cNvPr>
+          <p:cNvPr id="13" name="Image 3" descr="">
+            <a:extLst>
+              <a:ext uri="{C183D7F6-B498-43B3-948B-1728B52AA6E4}">
+                <adec:decorative xmlns:adec="http://schemas.microsoft.com/office/drawing/2017/decorative" val="1"/>
+              </a:ext>
+            </a:extLst>
+          </p:cNvPr>
           <p:cNvPicPr>
             <a:picLocks noChangeAspect="1"/>
           </p:cNvPicPr>
@@ -9208,7 +9316,13 @@
       </p:sp>
       <p:pic>
         <p:nvPicPr>
-          <p:cNvPr id="21" name="Image 4" descr="/Users/danwahlin/.copilot/session-state/56a7a0da-def8-48d4-b5e8-0ac3878cb8dd/files/slides-build/icons/GoAlert-CF222E.png">    </p:cNvPr>
+          <p:cNvPr id="21" name="Image 4" descr="">
+            <a:extLst>
+              <a:ext uri="{C183D7F6-B498-43B3-948B-1728B52AA6E4}">
+                <adec:decorative xmlns:adec="http://schemas.microsoft.com/office/drawing/2017/decorative" val="1"/>
+              </a:ext>
+            </a:extLst>
+          </p:cNvPr>
           <p:cNvPicPr>
             <a:picLocks noChangeAspect="1"/>
           </p:cNvPicPr>
@@ -9348,7 +9462,13 @@
       </p:grpSpPr>
       <p:pic>
         <p:nvPicPr>
-          <p:cNvPr id="2" name="Image 0" descr="/Users/danwahlin/.copilot/session-state/56a7a0da-def8-48d4-b5e8-0ac3878cb8dd/files/slides-build/img/grad-corner-pattern.png">    </p:cNvPr>
+          <p:cNvPr id="2" name="Image 0" descr="">
+            <a:extLst>
+              <a:ext uri="{C183D7F6-B498-43B3-948B-1728B52AA6E4}">
+                <adec:decorative xmlns:adec="http://schemas.microsoft.com/office/drawing/2017/decorative" val="1"/>
+              </a:ext>
+            </a:extLst>
+          </p:cNvPr>
           <p:cNvPicPr>
             <a:picLocks noChangeAspect="1"/>
           </p:cNvPicPr>
@@ -9443,7 +9563,7 @@
       </p:sp>
       <p:pic>
         <p:nvPicPr>
-          <p:cNvPr id="5" name="Image 1" descr="/Users/danwahlin/.copilot/session-state/56a7a0da-def8-48d4-b5e8-0ac3878cb8dd/files/slides-build/icons/FaGithub-1F2328.png">
+          <p:cNvPr id="5" name="Image 1" descr="Open this chapter on GitHub">
             <a:hlinkClick r:id="rId3" tooltip="https://github.com/github/copilot-app-for-beginners/tree/main/03-development-workflows"/>
           </p:cNvPr>
           <p:cNvPicPr>
@@ -10425,7 +10545,13 @@
       </p:sp>
       <p:pic>
         <p:nvPicPr>
-          <p:cNvPr id="31" name="Image 2" descr="/Users/danwahlin/.copilot/session-state/56a7a0da-def8-48d4-b5e8-0ac3878cb8dd/files/slides-build/icons/GoGoal-BC4C00.png">    </p:cNvPr>
+          <p:cNvPr id="31" name="Image 2" descr="">
+            <a:extLst>
+              <a:ext uri="{C183D7F6-B498-43B3-948B-1728B52AA6E4}">
+                <adec:decorative xmlns:adec="http://schemas.microsoft.com/office/drawing/2017/decorative" val="1"/>
+              </a:ext>
+            </a:extLst>
+          </p:cNvPr>
           <p:cNvPicPr>
             <a:picLocks noChangeAspect="1"/>
           </p:cNvPicPr>
@@ -10565,7 +10691,13 @@
       </p:grpSpPr>
       <p:pic>
         <p:nvPicPr>
-          <p:cNvPr id="2" name="Image 0" descr="/Users/danwahlin/.copilot/session-state/56a7a0da-def8-48d4-b5e8-0ac3878cb8dd/files/slides-build/img/grad-corner-pattern.png">    </p:cNvPr>
+          <p:cNvPr id="2" name="Image 0" descr="">
+            <a:extLst>
+              <a:ext uri="{C183D7F6-B498-43B3-948B-1728B52AA6E4}">
+                <adec:decorative xmlns:adec="http://schemas.microsoft.com/office/drawing/2017/decorative" val="1"/>
+              </a:ext>
+            </a:extLst>
+          </p:cNvPr>
           <p:cNvPicPr>
             <a:picLocks noChangeAspect="1"/>
           </p:cNvPicPr>
@@ -10660,7 +10792,7 @@
       </p:sp>
       <p:pic>
         <p:nvPicPr>
-          <p:cNvPr id="5" name="Image 1" descr="/Users/danwahlin/.copilot/session-state/56a7a0da-def8-48d4-b5e8-0ac3878cb8dd/files/slides-build/icons/FaGithub-1F2328.png">
+          <p:cNvPr id="5" name="Image 1" descr="Open this chapter on GitHub">
             <a:hlinkClick r:id="rId3" tooltip="https://github.com/github/copilot-app-for-beginners/tree/main/03-development-workflows"/>
           </p:cNvPr>
           <p:cNvPicPr>
@@ -11434,7 +11566,13 @@
       </p:sp>
       <p:pic>
         <p:nvPicPr>
-          <p:cNvPr id="26" name="Image 2" descr="/Users/danwahlin/.copilot/session-state/56a7a0da-def8-48d4-b5e8-0ac3878cb8dd/files/slides-build/icons/FaGithub-0969DA.png">    </p:cNvPr>
+          <p:cNvPr id="26" name="Image 2" descr="">
+            <a:extLst>
+              <a:ext uri="{C183D7F6-B498-43B3-948B-1728B52AA6E4}">
+                <adec:decorative xmlns:adec="http://schemas.microsoft.com/office/drawing/2017/decorative" val="1"/>
+              </a:ext>
+            </a:extLst>
+          </p:cNvPr>
           <p:cNvPicPr>
             <a:picLocks noChangeAspect="1"/>
           </p:cNvPicPr>
@@ -11660,7 +11798,13 @@
       </p:grpSpPr>
       <p:pic>
         <p:nvPicPr>
-          <p:cNvPr id="2" name="Image 0" descr="/Users/danwahlin/.copilot/session-state/56a7a0da-def8-48d4-b5e8-0ac3878cb8dd/files/slides-build/img/grad-corner-pattern.png">    </p:cNvPr>
+          <p:cNvPr id="2" name="Image 0" descr="">
+            <a:extLst>
+              <a:ext uri="{C183D7F6-B498-43B3-948B-1728B52AA6E4}">
+                <adec:decorative xmlns:adec="http://schemas.microsoft.com/office/drawing/2017/decorative" val="1"/>
+              </a:ext>
+            </a:extLst>
+          </p:cNvPr>
           <p:cNvPicPr>
             <a:picLocks noChangeAspect="1"/>
           </p:cNvPicPr>
@@ -11755,7 +11899,7 @@
       </p:sp>
       <p:pic>
         <p:nvPicPr>
-          <p:cNvPr id="5" name="Image 1" descr="/Users/danwahlin/.copilot/session-state/56a7a0da-def8-48d4-b5e8-0ac3878cb8dd/files/slides-build/icons/FaGithub-1F2328.png">
+          <p:cNvPr id="5" name="Image 1" descr="Open this chapter on GitHub">
             <a:hlinkClick r:id="rId3" tooltip="https://github.com/github/copilot-app-for-beginners/tree/main/03-development-workflows"/>
           </p:cNvPr>
           <p:cNvPicPr>
@@ -12385,7 +12529,13 @@
       </p:grpSpPr>
       <p:pic>
         <p:nvPicPr>
-          <p:cNvPr id="2" name="Image 0" descr="/Users/danwahlin/.copilot/session-state/56a7a0da-def8-48d4-b5e8-0ac3878cb8dd/files/slides-build/img/grad-corner-pattern.png">    </p:cNvPr>
+          <p:cNvPr id="2" name="Image 0" descr="">
+            <a:extLst>
+              <a:ext uri="{C183D7F6-B498-43B3-948B-1728B52AA6E4}">
+                <adec:decorative xmlns:adec="http://schemas.microsoft.com/office/drawing/2017/decorative" val="1"/>
+              </a:ext>
+            </a:extLst>
+          </p:cNvPr>
           <p:cNvPicPr>
             <a:picLocks noChangeAspect="1"/>
           </p:cNvPicPr>
@@ -12480,7 +12630,7 @@
       </p:sp>
       <p:pic>
         <p:nvPicPr>
-          <p:cNvPr id="5" name="Image 1" descr="/Users/danwahlin/.copilot/session-state/56a7a0da-def8-48d4-b5e8-0ac3878cb8dd/files/slides-build/icons/FaGithub-1F2328.png">
+          <p:cNvPr id="5" name="Image 1" descr="Open this chapter on GitHub">
             <a:hlinkClick r:id="rId3" tooltip="https://github.com/github/copilot-app-for-beginners/tree/main/03-development-workflows"/>
           </p:cNvPr>
           <p:cNvPicPr>
@@ -12633,7 +12783,7 @@
       </p:sp>
       <p:pic>
         <p:nvPicPr>
-          <p:cNvPr id="9" name="Image 2" descr="/Users/danwahlin/.copilot/session-state/56a7a0da-def8-48d4-b5e8-0ac3878cb8dd/files/slides-build/img/03-record-playback-retake-loop.jpg">    </p:cNvPr>
+          <p:cNvPr id="9" name="Image 2" descr="Record, play back, and re-take analogy for the development loop">    </p:cNvPr>
           <p:cNvPicPr>
             <a:picLocks noChangeAspect="1"/>
           </p:cNvPicPr>
@@ -12689,7 +12839,13 @@
       </p:sp>
       <p:pic>
         <p:nvPicPr>
-          <p:cNvPr id="11" name="Image 3" descr="/Users/danwahlin/.copilot/session-state/56a7a0da-def8-48d4-b5e8-0ac3878cb8dd/files/slides-build/icons/GoSync-0969DA.png">    </p:cNvPr>
+          <p:cNvPr id="11" name="Image 3" descr="">
+            <a:extLst>
+              <a:ext uri="{C183D7F6-B498-43B3-948B-1728B52AA6E4}">
+                <adec:decorative xmlns:adec="http://schemas.microsoft.com/office/drawing/2017/decorative" val="1"/>
+              </a:ext>
+            </a:extLst>
+          </p:cNvPr>
           <p:cNvPicPr>
             <a:picLocks noChangeAspect="1"/>
           </p:cNvPicPr>
@@ -12837,7 +12993,7 @@
       </p:sp>
       <p:pic>
         <p:nvPicPr>
-          <p:cNvPr id="15" name="Image 4" descr="/Users/danwahlin/.copilot/session-state/56a7a0da-def8-48d4-b5e8-0ac3878cb8dd/files/slides-build/img/03-producer-review-desk-github.jpg">    </p:cNvPr>
+          <p:cNvPr id="15" name="Image 4" descr="Producer review desk analogy for GitHub issues and pull requests">    </p:cNvPr>
           <p:cNvPicPr>
             <a:picLocks noChangeAspect="1"/>
           </p:cNvPicPr>
@@ -12893,7 +13049,13 @@
       </p:sp>
       <p:pic>
         <p:nvPicPr>
-          <p:cNvPr id="17" name="Image 5" descr="/Users/danwahlin/.copilot/session-state/56a7a0da-def8-48d4-b5e8-0ac3878cb8dd/files/slides-build/icons/FaGithub-8250DF.png">    </p:cNvPr>
+          <p:cNvPr id="17" name="Image 5" descr="">
+            <a:extLst>
+              <a:ext uri="{C183D7F6-B498-43B3-948B-1728B52AA6E4}">
+                <adec:decorative xmlns:adec="http://schemas.microsoft.com/office/drawing/2017/decorative" val="1"/>
+              </a:ext>
+            </a:extLst>
+          </p:cNvPr>
           <p:cNvPicPr>
             <a:picLocks noChangeAspect="1"/>
           </p:cNvPicPr>
@@ -13030,7 +13192,13 @@
       </p:grpSpPr>
       <p:pic>
         <p:nvPicPr>
-          <p:cNvPr id="2" name="Image 0" descr="/Users/danwahlin/.copilot/session-state/56a7a0da-def8-48d4-b5e8-0ac3878cb8dd/files/slides-build/img/grad-corner-pattern.png">    </p:cNvPr>
+          <p:cNvPr id="2" name="Image 0" descr="">
+            <a:extLst>
+              <a:ext uri="{C183D7F6-B498-43B3-948B-1728B52AA6E4}">
+                <adec:decorative xmlns:adec="http://schemas.microsoft.com/office/drawing/2017/decorative" val="1"/>
+              </a:ext>
+            </a:extLst>
+          </p:cNvPr>
           <p:cNvPicPr>
             <a:picLocks noChangeAspect="1"/>
           </p:cNvPicPr>
@@ -13125,7 +13293,7 @@
       </p:sp>
       <p:pic>
         <p:nvPicPr>
-          <p:cNvPr id="5" name="Image 1" descr="/Users/danwahlin/.copilot/session-state/56a7a0da-def8-48d4-b5e8-0ac3878cb8dd/files/slides-build/icons/FaGithub-1F2328.png">
+          <p:cNvPr id="5" name="Image 1" descr="Open this chapter on GitHub">
             <a:hlinkClick r:id="rId3" tooltip="https://github.com/github/copilot-app-for-beginners/tree/main/03-development-workflows"/>
           </p:cNvPr>
           <p:cNvPicPr>
@@ -13323,7 +13491,7 @@
       </p:sp>
       <p:pic>
         <p:nvPicPr>
-          <p:cNvPr id="10" name="Image 2" descr="/Users/danwahlin/.copilot/session-state/56a7a0da-def8-48d4-b5e8-0ac3878cb8dd/files/slides-build/img/03-development-loop.jpg">    </p:cNvPr>
+          <p:cNvPr id="10" name="Image 2" descr="Development loop. Inner loop on your machine: understand, change, inspect, test and build, and preview. Outer loop on GitHub: issue, pull request, feedback, checks, and merge. Human judgment applies to both loops.">    </p:cNvPr>
           <p:cNvPicPr>
             <a:picLocks noChangeAspect="1"/>
           </p:cNvPicPr>
@@ -13415,7 +13583,13 @@
       </p:sp>
       <p:pic>
         <p:nvPicPr>
-          <p:cNvPr id="13" name="Image 3" descr="/Users/danwahlin/.copilot/session-state/56a7a0da-def8-48d4-b5e8-0ac3878cb8dd/files/slides-build/icons/GoDeviceDesktop-0969DA.png">    </p:cNvPr>
+          <p:cNvPr id="13" name="Image 3" descr="">
+            <a:extLst>
+              <a:ext uri="{C183D7F6-B498-43B3-948B-1728B52AA6E4}">
+                <adec:decorative xmlns:adec="http://schemas.microsoft.com/office/drawing/2017/decorative" val="1"/>
+              </a:ext>
+            </a:extLst>
+          </p:cNvPr>
           <p:cNvPicPr>
             <a:picLocks noChangeAspect="1"/>
           </p:cNvPicPr>
@@ -13591,7 +13765,13 @@
       </p:sp>
       <p:pic>
         <p:nvPicPr>
-          <p:cNvPr id="18" name="Image 4" descr="/Users/danwahlin/.copilot/session-state/56a7a0da-def8-48d4-b5e8-0ac3878cb8dd/files/slides-build/icons/FaGithub-8250DF.png">    </p:cNvPr>
+          <p:cNvPr id="18" name="Image 4" descr="">
+            <a:extLst>
+              <a:ext uri="{C183D7F6-B498-43B3-948B-1728B52AA6E4}">
+                <adec:decorative xmlns:adec="http://schemas.microsoft.com/office/drawing/2017/decorative" val="1"/>
+              </a:ext>
+            </a:extLst>
+          </p:cNvPr>
           <p:cNvPicPr>
             <a:picLocks noChangeAspect="1"/>
           </p:cNvPicPr>
@@ -13731,7 +13911,13 @@
       </p:grpSpPr>
       <p:pic>
         <p:nvPicPr>
-          <p:cNvPr id="2" name="Image 0" descr="/Users/danwahlin/.copilot/session-state/56a7a0da-def8-48d4-b5e8-0ac3878cb8dd/files/slides-build/img/grad-corner-pattern.png">    </p:cNvPr>
+          <p:cNvPr id="2" name="Image 0" descr="">
+            <a:extLst>
+              <a:ext uri="{C183D7F6-B498-43B3-948B-1728B52AA6E4}">
+                <adec:decorative xmlns:adec="http://schemas.microsoft.com/office/drawing/2017/decorative" val="1"/>
+              </a:ext>
+            </a:extLst>
+          </p:cNvPr>
           <p:cNvPicPr>
             <a:picLocks noChangeAspect="1"/>
           </p:cNvPicPr>
@@ -13826,7 +14012,7 @@
       </p:sp>
       <p:pic>
         <p:nvPicPr>
-          <p:cNvPr id="5" name="Image 1" descr="/Users/danwahlin/.copilot/session-state/56a7a0da-def8-48d4-b5e8-0ac3878cb8dd/files/slides-build/icons/FaGithub-1F2328.png">
+          <p:cNvPr id="5" name="Image 1" descr="Open this chapter on GitHub">
             <a:hlinkClick r:id="rId3" tooltip="https://github.com/github/copilot-app-for-beginners/tree/main/03-development-workflows"/>
           </p:cNvPr>
           <p:cNvPicPr>
@@ -14049,7 +14235,13 @@
       </p:sp>
       <p:pic>
         <p:nvPicPr>
-          <p:cNvPr id="11" name="Image 2" descr="/Users/danwahlin/.copilot/session-state/56a7a0da-def8-48d4-b5e8-0ac3878cb8dd/files/slides-build/icons/GoFileDiff-0969DA.png">    </p:cNvPr>
+          <p:cNvPr id="11" name="Image 2" descr="">
+            <a:extLst>
+              <a:ext uri="{C183D7F6-B498-43B3-948B-1728B52AA6E4}">
+                <adec:decorative xmlns:adec="http://schemas.microsoft.com/office/drawing/2017/decorative" val="1"/>
+              </a:ext>
+            </a:extLst>
+          </p:cNvPr>
           <p:cNvPicPr>
             <a:picLocks noChangeAspect="1"/>
           </p:cNvPicPr>
@@ -14264,7 +14456,13 @@
       </p:sp>
       <p:pic>
         <p:nvPicPr>
-          <p:cNvPr id="17" name="Image 3" descr="/Users/danwahlin/.copilot/session-state/56a7a0da-def8-48d4-b5e8-0ac3878cb8dd/files/slides-build/icons/GoTerminal-8250DF.png">    </p:cNvPr>
+          <p:cNvPr id="17" name="Image 3" descr="">
+            <a:extLst>
+              <a:ext uri="{C183D7F6-B498-43B3-948B-1728B52AA6E4}">
+                <adec:decorative xmlns:adec="http://schemas.microsoft.com/office/drawing/2017/decorative" val="1"/>
+              </a:ext>
+            </a:extLst>
+          </p:cNvPr>
           <p:cNvPicPr>
             <a:picLocks noChangeAspect="1"/>
           </p:cNvPicPr>
@@ -14479,7 +14677,13 @@
       </p:sp>
       <p:pic>
         <p:nvPicPr>
-          <p:cNvPr id="23" name="Image 4" descr="/Users/danwahlin/.copilot/session-state/56a7a0da-def8-48d4-b5e8-0ac3878cb8dd/files/slides-build/icons/GoBrowser-BC4C00.png">    </p:cNvPr>
+          <p:cNvPr id="23" name="Image 4" descr="">
+            <a:extLst>
+              <a:ext uri="{C183D7F6-B498-43B3-948B-1728B52AA6E4}">
+                <adec:decorative xmlns:adec="http://schemas.microsoft.com/office/drawing/2017/decorative" val="1"/>
+              </a:ext>
+            </a:extLst>
+          </p:cNvPr>
           <p:cNvPicPr>
             <a:picLocks noChangeAspect="1"/>
           </p:cNvPicPr>
@@ -14694,7 +14898,13 @@
       </p:sp>
       <p:pic>
         <p:nvPicPr>
-          <p:cNvPr id="29" name="Image 5" descr="/Users/danwahlin/.copilot/session-state/56a7a0da-def8-48d4-b5e8-0ac3878cb8dd/files/slides-build/icons/GoCheckCircle-1A7F37.png">    </p:cNvPr>
+          <p:cNvPr id="29" name="Image 5" descr="">
+            <a:extLst>
+              <a:ext uri="{C183D7F6-B498-43B3-948B-1728B52AA6E4}">
+                <adec:decorative xmlns:adec="http://schemas.microsoft.com/office/drawing/2017/decorative" val="1"/>
+              </a:ext>
+            </a:extLst>
+          </p:cNvPr>
           <p:cNvPicPr>
             <a:picLocks noChangeAspect="1"/>
           </p:cNvPicPr>
@@ -14975,7 +15185,13 @@
       </p:sp>
       <p:pic>
         <p:nvPicPr>
-          <p:cNvPr id="5" name="Image 0" descr="/Users/danwahlin/.copilot/session-state/56a7a0da-def8-48d4-b5e8-0ac3878cb8dd/files/slides-build/img/grad-corner-pattern.png">    </p:cNvPr>
+          <p:cNvPr id="5" name="Image 0" descr="">
+            <a:extLst>
+              <a:ext uri="{C183D7F6-B498-43B3-948B-1728B52AA6E4}">
+                <adec:decorative xmlns:adec="http://schemas.microsoft.com/office/drawing/2017/decorative" val="1"/>
+              </a:ext>
+            </a:extLst>
+          </p:cNvPr>
           <p:cNvPicPr>
             <a:picLocks noChangeAspect="1"/>
           </p:cNvPicPr>
@@ -15070,7 +15286,7 @@
       </p:sp>
       <p:pic>
         <p:nvPicPr>
-          <p:cNvPr id="8" name="Image 1" descr="/Users/danwahlin/.copilot/session-state/56a7a0da-def8-48d4-b5e8-0ac3878cb8dd/files/slides-build/icons/FaGithub-1F2328.png">
+          <p:cNvPr id="8" name="Image 1" descr="Open this chapter on GitHub">
             <a:hlinkClick r:id="rId3" tooltip="https://github.com/github/copilot-app-for-beginners/tree/main/03-development-workflows"/>
           </p:cNvPr>
           <p:cNvPicPr>
@@ -15286,7 +15502,13 @@
       </p:grpSpPr>
       <p:pic>
         <p:nvPicPr>
-          <p:cNvPr id="2" name="Image 0" descr="/Users/danwahlin/.copilot/session-state/56a7a0da-def8-48d4-b5e8-0ac3878cb8dd/files/slides-build/img/grad-corner-pattern.png">    </p:cNvPr>
+          <p:cNvPr id="2" name="Image 0" descr="">
+            <a:extLst>
+              <a:ext uri="{C183D7F6-B498-43B3-948B-1728B52AA6E4}">
+                <adec:decorative xmlns:adec="http://schemas.microsoft.com/office/drawing/2017/decorative" val="1"/>
+              </a:ext>
+            </a:extLst>
+          </p:cNvPr>
           <p:cNvPicPr>
             <a:picLocks noChangeAspect="1"/>
           </p:cNvPicPr>
@@ -15381,7 +15603,7 @@
       </p:sp>
       <p:pic>
         <p:nvPicPr>
-          <p:cNvPr id="5" name="Image 1" descr="/Users/danwahlin/.copilot/session-state/56a7a0da-def8-48d4-b5e8-0ac3878cb8dd/files/slides-build/icons/FaGithub-1F2328.png">
+          <p:cNvPr id="5" name="Image 1" descr="Open this chapter on GitHub">
             <a:hlinkClick r:id="rId3" tooltip="https://github.com/github/copilot-app-for-beginners/tree/main/03-development-workflows"/>
           </p:cNvPr>
           <p:cNvPicPr>
@@ -16188,7 +16410,13 @@
       </p:sp>
       <p:pic>
         <p:nvPicPr>
-          <p:cNvPr id="25" name="Image 2" descr="/Users/danwahlin/.copilot/session-state/56a7a0da-def8-48d4-b5e8-0ac3878cb8dd/files/slides-build/icons/GoAlert-9A6700.png">    </p:cNvPr>
+          <p:cNvPr id="25" name="Image 2" descr="">
+            <a:extLst>
+              <a:ext uri="{C183D7F6-B498-43B3-948B-1728B52AA6E4}">
+                <adec:decorative xmlns:adec="http://schemas.microsoft.com/office/drawing/2017/decorative" val="1"/>
+              </a:ext>
+            </a:extLst>
+          </p:cNvPr>
           <p:cNvPicPr>
             <a:picLocks noChangeAspect="1"/>
           </p:cNvPicPr>
@@ -16324,7 +16552,13 @@
       </p:sp>
       <p:pic>
         <p:nvPicPr>
-          <p:cNvPr id="28" name="Image 3" descr="/Users/danwahlin/.copilot/session-state/56a7a0da-def8-48d4-b5e8-0ac3878cb8dd/files/slides-build/icons/GoPlay-0969DA.png">    </p:cNvPr>
+          <p:cNvPr id="28" name="Image 3" descr="">
+            <a:extLst>
+              <a:ext uri="{C183D7F6-B498-43B3-948B-1728B52AA6E4}">
+                <adec:decorative xmlns:adec="http://schemas.microsoft.com/office/drawing/2017/decorative" val="1"/>
+              </a:ext>
+            </a:extLst>
+          </p:cNvPr>
           <p:cNvPicPr>
             <a:picLocks noChangeAspect="1"/>
           </p:cNvPicPr>
@@ -16456,7 +16690,13 @@
       </p:grpSpPr>
       <p:pic>
         <p:nvPicPr>
-          <p:cNvPr id="2" name="Image 0" descr="/Users/danwahlin/.copilot/session-state/56a7a0da-def8-48d4-b5e8-0ac3878cb8dd/files/slides-build/img/grad-corner-pattern.png">    </p:cNvPr>
+          <p:cNvPr id="2" name="Image 0" descr="">
+            <a:extLst>
+              <a:ext uri="{C183D7F6-B498-43B3-948B-1728B52AA6E4}">
+                <adec:decorative xmlns:adec="http://schemas.microsoft.com/office/drawing/2017/decorative" val="1"/>
+              </a:ext>
+            </a:extLst>
+          </p:cNvPr>
           <p:cNvPicPr>
             <a:picLocks noChangeAspect="1"/>
           </p:cNvPicPr>
@@ -16551,7 +16791,7 @@
       </p:sp>
       <p:pic>
         <p:nvPicPr>
-          <p:cNvPr id="5" name="Image 1" descr="/Users/danwahlin/.copilot/session-state/56a7a0da-def8-48d4-b5e8-0ac3878cb8dd/files/slides-build/icons/FaGithub-1F2328.png">
+          <p:cNvPr id="5" name="Image 1" descr="Open this chapter on GitHub">
             <a:hlinkClick r:id="rId3" tooltip="https://github.com/github/copilot-app-for-beginners/tree/main/03-development-workflows"/>
           </p:cNvPr>
           <p:cNvPicPr>
@@ -17656,7 +17896,13 @@
       </p:grpSpPr>
       <p:pic>
         <p:nvPicPr>
-          <p:cNvPr id="2" name="Image 0" descr="/Users/danwahlin/.copilot/session-state/56a7a0da-def8-48d4-b5e8-0ac3878cb8dd/files/slides-build/img/grad-corner-pattern.png">    </p:cNvPr>
+          <p:cNvPr id="2" name="Image 0" descr="">
+            <a:extLst>
+              <a:ext uri="{C183D7F6-B498-43B3-948B-1728B52AA6E4}">
+                <adec:decorative xmlns:adec="http://schemas.microsoft.com/office/drawing/2017/decorative" val="1"/>
+              </a:ext>
+            </a:extLst>
+          </p:cNvPr>
           <p:cNvPicPr>
             <a:picLocks noChangeAspect="1"/>
           </p:cNvPicPr>
@@ -17751,7 +17997,7 @@
       </p:sp>
       <p:pic>
         <p:nvPicPr>
-          <p:cNvPr id="5" name="Image 1" descr="/Users/danwahlin/.copilot/session-state/56a7a0da-def8-48d4-b5e8-0ac3878cb8dd/files/slides-build/icons/FaGithub-1F2328.png">
+          <p:cNvPr id="5" name="Image 1" descr="Open this chapter on GitHub">
             <a:hlinkClick r:id="rId3" tooltip="https://github.com/github/copilot-app-for-beginners/tree/main/03-development-workflows"/>
           </p:cNvPr>
           <p:cNvPicPr>
